--- a/納品レポート/ホテル別レポート/comfort_narita_口コミ分析レポート.pptx
+++ b/納品レポート/ホテル別レポート/comfort_narita_口コミ分析レポート.pptx
@@ -214,7 +214,7 @@
                   <c:v>9.5</c:v>
                 </c:pt>
                 <c:pt idx="2">
-                  <c:v>8.43</c:v>
+                  <c:v>8.42</c:v>
                 </c:pt>
                 <c:pt idx="3">
                   <c:v>8.17</c:v>
@@ -566,7 +566,7 @@
               <c:numCache>
                 <c:ptCount val="3"/>
                 <c:pt idx="0">
-                  <c:v>96</c:v>
+                  <c:v>98</c:v>
                 </c:pt>
                 <c:pt idx="1">
                   <c:v>20</c:v>
@@ -815,7 +815,7 @@
                   <c:v>16</c:v>
                 </c:pt>
                 <c:pt idx="2">
-                  <c:v>29</c:v>
+                  <c:v>31</c:v>
                 </c:pt>
                 <c:pt idx="3">
                   <c:v>7</c:v>
@@ -2781,7 +2781,7 @@
                 <a:ea typeface="Arial" pitchFamily="34" charset="-122"/>
                 <a:cs typeface="Arial" pitchFamily="34" charset="-120"/>
               </a:rPr>
-              <a:t>レビュー総数：119件（6サイト）</a:t>
+              <a:t>レビュー総数：121件（6サイト）</a:t>
             </a:r>
             <a:endParaRPr lang="en-US" sz="1000" dirty="0"/>
           </a:p>
@@ -2801,7 +2801,7 @@
                 <a:ea typeface="Arial" pitchFamily="34" charset="-122"/>
                 <a:cs typeface="Arial" pitchFamily="34" charset="-120"/>
               </a:rPr>
-              <a:t>作成日：2026年3月17日</a:t>
+              <a:t>作成日：2026年3月18日</a:t>
             </a:r>
             <a:endParaRPr lang="en-US" sz="1000" dirty="0"/>
           </a:p>
@@ -3347,7 +3347,7 @@
                           <a:ea typeface="Arial" pitchFamily="34" charset="-122"/>
                           <a:cs typeface="Arial" pitchFamily="34" charset="-120"/>
                         </a:rPr>
-                        <a:t>8.60点</a:t>
+                        <a:t>8.59点</a:t>
                       </a:r>
                       <a:endParaRPr lang="en-US" sz="1000" dirty="0">
                         <a:latin typeface="Arial" charset="0"/>
@@ -3621,7 +3621,7 @@
                           <a:ea typeface="Arial" pitchFamily="34" charset="-122"/>
                           <a:cs typeface="Arial" pitchFamily="34" charset="-120"/>
                         </a:rPr>
-                        <a:t>80.7%</a:t>
+                        <a:t>81.0%</a:t>
                       </a:r>
                       <a:endParaRPr lang="en-US" sz="1000" dirty="0">
                         <a:latin typeface="Arial" charset="0"/>
@@ -5356,7 +5356,7 @@
                 <a:ea typeface="Arial" pitchFamily="34" charset="-122"/>
                 <a:cs typeface="Arial" pitchFamily="34" charset="-120"/>
               </a:rPr>
-              <a:t>8.60</a:t>
+              <a:t>8.59</a:t>
             </a:r>
             <a:endParaRPr lang="en-US" sz="3200" dirty="0"/>
           </a:p>
@@ -5481,7 +5481,7 @@
                 <a:ea typeface="Arial" pitchFamily="34" charset="-122"/>
                 <a:cs typeface="Arial" pitchFamily="34" charset="-120"/>
               </a:rPr>
-              <a:t>80.7%</a:t>
+              <a:t>81.0%</a:t>
             </a:r>
             <a:endParaRPr lang="en-US" sz="3200" dirty="0"/>
           </a:p>
@@ -5731,7 +5731,7 @@
                 <a:ea typeface="Arial" pitchFamily="34" charset="-122"/>
                 <a:cs typeface="Arial" pitchFamily="34" charset="-120"/>
               </a:rPr>
-              <a:t>119件</a:t>
+              <a:t>121件</a:t>
             </a:r>
             <a:endParaRPr lang="en-US" sz="3200" dirty="0"/>
           </a:p>
@@ -5879,7 +5879,7 @@
                 <a:ea typeface="Arial" pitchFamily="34" charset="-122"/>
                 <a:cs typeface="Arial" pitchFamily="34" charset="-120"/>
               </a:rPr>
-              <a:t>  アメニティ：無料のコーヒーと美味しい朝食メニューは大変ありがたかったです</a:t>
+              <a:t>  普通のホテルですが朝食が美味しくて満足です 普通のホテルですが朝食が美味しくて満足です</a:t>
             </a:r>
             <a:endParaRPr lang="en-US" sz="1100" dirty="0"/>
           </a:p>
@@ -6540,7 +6540,7 @@
                 <a:ea typeface="Arial" pitchFamily="34" charset="-122"/>
                 <a:cs typeface="Arial" pitchFamily="34" charset="-120"/>
               </a:rPr>
-              <a:t>8.60</a:t>
+              <a:t>8.59</a:t>
             </a:r>
             <a:endParaRPr lang="en-US" sz="3200" dirty="0"/>
           </a:p>
@@ -6665,7 +6665,7 @@
                 <a:ea typeface="Arial" pitchFamily="34" charset="-122"/>
                 <a:cs typeface="Arial" pitchFamily="34" charset="-120"/>
               </a:rPr>
-              <a:t>80.7%</a:t>
+              <a:t>81.0%</a:t>
             </a:r>
             <a:endParaRPr lang="en-US" sz="3200" dirty="0"/>
           </a:p>
@@ -6915,7 +6915,7 @@
                 <a:ea typeface="Arial" pitchFamily="34" charset="-122"/>
                 <a:cs typeface="Arial" pitchFamily="34" charset="-120"/>
               </a:rPr>
-              <a:t>119件</a:t>
+              <a:t>121件</a:t>
             </a:r>
             <a:endParaRPr lang="en-US" sz="3200" dirty="0"/>
           </a:p>
@@ -8578,7 +8578,7 @@
                           <a:ea typeface="Arial" pitchFamily="34" charset="-122"/>
                           <a:cs typeface="Arial" pitchFamily="34" charset="-120"/>
                         </a:rPr>
-                        <a:t>49</a:t>
+                        <a:t>50</a:t>
                       </a:r>
                       <a:endParaRPr lang="en-US" sz="900" dirty="0">
                         <a:latin typeface="Arial" charset="0"/>
@@ -8646,7 +8646,7 @@
                           <a:ea typeface="Arial" pitchFamily="34" charset="-122"/>
                           <a:cs typeface="Arial" pitchFamily="34" charset="-120"/>
                         </a:rPr>
-                        <a:t>8.43</a:t>
+                        <a:t>8.42</a:t>
                       </a:r>
                       <a:endParaRPr lang="en-US" sz="900" dirty="0">
                         <a:latin typeface="Arial" charset="0"/>
@@ -8782,7 +8782,7 @@
                           <a:ea typeface="Arial" pitchFamily="34" charset="-122"/>
                           <a:cs typeface="Arial" pitchFamily="34" charset="-120"/>
                         </a:rPr>
-                        <a:t>8.43</a:t>
+                        <a:t>8.42</a:t>
                       </a:r>
                       <a:endParaRPr lang="en-US" sz="900" dirty="0">
                         <a:latin typeface="Arial" charset="0"/>
@@ -9262,7 +9262,7 @@
                           <a:ea typeface="Arial" pitchFamily="34" charset="-122"/>
                           <a:cs typeface="Arial" pitchFamily="34" charset="-120"/>
                         </a:rPr>
-                        <a:t>14</a:t>
+                        <a:t>15</a:t>
                       </a:r>
                       <a:endParaRPr lang="en-US" sz="900" dirty="0">
                         <a:latin typeface="Arial" charset="0"/>
@@ -10216,7 +10216,7 @@
                 <a:ea typeface="Arial" pitchFamily="34" charset="-122"/>
                 <a:cs typeface="Arial" pitchFamily="34" charset="-120"/>
               </a:rPr>
-              <a:t>96件（80.7%）</a:t>
+              <a:t>98件（81.0%）</a:t>
             </a:r>
             <a:endParaRPr lang="en-US" sz="1100" dirty="0"/>
           </a:p>
@@ -10314,7 +10314,7 @@
                 <a:ea typeface="Arial" pitchFamily="34" charset="-122"/>
                 <a:cs typeface="Arial" pitchFamily="34" charset="-120"/>
               </a:rPr>
-              <a:t>20件（16.8%）</a:t>
+              <a:t>20件（16.5%）</a:t>
             </a:r>
             <a:endParaRPr lang="en-US" sz="1100" dirty="0"/>
           </a:p>
@@ -10824,7 +10824,7 @@
                 <a:ea typeface="Arial" pitchFamily="34" charset="-122"/>
                 <a:cs typeface="Arial" pitchFamily="34" charset="-120"/>
               </a:rPr>
-              <a:t>アメニティ：無料のコーヒーと美味しい朝食メニューは大変ありがたかったです</a:t>
+              <a:t>普通のホテルですが朝食が美味しくて満足です 普通のホテルですが朝食が美味しくて満足です</a:t>
             </a:r>
             <a:endParaRPr lang="en-US" sz="900" dirty="0"/>
           </a:p>
@@ -10863,7 +10863,7 @@
                 <a:ea typeface="Arial" pitchFamily="34" charset="-122"/>
                 <a:cs typeface="Arial" pitchFamily="34" charset="-120"/>
               </a:rPr>
-              <a:t>「バイキングとても美味しかったです」</a:t>
+              <a:t>「アメニティ：無料のコーヒーと美味しい朝食メニューは大変ありがたかったです」</a:t>
             </a:r>
             <a:endParaRPr lang="en-US" sz="900" dirty="0"/>
           </a:p>

--- a/納品レポート/ホテル別レポート/comfort_narita_口コミ分析レポート.pptx
+++ b/納品レポート/ホテル別レポート/comfort_narita_口コミ分析レポート.pptx
@@ -208,7 +208,7 @@
                 <c:formatCode>General</c:formatCode>
                 <c:ptCount val="6"/>
                 <c:pt idx="0">
-                  <c:v>9.69</c:v>
+                  <c:v>9.53</c:v>
                 </c:pt>
                 <c:pt idx="1">
                   <c:v>9.5</c:v>
@@ -220,7 +220,7 @@
                   <c:v>8.17</c:v>
                 </c:pt>
                 <c:pt idx="4">
-                  <c:v>8</c:v>
+                  <c:v>7.75</c:v>
                 </c:pt>
                 <c:pt idx="5">
                   <c:v>6.88</c:v>
@@ -569,10 +569,10 @@
                   <c:v>98</c:v>
                 </c:pt>
                 <c:pt idx="1">
-                  <c:v>20</c:v>
+                  <c:v>21</c:v>
                 </c:pt>
                 <c:pt idx="2">
-                  <c:v>3</c:v>
+                  <c:v>4</c:v>
                 </c:pt>
               </c:numCache>
             </c:numRef>
@@ -818,7 +818,7 @@
                   <c:v>31</c:v>
                 </c:pt>
                 <c:pt idx="3">
-                  <c:v>7</c:v>
+                  <c:v>8</c:v>
                 </c:pt>
                 <c:pt idx="4">
                   <c:v>12</c:v>
@@ -827,7 +827,7 @@
                   <c:v>1</c:v>
                 </c:pt>
                 <c:pt idx="6">
-                  <c:v>2</c:v>
+                  <c:v>3</c:v>
                 </c:pt>
                 <c:pt idx="7">
                   <c:v>1</c:v>
@@ -2781,7 +2781,7 @@
                 <a:ea typeface="Arial" pitchFamily="34" charset="-122"/>
                 <a:cs typeface="Arial" pitchFamily="34" charset="-120"/>
               </a:rPr>
-              <a:t>レビュー総数：121件（6サイト）</a:t>
+              <a:t>レビュー総数：123件（6サイト）</a:t>
             </a:r>
             <a:endParaRPr lang="en-US" sz="1000" dirty="0"/>
           </a:p>
@@ -2801,7 +2801,7 @@
                 <a:ea typeface="Arial" pitchFamily="34" charset="-122"/>
                 <a:cs typeface="Arial" pitchFamily="34" charset="-120"/>
               </a:rPr>
-              <a:t>作成日：2026年3月18日</a:t>
+              <a:t>作成日：2026年3月19日</a:t>
             </a:r>
             <a:endParaRPr lang="en-US" sz="1000" dirty="0"/>
           </a:p>
@@ -3347,7 +3347,7 @@
                           <a:ea typeface="Arial" pitchFamily="34" charset="-122"/>
                           <a:cs typeface="Arial" pitchFamily="34" charset="-120"/>
                         </a:rPr>
-                        <a:t>8.59点</a:t>
+                        <a:t>8.54点</a:t>
                       </a:r>
                       <a:endParaRPr lang="en-US" sz="1000" dirty="0">
                         <a:latin typeface="Arial" charset="0"/>
@@ -3415,7 +3415,7 @@
                           <a:ea typeface="Arial" pitchFamily="34" charset="-122"/>
                           <a:cs typeface="Arial" pitchFamily="34" charset="-120"/>
                         </a:rPr>
-                        <a:t>8.9点以上</a:t>
+                        <a:t>8.8点以上</a:t>
                       </a:r>
                       <a:endParaRPr lang="en-US" sz="1000" dirty="0">
                         <a:latin typeface="Arial" charset="0"/>
@@ -3621,7 +3621,7 @@
                           <a:ea typeface="Arial" pitchFamily="34" charset="-122"/>
                           <a:cs typeface="Arial" pitchFamily="34" charset="-120"/>
                         </a:rPr>
-                        <a:t>81.0%</a:t>
+                        <a:t>79.7%</a:t>
                       </a:r>
                       <a:endParaRPr lang="en-US" sz="1000" dirty="0">
                         <a:latin typeface="Arial" charset="0"/>
@@ -3689,7 +3689,7 @@
                           <a:ea typeface="Arial" pitchFamily="34" charset="-122"/>
                           <a:cs typeface="Arial" pitchFamily="34" charset="-120"/>
                         </a:rPr>
-                        <a:t>86%以上</a:t>
+                        <a:t>85%以上</a:t>
                       </a:r>
                       <a:endParaRPr lang="en-US" sz="1000" dirty="0">
                         <a:latin typeface="Arial" charset="0"/>
@@ -3895,7 +3895,7 @@
                           <a:ea typeface="Arial" pitchFamily="34" charset="-122"/>
                           <a:cs typeface="Arial" pitchFamily="34" charset="-120"/>
                         </a:rPr>
-                        <a:t>2.5%</a:t>
+                        <a:t>3.3%</a:t>
                       </a:r>
                       <a:endParaRPr lang="en-US" sz="1000" dirty="0">
                         <a:latin typeface="Arial" charset="0"/>
@@ -5356,7 +5356,7 @@
                 <a:ea typeface="Arial" pitchFamily="34" charset="-122"/>
                 <a:cs typeface="Arial" pitchFamily="34" charset="-120"/>
               </a:rPr>
-              <a:t>8.59</a:t>
+              <a:t>8.54</a:t>
             </a:r>
             <a:endParaRPr lang="en-US" sz="3200" dirty="0"/>
           </a:p>
@@ -5481,7 +5481,7 @@
                 <a:ea typeface="Arial" pitchFamily="34" charset="-122"/>
                 <a:cs typeface="Arial" pitchFamily="34" charset="-120"/>
               </a:rPr>
-              <a:t>81.0%</a:t>
+              <a:t>79.7%</a:t>
             </a:r>
             <a:endParaRPr lang="en-US" sz="3200" dirty="0"/>
           </a:p>
@@ -5606,7 +5606,7 @@
                 <a:ea typeface="Arial" pitchFamily="34" charset="-122"/>
                 <a:cs typeface="Arial" pitchFamily="34" charset="-120"/>
               </a:rPr>
-              <a:t>2.5%</a:t>
+              <a:t>3.3%</a:t>
             </a:r>
             <a:endParaRPr lang="en-US" sz="3200" dirty="0"/>
           </a:p>
@@ -5731,7 +5731,7 @@
                 <a:ea typeface="Arial" pitchFamily="34" charset="-122"/>
                 <a:cs typeface="Arial" pitchFamily="34" charset="-120"/>
               </a:rPr>
-              <a:t>121件</a:t>
+              <a:t>123件</a:t>
             </a:r>
             <a:endParaRPr lang="en-US" sz="3200" dirty="0"/>
           </a:p>
@@ -5959,7 +5959,7 @@
                 <a:ea typeface="Arial" pitchFamily="34" charset="-122"/>
                 <a:cs typeface="Arial" pitchFamily="34" charset="-120"/>
               </a:rPr>
-              <a:t>  立地が非常に便利で、空港を利用する方にとって理想的なホテルです</a:t>
+              <a:t>  駅から近く、室内もきれいでした</a:t>
             </a:r>
             <a:endParaRPr lang="en-US" sz="1100" dirty="0"/>
           </a:p>
@@ -6540,7 +6540,7 @@
                 <a:ea typeface="Arial" pitchFamily="34" charset="-122"/>
                 <a:cs typeface="Arial" pitchFamily="34" charset="-120"/>
               </a:rPr>
-              <a:t>8.59</a:t>
+              <a:t>8.54</a:t>
             </a:r>
             <a:endParaRPr lang="en-US" sz="3200" dirty="0"/>
           </a:p>
@@ -6588,7 +6588,7 @@
             <a:avLst/>
           </a:prstGeom>
           <a:solidFill>
-            <a:srgbClr val="16A34A"/>
+            <a:srgbClr val="D4A843"/>
           </a:solidFill>
           <a:ln/>
         </p:spPr>
@@ -6659,13 +6659,13 @@
             <a:r>
               <a:rPr lang="en-US" sz="3200" b="1" dirty="0">
                 <a:solidFill>
-                  <a:srgbClr val="16A34A"/>
+                  <a:srgbClr val="D4A843"/>
                 </a:solidFill>
                 <a:latin typeface="Arial" pitchFamily="34" charset="0"/>
                 <a:ea typeface="Arial" pitchFamily="34" charset="-122"/>
                 <a:cs typeface="Arial" pitchFamily="34" charset="-120"/>
               </a:rPr>
-              <a:t>81.0%</a:t>
+              <a:t>79.7%</a:t>
             </a:r>
             <a:endParaRPr lang="en-US" sz="3200" dirty="0"/>
           </a:p>
@@ -6790,7 +6790,7 @@
                 <a:ea typeface="Arial" pitchFamily="34" charset="-122"/>
                 <a:cs typeface="Arial" pitchFamily="34" charset="-120"/>
               </a:rPr>
-              <a:t>2.5%</a:t>
+              <a:t>3.3%</a:t>
             </a:r>
             <a:endParaRPr lang="en-US" sz="3200" dirty="0"/>
           </a:p>
@@ -6915,7 +6915,7 @@
                 <a:ea typeface="Arial" pitchFamily="34" charset="-122"/>
                 <a:cs typeface="Arial" pitchFamily="34" charset="-120"/>
               </a:rPr>
-              <a:t>121件</a:t>
+              <a:t>123件</a:t>
             </a:r>
             <a:endParaRPr lang="en-US" sz="3200" dirty="0"/>
           </a:p>
@@ -7336,7 +7336,7 @@
                 <a:ea typeface="Arial" pitchFamily="34" charset="-122"/>
                 <a:cs typeface="Arial" pitchFamily="34" charset="-120"/>
               </a:rPr>
-              <a:t>Trip.com(9.69)が最高スコア。</a:t>
+              <a:t>Trip.com(9.53)が最高スコア。</a:t>
             </a:r>
             <a:endParaRPr lang="en-US" sz="1100" dirty="0"/>
           </a:p>
@@ -7894,7 +7894,7 @@
                           <a:ea typeface="Arial" pitchFamily="34" charset="-122"/>
                           <a:cs typeface="Arial" pitchFamily="34" charset="-120"/>
                         </a:rPr>
-                        <a:t>16</a:t>
+                        <a:t>17</a:t>
                       </a:r>
                       <a:endParaRPr lang="en-US" sz="900" dirty="0">
                         <a:latin typeface="Arial" charset="0"/>
@@ -7962,7 +7962,7 @@
                           <a:ea typeface="Arial" pitchFamily="34" charset="-122"/>
                           <a:cs typeface="Arial" pitchFamily="34" charset="-120"/>
                         </a:rPr>
-                        <a:t>9.69</a:t>
+                        <a:t>9.53</a:t>
                       </a:r>
                       <a:endParaRPr lang="en-US" sz="900" dirty="0">
                         <a:latin typeface="Arial" charset="0"/>
@@ -8098,7 +8098,7 @@
                           <a:ea typeface="Arial" pitchFamily="34" charset="-122"/>
                           <a:cs typeface="Arial" pitchFamily="34" charset="-120"/>
                         </a:rPr>
-                        <a:t>9.69</a:t>
+                        <a:t>9.53</a:t>
                       </a:r>
                       <a:endParaRPr lang="en-US" sz="900" dirty="0">
                         <a:latin typeface="Arial" charset="0"/>
@@ -9262,7 +9262,7 @@
                           <a:ea typeface="Arial" pitchFamily="34" charset="-122"/>
                           <a:cs typeface="Arial" pitchFamily="34" charset="-120"/>
                         </a:rPr>
-                        <a:t>15</a:t>
+                        <a:t>16</a:t>
                       </a:r>
                       <a:endParaRPr lang="en-US" sz="900" dirty="0">
                         <a:latin typeface="Arial" charset="0"/>
@@ -9330,7 +9330,7 @@
                           <a:ea typeface="Arial" pitchFamily="34" charset="-122"/>
                           <a:cs typeface="Arial" pitchFamily="34" charset="-120"/>
                         </a:rPr>
-                        <a:t>4</a:t>
+                        <a:t>3.88</a:t>
                       </a:r>
                       <a:endParaRPr lang="en-US" sz="900" dirty="0">
                         <a:latin typeface="Arial" charset="0"/>
@@ -9466,7 +9466,7 @@
                           <a:ea typeface="Arial" pitchFamily="34" charset="-122"/>
                           <a:cs typeface="Arial" pitchFamily="34" charset="-120"/>
                         </a:rPr>
-                        <a:t>8</a:t>
+                        <a:t>7.75</a:t>
                       </a:r>
                       <a:endParaRPr lang="en-US" sz="900" dirty="0">
                         <a:latin typeface="Arial" charset="0"/>
@@ -10216,7 +10216,7 @@
                 <a:ea typeface="Arial" pitchFamily="34" charset="-122"/>
                 <a:cs typeface="Arial" pitchFamily="34" charset="-120"/>
               </a:rPr>
-              <a:t>98件（81.0%）</a:t>
+              <a:t>98件（79.7%）</a:t>
             </a:r>
             <a:endParaRPr lang="en-US" sz="1100" dirty="0"/>
           </a:p>
@@ -10314,7 +10314,7 @@
                 <a:ea typeface="Arial" pitchFamily="34" charset="-122"/>
                 <a:cs typeface="Arial" pitchFamily="34" charset="-120"/>
               </a:rPr>
-              <a:t>20件（16.5%）</a:t>
+              <a:t>21件（17.1%）</a:t>
             </a:r>
             <a:endParaRPr lang="en-US" sz="1100" dirty="0"/>
           </a:p>
@@ -10412,7 +10412,7 @@
                 <a:ea typeface="Arial" pitchFamily="34" charset="-122"/>
                 <a:cs typeface="Arial" pitchFamily="34" charset="-120"/>
               </a:rPr>
-              <a:t>3件（2.5%）</a:t>
+              <a:t>4件（3.3%）</a:t>
             </a:r>
             <a:endParaRPr lang="en-US" sz="1100" dirty="0"/>
           </a:p>
@@ -11270,7 +11270,7 @@
                 <a:ea typeface="Arial" pitchFamily="34" charset="-122"/>
                 <a:cs typeface="Arial" pitchFamily="34" charset="-120"/>
               </a:rPr>
-              <a:t>立地が非常に便利で、空港を利用する方にとって理想的なホテルです</a:t>
+              <a:t>駅から近く、室内もきれいでした</a:t>
             </a:r>
             <a:endParaRPr lang="en-US" sz="900" dirty="0"/>
           </a:p>
@@ -11309,7 +11309,7 @@
                 <a:ea typeface="Arial" pitchFamily="34" charset="-122"/>
                 <a:cs typeface="Arial" pitchFamily="34" charset="-120"/>
               </a:rPr>
-              <a:t>「Very good location,  nice staff, Too small, bathroom entr...」</a:t>
+              <a:t>「立地が非常に便利で、空港を利用する方にとって理想的なホテルです」</a:t>
             </a:r>
             <a:endParaRPr lang="en-US" sz="900" dirty="0"/>
           </a:p>
@@ -11493,7 +11493,7 @@
                 <a:ea typeface="Arial" pitchFamily="34" charset="-122"/>
                 <a:cs typeface="Arial" pitchFamily="34" charset="-120"/>
               </a:rPr>
-              <a:t>The bed and pillow were uncomfortable to sleep in</a:t>
+              <a:t>ベッドヘッドに白い汚れがたくさん付いていてすごく不快だったので改善してほしいです</a:t>
             </a:r>
             <a:endParaRPr lang="en-US" sz="900" dirty="0"/>
           </a:p>
@@ -11532,7 +11532,7 @@
                 <a:ea typeface="Arial" pitchFamily="34" charset="-122"/>
                 <a:cs typeface="Arial" pitchFamily="34" charset="-120"/>
               </a:rPr>
-              <a:t>「部屋もベッドも広くて大満足」</a:t>
+              <a:t>「The bed and pillow were uncomfortable to sleep in」</a:t>
             </a:r>
             <a:endParaRPr lang="en-US" sz="900" dirty="0"/>
           </a:p>
@@ -11716,7 +11716,7 @@
                 <a:ea typeface="Arial" pitchFamily="34" charset="-122"/>
                 <a:cs typeface="Arial" pitchFamily="34" charset="-120"/>
               </a:rPr>
-              <a:t>清潔さ：部屋は隅々まで清潔で、手入れが行き届いていました</a:t>
+              <a:t>駅から近く、室内もきれいでした</a:t>
             </a:r>
             <a:endParaRPr lang="en-US" sz="900" dirty="0"/>
           </a:p>
@@ -11755,7 +11755,7 @@
                 <a:ea typeface="Arial" pitchFamily="34" charset="-122"/>
                 <a:cs typeface="Arial" pitchFamily="34" charset="-120"/>
               </a:rPr>
-              <a:t>「Clean and tidy, tv has Netflix which is a huge plus for me」</a:t>
+              <a:t>「清潔さ：部屋は隅々まで清潔で、手入れが行き届いていました」</a:t>
             </a:r>
             <a:endParaRPr lang="en-US" sz="900" dirty="0"/>
           </a:p>
@@ -13696,7 +13696,7 @@
                           <a:ea typeface="Arial" pitchFamily="34" charset="-122"/>
                           <a:cs typeface="Arial" pitchFamily="34" charset="-120"/>
                         </a:rPr>
-                        <a:t>朝食の改善要望</a:t>
+                        <a:t>清掃不備</a:t>
                       </a:r>
                       <a:endParaRPr lang="en-US" sz="900" dirty="0">
                         <a:latin typeface="Arial" charset="0"/>
@@ -13764,7 +13764,7 @@
                           <a:ea typeface="Arial" pitchFamily="34" charset="-122"/>
                           <a:cs typeface="Arial" pitchFamily="34" charset="-120"/>
                         </a:rPr>
-                        <a:t>朝食なしのホテルと同じ価格なのに、朝食は無料です。 成田市で一番のお気に入り。朝食なしのホテルと同じ価格なのに、朝...</a:t>
+                        <a:t>ベッドヘッドに白い汚れがたくさん付いていてすごく不快だったので改善してほしいです</a:t>
                       </a:r>
                       <a:endParaRPr lang="en-US" sz="900" dirty="0">
                         <a:latin typeface="Arial" charset="0"/>
@@ -13832,7 +13832,7 @@
                           <a:ea typeface="Arial" pitchFamily="34" charset="-122"/>
                           <a:cs typeface="Arial" pitchFamily="34" charset="-120"/>
                         </a:rPr>
-                        <a:t>3件</a:t>
+                        <a:t>4件</a:t>
                       </a:r>
                       <a:endParaRPr lang="en-US" sz="900" dirty="0">
                         <a:latin typeface="Arial" charset="0"/>
@@ -13970,7 +13970,7 @@
                           <a:ea typeface="Arial" pitchFamily="34" charset="-122"/>
                           <a:cs typeface="Arial" pitchFamily="34" charset="-120"/>
                         </a:rPr>
-                        <a:t>対応・サービスの不満</a:t>
+                        <a:t>朝食の改善要望</a:t>
                       </a:r>
                       <a:endParaRPr lang="en-US" sz="900" dirty="0">
                         <a:latin typeface="Arial" charset="0"/>
@@ -14038,7 +14038,7 @@
                           <a:ea typeface="Arial" pitchFamily="34" charset="-122"/>
                           <a:cs typeface="Arial" pitchFamily="34" charset="-120"/>
                         </a:rPr>
-                        <a:t>員工態度親切 一進房間有股臭味（發霉味），地毯稍嫌不乾淨 部屋に入るとカビ臭い匂いがして、カーペットも少し汚れていた</a:t>
+                        <a:t>朝食なしのホテルと同じ価格なのに、朝食は無料です。 成田市で一番のお気に入り。朝食なしのホテルと同じ価格なのに、朝...</a:t>
                       </a:r>
                       <a:endParaRPr lang="en-US" sz="900" dirty="0">
                         <a:latin typeface="Arial" charset="0"/>
@@ -14244,7 +14244,7 @@
                           <a:ea typeface="Arial" pitchFamily="34" charset="-122"/>
                           <a:cs typeface="Arial" pitchFamily="34" charset="-120"/>
                         </a:rPr>
-                        <a:t>清掃不備</a:t>
+                        <a:t>対応・サービスの不満</a:t>
                       </a:r>
                       <a:endParaRPr lang="en-US" sz="900" dirty="0">
                         <a:latin typeface="Arial" charset="0"/>

--- a/納品レポート/ホテル別レポート/comfort_narita_口コミ分析レポート.pptx
+++ b/納品レポート/ホテル別レポート/comfort_narita_口コミ分析レポート.pptx
@@ -211,7 +211,7 @@
                   <c:v>9.53</c:v>
                 </c:pt>
                 <c:pt idx="1">
-                  <c:v>9.5</c:v>
+                  <c:v>9.36</c:v>
                 </c:pt>
                 <c:pt idx="2">
                   <c:v>8.42</c:v>
@@ -566,7 +566,7 @@
               <c:numCache>
                 <c:ptCount val="3"/>
                 <c:pt idx="0">
-                  <c:v>98</c:v>
+                  <c:v>100</c:v>
                 </c:pt>
                 <c:pt idx="1">
                   <c:v>21</c:v>
@@ -815,7 +815,7 @@
                   <c:v>16</c:v>
                 </c:pt>
                 <c:pt idx="2">
-                  <c:v>31</c:v>
+                  <c:v>33</c:v>
                 </c:pt>
                 <c:pt idx="3">
                   <c:v>8</c:v>
@@ -2781,7 +2781,7 @@
                 <a:ea typeface="Arial" pitchFamily="34" charset="-122"/>
                 <a:cs typeface="Arial" pitchFamily="34" charset="-120"/>
               </a:rPr>
-              <a:t>レビュー総数：123件（6サイト）</a:t>
+              <a:t>レビュー総数：125件（6サイト）</a:t>
             </a:r>
             <a:endParaRPr lang="en-US" sz="1000" dirty="0"/>
           </a:p>
@@ -2801,7 +2801,7 @@
                 <a:ea typeface="Arial" pitchFamily="34" charset="-122"/>
                 <a:cs typeface="Arial" pitchFamily="34" charset="-120"/>
               </a:rPr>
-              <a:t>作成日：2026年3月19日</a:t>
+              <a:t>作成日：2026年3月20日</a:t>
             </a:r>
             <a:endParaRPr lang="en-US" sz="1000" dirty="0"/>
           </a:p>
@@ -3347,7 +3347,7 @@
                           <a:ea typeface="Arial" pitchFamily="34" charset="-122"/>
                           <a:cs typeface="Arial" pitchFamily="34" charset="-120"/>
                         </a:rPr>
-                        <a:t>8.54点</a:t>
+                        <a:t>8.53点</a:t>
                       </a:r>
                       <a:endParaRPr lang="en-US" sz="1000" dirty="0">
                         <a:latin typeface="Arial" charset="0"/>
@@ -3621,7 +3621,7 @@
                           <a:ea typeface="Arial" pitchFamily="34" charset="-122"/>
                           <a:cs typeface="Arial" pitchFamily="34" charset="-120"/>
                         </a:rPr>
-                        <a:t>79.7%</a:t>
+                        <a:t>80.0%</a:t>
                       </a:r>
                       <a:endParaRPr lang="en-US" sz="1000" dirty="0">
                         <a:latin typeface="Arial" charset="0"/>
@@ -3895,7 +3895,7 @@
                           <a:ea typeface="Arial" pitchFamily="34" charset="-122"/>
                           <a:cs typeface="Arial" pitchFamily="34" charset="-120"/>
                         </a:rPr>
-                        <a:t>3.3%</a:t>
+                        <a:t>3.2%</a:t>
                       </a:r>
                       <a:endParaRPr lang="en-US" sz="1000" dirty="0">
                         <a:latin typeface="Arial" charset="0"/>
@@ -5356,7 +5356,7 @@
                 <a:ea typeface="Arial" pitchFamily="34" charset="-122"/>
                 <a:cs typeface="Arial" pitchFamily="34" charset="-120"/>
               </a:rPr>
-              <a:t>8.54</a:t>
+              <a:t>8.53</a:t>
             </a:r>
             <a:endParaRPr lang="en-US" sz="3200" dirty="0"/>
           </a:p>
@@ -5481,7 +5481,7 @@
                 <a:ea typeface="Arial" pitchFamily="34" charset="-122"/>
                 <a:cs typeface="Arial" pitchFamily="34" charset="-120"/>
               </a:rPr>
-              <a:t>79.7%</a:t>
+              <a:t>80.0%</a:t>
             </a:r>
             <a:endParaRPr lang="en-US" sz="3200" dirty="0"/>
           </a:p>
@@ -5606,7 +5606,7 @@
                 <a:ea typeface="Arial" pitchFamily="34" charset="-122"/>
                 <a:cs typeface="Arial" pitchFamily="34" charset="-120"/>
               </a:rPr>
-              <a:t>3.3%</a:t>
+              <a:t>3.2%</a:t>
             </a:r>
             <a:endParaRPr lang="en-US" sz="3200" dirty="0"/>
           </a:p>
@@ -5731,7 +5731,7 @@
                 <a:ea typeface="Arial" pitchFamily="34" charset="-122"/>
                 <a:cs typeface="Arial" pitchFamily="34" charset="-120"/>
               </a:rPr>
-              <a:t>123件</a:t>
+              <a:t>125件</a:t>
             </a:r>
             <a:endParaRPr lang="en-US" sz="3200" dirty="0"/>
           </a:p>
@@ -5879,7 +5879,7 @@
                 <a:ea typeface="Arial" pitchFamily="34" charset="-122"/>
                 <a:cs typeface="Arial" pitchFamily="34" charset="-120"/>
               </a:rPr>
-              <a:t>  普通のホテルですが朝食が美味しくて満足です 普通のホテルですが朝食が美味しくて満足です</a:t>
+              <a:t>  朝食も軽食とは言えないほどボリュームありました</a:t>
             </a:r>
             <a:endParaRPr lang="en-US" sz="1100" dirty="0"/>
           </a:p>
@@ -6540,7 +6540,7 @@
                 <a:ea typeface="Arial" pitchFamily="34" charset="-122"/>
                 <a:cs typeface="Arial" pitchFamily="34" charset="-120"/>
               </a:rPr>
-              <a:t>8.54</a:t>
+              <a:t>8.53</a:t>
             </a:r>
             <a:endParaRPr lang="en-US" sz="3200" dirty="0"/>
           </a:p>
@@ -6588,7 +6588,7 @@
             <a:avLst/>
           </a:prstGeom>
           <a:solidFill>
-            <a:srgbClr val="D4A843"/>
+            <a:srgbClr val="16A34A"/>
           </a:solidFill>
           <a:ln/>
         </p:spPr>
@@ -6659,13 +6659,13 @@
             <a:r>
               <a:rPr lang="en-US" sz="3200" b="1" dirty="0">
                 <a:solidFill>
-                  <a:srgbClr val="D4A843"/>
+                  <a:srgbClr val="16A34A"/>
                 </a:solidFill>
                 <a:latin typeface="Arial" pitchFamily="34" charset="0"/>
                 <a:ea typeface="Arial" pitchFamily="34" charset="-122"/>
                 <a:cs typeface="Arial" pitchFamily="34" charset="-120"/>
               </a:rPr>
-              <a:t>79.7%</a:t>
+              <a:t>80.0%</a:t>
             </a:r>
             <a:endParaRPr lang="en-US" sz="3200" dirty="0"/>
           </a:p>
@@ -6790,7 +6790,7 @@
                 <a:ea typeface="Arial" pitchFamily="34" charset="-122"/>
                 <a:cs typeface="Arial" pitchFamily="34" charset="-120"/>
               </a:rPr>
-              <a:t>3.3%</a:t>
+              <a:t>3.2%</a:t>
             </a:r>
             <a:endParaRPr lang="en-US" sz="3200" dirty="0"/>
           </a:p>
@@ -6915,7 +6915,7 @@
                 <a:ea typeface="Arial" pitchFamily="34" charset="-122"/>
                 <a:cs typeface="Arial" pitchFamily="34" charset="-120"/>
               </a:rPr>
-              <a:t>123件</a:t>
+              <a:t>125件</a:t>
             </a:r>
             <a:endParaRPr lang="en-US" sz="3200" dirty="0"/>
           </a:p>
@@ -8236,7 +8236,7 @@
                           <a:ea typeface="Arial" pitchFamily="34" charset="-122"/>
                           <a:cs typeface="Arial" pitchFamily="34" charset="-120"/>
                         </a:rPr>
-                        <a:t>20</a:t>
+                        <a:t>22</a:t>
                       </a:r>
                       <a:endParaRPr lang="en-US" sz="900" dirty="0">
                         <a:latin typeface="Arial" charset="0"/>
@@ -8304,7 +8304,7 @@
                           <a:ea typeface="Arial" pitchFamily="34" charset="-122"/>
                           <a:cs typeface="Arial" pitchFamily="34" charset="-120"/>
                         </a:rPr>
-                        <a:t>4.75</a:t>
+                        <a:t>4.68</a:t>
                       </a:r>
                       <a:endParaRPr lang="en-US" sz="900" dirty="0">
                         <a:latin typeface="Arial" charset="0"/>
@@ -8440,7 +8440,7 @@
                           <a:ea typeface="Arial" pitchFamily="34" charset="-122"/>
                           <a:cs typeface="Arial" pitchFamily="34" charset="-120"/>
                         </a:rPr>
-                        <a:t>9.5</a:t>
+                        <a:t>9.36</a:t>
                       </a:r>
                       <a:endParaRPr lang="en-US" sz="900" dirty="0">
                         <a:latin typeface="Arial" charset="0"/>
@@ -10216,7 +10216,7 @@
                 <a:ea typeface="Arial" pitchFamily="34" charset="-122"/>
                 <a:cs typeface="Arial" pitchFamily="34" charset="-120"/>
               </a:rPr>
-              <a:t>98件（79.7%）</a:t>
+              <a:t>100件（80.0%）</a:t>
             </a:r>
             <a:endParaRPr lang="en-US" sz="1100" dirty="0"/>
           </a:p>
@@ -10314,7 +10314,7 @@
                 <a:ea typeface="Arial" pitchFamily="34" charset="-122"/>
                 <a:cs typeface="Arial" pitchFamily="34" charset="-120"/>
               </a:rPr>
-              <a:t>21件（17.1%）</a:t>
+              <a:t>21件（16.8%）</a:t>
             </a:r>
             <a:endParaRPr lang="en-US" sz="1100" dirty="0"/>
           </a:p>
@@ -10412,7 +10412,7 @@
                 <a:ea typeface="Arial" pitchFamily="34" charset="-122"/>
                 <a:cs typeface="Arial" pitchFamily="34" charset="-120"/>
               </a:rPr>
-              <a:t>4件（3.3%）</a:t>
+              <a:t>4件（3.2%）</a:t>
             </a:r>
             <a:endParaRPr lang="en-US" sz="1100" dirty="0"/>
           </a:p>
@@ -10824,7 +10824,7 @@
                 <a:ea typeface="Arial" pitchFamily="34" charset="-122"/>
                 <a:cs typeface="Arial" pitchFamily="34" charset="-120"/>
               </a:rPr>
-              <a:t>普通のホテルですが朝食が美味しくて満足です 普通のホテルですが朝食が美味しくて満足です</a:t>
+              <a:t>朝食も軽食とは言えないほどボリュームありました</a:t>
             </a:r>
             <a:endParaRPr lang="en-US" sz="900" dirty="0"/>
           </a:p>
@@ -10863,7 +10863,7 @@
                 <a:ea typeface="Arial" pitchFamily="34" charset="-122"/>
                 <a:cs typeface="Arial" pitchFamily="34" charset="-120"/>
               </a:rPr>
-              <a:t>「アメニティ：無料のコーヒーと美味しい朝食メニューは大変ありがたかったです」</a:t>
+              <a:t>「普通のホテルですが朝食が美味しくて満足です 普通のホテルですが朝食が美味しくて満足です」</a:t>
             </a:r>
             <a:endParaRPr lang="en-US" sz="900" dirty="0"/>
           </a:p>
@@ -11493,7 +11493,7 @@
                 <a:ea typeface="Arial" pitchFamily="34" charset="-122"/>
                 <a:cs typeface="Arial" pitchFamily="34" charset="-120"/>
               </a:rPr>
-              <a:t>ベッドヘッドに白い汚れがたくさん付いていてすごく不快だったので改善してほしいです</a:t>
+              <a:t>室内、アメニティ含めて問題ない</a:t>
             </a:r>
             <a:endParaRPr lang="en-US" sz="900" dirty="0"/>
           </a:p>
@@ -11532,7 +11532,7 @@
                 <a:ea typeface="Arial" pitchFamily="34" charset="-122"/>
                 <a:cs typeface="Arial" pitchFamily="34" charset="-120"/>
               </a:rPr>
-              <a:t>「The bed and pillow were uncomfortable to sleep in」</a:t>
+              <a:t>「ベッドヘッドに白い汚れがたくさん付いていてすごく不快だったので改善してほしいです」</a:t>
             </a:r>
             <a:endParaRPr lang="en-US" sz="900" dirty="0"/>
           </a:p>

--- a/納品レポート/ホテル別レポート/comfort_narita_口コミ分析レポート.pptx
+++ b/納品レポート/ホテル別レポート/comfort_narita_口コミ分析レポート.pptx
@@ -214,13 +214,13 @@
                   <c:v>9.36</c:v>
                 </c:pt>
                 <c:pt idx="2">
-                  <c:v>8.42</c:v>
+                  <c:v>8.45</c:v>
                 </c:pt>
                 <c:pt idx="3">
                   <c:v>8.17</c:v>
                 </c:pt>
                 <c:pt idx="4">
-                  <c:v>7.75</c:v>
+                  <c:v>7.88</c:v>
                 </c:pt>
                 <c:pt idx="5">
                   <c:v>6.88</c:v>
@@ -566,7 +566,7 @@
               <c:numCache>
                 <c:ptCount val="3"/>
                 <c:pt idx="0">
-                  <c:v>100</c:v>
+                  <c:v>102</c:v>
                 </c:pt>
                 <c:pt idx="1">
                   <c:v>21</c:v>
@@ -809,7 +809,7 @@
                 <c:formatCode>General</c:formatCode>
                 <c:ptCount val="8"/>
                 <c:pt idx="0">
-                  <c:v>51</c:v>
+                  <c:v>53</c:v>
                 </c:pt>
                 <c:pt idx="1">
                   <c:v>16</c:v>
@@ -2781,7 +2781,7 @@
                 <a:ea typeface="Arial" pitchFamily="34" charset="-122"/>
                 <a:cs typeface="Arial" pitchFamily="34" charset="-120"/>
               </a:rPr>
-              <a:t>レビュー総数：125件（6サイト）</a:t>
+              <a:t>レビュー総数：127件（6サイト）</a:t>
             </a:r>
             <a:endParaRPr lang="en-US" sz="1000" dirty="0"/>
           </a:p>
@@ -2801,7 +2801,7 @@
                 <a:ea typeface="Arial" pitchFamily="34" charset="-122"/>
                 <a:cs typeface="Arial" pitchFamily="34" charset="-120"/>
               </a:rPr>
-              <a:t>作成日：2026年3月20日</a:t>
+              <a:t>作成日：2026年3月21日</a:t>
             </a:r>
             <a:endParaRPr lang="en-US" sz="1000" dirty="0"/>
           </a:p>
@@ -3347,7 +3347,7 @@
                           <a:ea typeface="Arial" pitchFamily="34" charset="-122"/>
                           <a:cs typeface="Arial" pitchFamily="34" charset="-120"/>
                         </a:rPr>
-                        <a:t>8.53点</a:t>
+                        <a:t>8.55点</a:t>
                       </a:r>
                       <a:endParaRPr lang="en-US" sz="1000" dirty="0">
                         <a:latin typeface="Arial" charset="0"/>
@@ -3415,7 +3415,7 @@
                           <a:ea typeface="Arial" pitchFamily="34" charset="-122"/>
                           <a:cs typeface="Arial" pitchFamily="34" charset="-120"/>
                         </a:rPr>
-                        <a:t>8.8点以上</a:t>
+                        <a:t>8.9点以上</a:t>
                       </a:r>
                       <a:endParaRPr lang="en-US" sz="1000" dirty="0">
                         <a:latin typeface="Arial" charset="0"/>
@@ -3621,7 +3621,7 @@
                           <a:ea typeface="Arial" pitchFamily="34" charset="-122"/>
                           <a:cs typeface="Arial" pitchFamily="34" charset="-120"/>
                         </a:rPr>
-                        <a:t>80.0%</a:t>
+                        <a:t>80.3%</a:t>
                       </a:r>
                       <a:endParaRPr lang="en-US" sz="1000" dirty="0">
                         <a:latin typeface="Arial" charset="0"/>
@@ -3895,7 +3895,7 @@
                           <a:ea typeface="Arial" pitchFamily="34" charset="-122"/>
                           <a:cs typeface="Arial" pitchFamily="34" charset="-120"/>
                         </a:rPr>
-                        <a:t>3.2%</a:t>
+                        <a:t>3.1%</a:t>
                       </a:r>
                       <a:endParaRPr lang="en-US" sz="1000" dirty="0">
                         <a:latin typeface="Arial" charset="0"/>
@@ -5356,7 +5356,7 @@
                 <a:ea typeface="Arial" pitchFamily="34" charset="-122"/>
                 <a:cs typeface="Arial" pitchFamily="34" charset="-120"/>
               </a:rPr>
-              <a:t>8.53</a:t>
+              <a:t>8.55</a:t>
             </a:r>
             <a:endParaRPr lang="en-US" sz="3200" dirty="0"/>
           </a:p>
@@ -5481,7 +5481,7 @@
                 <a:ea typeface="Arial" pitchFamily="34" charset="-122"/>
                 <a:cs typeface="Arial" pitchFamily="34" charset="-120"/>
               </a:rPr>
-              <a:t>80.0%</a:t>
+              <a:t>80.3%</a:t>
             </a:r>
             <a:endParaRPr lang="en-US" sz="3200" dirty="0"/>
           </a:p>
@@ -5606,7 +5606,7 @@
                 <a:ea typeface="Arial" pitchFamily="34" charset="-122"/>
                 <a:cs typeface="Arial" pitchFamily="34" charset="-120"/>
               </a:rPr>
-              <a:t>3.2%</a:t>
+              <a:t>3.1%</a:t>
             </a:r>
             <a:endParaRPr lang="en-US" sz="3200" dirty="0"/>
           </a:p>
@@ -5731,7 +5731,7 @@
                 <a:ea typeface="Arial" pitchFamily="34" charset="-122"/>
                 <a:cs typeface="Arial" pitchFamily="34" charset="-120"/>
               </a:rPr>
-              <a:t>125件</a:t>
+              <a:t>127件</a:t>
             </a:r>
             <a:endParaRPr lang="en-US" sz="3200" dirty="0"/>
           </a:p>
@@ -5879,7 +5879,47 @@
                 <a:ea typeface="Arial" pitchFamily="34" charset="-122"/>
                 <a:cs typeface="Arial" pitchFamily="34" charset="-120"/>
               </a:rPr>
-              <a:t>  朝食も軽食とは言えないほどボリュームありました</a:t>
+              <a:t>  駅からも近く、コンビニもすぐそばにあるため便利でした  朝食も五穀米やスープ、スムージーがおいしくていつもの朝食よ...</a:t>
+            </a:r>
+            <a:endParaRPr lang="en-US" sz="1100" dirty="0"/>
+          </a:p>
+          <a:p>
+            <a:pPr indent="0" marL="0">
+              <a:spcAft>
+                <a:spcPts val="200"/>
+              </a:spcAft>
+              <a:buNone/>
+            </a:pPr>
+            <a:r>
+              <a:rPr lang="en-US" sz="1100" b="1" dirty="0">
+                <a:solidFill>
+                  <a:srgbClr val="334155"/>
+                </a:solidFill>
+                <a:latin typeface="Arial" pitchFamily="34" charset="0"/>
+                <a:ea typeface="Arial" pitchFamily="34" charset="-122"/>
+                <a:cs typeface="Arial" pitchFamily="34" charset="-120"/>
+              </a:rPr>
+              <a:t>立地・アクセス </a:t>
+            </a:r>
+            <a:endParaRPr lang="en-US" sz="1100" dirty="0"/>
+          </a:p>
+          <a:p>
+            <a:pPr indent="0" marL="0">
+              <a:spcAft>
+                <a:spcPts val="200"/>
+              </a:spcAft>
+              <a:buNone/>
+            </a:pPr>
+            <a:r>
+              <a:rPr lang="en-US" sz="900" dirty="0">
+                <a:solidFill>
+                  <a:srgbClr val="64748B"/>
+                </a:solidFill>
+                <a:latin typeface="Arial" pitchFamily="34" charset="0"/>
+                <a:ea typeface="Arial" pitchFamily="34" charset="-122"/>
+                <a:cs typeface="Arial" pitchFamily="34" charset="-120"/>
+              </a:rPr>
+              <a:t>  駅からも近く、コンビニもすぐそばにあるため便利でした  朝食も五穀米やスープ、スムージーがおいしくていつもの朝食よ...</a:t>
             </a:r>
             <a:endParaRPr lang="en-US" sz="1100" dirty="0"/>
           </a:p>
@@ -5920,46 +5960,6 @@
                 <a:cs typeface="Arial" pitchFamily="34" charset="-120"/>
               </a:rPr>
               <a:t>  チェックインも遅かったのですが、丁寧に対応頂き気分良かったです</a:t>
-            </a:r>
-            <a:endParaRPr lang="en-US" sz="1100" dirty="0"/>
-          </a:p>
-          <a:p>
-            <a:pPr indent="0" marL="0">
-              <a:spcAft>
-                <a:spcPts val="200"/>
-              </a:spcAft>
-              <a:buNone/>
-            </a:pPr>
-            <a:r>
-              <a:rPr lang="en-US" sz="1100" b="1" dirty="0">
-                <a:solidFill>
-                  <a:srgbClr val="334155"/>
-                </a:solidFill>
-                <a:latin typeface="Arial" pitchFamily="34" charset="0"/>
-                <a:ea typeface="Arial" pitchFamily="34" charset="-122"/>
-                <a:cs typeface="Arial" pitchFamily="34" charset="-120"/>
-              </a:rPr>
-              <a:t>立地・アクセス </a:t>
-            </a:r>
-            <a:endParaRPr lang="en-US" sz="1100" dirty="0"/>
-          </a:p>
-          <a:p>
-            <a:pPr indent="0" marL="0">
-              <a:spcAft>
-                <a:spcPts val="200"/>
-              </a:spcAft>
-              <a:buNone/>
-            </a:pPr>
-            <a:r>
-              <a:rPr lang="en-US" sz="900" dirty="0">
-                <a:solidFill>
-                  <a:srgbClr val="64748B"/>
-                </a:solidFill>
-                <a:latin typeface="Arial" pitchFamily="34" charset="0"/>
-                <a:ea typeface="Arial" pitchFamily="34" charset="-122"/>
-                <a:cs typeface="Arial" pitchFamily="34" charset="-120"/>
-              </a:rPr>
-              <a:t>  駅から近く、室内もきれいでした</a:t>
             </a:r>
             <a:endParaRPr lang="en-US" sz="1100" dirty="0"/>
           </a:p>
@@ -6540,7 +6540,7 @@
                 <a:ea typeface="Arial" pitchFamily="34" charset="-122"/>
                 <a:cs typeface="Arial" pitchFamily="34" charset="-120"/>
               </a:rPr>
-              <a:t>8.53</a:t>
+              <a:t>8.55</a:t>
             </a:r>
             <a:endParaRPr lang="en-US" sz="3200" dirty="0"/>
           </a:p>
@@ -6665,7 +6665,7 @@
                 <a:ea typeface="Arial" pitchFamily="34" charset="-122"/>
                 <a:cs typeface="Arial" pitchFamily="34" charset="-120"/>
               </a:rPr>
-              <a:t>80.0%</a:t>
+              <a:t>80.3%</a:t>
             </a:r>
             <a:endParaRPr lang="en-US" sz="3200" dirty="0"/>
           </a:p>
@@ -6790,7 +6790,7 @@
                 <a:ea typeface="Arial" pitchFamily="34" charset="-122"/>
                 <a:cs typeface="Arial" pitchFamily="34" charset="-120"/>
               </a:rPr>
-              <a:t>3.2%</a:t>
+              <a:t>3.1%</a:t>
             </a:r>
             <a:endParaRPr lang="en-US" sz="3200" dirty="0"/>
           </a:p>
@@ -6915,7 +6915,7 @@
                 <a:ea typeface="Arial" pitchFamily="34" charset="-122"/>
                 <a:cs typeface="Arial" pitchFamily="34" charset="-120"/>
               </a:rPr>
-              <a:t>125件</a:t>
+              <a:t>127件</a:t>
             </a:r>
             <a:endParaRPr lang="en-US" sz="3200" dirty="0"/>
           </a:p>
@@ -8578,7 +8578,7 @@
                           <a:ea typeface="Arial" pitchFamily="34" charset="-122"/>
                           <a:cs typeface="Arial" pitchFamily="34" charset="-120"/>
                         </a:rPr>
-                        <a:t>50</a:t>
+                        <a:t>51</a:t>
                       </a:r>
                       <a:endParaRPr lang="en-US" sz="900" dirty="0">
                         <a:latin typeface="Arial" charset="0"/>
@@ -8646,7 +8646,7 @@
                           <a:ea typeface="Arial" pitchFamily="34" charset="-122"/>
                           <a:cs typeface="Arial" pitchFamily="34" charset="-120"/>
                         </a:rPr>
-                        <a:t>8.42</a:t>
+                        <a:t>8.45</a:t>
                       </a:r>
                       <a:endParaRPr lang="en-US" sz="900" dirty="0">
                         <a:latin typeface="Arial" charset="0"/>
@@ -8782,7 +8782,7 @@
                           <a:ea typeface="Arial" pitchFamily="34" charset="-122"/>
                           <a:cs typeface="Arial" pitchFamily="34" charset="-120"/>
                         </a:rPr>
-                        <a:t>8.42</a:t>
+                        <a:t>8.45</a:t>
                       </a:r>
                       <a:endParaRPr lang="en-US" sz="900" dirty="0">
                         <a:latin typeface="Arial" charset="0"/>
@@ -9262,7 +9262,7 @@
                           <a:ea typeface="Arial" pitchFamily="34" charset="-122"/>
                           <a:cs typeface="Arial" pitchFamily="34" charset="-120"/>
                         </a:rPr>
-                        <a:t>16</a:t>
+                        <a:t>17</a:t>
                       </a:r>
                       <a:endParaRPr lang="en-US" sz="900" dirty="0">
                         <a:latin typeface="Arial" charset="0"/>
@@ -9330,7 +9330,7 @@
                           <a:ea typeface="Arial" pitchFamily="34" charset="-122"/>
                           <a:cs typeface="Arial" pitchFamily="34" charset="-120"/>
                         </a:rPr>
-                        <a:t>3.88</a:t>
+                        <a:t>3.94</a:t>
                       </a:r>
                       <a:endParaRPr lang="en-US" sz="900" dirty="0">
                         <a:latin typeface="Arial" charset="0"/>
@@ -9466,7 +9466,7 @@
                           <a:ea typeface="Arial" pitchFamily="34" charset="-122"/>
                           <a:cs typeface="Arial" pitchFamily="34" charset="-120"/>
                         </a:rPr>
-                        <a:t>7.75</a:t>
+                        <a:t>7.88</a:t>
                       </a:r>
                       <a:endParaRPr lang="en-US" sz="900" dirty="0">
                         <a:latin typeface="Arial" charset="0"/>
@@ -10216,7 +10216,7 @@
                 <a:ea typeface="Arial" pitchFamily="34" charset="-122"/>
                 <a:cs typeface="Arial" pitchFamily="34" charset="-120"/>
               </a:rPr>
-              <a:t>100件（80.0%）</a:t>
+              <a:t>102件（80.3%）</a:t>
             </a:r>
             <a:endParaRPr lang="en-US" sz="1100" dirty="0"/>
           </a:p>
@@ -10314,7 +10314,7 @@
                 <a:ea typeface="Arial" pitchFamily="34" charset="-122"/>
                 <a:cs typeface="Arial" pitchFamily="34" charset="-120"/>
               </a:rPr>
-              <a:t>21件（16.8%）</a:t>
+              <a:t>21件（16.5%）</a:t>
             </a:r>
             <a:endParaRPr lang="en-US" sz="1100" dirty="0"/>
           </a:p>
@@ -10412,7 +10412,7 @@
                 <a:ea typeface="Arial" pitchFamily="34" charset="-122"/>
                 <a:cs typeface="Arial" pitchFamily="34" charset="-120"/>
               </a:rPr>
-              <a:t>4件（3.2%）</a:t>
+              <a:t>4件（3.1%）</a:t>
             </a:r>
             <a:endParaRPr lang="en-US" sz="1100" dirty="0"/>
           </a:p>
@@ -10746,7 +10746,7 @@
                 <a:ea typeface="Arial" pitchFamily="34" charset="-122"/>
                 <a:cs typeface="Arial" pitchFamily="34" charset="-120"/>
               </a:rPr>
-              <a:t>20件+</a:t>
+              <a:t>50件+</a:t>
             </a:r>
             <a:endParaRPr lang="en-US" sz="900" dirty="0"/>
           </a:p>
@@ -10824,7 +10824,7 @@
                 <a:ea typeface="Arial" pitchFamily="34" charset="-122"/>
                 <a:cs typeface="Arial" pitchFamily="34" charset="-120"/>
               </a:rPr>
-              <a:t>朝食も軽食とは言えないほどボリュームありました</a:t>
+              <a:t>駅からも近く、コンビニもすぐそばにあるため便利でした  朝食も五穀米やスープ、スムージーがおいしくていつもの朝食よ...</a:t>
             </a:r>
             <a:endParaRPr lang="en-US" sz="900" dirty="0"/>
           </a:p>
@@ -10863,7 +10863,7 @@
                 <a:ea typeface="Arial" pitchFamily="34" charset="-122"/>
                 <a:cs typeface="Arial" pitchFamily="34" charset="-120"/>
               </a:rPr>
-              <a:t>「普通のホテルですが朝食が美味しくて満足です 普通のホテルですが朝食が美味しくて満足です」</a:t>
+              <a:t>「朝食も軽食とは言えないほどボリュームありました」</a:t>
             </a:r>
             <a:endParaRPr lang="en-US" sz="900" dirty="0"/>
           </a:p>
@@ -11008,6 +11008,229 @@
                 <a:ea typeface="Arial" pitchFamily="34" charset="-122"/>
                 <a:cs typeface="Arial" pitchFamily="34" charset="-120"/>
               </a:rPr>
+              <a:t>立地・アクセス</a:t>
+            </a:r>
+            <a:endParaRPr lang="en-US" sz="1300" dirty="0"/>
+          </a:p>
+        </p:txBody>
+      </p:sp>
+      <p:sp>
+        <p:nvSpPr>
+          <p:cNvPr id="17" name="Text 15"/>
+          <p:cNvSpPr/>
+          <p:nvPr/>
+        </p:nvSpPr>
+        <p:spPr>
+          <a:xfrm>
+            <a:off x="3429000" y="1417320"/>
+            <a:ext cx="2377440" cy="365760"/>
+          </a:xfrm>
+          <a:prstGeom prst="rect">
+            <a:avLst/>
+          </a:prstGeom>
+          <a:noFill/>
+          <a:ln/>
+        </p:spPr>
+        <p:txBody>
+          <a:bodyPr wrap="square" lIns="0" tIns="0" rIns="0" bIns="0" rtlCol="0" anchor="ctr"/>
+          <a:lstStyle/>
+          <a:p>
+            <a:pPr indent="0" marL="0">
+              <a:buNone/>
+            </a:pPr>
+            <a:r>
+              <a:rPr lang="en-US" sz="900" dirty="0">
+                <a:solidFill>
+                  <a:srgbClr val="64748B"/>
+                </a:solidFill>
+                <a:latin typeface="Arial" pitchFamily="34" charset="0"/>
+                <a:ea typeface="Arial" pitchFamily="34" charset="-122"/>
+                <a:cs typeface="Arial" pitchFamily="34" charset="-120"/>
+              </a:rPr>
+              <a:t>駅からも近く、コンビニもすぐそばにあるため便利でした  朝食も五穀米やスープ、スムージーがおいしくていつもの朝食よ...</a:t>
+            </a:r>
+            <a:endParaRPr lang="en-US" sz="900" dirty="0"/>
+          </a:p>
+        </p:txBody>
+      </p:sp>
+      <p:sp>
+        <p:nvSpPr>
+          <p:cNvPr id="18" name="Text 16"/>
+          <p:cNvSpPr/>
+          <p:nvPr/>
+        </p:nvSpPr>
+        <p:spPr>
+          <a:xfrm>
+            <a:off x="3429000" y="1828800"/>
+            <a:ext cx="2377440" cy="640080"/>
+          </a:xfrm>
+          <a:prstGeom prst="rect">
+            <a:avLst/>
+          </a:prstGeom>
+          <a:noFill/>
+          <a:ln/>
+        </p:spPr>
+        <p:txBody>
+          <a:bodyPr wrap="square" lIns="0" tIns="0" rIns="0" bIns="0" rtlCol="0" anchor="ctr"/>
+          <a:lstStyle/>
+          <a:p>
+            <a:pPr indent="0" marL="0">
+              <a:buNone/>
+            </a:pPr>
+            <a:r>
+              <a:rPr lang="en-US" sz="900" i="1" dirty="0">
+                <a:solidFill>
+                  <a:srgbClr val="3B7DD8"/>
+                </a:solidFill>
+                <a:latin typeface="Arial" pitchFamily="34" charset="0"/>
+                <a:ea typeface="Arial" pitchFamily="34" charset="-122"/>
+                <a:cs typeface="Arial" pitchFamily="34" charset="-120"/>
+              </a:rPr>
+              <a:t>「駅から近く、室内もきれいでした」</a:t>
+            </a:r>
+            <a:endParaRPr lang="en-US" sz="900" dirty="0"/>
+          </a:p>
+        </p:txBody>
+      </p:sp>
+      <p:sp>
+        <p:nvSpPr>
+          <p:cNvPr id="19" name="Shape 17"/>
+          <p:cNvSpPr/>
+          <p:nvPr/>
+        </p:nvSpPr>
+        <p:spPr>
+          <a:xfrm>
+            <a:off x="6126480" y="1051560"/>
+            <a:ext cx="2651760" cy="1600200"/>
+          </a:xfrm>
+          <a:prstGeom prst="rect">
+            <a:avLst/>
+          </a:prstGeom>
+          <a:solidFill>
+            <a:srgbClr val="FFFFFF"/>
+          </a:solidFill>
+          <a:ln/>
+          <a:effectLst>
+            <a:outerShdw sx="100000" sy="100000" kx="0" ky="0" algn="bl" rotWithShape="0" blurRad="50800" dist="25400" dir="8100000">
+              <a:srgbClr val="000000">
+                <a:alpha val="10000"/>
+              </a:srgbClr>
+            </a:outerShdw>
+          </a:effectLst>
+        </p:spPr>
+      </p:sp>
+      <p:sp>
+        <p:nvSpPr>
+          <p:cNvPr id="20" name="Shape 18"/>
+          <p:cNvSpPr/>
+          <p:nvPr/>
+        </p:nvSpPr>
+        <p:spPr>
+          <a:xfrm>
+            <a:off x="6126480" y="1051560"/>
+            <a:ext cx="54864" cy="1600200"/>
+          </a:xfrm>
+          <a:prstGeom prst="rect">
+            <a:avLst/>
+          </a:prstGeom>
+          <a:solidFill>
+            <a:srgbClr val="16A34A"/>
+          </a:solidFill>
+          <a:ln/>
+        </p:spPr>
+      </p:sp>
+      <p:sp>
+        <p:nvSpPr>
+          <p:cNvPr id="21" name="Shape 19"/>
+          <p:cNvSpPr/>
+          <p:nvPr/>
+        </p:nvSpPr>
+        <p:spPr>
+          <a:xfrm>
+            <a:off x="7955280" y="1124712"/>
+            <a:ext cx="658368" cy="228600"/>
+          </a:xfrm>
+          <a:prstGeom prst="rect">
+            <a:avLst/>
+          </a:prstGeom>
+          <a:solidFill>
+            <a:srgbClr val="DCFCE7"/>
+          </a:solidFill>
+          <a:ln/>
+        </p:spPr>
+      </p:sp>
+      <p:sp>
+        <p:nvSpPr>
+          <p:cNvPr id="22" name="Text 20"/>
+          <p:cNvSpPr/>
+          <p:nvPr/>
+        </p:nvSpPr>
+        <p:spPr>
+          <a:xfrm>
+            <a:off x="7955280" y="1124712"/>
+            <a:ext cx="658368" cy="228600"/>
+          </a:xfrm>
+          <a:prstGeom prst="rect">
+            <a:avLst/>
+          </a:prstGeom>
+          <a:noFill/>
+          <a:ln/>
+        </p:spPr>
+        <p:txBody>
+          <a:bodyPr wrap="square" lIns="0" tIns="0" rIns="0" bIns="0" rtlCol="0" anchor="ctr"/>
+          <a:lstStyle/>
+          <a:p>
+            <a:pPr algn="ctr" indent="0" marL="0">
+              <a:buNone/>
+            </a:pPr>
+            <a:r>
+              <a:rPr lang="en-US" sz="900" b="1" dirty="0">
+                <a:solidFill>
+                  <a:srgbClr val="16A34A"/>
+                </a:solidFill>
+                <a:latin typeface="Arial" pitchFamily="34" charset="0"/>
+                <a:ea typeface="Arial" pitchFamily="34" charset="-122"/>
+                <a:cs typeface="Arial" pitchFamily="34" charset="-120"/>
+              </a:rPr>
+              <a:t>20件+</a:t>
+            </a:r>
+            <a:endParaRPr lang="en-US" sz="900" dirty="0"/>
+          </a:p>
+        </p:txBody>
+      </p:sp>
+      <p:sp>
+        <p:nvSpPr>
+          <p:cNvPr id="23" name="Text 21"/>
+          <p:cNvSpPr/>
+          <p:nvPr/>
+        </p:nvSpPr>
+        <p:spPr>
+          <a:xfrm>
+            <a:off x="6263640" y="1124712"/>
+            <a:ext cx="1645920" cy="274320"/>
+          </a:xfrm>
+          <a:prstGeom prst="rect">
+            <a:avLst/>
+          </a:prstGeom>
+          <a:noFill/>
+          <a:ln/>
+        </p:spPr>
+        <p:txBody>
+          <a:bodyPr wrap="square" lIns="0" tIns="0" rIns="0" bIns="0" rtlCol="0" anchor="ctr"/>
+          <a:lstStyle/>
+          <a:p>
+            <a:pPr indent="0" marL="0">
+              <a:buNone/>
+            </a:pPr>
+            <a:r>
+              <a:rPr lang="en-US" sz="1300" b="1" dirty="0">
+                <a:solidFill>
+                  <a:srgbClr val="1A2744"/>
+                </a:solidFill>
+                <a:latin typeface="Arial" pitchFamily="34" charset="0"/>
+                <a:ea typeface="Arial" pitchFamily="34" charset="-122"/>
+                <a:cs typeface="Arial" pitchFamily="34" charset="-120"/>
+              </a:rPr>
               <a:t>スタッフの対応</a:t>
             </a:r>
             <a:endParaRPr lang="en-US" sz="1300" dirty="0"/>
@@ -11016,13 +11239,13 @@
       </p:sp>
       <p:sp>
         <p:nvSpPr>
-          <p:cNvPr id="17" name="Text 15"/>
-          <p:cNvSpPr/>
-          <p:nvPr/>
-        </p:nvSpPr>
-        <p:spPr>
-          <a:xfrm>
-            <a:off x="3429000" y="1417320"/>
+          <p:cNvPr id="24" name="Text 22"/>
+          <p:cNvSpPr/>
+          <p:nvPr/>
+        </p:nvSpPr>
+        <p:spPr>
+          <a:xfrm>
+            <a:off x="6263640" y="1417320"/>
             <a:ext cx="2377440" cy="365760"/>
           </a:xfrm>
           <a:prstGeom prst="rect">
@@ -11055,13 +11278,13 @@
       </p:sp>
       <p:sp>
         <p:nvSpPr>
-          <p:cNvPr id="18" name="Text 16"/>
-          <p:cNvSpPr/>
-          <p:nvPr/>
-        </p:nvSpPr>
-        <p:spPr>
-          <a:xfrm>
-            <a:off x="3429000" y="1828800"/>
+          <p:cNvPr id="25" name="Text 23"/>
+          <p:cNvSpPr/>
+          <p:nvPr/>
+        </p:nvSpPr>
+        <p:spPr>
+          <a:xfrm>
+            <a:off x="6263640" y="1828800"/>
             <a:ext cx="2377440" cy="640080"/>
           </a:xfrm>
           <a:prstGeom prst="rect">
@@ -11087,229 +11310,6 @@
                 <a:cs typeface="Arial" pitchFamily="34" charset="-120"/>
               </a:rPr>
               <a:t>「何よりも滞在を特別なものにしてくれたのは、素晴らしいスタッフの方々でした」</a:t>
-            </a:r>
-            <a:endParaRPr lang="en-US" sz="900" dirty="0"/>
-          </a:p>
-        </p:txBody>
-      </p:sp>
-      <p:sp>
-        <p:nvSpPr>
-          <p:cNvPr id="19" name="Shape 17"/>
-          <p:cNvSpPr/>
-          <p:nvPr/>
-        </p:nvSpPr>
-        <p:spPr>
-          <a:xfrm>
-            <a:off x="6126480" y="1051560"/>
-            <a:ext cx="2651760" cy="1600200"/>
-          </a:xfrm>
-          <a:prstGeom prst="rect">
-            <a:avLst/>
-          </a:prstGeom>
-          <a:solidFill>
-            <a:srgbClr val="FFFFFF"/>
-          </a:solidFill>
-          <a:ln/>
-          <a:effectLst>
-            <a:outerShdw sx="100000" sy="100000" kx="0" ky="0" algn="bl" rotWithShape="0" blurRad="50800" dist="25400" dir="8100000">
-              <a:srgbClr val="000000">
-                <a:alpha val="10000"/>
-              </a:srgbClr>
-            </a:outerShdw>
-          </a:effectLst>
-        </p:spPr>
-      </p:sp>
-      <p:sp>
-        <p:nvSpPr>
-          <p:cNvPr id="20" name="Shape 18"/>
-          <p:cNvSpPr/>
-          <p:nvPr/>
-        </p:nvSpPr>
-        <p:spPr>
-          <a:xfrm>
-            <a:off x="6126480" y="1051560"/>
-            <a:ext cx="54864" cy="1600200"/>
-          </a:xfrm>
-          <a:prstGeom prst="rect">
-            <a:avLst/>
-          </a:prstGeom>
-          <a:solidFill>
-            <a:srgbClr val="16A34A"/>
-          </a:solidFill>
-          <a:ln/>
-        </p:spPr>
-      </p:sp>
-      <p:sp>
-        <p:nvSpPr>
-          <p:cNvPr id="21" name="Shape 19"/>
-          <p:cNvSpPr/>
-          <p:nvPr/>
-        </p:nvSpPr>
-        <p:spPr>
-          <a:xfrm>
-            <a:off x="7955280" y="1124712"/>
-            <a:ext cx="658368" cy="228600"/>
-          </a:xfrm>
-          <a:prstGeom prst="rect">
-            <a:avLst/>
-          </a:prstGeom>
-          <a:solidFill>
-            <a:srgbClr val="DCFCE7"/>
-          </a:solidFill>
-          <a:ln/>
-        </p:spPr>
-      </p:sp>
-      <p:sp>
-        <p:nvSpPr>
-          <p:cNvPr id="22" name="Text 20"/>
-          <p:cNvSpPr/>
-          <p:nvPr/>
-        </p:nvSpPr>
-        <p:spPr>
-          <a:xfrm>
-            <a:off x="7955280" y="1124712"/>
-            <a:ext cx="658368" cy="228600"/>
-          </a:xfrm>
-          <a:prstGeom prst="rect">
-            <a:avLst/>
-          </a:prstGeom>
-          <a:noFill/>
-          <a:ln/>
-        </p:spPr>
-        <p:txBody>
-          <a:bodyPr wrap="square" lIns="0" tIns="0" rIns="0" bIns="0" rtlCol="0" anchor="ctr"/>
-          <a:lstStyle/>
-          <a:p>
-            <a:pPr algn="ctr" indent="0" marL="0">
-              <a:buNone/>
-            </a:pPr>
-            <a:r>
-              <a:rPr lang="en-US" sz="900" b="1" dirty="0">
-                <a:solidFill>
-                  <a:srgbClr val="16A34A"/>
-                </a:solidFill>
-                <a:latin typeface="Arial" pitchFamily="34" charset="0"/>
-                <a:ea typeface="Arial" pitchFamily="34" charset="-122"/>
-                <a:cs typeface="Arial" pitchFamily="34" charset="-120"/>
-              </a:rPr>
-              <a:t>20件+</a:t>
-            </a:r>
-            <a:endParaRPr lang="en-US" sz="900" dirty="0"/>
-          </a:p>
-        </p:txBody>
-      </p:sp>
-      <p:sp>
-        <p:nvSpPr>
-          <p:cNvPr id="23" name="Text 21"/>
-          <p:cNvSpPr/>
-          <p:nvPr/>
-        </p:nvSpPr>
-        <p:spPr>
-          <a:xfrm>
-            <a:off x="6263640" y="1124712"/>
-            <a:ext cx="1645920" cy="274320"/>
-          </a:xfrm>
-          <a:prstGeom prst="rect">
-            <a:avLst/>
-          </a:prstGeom>
-          <a:noFill/>
-          <a:ln/>
-        </p:spPr>
-        <p:txBody>
-          <a:bodyPr wrap="square" lIns="0" tIns="0" rIns="0" bIns="0" rtlCol="0" anchor="ctr"/>
-          <a:lstStyle/>
-          <a:p>
-            <a:pPr indent="0" marL="0">
-              <a:buNone/>
-            </a:pPr>
-            <a:r>
-              <a:rPr lang="en-US" sz="1300" b="1" dirty="0">
-                <a:solidFill>
-                  <a:srgbClr val="1A2744"/>
-                </a:solidFill>
-                <a:latin typeface="Arial" pitchFamily="34" charset="0"/>
-                <a:ea typeface="Arial" pitchFamily="34" charset="-122"/>
-                <a:cs typeface="Arial" pitchFamily="34" charset="-120"/>
-              </a:rPr>
-              <a:t>立地・アクセス</a:t>
-            </a:r>
-            <a:endParaRPr lang="en-US" sz="1300" dirty="0"/>
-          </a:p>
-        </p:txBody>
-      </p:sp>
-      <p:sp>
-        <p:nvSpPr>
-          <p:cNvPr id="24" name="Text 22"/>
-          <p:cNvSpPr/>
-          <p:nvPr/>
-        </p:nvSpPr>
-        <p:spPr>
-          <a:xfrm>
-            <a:off x="6263640" y="1417320"/>
-            <a:ext cx="2377440" cy="365760"/>
-          </a:xfrm>
-          <a:prstGeom prst="rect">
-            <a:avLst/>
-          </a:prstGeom>
-          <a:noFill/>
-          <a:ln/>
-        </p:spPr>
-        <p:txBody>
-          <a:bodyPr wrap="square" lIns="0" tIns="0" rIns="0" bIns="0" rtlCol="0" anchor="ctr"/>
-          <a:lstStyle/>
-          <a:p>
-            <a:pPr indent="0" marL="0">
-              <a:buNone/>
-            </a:pPr>
-            <a:r>
-              <a:rPr lang="en-US" sz="900" dirty="0">
-                <a:solidFill>
-                  <a:srgbClr val="64748B"/>
-                </a:solidFill>
-                <a:latin typeface="Arial" pitchFamily="34" charset="0"/>
-                <a:ea typeface="Arial" pitchFamily="34" charset="-122"/>
-                <a:cs typeface="Arial" pitchFamily="34" charset="-120"/>
-              </a:rPr>
-              <a:t>駅から近く、室内もきれいでした</a:t>
-            </a:r>
-            <a:endParaRPr lang="en-US" sz="900" dirty="0"/>
-          </a:p>
-        </p:txBody>
-      </p:sp>
-      <p:sp>
-        <p:nvSpPr>
-          <p:cNvPr id="25" name="Text 23"/>
-          <p:cNvSpPr/>
-          <p:nvPr/>
-        </p:nvSpPr>
-        <p:spPr>
-          <a:xfrm>
-            <a:off x="6263640" y="1828800"/>
-            <a:ext cx="2377440" cy="640080"/>
-          </a:xfrm>
-          <a:prstGeom prst="rect">
-            <a:avLst/>
-          </a:prstGeom>
-          <a:noFill/>
-          <a:ln/>
-        </p:spPr>
-        <p:txBody>
-          <a:bodyPr wrap="square" lIns="0" tIns="0" rIns="0" bIns="0" rtlCol="0" anchor="ctr"/>
-          <a:lstStyle/>
-          <a:p>
-            <a:pPr indent="0" marL="0">
-              <a:buNone/>
-            </a:pPr>
-            <a:r>
-              <a:rPr lang="en-US" sz="900" i="1" dirty="0">
-                <a:solidFill>
-                  <a:srgbClr val="3B7DD8"/>
-                </a:solidFill>
-                <a:latin typeface="Arial" pitchFamily="34" charset="0"/>
-                <a:ea typeface="Arial" pitchFamily="34" charset="-122"/>
-                <a:cs typeface="Arial" pitchFamily="34" charset="-120"/>
-              </a:rPr>
-              <a:t>「立地が非常に便利で、空港を利用する方にとって理想的なホテルです」</a:t>
             </a:r>
             <a:endParaRPr lang="en-US" sz="900" dirty="0"/>
           </a:p>

--- a/納品レポート/ホテル別レポート/comfort_narita_口コミ分析レポート.pptx
+++ b/納品レポート/ホテル別レポート/comfort_narita_口コミ分析レポート.pptx
@@ -189,10 +189,10 @@
                     <c:v>Booking.com</c:v>
                   </c:pt>
                   <c:pt idx="3">
-                    <c:v>じゃらん</c:v>
+                    <c:v>楽天トラベル</c:v>
                   </c:pt>
                   <c:pt idx="4">
-                    <c:v>楽天トラベル</c:v>
+                    <c:v>じゃらん</c:v>
                   </c:pt>
                   <c:pt idx="5">
                     <c:v>Agoda</c:v>
@@ -211,19 +211,19 @@
                   <c:v>9.53</c:v>
                 </c:pt>
                 <c:pt idx="1">
-                  <c:v>9.36</c:v>
+                  <c:v>9.18</c:v>
                 </c:pt>
                 <c:pt idx="2">
                   <c:v>8.45</c:v>
                 </c:pt>
                 <c:pt idx="3">
+                  <c:v>8.19</c:v>
+                </c:pt>
+                <c:pt idx="4">
                   <c:v>8.17</c:v>
                 </c:pt>
-                <c:pt idx="4">
-                  <c:v>7.88</c:v>
-                </c:pt>
                 <c:pt idx="5">
-                  <c:v>6.88</c:v>
+                  <c:v>6.78</c:v>
                 </c:pt>
               </c:numCache>
             </c:numRef>
@@ -566,10 +566,10 @@
               <c:numCache>
                 <c:ptCount val="3"/>
                 <c:pt idx="0">
-                  <c:v>102</c:v>
+                  <c:v>107</c:v>
                 </c:pt>
                 <c:pt idx="1">
-                  <c:v>21</c:v>
+                  <c:v>23</c:v>
                 </c:pt>
                 <c:pt idx="2">
                   <c:v>4</c:v>
@@ -809,19 +809,19 @@
                 <c:formatCode>General</c:formatCode>
                 <c:ptCount val="8"/>
                 <c:pt idx="0">
-                  <c:v>53</c:v>
+                  <c:v>55</c:v>
                 </c:pt>
                 <c:pt idx="1">
-                  <c:v>16</c:v>
+                  <c:v>17</c:v>
                 </c:pt>
                 <c:pt idx="2">
-                  <c:v>33</c:v>
+                  <c:v>35</c:v>
                 </c:pt>
                 <c:pt idx="3">
                   <c:v>8</c:v>
                 </c:pt>
                 <c:pt idx="4">
-                  <c:v>12</c:v>
+                  <c:v>14</c:v>
                 </c:pt>
                 <c:pt idx="5">
                   <c:v>1</c:v>
@@ -2781,7 +2781,7 @@
                 <a:ea typeface="Arial" pitchFamily="34" charset="-122"/>
                 <a:cs typeface="Arial" pitchFamily="34" charset="-120"/>
               </a:rPr>
-              <a:t>レビュー総数：127件（6サイト）</a:t>
+              <a:t>レビュー総数：134件（6サイト）</a:t>
             </a:r>
             <a:endParaRPr lang="en-US" sz="1000" dirty="0"/>
           </a:p>
@@ -2801,7 +2801,7 @@
                 <a:ea typeface="Arial" pitchFamily="34" charset="-122"/>
                 <a:cs typeface="Arial" pitchFamily="34" charset="-120"/>
               </a:rPr>
-              <a:t>作成日：2026年3月21日</a:t>
+              <a:t>作成日：2026年3月23日</a:t>
             </a:r>
             <a:endParaRPr lang="en-US" sz="1000" dirty="0"/>
           </a:p>
@@ -3347,7 +3347,7 @@
                           <a:ea typeface="Arial" pitchFamily="34" charset="-122"/>
                           <a:cs typeface="Arial" pitchFamily="34" charset="-120"/>
                         </a:rPr>
-                        <a:t>8.55点</a:t>
+                        <a:t>8.53点</a:t>
                       </a:r>
                       <a:endParaRPr lang="en-US" sz="1000" dirty="0">
                         <a:latin typeface="Arial" charset="0"/>
@@ -3415,7 +3415,7 @@
                           <a:ea typeface="Arial" pitchFamily="34" charset="-122"/>
                           <a:cs typeface="Arial" pitchFamily="34" charset="-120"/>
                         </a:rPr>
-                        <a:t>8.9点以上</a:t>
+                        <a:t>8.8点以上</a:t>
                       </a:r>
                       <a:endParaRPr lang="en-US" sz="1000" dirty="0">
                         <a:latin typeface="Arial" charset="0"/>
@@ -3621,7 +3621,7 @@
                           <a:ea typeface="Arial" pitchFamily="34" charset="-122"/>
                           <a:cs typeface="Arial" pitchFamily="34" charset="-120"/>
                         </a:rPr>
-                        <a:t>80.3%</a:t>
+                        <a:t>79.9%</a:t>
                       </a:r>
                       <a:endParaRPr lang="en-US" sz="1000" dirty="0">
                         <a:latin typeface="Arial" charset="0"/>
@@ -3895,7 +3895,7 @@
                           <a:ea typeface="Arial" pitchFamily="34" charset="-122"/>
                           <a:cs typeface="Arial" pitchFamily="34" charset="-120"/>
                         </a:rPr>
-                        <a:t>3.1%</a:t>
+                        <a:t>3.0%</a:t>
                       </a:r>
                       <a:endParaRPr lang="en-US" sz="1000" dirty="0">
                         <a:latin typeface="Arial" charset="0"/>
@@ -4169,7 +4169,7 @@
                           <a:ea typeface="Arial" pitchFamily="34" charset="-122"/>
                           <a:cs typeface="Arial" pitchFamily="34" charset="-120"/>
                         </a:rPr>
-                        <a:t>6.9点</a:t>
+                        <a:t>6.8点</a:t>
                       </a:r>
                       <a:endParaRPr lang="en-US" sz="1000" dirty="0">
                         <a:latin typeface="Arial" charset="0"/>
@@ -4237,7 +4237,7 @@
                           <a:ea typeface="Arial" pitchFamily="34" charset="-122"/>
                           <a:cs typeface="Arial" pitchFamily="34" charset="-120"/>
                         </a:rPr>
-                        <a:t>7.9点以上</a:t>
+                        <a:t>7.8点以上</a:t>
                       </a:r>
                       <a:endParaRPr lang="en-US" sz="1000" dirty="0">
                         <a:latin typeface="Arial" charset="0"/>
@@ -4717,7 +4717,7 @@
                           <a:ea typeface="Arial" pitchFamily="34" charset="-122"/>
                           <a:cs typeface="Arial" pitchFamily="34" charset="-120"/>
                         </a:rPr>
-                        <a:t>約14件/期間</a:t>
+                        <a:t>約16件/期間</a:t>
                       </a:r>
                       <a:endParaRPr lang="en-US" sz="1000" dirty="0">
                         <a:latin typeface="Arial" charset="0"/>
@@ -4785,7 +4785,7 @@
                           <a:ea typeface="Arial" pitchFamily="34" charset="-122"/>
                           <a:cs typeface="Arial" pitchFamily="34" charset="-120"/>
                         </a:rPr>
-                        <a:t>7件以下</a:t>
+                        <a:t>8件以下</a:t>
                       </a:r>
                       <a:endParaRPr lang="en-US" sz="1000" dirty="0">
                         <a:latin typeface="Arial" charset="0"/>
@@ -5356,7 +5356,7 @@
                 <a:ea typeface="Arial" pitchFamily="34" charset="-122"/>
                 <a:cs typeface="Arial" pitchFamily="34" charset="-120"/>
               </a:rPr>
-              <a:t>8.55</a:t>
+              <a:t>8.53</a:t>
             </a:r>
             <a:endParaRPr lang="en-US" sz="3200" dirty="0"/>
           </a:p>
@@ -5481,7 +5481,7 @@
                 <a:ea typeface="Arial" pitchFamily="34" charset="-122"/>
                 <a:cs typeface="Arial" pitchFamily="34" charset="-120"/>
               </a:rPr>
-              <a:t>80.3%</a:t>
+              <a:t>79.9%</a:t>
             </a:r>
             <a:endParaRPr lang="en-US" sz="3200" dirty="0"/>
           </a:p>
@@ -5606,7 +5606,7 @@
                 <a:ea typeface="Arial" pitchFamily="34" charset="-122"/>
                 <a:cs typeface="Arial" pitchFamily="34" charset="-120"/>
               </a:rPr>
-              <a:t>3.1%</a:t>
+              <a:t>3.0%</a:t>
             </a:r>
             <a:endParaRPr lang="en-US" sz="3200" dirty="0"/>
           </a:p>
@@ -5731,7 +5731,7 @@
                 <a:ea typeface="Arial" pitchFamily="34" charset="-122"/>
                 <a:cs typeface="Arial" pitchFamily="34" charset="-120"/>
               </a:rPr>
-              <a:t>127件</a:t>
+              <a:t>134件</a:t>
             </a:r>
             <a:endParaRPr lang="en-US" sz="3200" dirty="0"/>
           </a:p>
@@ -5879,7 +5879,47 @@
                 <a:ea typeface="Arial" pitchFamily="34" charset="-122"/>
                 <a:cs typeface="Arial" pitchFamily="34" charset="-120"/>
               </a:rPr>
-              <a:t>  駅からも近く、コンビニもすぐそばにあるため便利でした  朝食も五穀米やスープ、スムージーがおいしくていつもの朝食よ...</a:t>
+              <a:t>  The breakfast was very good with excellent coffee</a:t>
+            </a:r>
+            <a:endParaRPr lang="en-US" sz="1100" dirty="0"/>
+          </a:p>
+          <a:p>
+            <a:pPr indent="0" marL="0">
+              <a:spcAft>
+                <a:spcPts val="200"/>
+              </a:spcAft>
+              <a:buNone/>
+            </a:pPr>
+            <a:r>
+              <a:rPr lang="en-US" sz="1100" b="1" dirty="0">
+                <a:solidFill>
+                  <a:srgbClr val="334155"/>
+                </a:solidFill>
+                <a:latin typeface="Arial" pitchFamily="34" charset="0"/>
+                <a:ea typeface="Arial" pitchFamily="34" charset="-122"/>
+                <a:cs typeface="Arial" pitchFamily="34" charset="-120"/>
+              </a:rPr>
+              <a:t>スタッフの対応 </a:t>
+            </a:r>
+            <a:endParaRPr lang="en-US" sz="1100" dirty="0"/>
+          </a:p>
+          <a:p>
+            <a:pPr indent="0" marL="0">
+              <a:spcAft>
+                <a:spcPts val="200"/>
+              </a:spcAft>
+              <a:buNone/>
+            </a:pPr>
+            <a:r>
+              <a:rPr lang="en-US" sz="900" dirty="0">
+                <a:solidFill>
+                  <a:srgbClr val="64748B"/>
+                </a:solidFill>
+                <a:latin typeface="Arial" pitchFamily="34" charset="0"/>
+                <a:ea typeface="Arial" pitchFamily="34" charset="-122"/>
+                <a:cs typeface="Arial" pitchFamily="34" charset="-120"/>
+              </a:rPr>
+              <a:t>  The staff were very friendly There was no way to control ...</a:t>
             </a:r>
             <a:endParaRPr lang="en-US" sz="1100" dirty="0"/>
           </a:p>
@@ -5919,47 +5959,7 @@
                 <a:ea typeface="Arial" pitchFamily="34" charset="-122"/>
                 <a:cs typeface="Arial" pitchFamily="34" charset="-120"/>
               </a:rPr>
-              <a:t>  駅からも近く、コンビニもすぐそばにあるため便利でした  朝食も五穀米やスープ、スムージーがおいしくていつもの朝食よ...</a:t>
-            </a:r>
-            <a:endParaRPr lang="en-US" sz="1100" dirty="0"/>
-          </a:p>
-          <a:p>
-            <a:pPr indent="0" marL="0">
-              <a:spcAft>
-                <a:spcPts val="200"/>
-              </a:spcAft>
-              <a:buNone/>
-            </a:pPr>
-            <a:r>
-              <a:rPr lang="en-US" sz="1100" b="1" dirty="0">
-                <a:solidFill>
-                  <a:srgbClr val="334155"/>
-                </a:solidFill>
-                <a:latin typeface="Arial" pitchFamily="34" charset="0"/>
-                <a:ea typeface="Arial" pitchFamily="34" charset="-122"/>
-                <a:cs typeface="Arial" pitchFamily="34" charset="-120"/>
-              </a:rPr>
-              <a:t>スタッフの対応 </a:t>
-            </a:r>
-            <a:endParaRPr lang="en-US" sz="1100" dirty="0"/>
-          </a:p>
-          <a:p>
-            <a:pPr indent="0" marL="0">
-              <a:spcAft>
-                <a:spcPts val="200"/>
-              </a:spcAft>
-              <a:buNone/>
-            </a:pPr>
-            <a:r>
-              <a:rPr lang="en-US" sz="900" dirty="0">
-                <a:solidFill>
-                  <a:srgbClr val="64748B"/>
-                </a:solidFill>
-                <a:latin typeface="Arial" pitchFamily="34" charset="0"/>
-                <a:ea typeface="Arial" pitchFamily="34" charset="-122"/>
-                <a:cs typeface="Arial" pitchFamily="34" charset="-120"/>
-              </a:rPr>
-              <a:t>  チェックインも遅かったのですが、丁寧に対応頂き気分良かったです</a:t>
+              <a:t>  Location None なし</a:t>
             </a:r>
             <a:endParaRPr lang="en-US" sz="1100" dirty="0"/>
           </a:p>
@@ -6107,7 +6107,7 @@
                 <a:ea typeface="Arial" pitchFamily="34" charset="-122"/>
                 <a:cs typeface="Arial" pitchFamily="34" charset="-120"/>
               </a:rPr>
-              <a:t>  Complimentary parking ticket for parking at nearby carpar...</a:t>
+              <a:t>  異常に暑い日には、室温を調節する方法はシステムをオフにする以外になかった</a:t>
             </a:r>
             <a:endParaRPr lang="en-US" sz="1100" dirty="0"/>
           </a:p>
@@ -6540,7 +6540,7 @@
                 <a:ea typeface="Arial" pitchFamily="34" charset="-122"/>
                 <a:cs typeface="Arial" pitchFamily="34" charset="-120"/>
               </a:rPr>
-              <a:t>8.55</a:t>
+              <a:t>8.53</a:t>
             </a:r>
             <a:endParaRPr lang="en-US" sz="3200" dirty="0"/>
           </a:p>
@@ -6588,7 +6588,7 @@
             <a:avLst/>
           </a:prstGeom>
           <a:solidFill>
-            <a:srgbClr val="16A34A"/>
+            <a:srgbClr val="D4A843"/>
           </a:solidFill>
           <a:ln/>
         </p:spPr>
@@ -6659,13 +6659,13 @@
             <a:r>
               <a:rPr lang="en-US" sz="3200" b="1" dirty="0">
                 <a:solidFill>
-                  <a:srgbClr val="16A34A"/>
+                  <a:srgbClr val="D4A843"/>
                 </a:solidFill>
                 <a:latin typeface="Arial" pitchFamily="34" charset="0"/>
                 <a:ea typeface="Arial" pitchFamily="34" charset="-122"/>
                 <a:cs typeface="Arial" pitchFamily="34" charset="-120"/>
               </a:rPr>
-              <a:t>80.3%</a:t>
+              <a:t>79.9%</a:t>
             </a:r>
             <a:endParaRPr lang="en-US" sz="3200" dirty="0"/>
           </a:p>
@@ -6790,7 +6790,7 @@
                 <a:ea typeface="Arial" pitchFamily="34" charset="-122"/>
                 <a:cs typeface="Arial" pitchFamily="34" charset="-120"/>
               </a:rPr>
-              <a:t>3.1%</a:t>
+              <a:t>3.0%</a:t>
             </a:r>
             <a:endParaRPr lang="en-US" sz="3200" dirty="0"/>
           </a:p>
@@ -6915,7 +6915,7 @@
                 <a:ea typeface="Arial" pitchFamily="34" charset="-122"/>
                 <a:cs typeface="Arial" pitchFamily="34" charset="-120"/>
               </a:rPr>
-              <a:t>127件</a:t>
+              <a:t>134件</a:t>
             </a:r>
             <a:endParaRPr lang="en-US" sz="3200" dirty="0"/>
           </a:p>
@@ -7385,7 +7385,7 @@
                 <a:ea typeface="Arial" pitchFamily="34" charset="-122"/>
                 <a:cs typeface="Arial" pitchFamily="34" charset="-120"/>
               </a:rPr>
-              <a:t>Agoda(6.9)が相対的に低い。口コミ返信の強化が急務</a:t>
+              <a:t>Agoda(6.8)が相対的に低い。口コミ返信の強化が急務</a:t>
             </a:r>
             <a:endParaRPr lang="en-US" sz="1100" dirty="0"/>
           </a:p>
@@ -8304,7 +8304,7 @@
                           <a:ea typeface="Arial" pitchFamily="34" charset="-122"/>
                           <a:cs typeface="Arial" pitchFamily="34" charset="-120"/>
                         </a:rPr>
-                        <a:t>4.68</a:t>
+                        <a:t>4.59</a:t>
                       </a:r>
                       <a:endParaRPr lang="en-US" sz="900" dirty="0">
                         <a:latin typeface="Arial" charset="0"/>
@@ -8440,7 +8440,7 @@
                           <a:ea typeface="Arial" pitchFamily="34" charset="-122"/>
                           <a:cs typeface="Arial" pitchFamily="34" charset="-120"/>
                         </a:rPr>
-                        <a:t>9.36</a:t>
+                        <a:t>9.18</a:t>
                       </a:r>
                       <a:endParaRPr lang="en-US" sz="900" dirty="0">
                         <a:latin typeface="Arial" charset="0"/>
@@ -8578,7 +8578,7 @@
                           <a:ea typeface="Arial" pitchFamily="34" charset="-122"/>
                           <a:cs typeface="Arial" pitchFamily="34" charset="-120"/>
                         </a:rPr>
-                        <a:t>51</a:t>
+                        <a:t>53</a:t>
                       </a:r>
                       <a:endParaRPr lang="en-US" sz="900" dirty="0">
                         <a:latin typeface="Arial" charset="0"/>
@@ -8852,7 +8852,7 @@
                           <a:ea typeface="Arial" pitchFamily="34" charset="-122"/>
                           <a:cs typeface="Arial" pitchFamily="34" charset="-120"/>
                         </a:rPr>
-                        <a:t>じゃらん</a:t>
+                        <a:t>楽天トラベル</a:t>
                       </a:r>
                       <a:endParaRPr lang="en-US" sz="900" dirty="0">
                         <a:latin typeface="Arial" charset="0"/>
@@ -8920,7 +8920,7 @@
                           <a:ea typeface="Arial" pitchFamily="34" charset="-122"/>
                           <a:cs typeface="Arial" pitchFamily="34" charset="-120"/>
                         </a:rPr>
-                        <a:t>12</a:t>
+                        <a:t>21</a:t>
                       </a:r>
                       <a:endParaRPr lang="en-US" sz="900" dirty="0">
                         <a:latin typeface="Arial" charset="0"/>
@@ -8988,7 +8988,7 @@
                           <a:ea typeface="Arial" pitchFamily="34" charset="-122"/>
                           <a:cs typeface="Arial" pitchFamily="34" charset="-120"/>
                         </a:rPr>
-                        <a:t>4.08</a:t>
+                        <a:t>4.1</a:t>
                       </a:r>
                       <a:endParaRPr lang="en-US" sz="900" dirty="0">
                         <a:latin typeface="Arial" charset="0"/>
@@ -9124,7 +9124,7 @@
                           <a:ea typeface="Arial" pitchFamily="34" charset="-122"/>
                           <a:cs typeface="Arial" pitchFamily="34" charset="-120"/>
                         </a:rPr>
-                        <a:t>8.17</a:t>
+                        <a:t>8.19</a:t>
                       </a:r>
                       <a:endParaRPr lang="en-US" sz="900" dirty="0">
                         <a:latin typeface="Arial" charset="0"/>
@@ -9194,7 +9194,7 @@
                           <a:ea typeface="Arial" pitchFamily="34" charset="-122"/>
                           <a:cs typeface="Arial" pitchFamily="34" charset="-120"/>
                         </a:rPr>
-                        <a:t>楽天トラベル</a:t>
+                        <a:t>じゃらん</a:t>
                       </a:r>
                       <a:endParaRPr lang="en-US" sz="900" dirty="0">
                         <a:latin typeface="Arial" charset="0"/>
@@ -9262,7 +9262,7 @@
                           <a:ea typeface="Arial" pitchFamily="34" charset="-122"/>
                           <a:cs typeface="Arial" pitchFamily="34" charset="-120"/>
                         </a:rPr>
-                        <a:t>17</a:t>
+                        <a:t>12</a:t>
                       </a:r>
                       <a:endParaRPr lang="en-US" sz="900" dirty="0">
                         <a:latin typeface="Arial" charset="0"/>
@@ -9330,7 +9330,7 @@
                           <a:ea typeface="Arial" pitchFamily="34" charset="-122"/>
                           <a:cs typeface="Arial" pitchFamily="34" charset="-120"/>
                         </a:rPr>
-                        <a:t>3.94</a:t>
+                        <a:t>4.08</a:t>
                       </a:r>
                       <a:endParaRPr lang="en-US" sz="900" dirty="0">
                         <a:latin typeface="Arial" charset="0"/>
@@ -9466,7 +9466,7 @@
                           <a:ea typeface="Arial" pitchFamily="34" charset="-122"/>
                           <a:cs typeface="Arial" pitchFamily="34" charset="-120"/>
                         </a:rPr>
-                        <a:t>7.88</a:t>
+                        <a:t>8.17</a:t>
                       </a:r>
                       <a:endParaRPr lang="en-US" sz="900" dirty="0">
                         <a:latin typeface="Arial" charset="0"/>
@@ -9604,7 +9604,7 @@
                           <a:ea typeface="Arial" pitchFamily="34" charset="-122"/>
                           <a:cs typeface="Arial" pitchFamily="34" charset="-120"/>
                         </a:rPr>
-                        <a:t>8</a:t>
+                        <a:t>9</a:t>
                       </a:r>
                       <a:endParaRPr lang="en-US" sz="900" dirty="0">
                         <a:latin typeface="Arial" charset="0"/>
@@ -9672,7 +9672,7 @@
                           <a:ea typeface="Arial" pitchFamily="34" charset="-122"/>
                           <a:cs typeface="Arial" pitchFamily="34" charset="-120"/>
                         </a:rPr>
-                        <a:t>6.88</a:t>
+                        <a:t>6.78</a:t>
                       </a:r>
                       <a:endParaRPr lang="en-US" sz="900" dirty="0">
                         <a:latin typeface="Arial" charset="0"/>
@@ -9808,7 +9808,7 @@
                           <a:ea typeface="Arial" pitchFamily="34" charset="-122"/>
                           <a:cs typeface="Arial" pitchFamily="34" charset="-120"/>
                         </a:rPr>
-                        <a:t>6.88</a:t>
+                        <a:t>6.78</a:t>
                       </a:r>
                       <a:endParaRPr lang="en-US" sz="900" dirty="0">
                         <a:latin typeface="Arial" charset="0"/>
@@ -10216,7 +10216,7 @@
                 <a:ea typeface="Arial" pitchFamily="34" charset="-122"/>
                 <a:cs typeface="Arial" pitchFamily="34" charset="-120"/>
               </a:rPr>
-              <a:t>102件（80.3%）</a:t>
+              <a:t>107件（79.9%）</a:t>
             </a:r>
             <a:endParaRPr lang="en-US" sz="1100" dirty="0"/>
           </a:p>
@@ -10314,7 +10314,7 @@
                 <a:ea typeface="Arial" pitchFamily="34" charset="-122"/>
                 <a:cs typeface="Arial" pitchFamily="34" charset="-120"/>
               </a:rPr>
-              <a:t>21件（16.5%）</a:t>
+              <a:t>23件（17.2%）</a:t>
             </a:r>
             <a:endParaRPr lang="en-US" sz="1100" dirty="0"/>
           </a:p>
@@ -10412,7 +10412,7 @@
                 <a:ea typeface="Arial" pitchFamily="34" charset="-122"/>
                 <a:cs typeface="Arial" pitchFamily="34" charset="-120"/>
               </a:rPr>
-              <a:t>4件（3.1%）</a:t>
+              <a:t>4件（3.0%）</a:t>
             </a:r>
             <a:endParaRPr lang="en-US" sz="1100" dirty="0"/>
           </a:p>
@@ -10824,7 +10824,7 @@
                 <a:ea typeface="Arial" pitchFamily="34" charset="-122"/>
                 <a:cs typeface="Arial" pitchFamily="34" charset="-120"/>
               </a:rPr>
-              <a:t>駅からも近く、コンビニもすぐそばにあるため便利でした  朝食も五穀米やスープ、スムージーがおいしくていつもの朝食よ...</a:t>
+              <a:t>The breakfast was very good with excellent coffee</a:t>
             </a:r>
             <a:endParaRPr lang="en-US" sz="900" dirty="0"/>
           </a:p>
@@ -10863,7 +10863,7 @@
                 <a:ea typeface="Arial" pitchFamily="34" charset="-122"/>
                 <a:cs typeface="Arial" pitchFamily="34" charset="-120"/>
               </a:rPr>
-              <a:t>「朝食も軽食とは言えないほどボリュームありました」</a:t>
+              <a:t>「朝食の豊富な種類」</a:t>
             </a:r>
             <a:endParaRPr lang="en-US" sz="900" dirty="0"/>
           </a:p>
@@ -11008,7 +11008,7 @@
                 <a:ea typeface="Arial" pitchFamily="34" charset="-122"/>
                 <a:cs typeface="Arial" pitchFamily="34" charset="-120"/>
               </a:rPr>
-              <a:t>立地・アクセス</a:t>
+              <a:t>スタッフの対応</a:t>
             </a:r>
             <a:endParaRPr lang="en-US" sz="1300" dirty="0"/>
           </a:p>
@@ -11047,7 +11047,7 @@
                 <a:ea typeface="Arial" pitchFamily="34" charset="-122"/>
                 <a:cs typeface="Arial" pitchFamily="34" charset="-120"/>
               </a:rPr>
-              <a:t>駅からも近く、コンビニもすぐそばにあるため便利でした  朝食も五穀米やスープ、スムージーがおいしくていつもの朝食よ...</a:t>
+              <a:t>The staff were very friendly There was no way to control ...</a:t>
             </a:r>
             <a:endParaRPr lang="en-US" sz="900" dirty="0"/>
           </a:p>
@@ -11086,7 +11086,7 @@
                 <a:ea typeface="Arial" pitchFamily="34" charset="-122"/>
                 <a:cs typeface="Arial" pitchFamily="34" charset="-120"/>
               </a:rPr>
-              <a:t>「駅から近く、室内もきれいでした」</a:t>
+              <a:t>「受付時、とても親切なご案内でした」</a:t>
             </a:r>
             <a:endParaRPr lang="en-US" sz="900" dirty="0"/>
           </a:p>
@@ -11231,7 +11231,7 @@
                 <a:ea typeface="Arial" pitchFamily="34" charset="-122"/>
                 <a:cs typeface="Arial" pitchFamily="34" charset="-120"/>
               </a:rPr>
-              <a:t>スタッフの対応</a:t>
+              <a:t>立地・アクセス</a:t>
             </a:r>
             <a:endParaRPr lang="en-US" sz="1300" dirty="0"/>
           </a:p>
@@ -11270,7 +11270,7 @@
                 <a:ea typeface="Arial" pitchFamily="34" charset="-122"/>
                 <a:cs typeface="Arial" pitchFamily="34" charset="-120"/>
               </a:rPr>
-              <a:t>チェックインも遅かったのですが、丁寧に対応頂き気分良かったです</a:t>
+              <a:t>Location None なし</a:t>
             </a:r>
             <a:endParaRPr lang="en-US" sz="900" dirty="0"/>
           </a:p>
@@ -11309,7 +11309,7 @@
                 <a:ea typeface="Arial" pitchFamily="34" charset="-122"/>
                 <a:cs typeface="Arial" pitchFamily="34" charset="-120"/>
               </a:rPr>
-              <a:t>「何よりも滞在を特別なものにしてくれたのは、素晴らしいスタッフの方々でした」</a:t>
+              <a:t>「It is very conveniently located near the Keisei train sta...」</a:t>
             </a:r>
             <a:endParaRPr lang="en-US" sz="900" dirty="0"/>
           </a:p>
@@ -11493,7 +11493,7 @@
                 <a:ea typeface="Arial" pitchFamily="34" charset="-122"/>
                 <a:cs typeface="Arial" pitchFamily="34" charset="-120"/>
               </a:rPr>
-              <a:t>室内、アメニティ含めて問題ない</a:t>
+              <a:t>It is very conveniently located near the Keisei train sta...</a:t>
             </a:r>
             <a:endParaRPr lang="en-US" sz="900" dirty="0"/>
           </a:p>
@@ -11532,7 +11532,7 @@
                 <a:ea typeface="Arial" pitchFamily="34" charset="-122"/>
                 <a:cs typeface="Arial" pitchFamily="34" charset="-120"/>
               </a:rPr>
-              <a:t>「ベッドヘッドに白い汚れがたくさん付いていてすごく不快だったので改善してほしいです」</a:t>
+              <a:t>「室内、アメニティ含めて問題ない」</a:t>
             </a:r>
             <a:endParaRPr lang="en-US" sz="900" dirty="0"/>
           </a:p>
@@ -11716,7 +11716,7 @@
                 <a:ea typeface="Arial" pitchFamily="34" charset="-122"/>
                 <a:cs typeface="Arial" pitchFamily="34" charset="-120"/>
               </a:rPr>
-              <a:t>駅から近く、室内もきれいでした</a:t>
+              <a:t>It is very conveniently located near the Keisei train sta...</a:t>
             </a:r>
             <a:endParaRPr lang="en-US" sz="900" dirty="0"/>
           </a:p>
@@ -11755,7 +11755,7 @@
                 <a:ea typeface="Arial" pitchFamily="34" charset="-122"/>
                 <a:cs typeface="Arial" pitchFamily="34" charset="-120"/>
               </a:rPr>
-              <a:t>「清潔さ：部屋は隅々まで清潔で、手入れが行き届いていました」</a:t>
+              <a:t>「駅から近く、室内もきれいでした」</a:t>
             </a:r>
             <a:endParaRPr lang="en-US" sz="900" dirty="0"/>
           </a:p>
@@ -12668,7 +12668,7 @@
                           <a:ea typeface="Arial" pitchFamily="34" charset="-122"/>
                           <a:cs typeface="Arial" pitchFamily="34" charset="-120"/>
                         </a:rPr>
-                        <a:t>Complimentary parking ticket for parking at nearby carpar...</a:t>
+                        <a:t>異常に暑い日には、室温を調節する方法はシステムをオフにする以外になかった</a:t>
                       </a:r>
                       <a:endParaRPr lang="en-US" sz="900" dirty="0">
                         <a:latin typeface="Arial" charset="0"/>
@@ -12736,7 +12736,7 @@
                           <a:ea typeface="Arial" pitchFamily="34" charset="-122"/>
                           <a:cs typeface="Arial" pitchFamily="34" charset="-120"/>
                         </a:rPr>
-                        <a:t>14件</a:t>
+                        <a:t>16件</a:t>
                       </a:r>
                       <a:endParaRPr lang="en-US" sz="900" dirty="0">
                         <a:latin typeface="Arial" charset="0"/>
@@ -14860,7 +14860,7 @@
                           <a:ea typeface="Arial" pitchFamily="34" charset="-122"/>
                           <a:cs typeface="Arial" pitchFamily="34" charset="-120"/>
                         </a:rPr>
-                        <a:t>部屋が明るくきれいだった</a:t>
+                        <a:t>スタッフの皆さんが、明るく、丁寧にもてなしてくださり、朝食も素晴らしく、安心して滞在できました</a:t>
                       </a:r>
                       <a:endParaRPr lang="en-US" sz="900" dirty="0">
                         <a:latin typeface="Arial" charset="0"/>
@@ -14928,7 +14928,7 @@
                           <a:ea typeface="Arial" pitchFamily="34" charset="-122"/>
                           <a:cs typeface="Arial" pitchFamily="34" charset="-120"/>
                         </a:rPr>
-                        <a:t>1件</a:t>
+                        <a:t>2件</a:t>
                       </a:r>
                       <a:endParaRPr lang="en-US" sz="900" dirty="0">
                         <a:latin typeface="Arial" charset="0"/>

--- a/納品レポート/ホテル別レポート/comfort_narita_口コミ分析レポート.pptx
+++ b/納品レポート/ホテル別レポート/comfort_narita_口コミ分析レポート.pptx
@@ -211,16 +211,16 @@
                   <c:v>9.53</c:v>
                 </c:pt>
                 <c:pt idx="1">
-                  <c:v>9.18</c:v>
+                  <c:v>9</c:v>
                 </c:pt>
                 <c:pt idx="2">
-                  <c:v>8.45</c:v>
+                  <c:v>8.44</c:v>
                 </c:pt>
                 <c:pt idx="3">
                   <c:v>8.19</c:v>
                 </c:pt>
                 <c:pt idx="4">
-                  <c:v>8.17</c:v>
+                  <c:v>8.18</c:v>
                 </c:pt>
                 <c:pt idx="5">
                   <c:v>6.78</c:v>
@@ -566,10 +566,10 @@
               <c:numCache>
                 <c:ptCount val="3"/>
                 <c:pt idx="0">
-                  <c:v>107</c:v>
+                  <c:v>106</c:v>
                 </c:pt>
                 <c:pt idx="1">
-                  <c:v>23</c:v>
+                  <c:v>24</c:v>
                 </c:pt>
                 <c:pt idx="2">
                   <c:v>4</c:v>
@@ -809,7 +809,7 @@
                 <c:formatCode>General</c:formatCode>
                 <c:ptCount val="8"/>
                 <c:pt idx="0">
-                  <c:v>55</c:v>
+                  <c:v>54</c:v>
                 </c:pt>
                 <c:pt idx="1">
                   <c:v>17</c:v>
@@ -821,7 +821,7 @@
                   <c:v>8</c:v>
                 </c:pt>
                 <c:pt idx="4">
-                  <c:v>14</c:v>
+                  <c:v>15</c:v>
                 </c:pt>
                 <c:pt idx="5">
                   <c:v>1</c:v>
@@ -2801,7 +2801,7 @@
                 <a:ea typeface="Arial" pitchFamily="34" charset="-122"/>
                 <a:cs typeface="Arial" pitchFamily="34" charset="-120"/>
               </a:rPr>
-              <a:t>作成日：2026年3月23日</a:t>
+              <a:t>作成日：2026年3月24日</a:t>
             </a:r>
             <a:endParaRPr lang="en-US" sz="1000" dirty="0"/>
           </a:p>
@@ -3347,7 +3347,7 @@
                           <a:ea typeface="Arial" pitchFamily="34" charset="-122"/>
                           <a:cs typeface="Arial" pitchFamily="34" charset="-120"/>
                         </a:rPr>
-                        <a:t>8.53点</a:t>
+                        <a:t>8.50点</a:t>
                       </a:r>
                       <a:endParaRPr lang="en-US" sz="1000" dirty="0">
                         <a:latin typeface="Arial" charset="0"/>
@@ -3621,7 +3621,7 @@
                           <a:ea typeface="Arial" pitchFamily="34" charset="-122"/>
                           <a:cs typeface="Arial" pitchFamily="34" charset="-120"/>
                         </a:rPr>
-                        <a:t>79.9%</a:t>
+                        <a:t>79.1%</a:t>
                       </a:r>
                       <a:endParaRPr lang="en-US" sz="1000" dirty="0">
                         <a:latin typeface="Arial" charset="0"/>
@@ -3689,7 +3689,7 @@
                           <a:ea typeface="Arial" pitchFamily="34" charset="-122"/>
                           <a:cs typeface="Arial" pitchFamily="34" charset="-120"/>
                         </a:rPr>
-                        <a:t>85%以上</a:t>
+                        <a:t>84%以上</a:t>
                       </a:r>
                       <a:endParaRPr lang="en-US" sz="1000" dirty="0">
                         <a:latin typeface="Arial" charset="0"/>
@@ -4717,7 +4717,7 @@
                           <a:ea typeface="Arial" pitchFamily="34" charset="-122"/>
                           <a:cs typeface="Arial" pitchFamily="34" charset="-120"/>
                         </a:rPr>
-                        <a:t>約16件/期間</a:t>
+                        <a:t>約17件/期間</a:t>
                       </a:r>
                       <a:endParaRPr lang="en-US" sz="1000" dirty="0">
                         <a:latin typeface="Arial" charset="0"/>
@@ -5356,7 +5356,7 @@
                 <a:ea typeface="Arial" pitchFamily="34" charset="-122"/>
                 <a:cs typeface="Arial" pitchFamily="34" charset="-120"/>
               </a:rPr>
-              <a:t>8.53</a:t>
+              <a:t>8.50</a:t>
             </a:r>
             <a:endParaRPr lang="en-US" sz="3200" dirty="0"/>
           </a:p>
@@ -5481,7 +5481,7 @@
                 <a:ea typeface="Arial" pitchFamily="34" charset="-122"/>
                 <a:cs typeface="Arial" pitchFamily="34" charset="-120"/>
               </a:rPr>
-              <a:t>79.9%</a:t>
+              <a:t>79.1%</a:t>
             </a:r>
             <a:endParaRPr lang="en-US" sz="3200" dirty="0"/>
           </a:p>
@@ -5879,7 +5879,7 @@
                 <a:ea typeface="Arial" pitchFamily="34" charset="-122"/>
                 <a:cs typeface="Arial" pitchFamily="34" charset="-120"/>
               </a:rPr>
-              <a:t>  The breakfast was very good with excellent coffee</a:t>
+              <a:t>  空調電源を切ってるのに 奥でずっと音がしていて寝れない 朝ごはんは美味しい 駅の近くで立地は良いです 空調電源を切...</a:t>
             </a:r>
             <a:endParaRPr lang="en-US" sz="1100" dirty="0"/>
           </a:p>
@@ -5959,7 +5959,7 @@
                 <a:ea typeface="Arial" pitchFamily="34" charset="-122"/>
                 <a:cs typeface="Arial" pitchFamily="34" charset="-120"/>
               </a:rPr>
-              <a:t>  Location None なし</a:t>
+              <a:t>  空調電源を切ってるのに 奥でずっと音がしていて寝れない 朝ごはんは美味しい 駅の近くで立地は良いです 空調電源を切...</a:t>
             </a:r>
             <a:endParaRPr lang="en-US" sz="1100" dirty="0"/>
           </a:p>
@@ -6107,7 +6107,7 @@
                 <a:ea typeface="Arial" pitchFamily="34" charset="-122"/>
                 <a:cs typeface="Arial" pitchFamily="34" charset="-120"/>
               </a:rPr>
-              <a:t>  異常に暑い日には、室温を調節する方法はシステムをオフにする以外になかった</a:t>
+              <a:t>  空調電源を切ってるのに 奥でずっと音がしていて寝れない 朝ごはんは美味しい 駅の近くで立地は良いです 空調電源を切...</a:t>
             </a:r>
             <a:endParaRPr lang="en-US" sz="1100" dirty="0"/>
           </a:p>
@@ -6167,7 +6167,7 @@
                 <a:ea typeface="Arial" pitchFamily="34" charset="-122"/>
                 <a:cs typeface="Arial" pitchFamily="34" charset="-120"/>
               </a:rPr>
-              <a:t>部屋の狭さ </a:t>
+              <a:t>臭い・匂い </a:t>
             </a:r>
             <a:endParaRPr lang="en-US" sz="1100" dirty="0"/>
           </a:p>
@@ -6187,7 +6187,7 @@
                 <a:ea typeface="Arial" pitchFamily="34" charset="-122"/>
                 <a:cs typeface="Arial" pitchFamily="34" charset="-120"/>
               </a:rPr>
-              <a:t>  Very good location,  nice staff, Too small, bathroom entr...</a:t>
+              <a:t>  部屋の方はリニューアル後の為、綺麗でタバコの臭いもなく広さも充分</a:t>
             </a:r>
             <a:endParaRPr lang="en-US" sz="1100" dirty="0"/>
           </a:p>
@@ -6540,7 +6540,7 @@
                 <a:ea typeface="Arial" pitchFamily="34" charset="-122"/>
                 <a:cs typeface="Arial" pitchFamily="34" charset="-120"/>
               </a:rPr>
-              <a:t>8.53</a:t>
+              <a:t>8.50</a:t>
             </a:r>
             <a:endParaRPr lang="en-US" sz="3200" dirty="0"/>
           </a:p>
@@ -6665,7 +6665,7 @@
                 <a:ea typeface="Arial" pitchFamily="34" charset="-122"/>
                 <a:cs typeface="Arial" pitchFamily="34" charset="-120"/>
               </a:rPr>
-              <a:t>79.9%</a:t>
+              <a:t>79.1%</a:t>
             </a:r>
             <a:endParaRPr lang="en-US" sz="3200" dirty="0"/>
           </a:p>
@@ -8304,7 +8304,7 @@
                           <a:ea typeface="Arial" pitchFamily="34" charset="-122"/>
                           <a:cs typeface="Arial" pitchFamily="34" charset="-120"/>
                         </a:rPr>
-                        <a:t>4.59</a:t>
+                        <a:t>4.5</a:t>
                       </a:r>
                       <a:endParaRPr lang="en-US" sz="900" dirty="0">
                         <a:latin typeface="Arial" charset="0"/>
@@ -8440,7 +8440,7 @@
                           <a:ea typeface="Arial" pitchFamily="34" charset="-122"/>
                           <a:cs typeface="Arial" pitchFamily="34" charset="-120"/>
                         </a:rPr>
-                        <a:t>9.18</a:t>
+                        <a:t>9</a:t>
                       </a:r>
                       <a:endParaRPr lang="en-US" sz="900" dirty="0">
                         <a:latin typeface="Arial" charset="0"/>
@@ -8578,7 +8578,7 @@
                           <a:ea typeface="Arial" pitchFamily="34" charset="-122"/>
                           <a:cs typeface="Arial" pitchFamily="34" charset="-120"/>
                         </a:rPr>
-                        <a:t>53</a:t>
+                        <a:t>54</a:t>
                       </a:r>
                       <a:endParaRPr lang="en-US" sz="900" dirty="0">
                         <a:latin typeface="Arial" charset="0"/>
@@ -8646,7 +8646,7 @@
                           <a:ea typeface="Arial" pitchFamily="34" charset="-122"/>
                           <a:cs typeface="Arial" pitchFamily="34" charset="-120"/>
                         </a:rPr>
-                        <a:t>8.45</a:t>
+                        <a:t>8.44</a:t>
                       </a:r>
                       <a:endParaRPr lang="en-US" sz="900" dirty="0">
                         <a:latin typeface="Arial" charset="0"/>
@@ -8782,7 +8782,7 @@
                           <a:ea typeface="Arial" pitchFamily="34" charset="-122"/>
                           <a:cs typeface="Arial" pitchFamily="34" charset="-120"/>
                         </a:rPr>
-                        <a:t>8.45</a:t>
+                        <a:t>8.44</a:t>
                       </a:r>
                       <a:endParaRPr lang="en-US" sz="900" dirty="0">
                         <a:latin typeface="Arial" charset="0"/>
@@ -9262,7 +9262,7 @@
                           <a:ea typeface="Arial" pitchFamily="34" charset="-122"/>
                           <a:cs typeface="Arial" pitchFamily="34" charset="-120"/>
                         </a:rPr>
-                        <a:t>12</a:t>
+                        <a:t>11</a:t>
                       </a:r>
                       <a:endParaRPr lang="en-US" sz="900" dirty="0">
                         <a:latin typeface="Arial" charset="0"/>
@@ -9330,7 +9330,7 @@
                           <a:ea typeface="Arial" pitchFamily="34" charset="-122"/>
                           <a:cs typeface="Arial" pitchFamily="34" charset="-120"/>
                         </a:rPr>
-                        <a:t>4.08</a:t>
+                        <a:t>4.09</a:t>
                       </a:r>
                       <a:endParaRPr lang="en-US" sz="900" dirty="0">
                         <a:latin typeface="Arial" charset="0"/>
@@ -9466,7 +9466,7 @@
                           <a:ea typeface="Arial" pitchFamily="34" charset="-122"/>
                           <a:cs typeface="Arial" pitchFamily="34" charset="-120"/>
                         </a:rPr>
-                        <a:t>8.17</a:t>
+                        <a:t>8.18</a:t>
                       </a:r>
                       <a:endParaRPr lang="en-US" sz="900" dirty="0">
                         <a:latin typeface="Arial" charset="0"/>
@@ -10216,7 +10216,7 @@
                 <a:ea typeface="Arial" pitchFamily="34" charset="-122"/>
                 <a:cs typeface="Arial" pitchFamily="34" charset="-120"/>
               </a:rPr>
-              <a:t>107件（79.9%）</a:t>
+              <a:t>106件（79.1%）</a:t>
             </a:r>
             <a:endParaRPr lang="en-US" sz="1100" dirty="0"/>
           </a:p>
@@ -10314,7 +10314,7 @@
                 <a:ea typeface="Arial" pitchFamily="34" charset="-122"/>
                 <a:cs typeface="Arial" pitchFamily="34" charset="-120"/>
               </a:rPr>
-              <a:t>23件（17.2%）</a:t>
+              <a:t>24件（17.9%）</a:t>
             </a:r>
             <a:endParaRPr lang="en-US" sz="1100" dirty="0"/>
           </a:p>
@@ -10824,7 +10824,7 @@
                 <a:ea typeface="Arial" pitchFamily="34" charset="-122"/>
                 <a:cs typeface="Arial" pitchFamily="34" charset="-120"/>
               </a:rPr>
-              <a:t>The breakfast was very good with excellent coffee</a:t>
+              <a:t>空調電源を切ってるのに 奥でずっと音がしていて寝れない 朝ごはんは美味しい 駅の近くで立地は良いです 空調電源を切...</a:t>
             </a:r>
             <a:endParaRPr lang="en-US" sz="900" dirty="0"/>
           </a:p>
@@ -10863,7 +10863,7 @@
                 <a:ea typeface="Arial" pitchFamily="34" charset="-122"/>
                 <a:cs typeface="Arial" pitchFamily="34" charset="-120"/>
               </a:rPr>
-              <a:t>「朝食の豊富な種類」</a:t>
+              <a:t>「The breakfast was very good with excellent coffee」</a:t>
             </a:r>
             <a:endParaRPr lang="en-US" sz="900" dirty="0"/>
           </a:p>
@@ -11086,7 +11086,7 @@
                 <a:ea typeface="Arial" pitchFamily="34" charset="-122"/>
                 <a:cs typeface="Arial" pitchFamily="34" charset="-120"/>
               </a:rPr>
-              <a:t>「受付時、とても親切なご案内でした」</a:t>
+              <a:t>「またフロントに然り、朝食会場に然り、ホテルマンの方々が、本当に働いているなというくらい、挨拶と動きが良いです」</a:t>
             </a:r>
             <a:endParaRPr lang="en-US" sz="900" dirty="0"/>
           </a:p>
@@ -11270,7 +11270,7 @@
                 <a:ea typeface="Arial" pitchFamily="34" charset="-122"/>
                 <a:cs typeface="Arial" pitchFamily="34" charset="-120"/>
               </a:rPr>
-              <a:t>Location None なし</a:t>
+              <a:t>空調電源を切ってるのに 奥でずっと音がしていて寝れない 朝ごはんは美味しい 駅の近くで立地は良いです 空調電源を切...</a:t>
             </a:r>
             <a:endParaRPr lang="en-US" sz="900" dirty="0"/>
           </a:p>
@@ -11309,7 +11309,7 @@
                 <a:ea typeface="Arial" pitchFamily="34" charset="-122"/>
                 <a:cs typeface="Arial" pitchFamily="34" charset="-120"/>
               </a:rPr>
-              <a:t>「It is very conveniently located near the Keisei train sta...」</a:t>
+              <a:t>「Location None なし」</a:t>
             </a:r>
             <a:endParaRPr lang="en-US" sz="900" dirty="0"/>
           </a:p>
@@ -12668,7 +12668,7 @@
                           <a:ea typeface="Arial" pitchFamily="34" charset="-122"/>
                           <a:cs typeface="Arial" pitchFamily="34" charset="-120"/>
                         </a:rPr>
-                        <a:t>異常に暑い日には、室温を調節する方法はシステムをオフにする以外になかった</a:t>
+                        <a:t>空調電源を切ってるのに 奥でずっと音がしていて寝れない 朝ごはんは美味しい 駅の近くで立地は良いです 空調電源を切...</a:t>
                       </a:r>
                       <a:endParaRPr lang="en-US" sz="900" dirty="0">
                         <a:latin typeface="Arial" charset="0"/>
@@ -12736,7 +12736,7 @@
                           <a:ea typeface="Arial" pitchFamily="34" charset="-122"/>
                           <a:cs typeface="Arial" pitchFamily="34" charset="-120"/>
                         </a:rPr>
-                        <a:t>16件</a:t>
+                        <a:t>17件</a:t>
                       </a:r>
                       <a:endParaRPr lang="en-US" sz="900" dirty="0">
                         <a:latin typeface="Arial" charset="0"/>
@@ -13148,7 +13148,7 @@
                           <a:ea typeface="Arial" pitchFamily="34" charset="-122"/>
                           <a:cs typeface="Arial" pitchFamily="34" charset="-120"/>
                         </a:rPr>
-                        <a:t>部屋の狭さ</a:t>
+                        <a:t>臭い・匂い</a:t>
                       </a:r>
                       <a:endParaRPr lang="en-US" sz="900" dirty="0">
                         <a:latin typeface="Arial" charset="0"/>
@@ -13216,7 +13216,7 @@
                           <a:ea typeface="Arial" pitchFamily="34" charset="-122"/>
                           <a:cs typeface="Arial" pitchFamily="34" charset="-120"/>
                         </a:rPr>
-                        <a:t>Very good location,  nice staff, Too small, bathroom entr...</a:t>
+                        <a:t>部屋の方はリニューアル後の為、綺麗でタバコの臭いもなく広さも充分</a:t>
                       </a:r>
                       <a:endParaRPr lang="en-US" sz="900" dirty="0">
                         <a:latin typeface="Arial" charset="0"/>
@@ -13422,7 +13422,7 @@
                           <a:ea typeface="Arial" pitchFamily="34" charset="-122"/>
                           <a:cs typeface="Arial" pitchFamily="34" charset="-120"/>
                         </a:rPr>
-                        <a:t>臭い・匂い</a:t>
+                        <a:t>清掃不備</a:t>
                       </a:r>
                       <a:endParaRPr lang="en-US" sz="900" dirty="0">
                         <a:latin typeface="Arial" charset="0"/>
@@ -13490,7 +13490,7 @@
                           <a:ea typeface="Arial" pitchFamily="34" charset="-122"/>
                           <a:cs typeface="Arial" pitchFamily="34" charset="-120"/>
                         </a:rPr>
-                        <a:t>部屋の方はリニューアル後の為、綺麗でタバコの臭いもなく広さも充分</a:t>
+                        <a:t>ベッドヘッドに白い汚れがたくさん付いていてすごく不快だったので改善してほしいです</a:t>
                       </a:r>
                       <a:endParaRPr lang="en-US" sz="900" dirty="0">
                         <a:latin typeface="Arial" charset="0"/>
@@ -13558,7 +13558,7 @@
                           <a:ea typeface="Arial" pitchFamily="34" charset="-122"/>
                           <a:cs typeface="Arial" pitchFamily="34" charset="-120"/>
                         </a:rPr>
-                        <a:t>5件</a:t>
+                        <a:t>4件</a:t>
                       </a:r>
                       <a:endParaRPr lang="en-US" sz="900" dirty="0">
                         <a:latin typeface="Arial" charset="0"/>
@@ -13696,7 +13696,7 @@
                           <a:ea typeface="Arial" pitchFamily="34" charset="-122"/>
                           <a:cs typeface="Arial" pitchFamily="34" charset="-120"/>
                         </a:rPr>
-                        <a:t>清掃不備</a:t>
+                        <a:t>部屋の狭さ</a:t>
                       </a:r>
                       <a:endParaRPr lang="en-US" sz="900" dirty="0">
                         <a:latin typeface="Arial" charset="0"/>
@@ -13764,7 +13764,7 @@
                           <a:ea typeface="Arial" pitchFamily="34" charset="-122"/>
                           <a:cs typeface="Arial" pitchFamily="34" charset="-120"/>
                         </a:rPr>
-                        <a:t>ベッドヘッドに白い汚れがたくさん付いていてすごく不快だったので改善してほしいです</a:t>
+                        <a:t>Very good location,  nice staff, Too small, bathroom entr...</a:t>
                       </a:r>
                       <a:endParaRPr lang="en-US" sz="900" dirty="0">
                         <a:latin typeface="Arial" charset="0"/>
@@ -13832,7 +13832,7 @@
                           <a:ea typeface="Arial" pitchFamily="34" charset="-122"/>
                           <a:cs typeface="Arial" pitchFamily="34" charset="-120"/>
                         </a:rPr>
-                        <a:t>4件</a:t>
+                        <a:t>3件</a:t>
                       </a:r>
                       <a:endParaRPr lang="en-US" sz="900" dirty="0">
                         <a:latin typeface="Arial" charset="0"/>
@@ -16543,6 +16543,130 @@
                 <a:ea typeface="Arial" pitchFamily="34" charset="-122"/>
                 <a:cs typeface="Arial" pitchFamily="34" charset="-120"/>
               </a:rPr>
+              <a:t>防音対策の強化</a:t>
+            </a:r>
+            <a:endParaRPr lang="en-US" sz="1000" dirty="0"/>
+          </a:p>
+        </p:txBody>
+      </p:sp>
+      <p:sp>
+        <p:nvSpPr>
+          <p:cNvPr id="11" name="Text 9"/>
+          <p:cNvSpPr/>
+          <p:nvPr/>
+        </p:nvSpPr>
+        <p:spPr>
+          <a:xfrm>
+            <a:off x="640080" y="2761488"/>
+            <a:ext cx="3474720" cy="694944"/>
+          </a:xfrm>
+          <a:prstGeom prst="rect">
+            <a:avLst/>
+          </a:prstGeom>
+          <a:noFill/>
+          <a:ln/>
+        </p:spPr>
+        <p:txBody>
+          <a:bodyPr wrap="square" lIns="0" tIns="0" rIns="0" bIns="0" rtlCol="0" anchor="ctr"/>
+          <a:lstStyle/>
+          <a:p>
+            <a:pPr marL="342900" indent="-342900">
+              <a:spcAft>
+                <a:spcPts val="200"/>
+              </a:spcAft>
+              <a:buSzPct val="100000"/>
+              <a:buChar char="•"/>
+            </a:pPr>
+            <a:r>
+              <a:rPr lang="en-US" sz="900" dirty="0">
+                <a:solidFill>
+                  <a:srgbClr val="64748B"/>
+                </a:solidFill>
+                <a:latin typeface="Arial" pitchFamily="34" charset="0"/>
+                <a:ea typeface="Arial" pitchFamily="34" charset="-122"/>
+                <a:cs typeface="Arial" pitchFamily="34" charset="-120"/>
+              </a:rPr>
+              <a:t>窓際への防音カーテン導入（外部騒音対策）</a:t>
+            </a:r>
+            <a:endParaRPr lang="en-US" sz="900" dirty="0"/>
+          </a:p>
+          <a:p>
+            <a:pPr marL="342900" indent="-342900">
+              <a:spcAft>
+                <a:spcPts val="200"/>
+              </a:spcAft>
+              <a:buSzPct val="100000"/>
+              <a:buChar char="•"/>
+            </a:pPr>
+            <a:r>
+              <a:rPr lang="en-US" sz="900" dirty="0">
+                <a:solidFill>
+                  <a:srgbClr val="64748B"/>
+                </a:solidFill>
+                <a:latin typeface="Arial" pitchFamily="34" charset="0"/>
+                <a:ea typeface="Arial" pitchFamily="34" charset="-122"/>
+                <a:cs typeface="Arial" pitchFamily="34" charset="-120"/>
+              </a:rPr>
+              <a:t>ドア下部への隙間テープ設置（廊下・隣室からの音漏れ軽減）</a:t>
+            </a:r>
+            <a:endParaRPr lang="en-US" sz="900" dirty="0"/>
+          </a:p>
+          <a:p>
+            <a:pPr marL="342900" indent="-342900">
+              <a:spcAft>
+                <a:spcPts val="200"/>
+              </a:spcAft>
+              <a:buSzPct val="100000"/>
+              <a:buChar char="•"/>
+            </a:pPr>
+            <a:r>
+              <a:rPr lang="en-US" sz="900" dirty="0">
+                <a:solidFill>
+                  <a:srgbClr val="64748B"/>
+                </a:solidFill>
+                <a:latin typeface="Arial" pitchFamily="34" charset="0"/>
+                <a:ea typeface="Arial" pitchFamily="34" charset="-122"/>
+                <a:cs typeface="Arial" pitchFamily="34" charset="-120"/>
+              </a:rPr>
+              <a:t>騒音の少ない客室への優先案内の仕組み化</a:t>
+            </a:r>
+            <a:endParaRPr lang="en-US" sz="900" dirty="0"/>
+          </a:p>
+        </p:txBody>
+      </p:sp>
+      <p:sp>
+        <p:nvSpPr>
+          <p:cNvPr id="12" name="Text 10"/>
+          <p:cNvSpPr/>
+          <p:nvPr/>
+        </p:nvSpPr>
+        <p:spPr>
+          <a:xfrm>
+            <a:off x="640080" y="3547872"/>
+            <a:ext cx="3474720" cy="274320"/>
+          </a:xfrm>
+          <a:prstGeom prst="rect">
+            <a:avLst/>
+          </a:prstGeom>
+          <a:noFill/>
+          <a:ln/>
+        </p:spPr>
+        <p:txBody>
+          <a:bodyPr wrap="square" lIns="0" tIns="0" rIns="0" bIns="0" rtlCol="0" anchor="ctr"/>
+          <a:lstStyle/>
+          <a:p>
+            <a:pPr indent="0" marL="0">
+              <a:buNone/>
+            </a:pPr>
+            <a:r>
+              <a:rPr lang="en-US" sz="1000" b="1" dirty="0">
+                <a:solidFill>
+                  <a:srgbClr val="1A2744"/>
+                </a:solidFill>
+                <a:latin typeface="Arial" pitchFamily="34" charset="0"/>
+                <a:ea typeface="Arial" pitchFamily="34" charset="-122"/>
+                <a:cs typeface="Arial" pitchFamily="34" charset="-120"/>
+              </a:rPr>
               <a:t>窓・採光環境の改善</a:t>
             </a:r>
             <a:endParaRPr lang="en-US" sz="1000" dirty="0"/>
@@ -16551,13 +16675,13 @@
       </p:sp>
       <p:sp>
         <p:nvSpPr>
-          <p:cNvPr id="11" name="Text 9"/>
-          <p:cNvSpPr/>
-          <p:nvPr/>
-        </p:nvSpPr>
-        <p:spPr>
-          <a:xfrm>
-            <a:off x="640080" y="2761488"/>
+          <p:cNvPr id="13" name="Text 11"/>
+          <p:cNvSpPr/>
+          <p:nvPr/>
+        </p:nvSpPr>
+        <p:spPr>
+          <a:xfrm>
+            <a:off x="640080" y="3803904"/>
             <a:ext cx="3474720" cy="694944"/>
           </a:xfrm>
           <a:prstGeom prst="rect">
@@ -16636,109 +16760,6 @@
       </p:sp>
       <p:sp>
         <p:nvSpPr>
-          <p:cNvPr id="12" name="Text 10"/>
-          <p:cNvSpPr/>
-          <p:nvPr/>
-        </p:nvSpPr>
-        <p:spPr>
-          <a:xfrm>
-            <a:off x="640080" y="3547872"/>
-            <a:ext cx="3474720" cy="274320"/>
-          </a:xfrm>
-          <a:prstGeom prst="rect">
-            <a:avLst/>
-          </a:prstGeom>
-          <a:noFill/>
-          <a:ln/>
-        </p:spPr>
-        <p:txBody>
-          <a:bodyPr wrap="square" lIns="0" tIns="0" rIns="0" bIns="0" rtlCol="0" anchor="ctr"/>
-          <a:lstStyle/>
-          <a:p>
-            <a:pPr indent="0" marL="0">
-              <a:buNone/>
-            </a:pPr>
-            <a:r>
-              <a:rPr lang="en-US" sz="1000" b="1" dirty="0">
-                <a:solidFill>
-                  <a:srgbClr val="1A2744"/>
-                </a:solidFill>
-                <a:latin typeface="Arial" pitchFamily="34" charset="0"/>
-                <a:ea typeface="Arial" pitchFamily="34" charset="-122"/>
-                <a:cs typeface="Arial" pitchFamily="34" charset="-120"/>
-              </a:rPr>
-              <a:t>口コミ返信体制の構築</a:t>
-            </a:r>
-            <a:endParaRPr lang="en-US" sz="1000" dirty="0"/>
-          </a:p>
-        </p:txBody>
-      </p:sp>
-      <p:sp>
-        <p:nvSpPr>
-          <p:cNvPr id="13" name="Text 11"/>
-          <p:cNvSpPr/>
-          <p:nvPr/>
-        </p:nvSpPr>
-        <p:spPr>
-          <a:xfrm>
-            <a:off x="640080" y="3803904"/>
-            <a:ext cx="3474720" cy="493776"/>
-          </a:xfrm>
-          <a:prstGeom prst="rect">
-            <a:avLst/>
-          </a:prstGeom>
-          <a:noFill/>
-          <a:ln/>
-        </p:spPr>
-        <p:txBody>
-          <a:bodyPr wrap="square" lIns="0" tIns="0" rIns="0" bIns="0" rtlCol="0" anchor="ctr"/>
-          <a:lstStyle/>
-          <a:p>
-            <a:pPr marL="342900" indent="-342900">
-              <a:spcAft>
-                <a:spcPts val="200"/>
-              </a:spcAft>
-              <a:buSzPct val="100000"/>
-              <a:buChar char="•"/>
-            </a:pPr>
-            <a:r>
-              <a:rPr lang="en-US" sz="900" dirty="0">
-                <a:solidFill>
-                  <a:srgbClr val="64748B"/>
-                </a:solidFill>
-                <a:latin typeface="Arial" pitchFamily="34" charset="0"/>
-                <a:ea typeface="Arial" pitchFamily="34" charset="-122"/>
-                <a:cs typeface="Arial" pitchFamily="34" charset="-120"/>
-              </a:rPr>
-              <a:t>全サイトの口コミに48時間以内の返信を目標に設定</a:t>
-            </a:r>
-            <a:endParaRPr lang="en-US" sz="900" dirty="0"/>
-          </a:p>
-          <a:p>
-            <a:pPr marL="342900" indent="-342900">
-              <a:spcAft>
-                <a:spcPts val="200"/>
-              </a:spcAft>
-              <a:buSzPct val="100000"/>
-              <a:buChar char="•"/>
-            </a:pPr>
-            <a:r>
-              <a:rPr lang="en-US" sz="900" dirty="0">
-                <a:solidFill>
-                  <a:srgbClr val="64748B"/>
-                </a:solidFill>
-                <a:latin typeface="Arial" pitchFamily="34" charset="0"/>
-                <a:ea typeface="Arial" pitchFamily="34" charset="-122"/>
-                <a:cs typeface="Arial" pitchFamily="34" charset="-120"/>
-              </a:rPr>
-              <a:t>特に低評価レビューへのフォローアップ強化</a:t>
-            </a:r>
-            <a:endParaRPr lang="en-US" sz="900" dirty="0"/>
-          </a:p>
-        </p:txBody>
-      </p:sp>
-      <p:sp>
-        <p:nvSpPr>
           <p:cNvPr id="14" name="Shape 12"/>
           <p:cNvSpPr/>
           <p:nvPr/>
@@ -17083,7 +17104,7 @@
                 <a:ea typeface="Arial" pitchFamily="34" charset="-122"/>
                 <a:cs typeface="Arial" pitchFamily="34" charset="-120"/>
               </a:rPr>
-              <a:t>客室レイアウトの見直し</a:t>
+              <a:t>防音工事</a:t>
             </a:r>
             <a:endParaRPr lang="en-US" sz="1000" dirty="0"/>
           </a:p>
@@ -17098,7 +17119,7 @@
         <p:spPr>
           <a:xfrm>
             <a:off x="4892040" y="3602736"/>
-            <a:ext cx="3474720" cy="694944"/>
+            <a:ext cx="3474720" cy="493776"/>
           </a:xfrm>
           <a:prstGeom prst="rect">
             <a:avLst/>
@@ -17126,7 +17147,7 @@
                 <a:ea typeface="Arial" pitchFamily="34" charset="-122"/>
                 <a:cs typeface="Arial" pitchFamily="34" charset="-120"/>
               </a:rPr>
-              <a:t>家具配置の最適化による体感スペースの拡大</a:t>
+              <a:t>騒音源側客室の窓を二重サッシに交換</a:t>
             </a:r>
             <a:endParaRPr lang="en-US" sz="900" dirty="0"/>
           </a:p>
@@ -17147,28 +17168,7 @@
                 <a:ea typeface="Arial" pitchFamily="34" charset="-122"/>
                 <a:cs typeface="Arial" pitchFamily="34" charset="-120"/>
               </a:rPr>
-              <a:t>コンパクト家具への入替検討</a:t>
-            </a:r>
-            <a:endParaRPr lang="en-US" sz="900" dirty="0"/>
-          </a:p>
-          <a:p>
-            <a:pPr marL="342900" indent="-342900">
-              <a:spcAft>
-                <a:spcPts val="200"/>
-              </a:spcAft>
-              <a:buSzPct val="100000"/>
-              <a:buChar char="•"/>
-            </a:pPr>
-            <a:r>
-              <a:rPr lang="en-US" sz="900" dirty="0">
-                <a:solidFill>
-                  <a:srgbClr val="64748B"/>
-                </a:solidFill>
-                <a:latin typeface="Arial" pitchFamily="34" charset="0"/>
-                <a:ea typeface="Arial" pitchFamily="34" charset="-122"/>
-                <a:cs typeface="Arial" pitchFamily="34" charset="-120"/>
-              </a:rPr>
-              <a:t>収納スペースの効率化</a:t>
+              <a:t>隣室との壁面に遮音材を追加する改修工事の検討</a:t>
             </a:r>
             <a:endParaRPr lang="en-US" sz="900" dirty="0"/>
           </a:p>

--- a/納品レポート/ホテル別レポート/comfort_narita_口コミ分析レポート.pptx
+++ b/納品レポート/ホテル別レポート/comfort_narita_口コミ分析レポート.pptx
@@ -208,16 +208,16 @@
                 <c:formatCode>General</c:formatCode>
                 <c:ptCount val="6"/>
                 <c:pt idx="0">
-                  <c:v>9.53</c:v>
+                  <c:v>9.56</c:v>
                 </c:pt>
                 <c:pt idx="1">
-                  <c:v>9</c:v>
+                  <c:v>9.1</c:v>
                 </c:pt>
                 <c:pt idx="2">
                   <c:v>8.44</c:v>
                 </c:pt>
                 <c:pt idx="3">
-                  <c:v>8.19</c:v>
+                  <c:v>8.27</c:v>
                 </c:pt>
                 <c:pt idx="4">
                   <c:v>8.18</c:v>
@@ -566,10 +566,10 @@
               <c:numCache>
                 <c:ptCount val="3"/>
                 <c:pt idx="0">
-                  <c:v>106</c:v>
+                  <c:v>107</c:v>
                 </c:pt>
                 <c:pt idx="1">
-                  <c:v>24</c:v>
+                  <c:v>23</c:v>
                 </c:pt>
                 <c:pt idx="2">
                   <c:v>4</c:v>
@@ -809,7 +809,7 @@
                 <c:formatCode>General</c:formatCode>
                 <c:ptCount val="8"/>
                 <c:pt idx="0">
-                  <c:v>54</c:v>
+                  <c:v>55</c:v>
                 </c:pt>
                 <c:pt idx="1">
                   <c:v>17</c:v>
@@ -821,7 +821,7 @@
                   <c:v>8</c:v>
                 </c:pt>
                 <c:pt idx="4">
-                  <c:v>15</c:v>
+                  <c:v>14</c:v>
                 </c:pt>
                 <c:pt idx="5">
                   <c:v>1</c:v>
@@ -2801,7 +2801,7 @@
                 <a:ea typeface="Arial" pitchFamily="34" charset="-122"/>
                 <a:cs typeface="Arial" pitchFamily="34" charset="-120"/>
               </a:rPr>
-              <a:t>作成日：2026年3月24日</a:t>
+              <a:t>作成日：2026年3月25日</a:t>
             </a:r>
             <a:endParaRPr lang="en-US" sz="1000" dirty="0"/>
           </a:p>
@@ -3347,7 +3347,7 @@
                           <a:ea typeface="Arial" pitchFamily="34" charset="-122"/>
                           <a:cs typeface="Arial" pitchFamily="34" charset="-120"/>
                         </a:rPr>
-                        <a:t>8.50点</a:t>
+                        <a:t>8.53点</a:t>
                       </a:r>
                       <a:endParaRPr lang="en-US" sz="1000" dirty="0">
                         <a:latin typeface="Arial" charset="0"/>
@@ -3621,7 +3621,7 @@
                           <a:ea typeface="Arial" pitchFamily="34" charset="-122"/>
                           <a:cs typeface="Arial" pitchFamily="34" charset="-120"/>
                         </a:rPr>
-                        <a:t>79.1%</a:t>
+                        <a:t>79.9%</a:t>
                       </a:r>
                       <a:endParaRPr lang="en-US" sz="1000" dirty="0">
                         <a:latin typeface="Arial" charset="0"/>
@@ -3689,7 +3689,7 @@
                           <a:ea typeface="Arial" pitchFamily="34" charset="-122"/>
                           <a:cs typeface="Arial" pitchFamily="34" charset="-120"/>
                         </a:rPr>
-                        <a:t>84%以上</a:t>
+                        <a:t>85%以上</a:t>
                       </a:r>
                       <a:endParaRPr lang="en-US" sz="1000" dirty="0">
                         <a:latin typeface="Arial" charset="0"/>
@@ -5356,7 +5356,7 @@
                 <a:ea typeface="Arial" pitchFamily="34" charset="-122"/>
                 <a:cs typeface="Arial" pitchFamily="34" charset="-120"/>
               </a:rPr>
-              <a:t>8.50</a:t>
+              <a:t>8.53</a:t>
             </a:r>
             <a:endParaRPr lang="en-US" sz="3200" dirty="0"/>
           </a:p>
@@ -5481,7 +5481,7 @@
                 <a:ea typeface="Arial" pitchFamily="34" charset="-122"/>
                 <a:cs typeface="Arial" pitchFamily="34" charset="-120"/>
               </a:rPr>
-              <a:t>79.1%</a:t>
+              <a:t>79.9%</a:t>
             </a:r>
             <a:endParaRPr lang="en-US" sz="3200" dirty="0"/>
           </a:p>
@@ -5879,7 +5879,47 @@
                 <a:ea typeface="Arial" pitchFamily="34" charset="-122"/>
                 <a:cs typeface="Arial" pitchFamily="34" charset="-120"/>
               </a:rPr>
-              <a:t>  空調電源を切ってるのに 奥でずっと音がしていて寝れない 朝ごはんは美味しい 駅の近くで立地は良いです 空調電源を切...</a:t>
+              <a:t>  無料の朝食バイキングおいしかったです</a:t>
+            </a:r>
+            <a:endParaRPr lang="en-US" sz="1100" dirty="0"/>
+          </a:p>
+          <a:p>
+            <a:pPr indent="0" marL="0">
+              <a:spcAft>
+                <a:spcPts val="200"/>
+              </a:spcAft>
+              <a:buNone/>
+            </a:pPr>
+            <a:r>
+              <a:rPr lang="en-US" sz="1100" b="1" dirty="0">
+                <a:solidFill>
+                  <a:srgbClr val="334155"/>
+                </a:solidFill>
+                <a:latin typeface="Arial" pitchFamily="34" charset="0"/>
+                <a:ea typeface="Arial" pitchFamily="34" charset="-122"/>
+                <a:cs typeface="Arial" pitchFamily="34" charset="-120"/>
+              </a:rPr>
+              <a:t>立地・アクセス </a:t>
+            </a:r>
+            <a:endParaRPr lang="en-US" sz="1100" dirty="0"/>
+          </a:p>
+          <a:p>
+            <a:pPr indent="0" marL="0">
+              <a:spcAft>
+                <a:spcPts val="200"/>
+              </a:spcAft>
+              <a:buNone/>
+            </a:pPr>
+            <a:r>
+              <a:rPr lang="en-US" sz="900" dirty="0">
+                <a:solidFill>
+                  <a:srgbClr val="64748B"/>
+                </a:solidFill>
+                <a:latin typeface="Arial" pitchFamily="34" charset="0"/>
+                <a:ea typeface="Arial" pitchFamily="34" charset="-122"/>
+                <a:cs typeface="Arial" pitchFamily="34" charset="-120"/>
+              </a:rPr>
+              <a:t>  โลเคชั่นดี สะดวกมาก ห้องสะอาดดี เดินทางไปเที่ยวได้สะดวกดี...</a:t>
             </a:r>
             <a:endParaRPr lang="en-US" sz="1100" dirty="0"/>
           </a:p>
@@ -5923,6 +5963,114 @@
             </a:r>
             <a:endParaRPr lang="en-US" sz="1100" dirty="0"/>
           </a:p>
+        </p:txBody>
+      </p:sp>
+      <p:sp>
+        <p:nvSpPr>
+          <p:cNvPr id="25" name="Shape 23"/>
+          <p:cNvSpPr/>
+          <p:nvPr/>
+        </p:nvSpPr>
+        <p:spPr>
+          <a:xfrm>
+            <a:off x="4754880" y="2286000"/>
+            <a:ext cx="3931920" cy="2286000"/>
+          </a:xfrm>
+          <a:prstGeom prst="rect">
+            <a:avLst/>
+          </a:prstGeom>
+          <a:solidFill>
+            <a:srgbClr val="FFFFFF"/>
+          </a:solidFill>
+          <a:ln/>
+          <a:effectLst>
+            <a:outerShdw sx="100000" sy="100000" kx="0" ky="0" algn="bl" rotWithShape="0" blurRad="50800" dist="25400" dir="8100000">
+              <a:srgbClr val="000000">
+                <a:alpha val="10000"/>
+              </a:srgbClr>
+            </a:outerShdw>
+          </a:effectLst>
+        </p:spPr>
+      </p:sp>
+      <p:sp>
+        <p:nvSpPr>
+          <p:cNvPr id="26" name="Shape 24"/>
+          <p:cNvSpPr/>
+          <p:nvPr/>
+        </p:nvSpPr>
+        <p:spPr>
+          <a:xfrm>
+            <a:off x="4754880" y="2286000"/>
+            <a:ext cx="3931920" cy="45720"/>
+          </a:xfrm>
+          <a:prstGeom prst="rect">
+            <a:avLst/>
+          </a:prstGeom>
+          <a:solidFill>
+            <a:srgbClr val="DC2626"/>
+          </a:solidFill>
+          <a:ln/>
+        </p:spPr>
+      </p:sp>
+      <p:sp>
+        <p:nvSpPr>
+          <p:cNvPr id="27" name="Text 25"/>
+          <p:cNvSpPr/>
+          <p:nvPr/>
+        </p:nvSpPr>
+        <p:spPr>
+          <a:xfrm>
+            <a:off x="4937760" y="2377440"/>
+            <a:ext cx="2743200" cy="320040"/>
+          </a:xfrm>
+          <a:prstGeom prst="rect">
+            <a:avLst/>
+          </a:prstGeom>
+          <a:noFill/>
+          <a:ln/>
+        </p:spPr>
+        <p:txBody>
+          <a:bodyPr wrap="square" lIns="0" tIns="0" rIns="0" bIns="0" rtlCol="0" anchor="ctr"/>
+          <a:lstStyle/>
+          <a:p>
+            <a:pPr indent="0" marL="0">
+              <a:buNone/>
+            </a:pPr>
+            <a:r>
+              <a:rPr lang="en-US" sz="1400" b="1" dirty="0">
+                <a:solidFill>
+                  <a:srgbClr val="DC2626"/>
+                </a:solidFill>
+                <a:latin typeface="Arial" pitchFamily="34" charset="0"/>
+                <a:ea typeface="Arial" pitchFamily="34" charset="-122"/>
+                <a:cs typeface="Arial" pitchFamily="34" charset="-120"/>
+              </a:rPr>
+              <a:t>Weaknesses</a:t>
+            </a:r>
+            <a:endParaRPr lang="en-US" sz="1400" dirty="0"/>
+          </a:p>
+        </p:txBody>
+      </p:sp>
+      <p:sp>
+        <p:nvSpPr>
+          <p:cNvPr id="28" name="Text 26"/>
+          <p:cNvSpPr/>
+          <p:nvPr/>
+        </p:nvSpPr>
+        <p:spPr>
+          <a:xfrm>
+            <a:off x="4937760" y="2743200"/>
+            <a:ext cx="3474720" cy="1645920"/>
+          </a:xfrm>
+          <a:prstGeom prst="rect">
+            <a:avLst/>
+          </a:prstGeom>
+          <a:noFill/>
+          <a:ln/>
+        </p:spPr>
+        <p:txBody>
+          <a:bodyPr wrap="square" lIns="0" tIns="0" rIns="0" bIns="0" rtlCol="0" anchor="ctr"/>
+          <a:lstStyle/>
           <a:p>
             <a:pPr indent="0" marL="0">
               <a:spcAft>
@@ -5939,7 +6087,7 @@
                 <a:ea typeface="Arial" pitchFamily="34" charset="-122"/>
                 <a:cs typeface="Arial" pitchFamily="34" charset="-120"/>
               </a:rPr>
-              <a:t>立地・アクセス </a:t>
+              <a:t>エアコン・空調 </a:t>
             </a:r>
             <a:endParaRPr lang="en-US" sz="1100" dirty="0"/>
           </a:p>
@@ -5963,154 +6111,6 @@
             </a:r>
             <a:endParaRPr lang="en-US" sz="1100" dirty="0"/>
           </a:p>
-        </p:txBody>
-      </p:sp>
-      <p:sp>
-        <p:nvSpPr>
-          <p:cNvPr id="25" name="Shape 23"/>
-          <p:cNvSpPr/>
-          <p:nvPr/>
-        </p:nvSpPr>
-        <p:spPr>
-          <a:xfrm>
-            <a:off x="4754880" y="2286000"/>
-            <a:ext cx="3931920" cy="2286000"/>
-          </a:xfrm>
-          <a:prstGeom prst="rect">
-            <a:avLst/>
-          </a:prstGeom>
-          <a:solidFill>
-            <a:srgbClr val="FFFFFF"/>
-          </a:solidFill>
-          <a:ln/>
-          <a:effectLst>
-            <a:outerShdw sx="100000" sy="100000" kx="0" ky="0" algn="bl" rotWithShape="0" blurRad="50800" dist="25400" dir="8100000">
-              <a:srgbClr val="000000">
-                <a:alpha val="10000"/>
-              </a:srgbClr>
-            </a:outerShdw>
-          </a:effectLst>
-        </p:spPr>
-      </p:sp>
-      <p:sp>
-        <p:nvSpPr>
-          <p:cNvPr id="26" name="Shape 24"/>
-          <p:cNvSpPr/>
-          <p:nvPr/>
-        </p:nvSpPr>
-        <p:spPr>
-          <a:xfrm>
-            <a:off x="4754880" y="2286000"/>
-            <a:ext cx="3931920" cy="45720"/>
-          </a:xfrm>
-          <a:prstGeom prst="rect">
-            <a:avLst/>
-          </a:prstGeom>
-          <a:solidFill>
-            <a:srgbClr val="DC2626"/>
-          </a:solidFill>
-          <a:ln/>
-        </p:spPr>
-      </p:sp>
-      <p:sp>
-        <p:nvSpPr>
-          <p:cNvPr id="27" name="Text 25"/>
-          <p:cNvSpPr/>
-          <p:nvPr/>
-        </p:nvSpPr>
-        <p:spPr>
-          <a:xfrm>
-            <a:off x="4937760" y="2377440"/>
-            <a:ext cx="2743200" cy="320040"/>
-          </a:xfrm>
-          <a:prstGeom prst="rect">
-            <a:avLst/>
-          </a:prstGeom>
-          <a:noFill/>
-          <a:ln/>
-        </p:spPr>
-        <p:txBody>
-          <a:bodyPr wrap="square" lIns="0" tIns="0" rIns="0" bIns="0" rtlCol="0" anchor="ctr"/>
-          <a:lstStyle/>
-          <a:p>
-            <a:pPr indent="0" marL="0">
-              <a:buNone/>
-            </a:pPr>
-            <a:r>
-              <a:rPr lang="en-US" sz="1400" b="1" dirty="0">
-                <a:solidFill>
-                  <a:srgbClr val="DC2626"/>
-                </a:solidFill>
-                <a:latin typeface="Arial" pitchFamily="34" charset="0"/>
-                <a:ea typeface="Arial" pitchFamily="34" charset="-122"/>
-                <a:cs typeface="Arial" pitchFamily="34" charset="-120"/>
-              </a:rPr>
-              <a:t>Weaknesses</a:t>
-            </a:r>
-            <a:endParaRPr lang="en-US" sz="1400" dirty="0"/>
-          </a:p>
-        </p:txBody>
-      </p:sp>
-      <p:sp>
-        <p:nvSpPr>
-          <p:cNvPr id="28" name="Text 26"/>
-          <p:cNvSpPr/>
-          <p:nvPr/>
-        </p:nvSpPr>
-        <p:spPr>
-          <a:xfrm>
-            <a:off x="4937760" y="2743200"/>
-            <a:ext cx="3474720" cy="1645920"/>
-          </a:xfrm>
-          <a:prstGeom prst="rect">
-            <a:avLst/>
-          </a:prstGeom>
-          <a:noFill/>
-          <a:ln/>
-        </p:spPr>
-        <p:txBody>
-          <a:bodyPr wrap="square" lIns="0" tIns="0" rIns="0" bIns="0" rtlCol="0" anchor="ctr"/>
-          <a:lstStyle/>
-          <a:p>
-            <a:pPr indent="0" marL="0">
-              <a:spcAft>
-                <a:spcPts val="200"/>
-              </a:spcAft>
-              <a:buNone/>
-            </a:pPr>
-            <a:r>
-              <a:rPr lang="en-US" sz="1100" b="1" dirty="0">
-                <a:solidFill>
-                  <a:srgbClr val="334155"/>
-                </a:solidFill>
-                <a:latin typeface="Arial" pitchFamily="34" charset="0"/>
-                <a:ea typeface="Arial" pitchFamily="34" charset="-122"/>
-                <a:cs typeface="Arial" pitchFamily="34" charset="-120"/>
-              </a:rPr>
-              <a:t>エアコン・空調 </a:t>
-            </a:r>
-            <a:endParaRPr lang="en-US" sz="1100" dirty="0"/>
-          </a:p>
-          <a:p>
-            <a:pPr indent="0" marL="0">
-              <a:spcAft>
-                <a:spcPts val="200"/>
-              </a:spcAft>
-              <a:buNone/>
-            </a:pPr>
-            <a:r>
-              <a:rPr lang="en-US" sz="900" dirty="0">
-                <a:solidFill>
-                  <a:srgbClr val="64748B"/>
-                </a:solidFill>
-                <a:latin typeface="Arial" pitchFamily="34" charset="0"/>
-                <a:ea typeface="Arial" pitchFamily="34" charset="-122"/>
-                <a:cs typeface="Arial" pitchFamily="34" charset="-120"/>
-              </a:rPr>
-              <a:t>  空調電源を切ってるのに 奥でずっと音がしていて寝れない 朝ごはんは美味しい 駅の近くで立地は良いです 空調電源を切...</a:t>
-            </a:r>
-            <a:endParaRPr lang="en-US" sz="1100" dirty="0"/>
-          </a:p>
           <a:p>
             <a:pPr indent="0" marL="0">
               <a:spcAft>
@@ -6147,7 +6147,7 @@
                 <a:ea typeface="Arial" pitchFamily="34" charset="-122"/>
                 <a:cs typeface="Arial" pitchFamily="34" charset="-120"/>
               </a:rPr>
-              <a:t>  Very good location,  nice staff, Too small, bathroom entr...</a:t>
+              <a:t>  部屋は特に問題もなく水回りも清掃がいきとどいてよかったです</a:t>
             </a:r>
             <a:endParaRPr lang="en-US" sz="1100" dirty="0"/>
           </a:p>
@@ -6540,7 +6540,7 @@
                 <a:ea typeface="Arial" pitchFamily="34" charset="-122"/>
                 <a:cs typeface="Arial" pitchFamily="34" charset="-120"/>
               </a:rPr>
-              <a:t>8.50</a:t>
+              <a:t>8.53</a:t>
             </a:r>
             <a:endParaRPr lang="en-US" sz="3200" dirty="0"/>
           </a:p>
@@ -6665,7 +6665,7 @@
                 <a:ea typeface="Arial" pitchFamily="34" charset="-122"/>
                 <a:cs typeface="Arial" pitchFamily="34" charset="-120"/>
               </a:rPr>
-              <a:t>79.1%</a:t>
+              <a:t>79.9%</a:t>
             </a:r>
             <a:endParaRPr lang="en-US" sz="3200" dirty="0"/>
           </a:p>
@@ -7336,7 +7336,7 @@
                 <a:ea typeface="Arial" pitchFamily="34" charset="-122"/>
                 <a:cs typeface="Arial" pitchFamily="34" charset="-120"/>
               </a:rPr>
-              <a:t>Trip.com(9.53)が最高スコア。</a:t>
+              <a:t>Trip.com(9.56)が最高スコア。</a:t>
             </a:r>
             <a:endParaRPr lang="en-US" sz="1100" dirty="0"/>
           </a:p>
@@ -7894,7 +7894,7 @@
                           <a:ea typeface="Arial" pitchFamily="34" charset="-122"/>
                           <a:cs typeface="Arial" pitchFamily="34" charset="-120"/>
                         </a:rPr>
-                        <a:t>17</a:t>
+                        <a:t>18</a:t>
                       </a:r>
                       <a:endParaRPr lang="en-US" sz="900" dirty="0">
                         <a:latin typeface="Arial" charset="0"/>
@@ -7962,7 +7962,7 @@
                           <a:ea typeface="Arial" pitchFamily="34" charset="-122"/>
                           <a:cs typeface="Arial" pitchFamily="34" charset="-120"/>
                         </a:rPr>
-                        <a:t>9.53</a:t>
+                        <a:t>9.56</a:t>
                       </a:r>
                       <a:endParaRPr lang="en-US" sz="900" dirty="0">
                         <a:latin typeface="Arial" charset="0"/>
@@ -8098,7 +8098,7 @@
                           <a:ea typeface="Arial" pitchFamily="34" charset="-122"/>
                           <a:cs typeface="Arial" pitchFamily="34" charset="-120"/>
                         </a:rPr>
-                        <a:t>9.53</a:t>
+                        <a:t>9.56</a:t>
                       </a:r>
                       <a:endParaRPr lang="en-US" sz="900" dirty="0">
                         <a:latin typeface="Arial" charset="0"/>
@@ -8236,7 +8236,7 @@
                           <a:ea typeface="Arial" pitchFamily="34" charset="-122"/>
                           <a:cs typeface="Arial" pitchFamily="34" charset="-120"/>
                         </a:rPr>
-                        <a:t>22</a:t>
+                        <a:t>20</a:t>
                       </a:r>
                       <a:endParaRPr lang="en-US" sz="900" dirty="0">
                         <a:latin typeface="Arial" charset="0"/>
@@ -8304,7 +8304,7 @@
                           <a:ea typeface="Arial" pitchFamily="34" charset="-122"/>
                           <a:cs typeface="Arial" pitchFamily="34" charset="-120"/>
                         </a:rPr>
-                        <a:t>4.5</a:t>
+                        <a:t>4.55</a:t>
                       </a:r>
                       <a:endParaRPr lang="en-US" sz="900" dirty="0">
                         <a:latin typeface="Arial" charset="0"/>
@@ -8440,7 +8440,7 @@
                           <a:ea typeface="Arial" pitchFamily="34" charset="-122"/>
                           <a:cs typeface="Arial" pitchFamily="34" charset="-120"/>
                         </a:rPr>
-                        <a:t>9</a:t>
+                        <a:t>9.1</a:t>
                       </a:r>
                       <a:endParaRPr lang="en-US" sz="900" dirty="0">
                         <a:latin typeface="Arial" charset="0"/>
@@ -8920,7 +8920,7 @@
                           <a:ea typeface="Arial" pitchFamily="34" charset="-122"/>
                           <a:cs typeface="Arial" pitchFamily="34" charset="-120"/>
                         </a:rPr>
-                        <a:t>21</a:t>
+                        <a:t>22</a:t>
                       </a:r>
                       <a:endParaRPr lang="en-US" sz="900" dirty="0">
                         <a:latin typeface="Arial" charset="0"/>
@@ -8988,7 +8988,7 @@
                           <a:ea typeface="Arial" pitchFamily="34" charset="-122"/>
                           <a:cs typeface="Arial" pitchFamily="34" charset="-120"/>
                         </a:rPr>
-                        <a:t>4.1</a:t>
+                        <a:t>4.14</a:t>
                       </a:r>
                       <a:endParaRPr lang="en-US" sz="900" dirty="0">
                         <a:latin typeface="Arial" charset="0"/>
@@ -9124,7 +9124,7 @@
                           <a:ea typeface="Arial" pitchFamily="34" charset="-122"/>
                           <a:cs typeface="Arial" pitchFamily="34" charset="-120"/>
                         </a:rPr>
-                        <a:t>8.19</a:t>
+                        <a:t>8.27</a:t>
                       </a:r>
                       <a:endParaRPr lang="en-US" sz="900" dirty="0">
                         <a:latin typeface="Arial" charset="0"/>
@@ -10216,7 +10216,7 @@
                 <a:ea typeface="Arial" pitchFamily="34" charset="-122"/>
                 <a:cs typeface="Arial" pitchFamily="34" charset="-120"/>
               </a:rPr>
-              <a:t>106件（79.1%）</a:t>
+              <a:t>107件（79.9%）</a:t>
             </a:r>
             <a:endParaRPr lang="en-US" sz="1100" dirty="0"/>
           </a:p>
@@ -10314,7 +10314,7 @@
                 <a:ea typeface="Arial" pitchFamily="34" charset="-122"/>
                 <a:cs typeface="Arial" pitchFamily="34" charset="-120"/>
               </a:rPr>
-              <a:t>24件（17.9%）</a:t>
+              <a:t>23件（17.2%）</a:t>
             </a:r>
             <a:endParaRPr lang="en-US" sz="1100" dirty="0"/>
           </a:p>
@@ -10824,7 +10824,7 @@
                 <a:ea typeface="Arial" pitchFamily="34" charset="-122"/>
                 <a:cs typeface="Arial" pitchFamily="34" charset="-120"/>
               </a:rPr>
-              <a:t>空調電源を切ってるのに 奥でずっと音がしていて寝れない 朝ごはんは美味しい 駅の近くで立地は良いです 空調電源を切...</a:t>
+              <a:t>無料の朝食バイキングおいしかったです</a:t>
             </a:r>
             <a:endParaRPr lang="en-US" sz="900" dirty="0"/>
           </a:p>
@@ -10863,7 +10863,7 @@
                 <a:ea typeface="Arial" pitchFamily="34" charset="-122"/>
                 <a:cs typeface="Arial" pitchFamily="34" charset="-120"/>
               </a:rPr>
-              <a:t>「The breakfast was very good with excellent coffee」</a:t>
+              <a:t>「空調電源を切ってるのに 奥でずっと音がしていて寝れない 朝ごはんは美味しい 駅の近くで立地は良いです 空調電源を切...」</a:t>
             </a:r>
             <a:endParaRPr lang="en-US" sz="900" dirty="0"/>
           </a:p>
@@ -11008,6 +11008,229 @@
                 <a:ea typeface="Arial" pitchFamily="34" charset="-122"/>
                 <a:cs typeface="Arial" pitchFamily="34" charset="-120"/>
               </a:rPr>
+              <a:t>立地・アクセス</a:t>
+            </a:r>
+            <a:endParaRPr lang="en-US" sz="1300" dirty="0"/>
+          </a:p>
+        </p:txBody>
+      </p:sp>
+      <p:sp>
+        <p:nvSpPr>
+          <p:cNvPr id="17" name="Text 15"/>
+          <p:cNvSpPr/>
+          <p:nvPr/>
+        </p:nvSpPr>
+        <p:spPr>
+          <a:xfrm>
+            <a:off x="3429000" y="1417320"/>
+            <a:ext cx="2377440" cy="365760"/>
+          </a:xfrm>
+          <a:prstGeom prst="rect">
+            <a:avLst/>
+          </a:prstGeom>
+          <a:noFill/>
+          <a:ln/>
+        </p:spPr>
+        <p:txBody>
+          <a:bodyPr wrap="square" lIns="0" tIns="0" rIns="0" bIns="0" rtlCol="0" anchor="ctr"/>
+          <a:lstStyle/>
+          <a:p>
+            <a:pPr indent="0" marL="0">
+              <a:buNone/>
+            </a:pPr>
+            <a:r>
+              <a:rPr lang="en-US" sz="900" dirty="0">
+                <a:solidFill>
+                  <a:srgbClr val="64748B"/>
+                </a:solidFill>
+                <a:latin typeface="Arial" pitchFamily="34" charset="0"/>
+                <a:ea typeface="Arial" pitchFamily="34" charset="-122"/>
+                <a:cs typeface="Arial" pitchFamily="34" charset="-120"/>
+              </a:rPr>
+              <a:t>โลเคชั่นดี สะดวกมาก ห้องสะอาดดี เดินทางไปเที่ยวได้สะดวกดี...</a:t>
+            </a:r>
+            <a:endParaRPr lang="en-US" sz="900" dirty="0"/>
+          </a:p>
+        </p:txBody>
+      </p:sp>
+      <p:sp>
+        <p:nvSpPr>
+          <p:cNvPr id="18" name="Text 16"/>
+          <p:cNvSpPr/>
+          <p:nvPr/>
+        </p:nvSpPr>
+        <p:spPr>
+          <a:xfrm>
+            <a:off x="3429000" y="1828800"/>
+            <a:ext cx="2377440" cy="640080"/>
+          </a:xfrm>
+          <a:prstGeom prst="rect">
+            <a:avLst/>
+          </a:prstGeom>
+          <a:noFill/>
+          <a:ln/>
+        </p:spPr>
+        <p:txBody>
+          <a:bodyPr wrap="square" lIns="0" tIns="0" rIns="0" bIns="0" rtlCol="0" anchor="ctr"/>
+          <a:lstStyle/>
+          <a:p>
+            <a:pPr indent="0" marL="0">
+              <a:buNone/>
+            </a:pPr>
+            <a:r>
+              <a:rPr lang="en-US" sz="900" i="1" dirty="0">
+                <a:solidFill>
+                  <a:srgbClr val="3B7DD8"/>
+                </a:solidFill>
+                <a:latin typeface="Arial" pitchFamily="34" charset="0"/>
+                <a:ea typeface="Arial" pitchFamily="34" charset="-122"/>
+                <a:cs typeface="Arial" pitchFamily="34" charset="-120"/>
+              </a:rPr>
+              <a:t>「空調電源を切ってるのに 奥でずっと音がしていて寝れない 朝ごはんは美味しい 駅の近くで立地は良いです 空調電源を切...」</a:t>
+            </a:r>
+            <a:endParaRPr lang="en-US" sz="900" dirty="0"/>
+          </a:p>
+        </p:txBody>
+      </p:sp>
+      <p:sp>
+        <p:nvSpPr>
+          <p:cNvPr id="19" name="Shape 17"/>
+          <p:cNvSpPr/>
+          <p:nvPr/>
+        </p:nvSpPr>
+        <p:spPr>
+          <a:xfrm>
+            <a:off x="6126480" y="1051560"/>
+            <a:ext cx="2651760" cy="1600200"/>
+          </a:xfrm>
+          <a:prstGeom prst="rect">
+            <a:avLst/>
+          </a:prstGeom>
+          <a:solidFill>
+            <a:srgbClr val="FFFFFF"/>
+          </a:solidFill>
+          <a:ln/>
+          <a:effectLst>
+            <a:outerShdw sx="100000" sy="100000" kx="0" ky="0" algn="bl" rotWithShape="0" blurRad="50800" dist="25400" dir="8100000">
+              <a:srgbClr val="000000">
+                <a:alpha val="10000"/>
+              </a:srgbClr>
+            </a:outerShdw>
+          </a:effectLst>
+        </p:spPr>
+      </p:sp>
+      <p:sp>
+        <p:nvSpPr>
+          <p:cNvPr id="20" name="Shape 18"/>
+          <p:cNvSpPr/>
+          <p:nvPr/>
+        </p:nvSpPr>
+        <p:spPr>
+          <a:xfrm>
+            <a:off x="6126480" y="1051560"/>
+            <a:ext cx="54864" cy="1600200"/>
+          </a:xfrm>
+          <a:prstGeom prst="rect">
+            <a:avLst/>
+          </a:prstGeom>
+          <a:solidFill>
+            <a:srgbClr val="16A34A"/>
+          </a:solidFill>
+          <a:ln/>
+        </p:spPr>
+      </p:sp>
+      <p:sp>
+        <p:nvSpPr>
+          <p:cNvPr id="21" name="Shape 19"/>
+          <p:cNvSpPr/>
+          <p:nvPr/>
+        </p:nvSpPr>
+        <p:spPr>
+          <a:xfrm>
+            <a:off x="7955280" y="1124712"/>
+            <a:ext cx="658368" cy="228600"/>
+          </a:xfrm>
+          <a:prstGeom prst="rect">
+            <a:avLst/>
+          </a:prstGeom>
+          <a:solidFill>
+            <a:srgbClr val="DCFCE7"/>
+          </a:solidFill>
+          <a:ln/>
+        </p:spPr>
+      </p:sp>
+      <p:sp>
+        <p:nvSpPr>
+          <p:cNvPr id="22" name="Text 20"/>
+          <p:cNvSpPr/>
+          <p:nvPr/>
+        </p:nvSpPr>
+        <p:spPr>
+          <a:xfrm>
+            <a:off x="7955280" y="1124712"/>
+            <a:ext cx="658368" cy="228600"/>
+          </a:xfrm>
+          <a:prstGeom prst="rect">
+            <a:avLst/>
+          </a:prstGeom>
+          <a:noFill/>
+          <a:ln/>
+        </p:spPr>
+        <p:txBody>
+          <a:bodyPr wrap="square" lIns="0" tIns="0" rIns="0" bIns="0" rtlCol="0" anchor="ctr"/>
+          <a:lstStyle/>
+          <a:p>
+            <a:pPr algn="ctr" indent="0" marL="0">
+              <a:buNone/>
+            </a:pPr>
+            <a:r>
+              <a:rPr lang="en-US" sz="900" b="1" dirty="0">
+                <a:solidFill>
+                  <a:srgbClr val="16A34A"/>
+                </a:solidFill>
+                <a:latin typeface="Arial" pitchFamily="34" charset="0"/>
+                <a:ea typeface="Arial" pitchFamily="34" charset="-122"/>
+                <a:cs typeface="Arial" pitchFamily="34" charset="-120"/>
+              </a:rPr>
+              <a:t>20件+</a:t>
+            </a:r>
+            <a:endParaRPr lang="en-US" sz="900" dirty="0"/>
+          </a:p>
+        </p:txBody>
+      </p:sp>
+      <p:sp>
+        <p:nvSpPr>
+          <p:cNvPr id="23" name="Text 21"/>
+          <p:cNvSpPr/>
+          <p:nvPr/>
+        </p:nvSpPr>
+        <p:spPr>
+          <a:xfrm>
+            <a:off x="6263640" y="1124712"/>
+            <a:ext cx="1645920" cy="274320"/>
+          </a:xfrm>
+          <a:prstGeom prst="rect">
+            <a:avLst/>
+          </a:prstGeom>
+          <a:noFill/>
+          <a:ln/>
+        </p:spPr>
+        <p:txBody>
+          <a:bodyPr wrap="square" lIns="0" tIns="0" rIns="0" bIns="0" rtlCol="0" anchor="ctr"/>
+          <a:lstStyle/>
+          <a:p>
+            <a:pPr indent="0" marL="0">
+              <a:buNone/>
+            </a:pPr>
+            <a:r>
+              <a:rPr lang="en-US" sz="1300" b="1" dirty="0">
+                <a:solidFill>
+                  <a:srgbClr val="1A2744"/>
+                </a:solidFill>
+                <a:latin typeface="Arial" pitchFamily="34" charset="0"/>
+                <a:ea typeface="Arial" pitchFamily="34" charset="-122"/>
+                <a:cs typeface="Arial" pitchFamily="34" charset="-120"/>
+              </a:rPr>
               <a:t>スタッフの対応</a:t>
             </a:r>
             <a:endParaRPr lang="en-US" sz="1300" dirty="0"/>
@@ -11016,13 +11239,13 @@
       </p:sp>
       <p:sp>
         <p:nvSpPr>
-          <p:cNvPr id="17" name="Text 15"/>
-          <p:cNvSpPr/>
-          <p:nvPr/>
-        </p:nvSpPr>
-        <p:spPr>
-          <a:xfrm>
-            <a:off x="3429000" y="1417320"/>
+          <p:cNvPr id="24" name="Text 22"/>
+          <p:cNvSpPr/>
+          <p:nvPr/>
+        </p:nvSpPr>
+        <p:spPr>
+          <a:xfrm>
+            <a:off x="6263640" y="1417320"/>
             <a:ext cx="2377440" cy="365760"/>
           </a:xfrm>
           <a:prstGeom prst="rect">
@@ -11055,13 +11278,13 @@
       </p:sp>
       <p:sp>
         <p:nvSpPr>
-          <p:cNvPr id="18" name="Text 16"/>
-          <p:cNvSpPr/>
-          <p:nvPr/>
-        </p:nvSpPr>
-        <p:spPr>
-          <a:xfrm>
-            <a:off x="3429000" y="1828800"/>
+          <p:cNvPr id="25" name="Text 23"/>
+          <p:cNvSpPr/>
+          <p:nvPr/>
+        </p:nvSpPr>
+        <p:spPr>
+          <a:xfrm>
+            <a:off x="6263640" y="1828800"/>
             <a:ext cx="2377440" cy="640080"/>
           </a:xfrm>
           <a:prstGeom prst="rect">
@@ -11094,13 +11317,13 @@
       </p:sp>
       <p:sp>
         <p:nvSpPr>
-          <p:cNvPr id="19" name="Shape 17"/>
-          <p:cNvSpPr/>
-          <p:nvPr/>
-        </p:nvSpPr>
-        <p:spPr>
-          <a:xfrm>
-            <a:off x="6126480" y="1051560"/>
+          <p:cNvPr id="26" name="Shape 24"/>
+          <p:cNvSpPr/>
+          <p:nvPr/>
+        </p:nvSpPr>
+        <p:spPr>
+          <a:xfrm>
+            <a:off x="457200" y="2880360"/>
             <a:ext cx="2651760" cy="1600200"/>
           </a:xfrm>
           <a:prstGeom prst="rect">
@@ -11121,13 +11344,13 @@
       </p:sp>
       <p:sp>
         <p:nvSpPr>
-          <p:cNvPr id="20" name="Shape 18"/>
-          <p:cNvSpPr/>
-          <p:nvPr/>
-        </p:nvSpPr>
-        <p:spPr>
-          <a:xfrm>
-            <a:off x="6126480" y="1051560"/>
+          <p:cNvPr id="27" name="Shape 25"/>
+          <p:cNvSpPr/>
+          <p:nvPr/>
+        </p:nvSpPr>
+        <p:spPr>
+          <a:xfrm>
+            <a:off x="457200" y="2880360"/>
             <a:ext cx="54864" cy="1600200"/>
           </a:xfrm>
           <a:prstGeom prst="rect">
@@ -11141,13 +11364,13 @@
       </p:sp>
       <p:sp>
         <p:nvSpPr>
-          <p:cNvPr id="21" name="Shape 19"/>
-          <p:cNvSpPr/>
-          <p:nvPr/>
-        </p:nvSpPr>
-        <p:spPr>
-          <a:xfrm>
-            <a:off x="7955280" y="1124712"/>
+          <p:cNvPr id="28" name="Shape 26"/>
+          <p:cNvSpPr/>
+          <p:nvPr/>
+        </p:nvSpPr>
+        <p:spPr>
+          <a:xfrm>
+            <a:off x="2286000" y="2953512"/>
             <a:ext cx="658368" cy="228600"/>
           </a:xfrm>
           <a:prstGeom prst="rect">
@@ -11161,13 +11384,13 @@
       </p:sp>
       <p:sp>
         <p:nvSpPr>
-          <p:cNvPr id="22" name="Text 20"/>
-          <p:cNvSpPr/>
-          <p:nvPr/>
-        </p:nvSpPr>
-        <p:spPr>
-          <a:xfrm>
-            <a:off x="7955280" y="1124712"/>
+          <p:cNvPr id="29" name="Text 27"/>
+          <p:cNvSpPr/>
+          <p:nvPr/>
+        </p:nvSpPr>
+        <p:spPr>
+          <a:xfrm>
+            <a:off x="2286000" y="2953512"/>
             <a:ext cx="658368" cy="228600"/>
           </a:xfrm>
           <a:prstGeom prst="rect">
@@ -11200,13 +11423,13 @@
       </p:sp>
       <p:sp>
         <p:nvSpPr>
-          <p:cNvPr id="23" name="Text 21"/>
-          <p:cNvSpPr/>
-          <p:nvPr/>
-        </p:nvSpPr>
-        <p:spPr>
-          <a:xfrm>
-            <a:off x="6263640" y="1124712"/>
+          <p:cNvPr id="30" name="Text 28"/>
+          <p:cNvSpPr/>
+          <p:nvPr/>
+        </p:nvSpPr>
+        <p:spPr>
+          <a:xfrm>
+            <a:off x="594360" y="2953512"/>
             <a:ext cx="1645920" cy="274320"/>
           </a:xfrm>
           <a:prstGeom prst="rect">
@@ -11231,7 +11454,7 @@
                 <a:ea typeface="Arial" pitchFamily="34" charset="-122"/>
                 <a:cs typeface="Arial" pitchFamily="34" charset="-120"/>
               </a:rPr>
-              <a:t>立地・アクセス</a:t>
+              <a:t>快適さ・設備</a:t>
             </a:r>
             <a:endParaRPr lang="en-US" sz="1300" dirty="0"/>
           </a:p>
@@ -11239,13 +11462,13 @@
       </p:sp>
       <p:sp>
         <p:nvSpPr>
-          <p:cNvPr id="24" name="Text 22"/>
-          <p:cNvSpPr/>
-          <p:nvPr/>
-        </p:nvSpPr>
-        <p:spPr>
-          <a:xfrm>
-            <a:off x="6263640" y="1417320"/>
+          <p:cNvPr id="31" name="Text 29"/>
+          <p:cNvSpPr/>
+          <p:nvPr/>
+        </p:nvSpPr>
+        <p:spPr>
+          <a:xfrm>
+            <a:off x="594360" y="3246120"/>
             <a:ext cx="2377440" cy="365760"/>
           </a:xfrm>
           <a:prstGeom prst="rect">
@@ -11270,7 +11493,7 @@
                 <a:ea typeface="Arial" pitchFamily="34" charset="-122"/>
                 <a:cs typeface="Arial" pitchFamily="34" charset="-120"/>
               </a:rPr>
-              <a:t>空調電源を切ってるのに 奥でずっと音がしていて寝れない 朝ごはんは美味しい 駅の近くで立地は良いです 空調電源を切...</a:t>
+              <a:t>早餐好吃 房間夠寬 24小時的免費飲料吧很棒 沒有洗烘衣設備 洗濯乾燥機はありません</a:t>
             </a:r>
             <a:endParaRPr lang="en-US" sz="900" dirty="0"/>
           </a:p>
@@ -11278,13 +11501,13 @@
       </p:sp>
       <p:sp>
         <p:nvSpPr>
-          <p:cNvPr id="25" name="Text 23"/>
-          <p:cNvSpPr/>
-          <p:nvPr/>
-        </p:nvSpPr>
-        <p:spPr>
-          <a:xfrm>
-            <a:off x="6263640" y="1828800"/>
+          <p:cNvPr id="32" name="Text 30"/>
+          <p:cNvSpPr/>
+          <p:nvPr/>
+        </p:nvSpPr>
+        <p:spPr>
+          <a:xfrm>
+            <a:off x="594360" y="3657600"/>
             <a:ext cx="2377440" cy="640080"/>
           </a:xfrm>
           <a:prstGeom prst="rect">
@@ -11309,7 +11532,7 @@
                 <a:ea typeface="Arial" pitchFamily="34" charset="-122"/>
                 <a:cs typeface="Arial" pitchFamily="34" charset="-120"/>
               </a:rPr>
-              <a:t>「Location None なし」</a:t>
+              <a:t>「It is very conveniently located near the Keisei train sta...」</a:t>
             </a:r>
             <a:endParaRPr lang="en-US" sz="900" dirty="0"/>
           </a:p>
@@ -11317,13 +11540,13 @@
       </p:sp>
       <p:sp>
         <p:nvSpPr>
-          <p:cNvPr id="26" name="Shape 24"/>
-          <p:cNvSpPr/>
-          <p:nvPr/>
-        </p:nvSpPr>
-        <p:spPr>
-          <a:xfrm>
-            <a:off x="457200" y="2880360"/>
+          <p:cNvPr id="33" name="Shape 31"/>
+          <p:cNvSpPr/>
+          <p:nvPr/>
+        </p:nvSpPr>
+        <p:spPr>
+          <a:xfrm>
+            <a:off x="3291840" y="2880360"/>
             <a:ext cx="2651760" cy="1600200"/>
           </a:xfrm>
           <a:prstGeom prst="rect">
@@ -11344,13 +11567,13 @@
       </p:sp>
       <p:sp>
         <p:nvSpPr>
-          <p:cNvPr id="27" name="Shape 25"/>
-          <p:cNvSpPr/>
-          <p:nvPr/>
-        </p:nvSpPr>
-        <p:spPr>
-          <a:xfrm>
-            <a:off x="457200" y="2880360"/>
+          <p:cNvPr id="34" name="Shape 32"/>
+          <p:cNvSpPr/>
+          <p:nvPr/>
+        </p:nvSpPr>
+        <p:spPr>
+          <a:xfrm>
+            <a:off x="3291840" y="2880360"/>
             <a:ext cx="54864" cy="1600200"/>
           </a:xfrm>
           <a:prstGeom prst="rect">
@@ -11364,13 +11587,13 @@
       </p:sp>
       <p:sp>
         <p:nvSpPr>
-          <p:cNvPr id="28" name="Shape 26"/>
-          <p:cNvSpPr/>
-          <p:nvPr/>
-        </p:nvSpPr>
-        <p:spPr>
-          <a:xfrm>
-            <a:off x="2286000" y="2953512"/>
+          <p:cNvPr id="35" name="Shape 33"/>
+          <p:cNvSpPr/>
+          <p:nvPr/>
+        </p:nvSpPr>
+        <p:spPr>
+          <a:xfrm>
+            <a:off x="5120640" y="2953512"/>
             <a:ext cx="658368" cy="228600"/>
           </a:xfrm>
           <a:prstGeom prst="rect">
@@ -11384,13 +11607,13 @@
       </p:sp>
       <p:sp>
         <p:nvSpPr>
-          <p:cNvPr id="29" name="Text 27"/>
-          <p:cNvSpPr/>
-          <p:nvPr/>
-        </p:nvSpPr>
-        <p:spPr>
-          <a:xfrm>
-            <a:off x="2286000" y="2953512"/>
+          <p:cNvPr id="36" name="Text 34"/>
+          <p:cNvSpPr/>
+          <p:nvPr/>
+        </p:nvSpPr>
+        <p:spPr>
+          <a:xfrm>
+            <a:off x="5120640" y="2953512"/>
             <a:ext cx="658368" cy="228600"/>
           </a:xfrm>
           <a:prstGeom prst="rect">
@@ -11423,229 +11646,6 @@
       </p:sp>
       <p:sp>
         <p:nvSpPr>
-          <p:cNvPr id="30" name="Text 28"/>
-          <p:cNvSpPr/>
-          <p:nvPr/>
-        </p:nvSpPr>
-        <p:spPr>
-          <a:xfrm>
-            <a:off x="594360" y="2953512"/>
-            <a:ext cx="1645920" cy="274320"/>
-          </a:xfrm>
-          <a:prstGeom prst="rect">
-            <a:avLst/>
-          </a:prstGeom>
-          <a:noFill/>
-          <a:ln/>
-        </p:spPr>
-        <p:txBody>
-          <a:bodyPr wrap="square" lIns="0" tIns="0" rIns="0" bIns="0" rtlCol="0" anchor="ctr"/>
-          <a:lstStyle/>
-          <a:p>
-            <a:pPr indent="0" marL="0">
-              <a:buNone/>
-            </a:pPr>
-            <a:r>
-              <a:rPr lang="en-US" sz="1300" b="1" dirty="0">
-                <a:solidFill>
-                  <a:srgbClr val="1A2744"/>
-                </a:solidFill>
-                <a:latin typeface="Arial" pitchFamily="34" charset="0"/>
-                <a:ea typeface="Arial" pitchFamily="34" charset="-122"/>
-                <a:cs typeface="Arial" pitchFamily="34" charset="-120"/>
-              </a:rPr>
-              <a:t>快適さ・設備</a:t>
-            </a:r>
-            <a:endParaRPr lang="en-US" sz="1300" dirty="0"/>
-          </a:p>
-        </p:txBody>
-      </p:sp>
-      <p:sp>
-        <p:nvSpPr>
-          <p:cNvPr id="31" name="Text 29"/>
-          <p:cNvSpPr/>
-          <p:nvPr/>
-        </p:nvSpPr>
-        <p:spPr>
-          <a:xfrm>
-            <a:off x="594360" y="3246120"/>
-            <a:ext cx="2377440" cy="365760"/>
-          </a:xfrm>
-          <a:prstGeom prst="rect">
-            <a:avLst/>
-          </a:prstGeom>
-          <a:noFill/>
-          <a:ln/>
-        </p:spPr>
-        <p:txBody>
-          <a:bodyPr wrap="square" lIns="0" tIns="0" rIns="0" bIns="0" rtlCol="0" anchor="ctr"/>
-          <a:lstStyle/>
-          <a:p>
-            <a:pPr indent="0" marL="0">
-              <a:buNone/>
-            </a:pPr>
-            <a:r>
-              <a:rPr lang="en-US" sz="900" dirty="0">
-                <a:solidFill>
-                  <a:srgbClr val="64748B"/>
-                </a:solidFill>
-                <a:latin typeface="Arial" pitchFamily="34" charset="0"/>
-                <a:ea typeface="Arial" pitchFamily="34" charset="-122"/>
-                <a:cs typeface="Arial" pitchFamily="34" charset="-120"/>
-              </a:rPr>
-              <a:t>It is very conveniently located near the Keisei train sta...</a:t>
-            </a:r>
-            <a:endParaRPr lang="en-US" sz="900" dirty="0"/>
-          </a:p>
-        </p:txBody>
-      </p:sp>
-      <p:sp>
-        <p:nvSpPr>
-          <p:cNvPr id="32" name="Text 30"/>
-          <p:cNvSpPr/>
-          <p:nvPr/>
-        </p:nvSpPr>
-        <p:spPr>
-          <a:xfrm>
-            <a:off x="594360" y="3657600"/>
-            <a:ext cx="2377440" cy="640080"/>
-          </a:xfrm>
-          <a:prstGeom prst="rect">
-            <a:avLst/>
-          </a:prstGeom>
-          <a:noFill/>
-          <a:ln/>
-        </p:spPr>
-        <p:txBody>
-          <a:bodyPr wrap="square" lIns="0" tIns="0" rIns="0" bIns="0" rtlCol="0" anchor="ctr"/>
-          <a:lstStyle/>
-          <a:p>
-            <a:pPr indent="0" marL="0">
-              <a:buNone/>
-            </a:pPr>
-            <a:r>
-              <a:rPr lang="en-US" sz="900" i="1" dirty="0">
-                <a:solidFill>
-                  <a:srgbClr val="3B7DD8"/>
-                </a:solidFill>
-                <a:latin typeface="Arial" pitchFamily="34" charset="0"/>
-                <a:ea typeface="Arial" pitchFamily="34" charset="-122"/>
-                <a:cs typeface="Arial" pitchFamily="34" charset="-120"/>
-              </a:rPr>
-              <a:t>「室内、アメニティ含めて問題ない」</a:t>
-            </a:r>
-            <a:endParaRPr lang="en-US" sz="900" dirty="0"/>
-          </a:p>
-        </p:txBody>
-      </p:sp>
-      <p:sp>
-        <p:nvSpPr>
-          <p:cNvPr id="33" name="Shape 31"/>
-          <p:cNvSpPr/>
-          <p:nvPr/>
-        </p:nvSpPr>
-        <p:spPr>
-          <a:xfrm>
-            <a:off x="3291840" y="2880360"/>
-            <a:ext cx="2651760" cy="1600200"/>
-          </a:xfrm>
-          <a:prstGeom prst="rect">
-            <a:avLst/>
-          </a:prstGeom>
-          <a:solidFill>
-            <a:srgbClr val="FFFFFF"/>
-          </a:solidFill>
-          <a:ln/>
-          <a:effectLst>
-            <a:outerShdw sx="100000" sy="100000" kx="0" ky="0" algn="bl" rotWithShape="0" blurRad="50800" dist="25400" dir="8100000">
-              <a:srgbClr val="000000">
-                <a:alpha val="10000"/>
-              </a:srgbClr>
-            </a:outerShdw>
-          </a:effectLst>
-        </p:spPr>
-      </p:sp>
-      <p:sp>
-        <p:nvSpPr>
-          <p:cNvPr id="34" name="Shape 32"/>
-          <p:cNvSpPr/>
-          <p:nvPr/>
-        </p:nvSpPr>
-        <p:spPr>
-          <a:xfrm>
-            <a:off x="3291840" y="2880360"/>
-            <a:ext cx="54864" cy="1600200"/>
-          </a:xfrm>
-          <a:prstGeom prst="rect">
-            <a:avLst/>
-          </a:prstGeom>
-          <a:solidFill>
-            <a:srgbClr val="16A34A"/>
-          </a:solidFill>
-          <a:ln/>
-        </p:spPr>
-      </p:sp>
-      <p:sp>
-        <p:nvSpPr>
-          <p:cNvPr id="35" name="Shape 33"/>
-          <p:cNvSpPr/>
-          <p:nvPr/>
-        </p:nvSpPr>
-        <p:spPr>
-          <a:xfrm>
-            <a:off x="5120640" y="2953512"/>
-            <a:ext cx="658368" cy="228600"/>
-          </a:xfrm>
-          <a:prstGeom prst="rect">
-            <a:avLst/>
-          </a:prstGeom>
-          <a:solidFill>
-            <a:srgbClr val="DCFCE7"/>
-          </a:solidFill>
-          <a:ln/>
-        </p:spPr>
-      </p:sp>
-      <p:sp>
-        <p:nvSpPr>
-          <p:cNvPr id="36" name="Text 34"/>
-          <p:cNvSpPr/>
-          <p:nvPr/>
-        </p:nvSpPr>
-        <p:spPr>
-          <a:xfrm>
-            <a:off x="5120640" y="2953512"/>
-            <a:ext cx="658368" cy="228600"/>
-          </a:xfrm>
-          <a:prstGeom prst="rect">
-            <a:avLst/>
-          </a:prstGeom>
-          <a:noFill/>
-          <a:ln/>
-        </p:spPr>
-        <p:txBody>
-          <a:bodyPr wrap="square" lIns="0" tIns="0" rIns="0" bIns="0" rtlCol="0" anchor="ctr"/>
-          <a:lstStyle/>
-          <a:p>
-            <a:pPr algn="ctr" indent="0" marL="0">
-              <a:buNone/>
-            </a:pPr>
-            <a:r>
-              <a:rPr lang="en-US" sz="900" b="1" dirty="0">
-                <a:solidFill>
-                  <a:srgbClr val="16A34A"/>
-                </a:solidFill>
-                <a:latin typeface="Arial" pitchFamily="34" charset="0"/>
-                <a:ea typeface="Arial" pitchFamily="34" charset="-122"/>
-                <a:cs typeface="Arial" pitchFamily="34" charset="-120"/>
-              </a:rPr>
-              <a:t>20件+</a:t>
-            </a:r>
-            <a:endParaRPr lang="en-US" sz="900" dirty="0"/>
-          </a:p>
-        </p:txBody>
-      </p:sp>
-      <p:sp>
-        <p:nvSpPr>
           <p:cNvPr id="37" name="Text 35"/>
           <p:cNvSpPr/>
           <p:nvPr/>
@@ -11716,7 +11716,7 @@
                 <a:ea typeface="Arial" pitchFamily="34" charset="-122"/>
                 <a:cs typeface="Arial" pitchFamily="34" charset="-120"/>
               </a:rPr>
-              <a:t>It is very conveniently located near the Keisei train sta...</a:t>
+              <a:t>部屋は清潔で、周辺を観光するのも簡単です</a:t>
             </a:r>
             <a:endParaRPr lang="en-US" sz="900" dirty="0"/>
           </a:p>
@@ -11755,7 +11755,7 @@
                 <a:ea typeface="Arial" pitchFamily="34" charset="-122"/>
                 <a:cs typeface="Arial" pitchFamily="34" charset="-120"/>
               </a:rPr>
-              <a:t>「駅から近く、室内もきれいでした」</a:t>
+              <a:t>「部屋は特に問題もなく水回りも清掃がいきとどいてよかったです」</a:t>
             </a:r>
             <a:endParaRPr lang="en-US" sz="900" dirty="0"/>
           </a:p>
@@ -12942,7 +12942,7 @@
                           <a:ea typeface="Arial" pitchFamily="34" charset="-122"/>
                           <a:cs typeface="Arial" pitchFamily="34" charset="-120"/>
                         </a:rPr>
-                        <a:t>Very good location,  nice staff, Too small, bathroom entr...</a:t>
+                        <a:t>部屋は特に問題もなく水回りも清掃がいきとどいてよかったです</a:t>
                       </a:r>
                       <a:endParaRPr lang="en-US" sz="900" dirty="0">
                         <a:latin typeface="Arial" charset="0"/>
@@ -13010,7 +13010,7 @@
                           <a:ea typeface="Arial" pitchFamily="34" charset="-122"/>
                           <a:cs typeface="Arial" pitchFamily="34" charset="-120"/>
                         </a:rPr>
-                        <a:t>8件</a:t>
+                        <a:t>9件</a:t>
                       </a:r>
                       <a:endParaRPr lang="en-US" sz="900" dirty="0">
                         <a:latin typeface="Arial" charset="0"/>

--- a/納品レポート/ホテル別レポート/comfort_narita_口コミ分析レポート.pptx
+++ b/納品レポート/ホテル別レポート/comfort_narita_口コミ分析レポート.pptx
@@ -2801,7 +2801,7 @@
                 <a:ea typeface="Arial" pitchFamily="34" charset="-122"/>
                 <a:cs typeface="Arial" pitchFamily="34" charset="-120"/>
               </a:rPr>
-              <a:t>作成日：2026年3月25日</a:t>
+              <a:t>作成日：2026年3月26日</a:t>
             </a:r>
             <a:endParaRPr lang="en-US" sz="1000" dirty="0"/>
           </a:p>

--- a/納品レポート/ホテル別レポート/comfort_narita_口コミ分析レポート.pptx
+++ b/納品レポート/ホテル別レポート/comfort_narita_口コミ分析レポート.pptx
@@ -211,16 +211,16 @@
                   <c:v>9.56</c:v>
                 </c:pt>
                 <c:pt idx="1">
-                  <c:v>9.1</c:v>
+                  <c:v>9.05</c:v>
                 </c:pt>
                 <c:pt idx="2">
-                  <c:v>8.44</c:v>
+                  <c:v>8.38</c:v>
                 </c:pt>
                 <c:pt idx="3">
-                  <c:v>8.27</c:v>
+                  <c:v>8.35</c:v>
                 </c:pt>
                 <c:pt idx="4">
-                  <c:v>8.18</c:v>
+                  <c:v>8</c:v>
                 </c:pt>
                 <c:pt idx="5">
                   <c:v>6.78</c:v>
@@ -566,10 +566,10 @@
               <c:numCache>
                 <c:ptCount val="3"/>
                 <c:pt idx="0">
-                  <c:v>107</c:v>
+                  <c:v>108</c:v>
                 </c:pt>
                 <c:pt idx="1">
-                  <c:v>23</c:v>
+                  <c:v>24</c:v>
                 </c:pt>
                 <c:pt idx="2">
                   <c:v>4</c:v>
@@ -812,16 +812,16 @@
                   <c:v>55</c:v>
                 </c:pt>
                 <c:pt idx="1">
-                  <c:v>17</c:v>
+                  <c:v>16</c:v>
                 </c:pt>
                 <c:pt idx="2">
-                  <c:v>35</c:v>
+                  <c:v>37</c:v>
                 </c:pt>
                 <c:pt idx="3">
                   <c:v>8</c:v>
                 </c:pt>
                 <c:pt idx="4">
-                  <c:v>14</c:v>
+                  <c:v>15</c:v>
                 </c:pt>
                 <c:pt idx="5">
                   <c:v>1</c:v>
@@ -2781,7 +2781,7 @@
                 <a:ea typeface="Arial" pitchFamily="34" charset="-122"/>
                 <a:cs typeface="Arial" pitchFamily="34" charset="-120"/>
               </a:rPr>
-              <a:t>レビュー総数：134件（6サイト）</a:t>
+              <a:t>レビュー総数：136件（6サイト）</a:t>
             </a:r>
             <a:endParaRPr lang="en-US" sz="1000" dirty="0"/>
           </a:p>
@@ -2801,7 +2801,7 @@
                 <a:ea typeface="Arial" pitchFamily="34" charset="-122"/>
                 <a:cs typeface="Arial" pitchFamily="34" charset="-120"/>
               </a:rPr>
-              <a:t>作成日：2026年3月26日</a:t>
+              <a:t>作成日：2026年3月27日</a:t>
             </a:r>
             <a:endParaRPr lang="en-US" sz="1000" dirty="0"/>
           </a:p>
@@ -3347,7 +3347,7 @@
                           <a:ea typeface="Arial" pitchFamily="34" charset="-122"/>
                           <a:cs typeface="Arial" pitchFamily="34" charset="-120"/>
                         </a:rPr>
-                        <a:t>8.53点</a:t>
+                        <a:t>8.50点</a:t>
                       </a:r>
                       <a:endParaRPr lang="en-US" sz="1000" dirty="0">
                         <a:latin typeface="Arial" charset="0"/>
@@ -3621,7 +3621,7 @@
                           <a:ea typeface="Arial" pitchFamily="34" charset="-122"/>
                           <a:cs typeface="Arial" pitchFamily="34" charset="-120"/>
                         </a:rPr>
-                        <a:t>79.9%</a:t>
+                        <a:t>79.4%</a:t>
                       </a:r>
                       <a:endParaRPr lang="en-US" sz="1000" dirty="0">
                         <a:latin typeface="Arial" charset="0"/>
@@ -3689,7 +3689,7 @@
                           <a:ea typeface="Arial" pitchFamily="34" charset="-122"/>
                           <a:cs typeface="Arial" pitchFamily="34" charset="-120"/>
                         </a:rPr>
-                        <a:t>85%以上</a:t>
+                        <a:t>84%以上</a:t>
                       </a:r>
                       <a:endParaRPr lang="en-US" sz="1000" dirty="0">
                         <a:latin typeface="Arial" charset="0"/>
@@ -3895,7 +3895,7 @@
                           <a:ea typeface="Arial" pitchFamily="34" charset="-122"/>
                           <a:cs typeface="Arial" pitchFamily="34" charset="-120"/>
                         </a:rPr>
-                        <a:t>3.0%</a:t>
+                        <a:t>2.9%</a:t>
                       </a:r>
                       <a:endParaRPr lang="en-US" sz="1000" dirty="0">
                         <a:latin typeface="Arial" charset="0"/>
@@ -5356,7 +5356,7 @@
                 <a:ea typeface="Arial" pitchFamily="34" charset="-122"/>
                 <a:cs typeface="Arial" pitchFamily="34" charset="-120"/>
               </a:rPr>
-              <a:t>8.53</a:t>
+              <a:t>8.50</a:t>
             </a:r>
             <a:endParaRPr lang="en-US" sz="3200" dirty="0"/>
           </a:p>
@@ -5481,7 +5481,7 @@
                 <a:ea typeface="Arial" pitchFamily="34" charset="-122"/>
                 <a:cs typeface="Arial" pitchFamily="34" charset="-120"/>
               </a:rPr>
-              <a:t>79.9%</a:t>
+              <a:t>79.4%</a:t>
             </a:r>
             <a:endParaRPr lang="en-US" sz="3200" dirty="0"/>
           </a:p>
@@ -5606,7 +5606,7 @@
                 <a:ea typeface="Arial" pitchFamily="34" charset="-122"/>
                 <a:cs typeface="Arial" pitchFamily="34" charset="-120"/>
               </a:rPr>
-              <a:t>3.0%</a:t>
+              <a:t>2.9%</a:t>
             </a:r>
             <a:endParaRPr lang="en-US" sz="3200" dirty="0"/>
           </a:p>
@@ -5731,7 +5731,7 @@
                 <a:ea typeface="Arial" pitchFamily="34" charset="-122"/>
                 <a:cs typeface="Arial" pitchFamily="34" charset="-120"/>
               </a:rPr>
-              <a:t>134件</a:t>
+              <a:t>136件</a:t>
             </a:r>
             <a:endParaRPr lang="en-US" sz="3200" dirty="0"/>
           </a:p>
@@ -5879,7 +5879,47 @@
                 <a:ea typeface="Arial" pitchFamily="34" charset="-122"/>
                 <a:cs typeface="Arial" pitchFamily="34" charset="-120"/>
               </a:rPr>
-              <a:t>  無料の朝食バイキングおいしかったです</a:t>
+              <a:t>  ￼  無料の朝食サービスもあり、種類はシンプルながら満足度は高く、コストパフォーマンスの良さを感じました</a:t>
+            </a:r>
+            <a:endParaRPr lang="en-US" sz="1100" dirty="0"/>
+          </a:p>
+          <a:p>
+            <a:pPr indent="0" marL="0">
+              <a:spcAft>
+                <a:spcPts val="200"/>
+              </a:spcAft>
+              <a:buNone/>
+            </a:pPr>
+            <a:r>
+              <a:rPr lang="en-US" sz="1100" b="1" dirty="0">
+                <a:solidFill>
+                  <a:srgbClr val="334155"/>
+                </a:solidFill>
+                <a:latin typeface="Arial" pitchFamily="34" charset="0"/>
+                <a:ea typeface="Arial" pitchFamily="34" charset="-122"/>
+                <a:cs typeface="Arial" pitchFamily="34" charset="-120"/>
+              </a:rPr>
+              <a:t>スタッフの対応 </a:t>
+            </a:r>
+            <a:endParaRPr lang="en-US" sz="1100" dirty="0"/>
+          </a:p>
+          <a:p>
+            <a:pPr indent="0" marL="0">
+              <a:spcAft>
+                <a:spcPts val="200"/>
+              </a:spcAft>
+              <a:buNone/>
+            </a:pPr>
+            <a:r>
+              <a:rPr lang="en-US" sz="900" dirty="0">
+                <a:solidFill>
+                  <a:srgbClr val="64748B"/>
+                </a:solidFill>
+                <a:latin typeface="Arial" pitchFamily="34" charset="0"/>
+                <a:ea typeface="Arial" pitchFamily="34" charset="-122"/>
+                <a:cs typeface="Arial" pitchFamily="34" charset="-120"/>
+              </a:rPr>
+              <a:t>  スタッフは親切で、チェックインも手伝ってくれました</a:t>
             </a:r>
             <a:endParaRPr lang="en-US" sz="1100" dirty="0"/>
           </a:p>
@@ -5919,47 +5959,7 @@
                 <a:ea typeface="Arial" pitchFamily="34" charset="-122"/>
                 <a:cs typeface="Arial" pitchFamily="34" charset="-120"/>
               </a:rPr>
-              <a:t>  โลเคชั่นดี สะดวกมาก ห้องสะอาดดี เดินทางไปเที่ยวได้สะดวกดี...</a:t>
-            </a:r>
-            <a:endParaRPr lang="en-US" sz="1100" dirty="0"/>
-          </a:p>
-          <a:p>
-            <a:pPr indent="0" marL="0">
-              <a:spcAft>
-                <a:spcPts val="200"/>
-              </a:spcAft>
-              <a:buNone/>
-            </a:pPr>
-            <a:r>
-              <a:rPr lang="en-US" sz="1100" b="1" dirty="0">
-                <a:solidFill>
-                  <a:srgbClr val="334155"/>
-                </a:solidFill>
-                <a:latin typeface="Arial" pitchFamily="34" charset="0"/>
-                <a:ea typeface="Arial" pitchFamily="34" charset="-122"/>
-                <a:cs typeface="Arial" pitchFamily="34" charset="-120"/>
-              </a:rPr>
-              <a:t>スタッフの対応 </a:t>
-            </a:r>
-            <a:endParaRPr lang="en-US" sz="1100" dirty="0"/>
-          </a:p>
-          <a:p>
-            <a:pPr indent="0" marL="0">
-              <a:spcAft>
-                <a:spcPts val="200"/>
-              </a:spcAft>
-              <a:buNone/>
-            </a:pPr>
-            <a:r>
-              <a:rPr lang="en-US" sz="900" dirty="0">
-                <a:solidFill>
-                  <a:srgbClr val="64748B"/>
-                </a:solidFill>
-                <a:latin typeface="Arial" pitchFamily="34" charset="0"/>
-                <a:ea typeface="Arial" pitchFamily="34" charset="-122"/>
-                <a:cs typeface="Arial" pitchFamily="34" charset="-120"/>
-              </a:rPr>
-              <a:t>  The staff were very friendly There was no way to control ...</a:t>
+              <a:t>  京成成田駅から徒歩2分ほど、JR成田駅からも徒歩圏内とアクセスが非常に良く、成田空港への移動にも便利な立地です</a:t>
             </a:r>
             <a:endParaRPr lang="en-US" sz="1100" dirty="0"/>
           </a:p>
@@ -6147,7 +6147,7 @@
                 <a:ea typeface="Arial" pitchFamily="34" charset="-122"/>
                 <a:cs typeface="Arial" pitchFamily="34" charset="-120"/>
               </a:rPr>
-              <a:t>  部屋は特に問題もなく水回りも清掃がいきとどいてよかったです</a:t>
+              <a:t>  ただ、トイレが狭すぎて少し使いづらいのが難点です</a:t>
             </a:r>
             <a:endParaRPr lang="en-US" sz="1100" dirty="0"/>
           </a:p>
@@ -6540,7 +6540,7 @@
                 <a:ea typeface="Arial" pitchFamily="34" charset="-122"/>
                 <a:cs typeface="Arial" pitchFamily="34" charset="-120"/>
               </a:rPr>
-              <a:t>8.53</a:t>
+              <a:t>8.50</a:t>
             </a:r>
             <a:endParaRPr lang="en-US" sz="3200" dirty="0"/>
           </a:p>
@@ -6665,7 +6665,7 @@
                 <a:ea typeface="Arial" pitchFamily="34" charset="-122"/>
                 <a:cs typeface="Arial" pitchFamily="34" charset="-120"/>
               </a:rPr>
-              <a:t>79.9%</a:t>
+              <a:t>79.4%</a:t>
             </a:r>
             <a:endParaRPr lang="en-US" sz="3200" dirty="0"/>
           </a:p>
@@ -6790,7 +6790,7 @@
                 <a:ea typeface="Arial" pitchFamily="34" charset="-122"/>
                 <a:cs typeface="Arial" pitchFamily="34" charset="-120"/>
               </a:rPr>
-              <a:t>3.0%</a:t>
+              <a:t>2.9%</a:t>
             </a:r>
             <a:endParaRPr lang="en-US" sz="3200" dirty="0"/>
           </a:p>
@@ -6915,7 +6915,7 @@
                 <a:ea typeface="Arial" pitchFamily="34" charset="-122"/>
                 <a:cs typeface="Arial" pitchFamily="34" charset="-120"/>
               </a:rPr>
-              <a:t>134件</a:t>
+              <a:t>136件</a:t>
             </a:r>
             <a:endParaRPr lang="en-US" sz="3200" dirty="0"/>
           </a:p>
@@ -8236,7 +8236,7 @@
                           <a:ea typeface="Arial" pitchFamily="34" charset="-122"/>
                           <a:cs typeface="Arial" pitchFamily="34" charset="-120"/>
                         </a:rPr>
-                        <a:t>20</a:t>
+                        <a:t>21</a:t>
                       </a:r>
                       <a:endParaRPr lang="en-US" sz="900" dirty="0">
                         <a:latin typeface="Arial" charset="0"/>
@@ -8304,7 +8304,7 @@
                           <a:ea typeface="Arial" pitchFamily="34" charset="-122"/>
                           <a:cs typeface="Arial" pitchFamily="34" charset="-120"/>
                         </a:rPr>
-                        <a:t>4.55</a:t>
+                        <a:t>4.52</a:t>
                       </a:r>
                       <a:endParaRPr lang="en-US" sz="900" dirty="0">
                         <a:latin typeface="Arial" charset="0"/>
@@ -8440,7 +8440,7 @@
                           <a:ea typeface="Arial" pitchFamily="34" charset="-122"/>
                           <a:cs typeface="Arial" pitchFamily="34" charset="-120"/>
                         </a:rPr>
-                        <a:t>9.1</a:t>
+                        <a:t>9.05</a:t>
                       </a:r>
                       <a:endParaRPr lang="en-US" sz="900" dirty="0">
                         <a:latin typeface="Arial" charset="0"/>
@@ -8578,7 +8578,7 @@
                           <a:ea typeface="Arial" pitchFamily="34" charset="-122"/>
                           <a:cs typeface="Arial" pitchFamily="34" charset="-120"/>
                         </a:rPr>
-                        <a:t>54</a:t>
+                        <a:t>55</a:t>
                       </a:r>
                       <a:endParaRPr lang="en-US" sz="900" dirty="0">
                         <a:latin typeface="Arial" charset="0"/>
@@ -8646,7 +8646,7 @@
                           <a:ea typeface="Arial" pitchFamily="34" charset="-122"/>
                           <a:cs typeface="Arial" pitchFamily="34" charset="-120"/>
                         </a:rPr>
-                        <a:t>8.44</a:t>
+                        <a:t>8.38</a:t>
                       </a:r>
                       <a:endParaRPr lang="en-US" sz="900" dirty="0">
                         <a:latin typeface="Arial" charset="0"/>
@@ -8782,7 +8782,7 @@
                           <a:ea typeface="Arial" pitchFamily="34" charset="-122"/>
                           <a:cs typeface="Arial" pitchFamily="34" charset="-120"/>
                         </a:rPr>
-                        <a:t>8.44</a:t>
+                        <a:t>8.38</a:t>
                       </a:r>
                       <a:endParaRPr lang="en-US" sz="900" dirty="0">
                         <a:latin typeface="Arial" charset="0"/>
@@ -8920,7 +8920,7 @@
                           <a:ea typeface="Arial" pitchFamily="34" charset="-122"/>
                           <a:cs typeface="Arial" pitchFamily="34" charset="-120"/>
                         </a:rPr>
-                        <a:t>22</a:t>
+                        <a:t>23</a:t>
                       </a:r>
                       <a:endParaRPr lang="en-US" sz="900" dirty="0">
                         <a:latin typeface="Arial" charset="0"/>
@@ -8988,7 +8988,7 @@
                           <a:ea typeface="Arial" pitchFamily="34" charset="-122"/>
                           <a:cs typeface="Arial" pitchFamily="34" charset="-120"/>
                         </a:rPr>
-                        <a:t>4.14</a:t>
+                        <a:t>4.17</a:t>
                       </a:r>
                       <a:endParaRPr lang="en-US" sz="900" dirty="0">
                         <a:latin typeface="Arial" charset="0"/>
@@ -9124,7 +9124,7 @@
                           <a:ea typeface="Arial" pitchFamily="34" charset="-122"/>
                           <a:cs typeface="Arial" pitchFamily="34" charset="-120"/>
                         </a:rPr>
-                        <a:t>8.27</a:t>
+                        <a:t>8.35</a:t>
                       </a:r>
                       <a:endParaRPr lang="en-US" sz="900" dirty="0">
                         <a:latin typeface="Arial" charset="0"/>
@@ -9262,7 +9262,7 @@
                           <a:ea typeface="Arial" pitchFamily="34" charset="-122"/>
                           <a:cs typeface="Arial" pitchFamily="34" charset="-120"/>
                         </a:rPr>
-                        <a:t>11</a:t>
+                        <a:t>10</a:t>
                       </a:r>
                       <a:endParaRPr lang="en-US" sz="900" dirty="0">
                         <a:latin typeface="Arial" charset="0"/>
@@ -9330,7 +9330,7 @@
                           <a:ea typeface="Arial" pitchFamily="34" charset="-122"/>
                           <a:cs typeface="Arial" pitchFamily="34" charset="-120"/>
                         </a:rPr>
-                        <a:t>4.09</a:t>
+                        <a:t>4</a:t>
                       </a:r>
                       <a:endParaRPr lang="en-US" sz="900" dirty="0">
                         <a:latin typeface="Arial" charset="0"/>
@@ -9466,7 +9466,7 @@
                           <a:ea typeface="Arial" pitchFamily="34" charset="-122"/>
                           <a:cs typeface="Arial" pitchFamily="34" charset="-120"/>
                         </a:rPr>
-                        <a:t>8.18</a:t>
+                        <a:t>8</a:t>
                       </a:r>
                       <a:endParaRPr lang="en-US" sz="900" dirty="0">
                         <a:latin typeface="Arial" charset="0"/>
@@ -10216,7 +10216,7 @@
                 <a:ea typeface="Arial" pitchFamily="34" charset="-122"/>
                 <a:cs typeface="Arial" pitchFamily="34" charset="-120"/>
               </a:rPr>
-              <a:t>107件（79.9%）</a:t>
+              <a:t>108件（79.4%）</a:t>
             </a:r>
             <a:endParaRPr lang="en-US" sz="1100" dirty="0"/>
           </a:p>
@@ -10314,7 +10314,7 @@
                 <a:ea typeface="Arial" pitchFamily="34" charset="-122"/>
                 <a:cs typeface="Arial" pitchFamily="34" charset="-120"/>
               </a:rPr>
-              <a:t>23件（17.2%）</a:t>
+              <a:t>24件（17.6%）</a:t>
             </a:r>
             <a:endParaRPr lang="en-US" sz="1100" dirty="0"/>
           </a:p>
@@ -10412,7 +10412,7 @@
                 <a:ea typeface="Arial" pitchFamily="34" charset="-122"/>
                 <a:cs typeface="Arial" pitchFamily="34" charset="-120"/>
               </a:rPr>
-              <a:t>4件（3.0%）</a:t>
+              <a:t>4件（2.9%）</a:t>
             </a:r>
             <a:endParaRPr lang="en-US" sz="1100" dirty="0"/>
           </a:p>
@@ -10824,7 +10824,7 @@
                 <a:ea typeface="Arial" pitchFamily="34" charset="-122"/>
                 <a:cs typeface="Arial" pitchFamily="34" charset="-120"/>
               </a:rPr>
-              <a:t>無料の朝食バイキングおいしかったです</a:t>
+              <a:t>￼  無料の朝食サービスもあり、種類はシンプルながら満足度は高く、コストパフォーマンスの良さを感じました</a:t>
             </a:r>
             <a:endParaRPr lang="en-US" sz="900" dirty="0"/>
           </a:p>
@@ -10863,7 +10863,7 @@
                 <a:ea typeface="Arial" pitchFamily="34" charset="-122"/>
                 <a:cs typeface="Arial" pitchFamily="34" charset="-120"/>
               </a:rPr>
-              <a:t>「空調電源を切ってるのに 奥でずっと音がしていて寝れない 朝ごはんは美味しい 駅の近くで立地は良いです 空調電源を切...」</a:t>
+              <a:t>「無料の朝食バイキングおいしかったです」</a:t>
             </a:r>
             <a:endParaRPr lang="en-US" sz="900" dirty="0"/>
           </a:p>
@@ -11008,7 +11008,7 @@
                 <a:ea typeface="Arial" pitchFamily="34" charset="-122"/>
                 <a:cs typeface="Arial" pitchFamily="34" charset="-120"/>
               </a:rPr>
-              <a:t>立地・アクセス</a:t>
+              <a:t>スタッフの対応</a:t>
             </a:r>
             <a:endParaRPr lang="en-US" sz="1300" dirty="0"/>
           </a:p>
@@ -11047,7 +11047,7 @@
                 <a:ea typeface="Arial" pitchFamily="34" charset="-122"/>
                 <a:cs typeface="Arial" pitchFamily="34" charset="-120"/>
               </a:rPr>
-              <a:t>โลเคชั่นดี สะดวกมาก ห้องสะอาดดี เดินทางไปเที่ยวได้สะดวกดี...</a:t>
+              <a:t>スタッフは親切で、チェックインも手伝ってくれました</a:t>
             </a:r>
             <a:endParaRPr lang="en-US" sz="900" dirty="0"/>
           </a:p>
@@ -11086,7 +11086,7 @@
                 <a:ea typeface="Arial" pitchFamily="34" charset="-122"/>
                 <a:cs typeface="Arial" pitchFamily="34" charset="-120"/>
               </a:rPr>
-              <a:t>「空調電源を切ってるのに 奥でずっと音がしていて寝れない 朝ごはんは美味しい 駅の近くで立地は良いです 空調電源を切...」</a:t>
+              <a:t>「受付のお姉さんがとても親切に接してくださり、旅の疲れがとれました」</a:t>
             </a:r>
             <a:endParaRPr lang="en-US" sz="900" dirty="0"/>
           </a:p>
@@ -11231,7 +11231,7 @@
                 <a:ea typeface="Arial" pitchFamily="34" charset="-122"/>
                 <a:cs typeface="Arial" pitchFamily="34" charset="-120"/>
               </a:rPr>
-              <a:t>スタッフの対応</a:t>
+              <a:t>立地・アクセス</a:t>
             </a:r>
             <a:endParaRPr lang="en-US" sz="1300" dirty="0"/>
           </a:p>
@@ -11270,7 +11270,7 @@
                 <a:ea typeface="Arial" pitchFamily="34" charset="-122"/>
                 <a:cs typeface="Arial" pitchFamily="34" charset="-120"/>
               </a:rPr>
-              <a:t>The staff were very friendly There was no way to control ...</a:t>
+              <a:t>京成成田駅から徒歩2分ほど、JR成田駅からも徒歩圏内とアクセスが非常に良く、成田空港への移動にも便利な立地です</a:t>
             </a:r>
             <a:endParaRPr lang="en-US" sz="900" dirty="0"/>
           </a:p>
@@ -11309,7 +11309,7 @@
                 <a:ea typeface="Arial" pitchFamily="34" charset="-122"/>
                 <a:cs typeface="Arial" pitchFamily="34" charset="-120"/>
               </a:rPr>
-              <a:t>「またフロントに然り、朝食会場に然り、ホテルマンの方々が、本当に働いているなというくらい、挨拶と動きが良いです」</a:t>
+              <a:t>「โลเคชั่นดี สะดวกมาก ห้องสะอาดดี เดินทางไปเที่ยวได้สะดวกดี...」</a:t>
             </a:r>
             <a:endParaRPr lang="en-US" sz="900" dirty="0"/>
           </a:p>
@@ -11493,7 +11493,7 @@
                 <a:ea typeface="Arial" pitchFamily="34" charset="-122"/>
                 <a:cs typeface="Arial" pitchFamily="34" charset="-120"/>
               </a:rPr>
-              <a:t>早餐好吃 房間夠寬 24小時的免費飲料吧很棒 沒有洗烘衣設備 洗濯乾燥機はありません</a:t>
+              <a:t>設備は充実していましたが、部屋が少し狭く、大きな荷物を置くスペースがありませんでした</a:t>
             </a:r>
             <a:endParaRPr lang="en-US" sz="900" dirty="0"/>
           </a:p>
@@ -11532,7 +11532,7 @@
                 <a:ea typeface="Arial" pitchFamily="34" charset="-122"/>
                 <a:cs typeface="Arial" pitchFamily="34" charset="-120"/>
               </a:rPr>
-              <a:t>「It is very conveniently located near the Keisei train sta...」</a:t>
+              <a:t>「設備は少し古いですが、とても清潔で快適です」</a:t>
             </a:r>
             <a:endParaRPr lang="en-US" sz="900" dirty="0"/>
           </a:p>
@@ -11716,7 +11716,7 @@
                 <a:ea typeface="Arial" pitchFamily="34" charset="-122"/>
                 <a:cs typeface="Arial" pitchFamily="34" charset="-120"/>
               </a:rPr>
-              <a:t>部屋は清潔で、周辺を観光するのも簡単です</a:t>
+              <a:t>設備は少し古いですが、とても清潔で快適です</a:t>
             </a:r>
             <a:endParaRPr lang="en-US" sz="900" dirty="0"/>
           </a:p>
@@ -11755,7 +11755,7 @@
                 <a:ea typeface="Arial" pitchFamily="34" charset="-122"/>
                 <a:cs typeface="Arial" pitchFamily="34" charset="-120"/>
               </a:rPr>
-              <a:t>「部屋は特に問題もなく水回りも清掃がいきとどいてよかったです」</a:t>
+              <a:t>「￼  客室はコンパクトながら清潔感があり、全室禁煙で快適に過ごせました」</a:t>
             </a:r>
             <a:endParaRPr lang="en-US" sz="900" dirty="0"/>
           </a:p>
@@ -11939,7 +11939,7 @@
                 <a:ea typeface="Arial" pitchFamily="34" charset="-122"/>
                 <a:cs typeface="Arial" pitchFamily="34" charset="-120"/>
               </a:rPr>
-              <a:t>Overall, this hotel offers excellent value for money</a:t>
+              <a:t>￼  無料の朝食サービスもあり、種類はシンプルながら満足度は高く、コストパフォーマンスの良さを感じました</a:t>
             </a:r>
             <a:endParaRPr lang="en-US" sz="900" dirty="0"/>
           </a:p>
@@ -11978,7 +11978,7 @@
                 <a:ea typeface="Arial" pitchFamily="34" charset="-122"/>
                 <a:cs typeface="Arial" pitchFamily="34" charset="-120"/>
               </a:rPr>
-              <a:t>「お手頃価格で、フレンドリーなホテルです」</a:t>
+              <a:t>「Overall, this hotel offers excellent value for money」</a:t>
             </a:r>
             <a:endParaRPr lang="en-US" sz="900" dirty="0"/>
           </a:p>
@@ -12942,7 +12942,7 @@
                           <a:ea typeface="Arial" pitchFamily="34" charset="-122"/>
                           <a:cs typeface="Arial" pitchFamily="34" charset="-120"/>
                         </a:rPr>
-                        <a:t>部屋は特に問題もなく水回りも清掃がいきとどいてよかったです</a:t>
+                        <a:t>ただ、トイレが狭すぎて少し使いづらいのが難点です</a:t>
                       </a:r>
                       <a:endParaRPr lang="en-US" sz="900" dirty="0">
                         <a:latin typeface="Arial" charset="0"/>
@@ -13010,7 +13010,7 @@
                           <a:ea typeface="Arial" pitchFamily="34" charset="-122"/>
                           <a:cs typeface="Arial" pitchFamily="34" charset="-120"/>
                         </a:rPr>
-                        <a:t>9件</a:t>
+                        <a:t>10件</a:t>
                       </a:r>
                       <a:endParaRPr lang="en-US" sz="900" dirty="0">
                         <a:latin typeface="Arial" charset="0"/>
@@ -13696,7 +13696,7 @@
                           <a:ea typeface="Arial" pitchFamily="34" charset="-122"/>
                           <a:cs typeface="Arial" pitchFamily="34" charset="-120"/>
                         </a:rPr>
-                        <a:t>部屋の狭さ</a:t>
+                        <a:t>設備の老朽化</a:t>
                       </a:r>
                       <a:endParaRPr lang="en-US" sz="900" dirty="0">
                         <a:latin typeface="Arial" charset="0"/>
@@ -13764,7 +13764,7 @@
                           <a:ea typeface="Arial" pitchFamily="34" charset="-122"/>
                           <a:cs typeface="Arial" pitchFamily="34" charset="-120"/>
                         </a:rPr>
-                        <a:t>Very good location,  nice staff, Too small, bathroom entr...</a:t>
+                        <a:t>設備は少し古いですが、とても清潔で快適です</a:t>
                       </a:r>
                       <a:endParaRPr lang="en-US" sz="900" dirty="0">
                         <a:latin typeface="Arial" charset="0"/>
@@ -13970,7 +13970,7 @@
                           <a:ea typeface="Arial" pitchFamily="34" charset="-122"/>
                           <a:cs typeface="Arial" pitchFamily="34" charset="-120"/>
                         </a:rPr>
-                        <a:t>朝食の改善要望</a:t>
+                        <a:t>部屋の狭さ</a:t>
                       </a:r>
                       <a:endParaRPr lang="en-US" sz="900" dirty="0">
                         <a:latin typeface="Arial" charset="0"/>
@@ -14038,7 +14038,7 @@
                           <a:ea typeface="Arial" pitchFamily="34" charset="-122"/>
                           <a:cs typeface="Arial" pitchFamily="34" charset="-120"/>
                         </a:rPr>
-                        <a:t>朝食なしのホテルと同じ価格なのに、朝食は無料です。 成田市で一番のお気に入り。朝食なしのホテルと同じ価格なのに、朝...</a:t>
+                        <a:t>Very good location,  nice staff, Too small, bathroom entr...</a:t>
                       </a:r>
                       <a:endParaRPr lang="en-US" sz="900" dirty="0">
                         <a:latin typeface="Arial" charset="0"/>
@@ -14244,7 +14244,7 @@
                           <a:ea typeface="Arial" pitchFamily="34" charset="-122"/>
                           <a:cs typeface="Arial" pitchFamily="34" charset="-120"/>
                         </a:rPr>
-                        <a:t>対応・サービスの不満</a:t>
+                        <a:t>朝食の改善要望</a:t>
                       </a:r>
                       <a:endParaRPr lang="en-US" sz="900" dirty="0">
                         <a:latin typeface="Arial" charset="0"/>
@@ -14312,7 +14312,7 @@
                           <a:ea typeface="Arial" pitchFamily="34" charset="-122"/>
                           <a:cs typeface="Arial" pitchFamily="34" charset="-120"/>
                         </a:rPr>
-                        <a:t>員工態度親切 一進房間有股臭味（發霉味），地毯稍嫌不乾淨 部屋に入るとカビ臭い匂いがして、カーペットも少し汚れていた</a:t>
+                        <a:t>朝食なしのホテルと同じ価格なのに、朝食は無料です。 成田市で一番のお気に入り。朝食なしのホテルと同じ価格なのに、朝...</a:t>
                       </a:r>
                       <a:endParaRPr lang="en-US" sz="900" dirty="0">
                         <a:latin typeface="Arial" charset="0"/>
@@ -14518,7 +14518,7 @@
                           <a:ea typeface="Arial" pitchFamily="34" charset="-122"/>
                           <a:cs typeface="Arial" pitchFamily="34" charset="-120"/>
                         </a:rPr>
-                        <a:t>設備の老朽化</a:t>
+                        <a:t>対応・サービスの不満</a:t>
                       </a:r>
                       <a:endParaRPr lang="en-US" sz="900" dirty="0">
                         <a:latin typeface="Arial" charset="0"/>
@@ -14586,7 +14586,7 @@
                           <a:ea typeface="Arial" pitchFamily="34" charset="-122"/>
                           <a:cs typeface="Arial" pitchFamily="34" charset="-120"/>
                         </a:rPr>
-                        <a:t>風呂が少し古い感じだった</a:t>
+                        <a:t>員工態度親切 一進房間有股臭味（發霉味），地毯稍嫌不乾淨 部屋に入るとカビ臭い匂いがして、カーペットも少し汚れていた</a:t>
                       </a:r>
                       <a:endParaRPr lang="en-US" sz="900" dirty="0">
                         <a:latin typeface="Arial" charset="0"/>
@@ -14654,7 +14654,7 @@
                           <a:ea typeface="Arial" pitchFamily="34" charset="-122"/>
                           <a:cs typeface="Arial" pitchFamily="34" charset="-120"/>
                         </a:rPr>
-                        <a:t>2件</a:t>
+                        <a:t>3件</a:t>
                       </a:r>
                       <a:endParaRPr lang="en-US" sz="900" dirty="0">
                         <a:latin typeface="Arial" charset="0"/>

--- a/納品レポート/ホテル別レポート/comfort_narita_口コミ分析レポート.pptx
+++ b/納品レポート/ホテル別レポート/comfort_narita_口コミ分析レポート.pptx
@@ -208,13 +208,13 @@
                 <c:formatCode>General</c:formatCode>
                 <c:ptCount val="6"/>
                 <c:pt idx="0">
-                  <c:v>9.56</c:v>
+                  <c:v>9.53</c:v>
                 </c:pt>
                 <c:pt idx="1">
                   <c:v>9.05</c:v>
                 </c:pt>
                 <c:pt idx="2">
-                  <c:v>8.38</c:v>
+                  <c:v>8.36</c:v>
                 </c:pt>
                 <c:pt idx="3">
                   <c:v>8.35</c:v>
@@ -566,7 +566,7 @@
               <c:numCache>
                 <c:ptCount val="3"/>
                 <c:pt idx="0">
-                  <c:v>108</c:v>
+                  <c:v>109</c:v>
                 </c:pt>
                 <c:pt idx="1">
                   <c:v>24</c:v>
@@ -809,10 +809,10 @@
                 <c:formatCode>General</c:formatCode>
                 <c:ptCount val="8"/>
                 <c:pt idx="0">
-                  <c:v>55</c:v>
+                  <c:v>54</c:v>
                 </c:pt>
                 <c:pt idx="1">
-                  <c:v>16</c:v>
+                  <c:v>18</c:v>
                 </c:pt>
                 <c:pt idx="2">
                   <c:v>37</c:v>
@@ -2781,7 +2781,7 @@
                 <a:ea typeface="Arial" pitchFamily="34" charset="-122"/>
                 <a:cs typeface="Arial" pitchFamily="34" charset="-120"/>
               </a:rPr>
-              <a:t>レビュー総数：136件（6サイト）</a:t>
+              <a:t>レビュー総数：137件（6サイト）</a:t>
             </a:r>
             <a:endParaRPr lang="en-US" sz="1000" dirty="0"/>
           </a:p>
@@ -2801,7 +2801,7 @@
                 <a:ea typeface="Arial" pitchFamily="34" charset="-122"/>
                 <a:cs typeface="Arial" pitchFamily="34" charset="-120"/>
               </a:rPr>
-              <a:t>作成日：2026年3月27日</a:t>
+              <a:t>作成日：2026年3月28日</a:t>
             </a:r>
             <a:endParaRPr lang="en-US" sz="1000" dirty="0"/>
           </a:p>
@@ -3621,7 +3621,7 @@
                           <a:ea typeface="Arial" pitchFamily="34" charset="-122"/>
                           <a:cs typeface="Arial" pitchFamily="34" charset="-120"/>
                         </a:rPr>
-                        <a:t>79.4%</a:t>
+                        <a:t>79.6%</a:t>
                       </a:r>
                       <a:endParaRPr lang="en-US" sz="1000" dirty="0">
                         <a:latin typeface="Arial" charset="0"/>
@@ -3689,7 +3689,7 @@
                           <a:ea typeface="Arial" pitchFamily="34" charset="-122"/>
                           <a:cs typeface="Arial" pitchFamily="34" charset="-120"/>
                         </a:rPr>
-                        <a:t>84%以上</a:t>
+                        <a:t>85%以上</a:t>
                       </a:r>
                       <a:endParaRPr lang="en-US" sz="1000" dirty="0">
                         <a:latin typeface="Arial" charset="0"/>
@@ -5481,7 +5481,7 @@
                 <a:ea typeface="Arial" pitchFamily="34" charset="-122"/>
                 <a:cs typeface="Arial" pitchFamily="34" charset="-120"/>
               </a:rPr>
-              <a:t>79.4%</a:t>
+              <a:t>79.6%</a:t>
             </a:r>
             <a:endParaRPr lang="en-US" sz="3200" dirty="0"/>
           </a:p>
@@ -5731,7 +5731,7 @@
                 <a:ea typeface="Arial" pitchFamily="34" charset="-122"/>
                 <a:cs typeface="Arial" pitchFamily="34" charset="-120"/>
               </a:rPr>
-              <a:t>136件</a:t>
+              <a:t>137件</a:t>
             </a:r>
             <a:endParaRPr lang="en-US" sz="3200" dirty="0"/>
           </a:p>
@@ -5879,7 +5879,7 @@
                 <a:ea typeface="Arial" pitchFamily="34" charset="-122"/>
                 <a:cs typeface="Arial" pitchFamily="34" charset="-120"/>
               </a:rPr>
-              <a:t>  ￼  無料の朝食サービスもあり、種類はシンプルながら満足度は高く、コストパフォーマンスの良さを感じました</a:t>
+              <a:t>  朝食もまあまあ</a:t>
             </a:r>
             <a:endParaRPr lang="en-US" sz="1100" dirty="0"/>
           </a:p>
@@ -5959,7 +5959,7 @@
                 <a:ea typeface="Arial" pitchFamily="34" charset="-122"/>
                 <a:cs typeface="Arial" pitchFamily="34" charset="-120"/>
               </a:rPr>
-              <a:t>  京成成田駅から徒歩2分ほど、JR成田駅からも徒歩圏内とアクセスが非常に良く、成田空港への移動にも便利な立地です</a:t>
+              <a:t>  立地が良い</a:t>
             </a:r>
             <a:endParaRPr lang="en-US" sz="1100" dirty="0"/>
           </a:p>
@@ -6665,7 +6665,7 @@
                 <a:ea typeface="Arial" pitchFamily="34" charset="-122"/>
                 <a:cs typeface="Arial" pitchFamily="34" charset="-120"/>
               </a:rPr>
-              <a:t>79.4%</a:t>
+              <a:t>79.6%</a:t>
             </a:r>
             <a:endParaRPr lang="en-US" sz="3200" dirty="0"/>
           </a:p>
@@ -6915,7 +6915,7 @@
                 <a:ea typeface="Arial" pitchFamily="34" charset="-122"/>
                 <a:cs typeface="Arial" pitchFamily="34" charset="-120"/>
               </a:rPr>
-              <a:t>136件</a:t>
+              <a:t>137件</a:t>
             </a:r>
             <a:endParaRPr lang="en-US" sz="3200" dirty="0"/>
           </a:p>
@@ -7336,7 +7336,7 @@
                 <a:ea typeface="Arial" pitchFamily="34" charset="-122"/>
                 <a:cs typeface="Arial" pitchFamily="34" charset="-120"/>
               </a:rPr>
-              <a:t>Trip.com(9.56)が最高スコア。</a:t>
+              <a:t>Trip.com(9.53)が最高スコア。</a:t>
             </a:r>
             <a:endParaRPr lang="en-US" sz="1100" dirty="0"/>
           </a:p>
@@ -7894,7 +7894,7 @@
                           <a:ea typeface="Arial" pitchFamily="34" charset="-122"/>
                           <a:cs typeface="Arial" pitchFamily="34" charset="-120"/>
                         </a:rPr>
-                        <a:t>18</a:t>
+                        <a:t>19</a:t>
                       </a:r>
                       <a:endParaRPr lang="en-US" sz="900" dirty="0">
                         <a:latin typeface="Arial" charset="0"/>
@@ -7962,7 +7962,7 @@
                           <a:ea typeface="Arial" pitchFamily="34" charset="-122"/>
                           <a:cs typeface="Arial" pitchFamily="34" charset="-120"/>
                         </a:rPr>
-                        <a:t>9.56</a:t>
+                        <a:t>9.53</a:t>
                       </a:r>
                       <a:endParaRPr lang="en-US" sz="900" dirty="0">
                         <a:latin typeface="Arial" charset="0"/>
@@ -8098,7 +8098,7 @@
                           <a:ea typeface="Arial" pitchFamily="34" charset="-122"/>
                           <a:cs typeface="Arial" pitchFamily="34" charset="-120"/>
                         </a:rPr>
-                        <a:t>9.56</a:t>
+                        <a:t>9.53</a:t>
                       </a:r>
                       <a:endParaRPr lang="en-US" sz="900" dirty="0">
                         <a:latin typeface="Arial" charset="0"/>
@@ -8646,7 +8646,7 @@
                           <a:ea typeface="Arial" pitchFamily="34" charset="-122"/>
                           <a:cs typeface="Arial" pitchFamily="34" charset="-120"/>
                         </a:rPr>
-                        <a:t>8.38</a:t>
+                        <a:t>8.36</a:t>
                       </a:r>
                       <a:endParaRPr lang="en-US" sz="900" dirty="0">
                         <a:latin typeface="Arial" charset="0"/>
@@ -8782,7 +8782,7 @@
                           <a:ea typeface="Arial" pitchFamily="34" charset="-122"/>
                           <a:cs typeface="Arial" pitchFamily="34" charset="-120"/>
                         </a:rPr>
-                        <a:t>8.38</a:t>
+                        <a:t>8.36</a:t>
                       </a:r>
                       <a:endParaRPr lang="en-US" sz="900" dirty="0">
                         <a:latin typeface="Arial" charset="0"/>
@@ -10216,7 +10216,7 @@
                 <a:ea typeface="Arial" pitchFamily="34" charset="-122"/>
                 <a:cs typeface="Arial" pitchFamily="34" charset="-120"/>
               </a:rPr>
-              <a:t>108件（79.4%）</a:t>
+              <a:t>109件（79.6%）</a:t>
             </a:r>
             <a:endParaRPr lang="en-US" sz="1100" dirty="0"/>
           </a:p>
@@ -10314,7 +10314,7 @@
                 <a:ea typeface="Arial" pitchFamily="34" charset="-122"/>
                 <a:cs typeface="Arial" pitchFamily="34" charset="-120"/>
               </a:rPr>
-              <a:t>24件（17.6%）</a:t>
+              <a:t>24件（17.5%）</a:t>
             </a:r>
             <a:endParaRPr lang="en-US" sz="1100" dirty="0"/>
           </a:p>
@@ -10824,7 +10824,7 @@
                 <a:ea typeface="Arial" pitchFamily="34" charset="-122"/>
                 <a:cs typeface="Arial" pitchFamily="34" charset="-120"/>
               </a:rPr>
-              <a:t>￼  無料の朝食サービスもあり、種類はシンプルながら満足度は高く、コストパフォーマンスの良さを感じました</a:t>
+              <a:t>朝食もまあまあ</a:t>
             </a:r>
             <a:endParaRPr lang="en-US" sz="900" dirty="0"/>
           </a:p>
@@ -10863,7 +10863,7 @@
                 <a:ea typeface="Arial" pitchFamily="34" charset="-122"/>
                 <a:cs typeface="Arial" pitchFamily="34" charset="-120"/>
               </a:rPr>
-              <a:t>「無料の朝食バイキングおいしかったです」</a:t>
+              <a:t>「￼  無料の朝食サービスもあり、種類はシンプルながら満足度は高く、コストパフォーマンスの良さを感じました」</a:t>
             </a:r>
             <a:endParaRPr lang="en-US" sz="900" dirty="0"/>
           </a:p>
@@ -11270,7 +11270,7 @@
                 <a:ea typeface="Arial" pitchFamily="34" charset="-122"/>
                 <a:cs typeface="Arial" pitchFamily="34" charset="-120"/>
               </a:rPr>
-              <a:t>京成成田駅から徒歩2分ほど、JR成田駅からも徒歩圏内とアクセスが非常に良く、成田空港への移動にも便利な立地です</a:t>
+              <a:t>立地が良い</a:t>
             </a:r>
             <a:endParaRPr lang="en-US" sz="900" dirty="0"/>
           </a:p>
@@ -11309,7 +11309,7 @@
                 <a:ea typeface="Arial" pitchFamily="34" charset="-122"/>
                 <a:cs typeface="Arial" pitchFamily="34" charset="-120"/>
               </a:rPr>
-              <a:t>「โลเคชั่นดี สะดวกมาก ห้องสะอาดดี เดินทางไปเที่ยวได้สะดวกดี...」</a:t>
+              <a:t>「京成成田駅から徒歩2分ほど、JR成田駅からも徒歩圏内とアクセスが非常に良く、成田空港への移動にも便利な立地です」</a:t>
             </a:r>
             <a:endParaRPr lang="en-US" sz="900" dirty="0"/>
           </a:p>

--- a/納品レポート/ホテル別レポート/comfort_narita_口コミ分析レポート.pptx
+++ b/納品レポート/ホテル別レポート/comfort_narita_口コミ分析レポート.pptx
@@ -234,7 +234,7 @@
             <c:bubble3D val="0"/>
             <c:spPr>
               <a:solidFill>
-                <a:srgbClr val="DC2626"/>
+                <a:srgbClr val="EA580C"/>
               </a:solidFill>
               <a:effectLst/>
             </c:spPr>
@@ -252,10 +252,10 @@
                     <c:v>Google</c:v>
                   </c:pt>
                   <c:pt idx="2">
-                    <c:v>Booking.com</c:v>
+                    <c:v>楽天トラベル</c:v>
                   </c:pt>
                   <c:pt idx="3">
-                    <c:v>楽天トラベル</c:v>
+                    <c:v>Booking.com</c:v>
                   </c:pt>
                   <c:pt idx="4">
                     <c:v>じゃらん</c:v>
@@ -277,19 +277,19 @@
                   <c:v>9.53</c:v>
                 </c:pt>
                 <c:pt idx="1">
-                  <c:v>9.05</c:v>
+                  <c:v>9</c:v>
                 </c:pt>
                 <c:pt idx="2">
-                  <c:v>8.36</c:v>
+                  <c:v>8.35</c:v>
                 </c:pt>
                 <c:pt idx="3">
-                  <c:v>8.35</c:v>
+                  <c:v>8.28</c:v>
                 </c:pt>
                 <c:pt idx="4">
                   <c:v>8</c:v>
                 </c:pt>
                 <c:pt idx="5">
-                  <c:v>6.78</c:v>
+                  <c:v>7.2</c:v>
                 </c:pt>
               </c:numCache>
             </c:numRef>
@@ -631,16 +631,16 @@
                   <c:v>54</c:v>
                 </c:pt>
                 <c:pt idx="1">
-                  <c:v>18</c:v>
+                  <c:v>19</c:v>
                 </c:pt>
                 <c:pt idx="2">
-                  <c:v>37</c:v>
+                  <c:v>38</c:v>
                 </c:pt>
                 <c:pt idx="3">
-                  <c:v>8</c:v>
+                  <c:v>9</c:v>
                 </c:pt>
                 <c:pt idx="4">
-                  <c:v>15</c:v>
+                  <c:v>14</c:v>
                 </c:pt>
                 <c:pt idx="5">
                   <c:v>1</c:v>
@@ -649,7 +649,7 @@
                   <c:v>3</c:v>
                 </c:pt>
                 <c:pt idx="7">
-                  <c:v>1</c:v>
+                  <c:v>2</c:v>
                 </c:pt>
               </c:numCache>
             </c:numRef>
@@ -2537,7 +2537,7 @@
                 <a:ea typeface="Arial" pitchFamily="34" charset="-122"/>
                 <a:cs typeface="Arial" pitchFamily="34" charset="-120"/>
               </a:rPr>
-              <a:t>レビュー総数：137件</a:t>
+              <a:t>レビュー総数：140件</a:t>
             </a:r>
             <a:endParaRPr lang="en-US" sz="1000" dirty="0"/>
           </a:p>
@@ -2817,7 +2817,7 @@
                 <a:ea typeface="Arial" pitchFamily="34" charset="-122"/>
                 <a:cs typeface="Arial" pitchFamily="34" charset="-120"/>
               </a:rPr>
-              <a:t>コンフォートホテル成田は全体平均8.50点（10pt換算）、高評価率79.6%を達成しています。本レポートで示した改善施策を段階的に実施することで、さらなる顧客満足度向上が期待できます。</a:t>
+              <a:t>コンフォートホテル成田は全体平均8.46点（10pt換算）、高評価率79.3%を達成しています。本レポートで示した改善施策を段階的に実施することで、さらなる顧客満足度向上が期待できます。</a:t>
             </a:r>
             <a:endParaRPr lang="en-US" sz="1200" dirty="0"/>
           </a:p>
@@ -3254,7 +3254,7 @@
                 <a:ea typeface="Arial" pitchFamily="34" charset="-122"/>
                 <a:cs typeface="Arial" pitchFamily="34" charset="-120"/>
               </a:rPr>
-              <a:t>8.50</a:t>
+              <a:t>8.46</a:t>
             </a:r>
             <a:endParaRPr lang="en-US" sz="2800" dirty="0"/>
           </a:p>
@@ -3372,7 +3372,7 @@
                 <a:ea typeface="Arial" pitchFamily="34" charset="-122"/>
                 <a:cs typeface="Arial" pitchFamily="34" charset="-120"/>
               </a:rPr>
-              <a:t>79.6%</a:t>
+              <a:t>79.3%</a:t>
             </a:r>
             <a:endParaRPr lang="en-US" sz="2800" dirty="0"/>
           </a:p>
@@ -3490,7 +3490,7 @@
                 <a:ea typeface="Arial" pitchFamily="34" charset="-122"/>
                 <a:cs typeface="Arial" pitchFamily="34" charset="-120"/>
               </a:rPr>
-              <a:t>2.9%</a:t>
+              <a:t>3.6%</a:t>
             </a:r>
             <a:endParaRPr lang="en-US" sz="2800" dirty="0"/>
           </a:p>
@@ -3608,7 +3608,7 @@
                 <a:ea typeface="Arial" pitchFamily="34" charset="-122"/>
                 <a:cs typeface="Arial" pitchFamily="34" charset="-120"/>
               </a:rPr>
-              <a:t>137件</a:t>
+              <a:t>140件</a:t>
             </a:r>
             <a:endParaRPr lang="en-US" sz="2800" dirty="0"/>
           </a:p>
@@ -4689,7 +4689,7 @@
                           <a:ea typeface="Arial" pitchFamily="34" charset="-122"/>
                           <a:cs typeface="Arial" pitchFamily="34" charset="-120"/>
                         </a:rPr>
-                        <a:t>21</a:t>
+                        <a:t>20</a:t>
                       </a:r>
                       <a:endParaRPr lang="en-US" sz="800" dirty="0">
                         <a:latin typeface="Arial" charset="0"/>
@@ -4757,7 +4757,7 @@
                           <a:ea typeface="Arial" pitchFamily="34" charset="-122"/>
                           <a:cs typeface="Arial" pitchFamily="34" charset="-120"/>
                         </a:rPr>
-                        <a:t>4.52/5</a:t>
+                        <a:t>4.50/5</a:t>
                       </a:r>
                       <a:endParaRPr lang="en-US" sz="800" dirty="0">
                         <a:latin typeface="Arial" charset="0"/>
@@ -4825,7 +4825,7 @@
                           <a:ea typeface="Arial" pitchFamily="34" charset="-122"/>
                           <a:cs typeface="Arial" pitchFamily="34" charset="-120"/>
                         </a:rPr>
-                        <a:t>9.05</a:t>
+                        <a:t>9.00</a:t>
                       </a:r>
                       <a:endParaRPr lang="en-US" sz="800" dirty="0">
                         <a:latin typeface="Arial" charset="0"/>
@@ -4894,6 +4894,348 @@
                           <a:cs typeface="Arial" pitchFamily="34" charset="-120"/>
                         </a:rPr>
                         <a:t>優秀</a:t>
+                      </a:r>
+                      <a:endParaRPr lang="en-US" sz="800" dirty="0">
+                        <a:latin typeface="Arial" charset="0"/>
+                        <a:ea typeface="Arial" charset="0"/>
+                        <a:cs typeface="Arial" charset="0"/>
+                      </a:endParaRPr>
+                    </a:p>
+                  </a:txBody>
+                  <a:tcPr marL="91440" marR="91440" marT="45720" marB="45720">
+                    <a:lnL w="6350" cap="flat" cmpd="sng" algn="ctr">
+                      <a:solidFill>
+                        <a:srgbClr val="CCCCCC"/>
+                      </a:solidFill>
+                      <a:prstDash val="solid"/>
+                      <a:round/>
+                      <a:headEnd type="none" w="med" len="med"/>
+                      <a:tailEnd type="none" w="med" len="med"/>
+                    </a:lnL>
+                    <a:lnR w="6350" cap="flat" cmpd="sng" algn="ctr">
+                      <a:solidFill>
+                        <a:srgbClr val="CCCCCC"/>
+                      </a:solidFill>
+                      <a:prstDash val="solid"/>
+                      <a:round/>
+                      <a:headEnd type="none" w="med" len="med"/>
+                      <a:tailEnd type="none" w="med" len="med"/>
+                    </a:lnR>
+                    <a:lnT w="6350" cap="flat" cmpd="sng" algn="ctr">
+                      <a:solidFill>
+                        <a:srgbClr val="CCCCCC"/>
+                      </a:solidFill>
+                      <a:prstDash val="solid"/>
+                      <a:round/>
+                      <a:headEnd type="none" w="med" len="med"/>
+                      <a:tailEnd type="none" w="med" len="med"/>
+                    </a:lnT>
+                    <a:lnB w="6350" cap="flat" cmpd="sng" algn="ctr">
+                      <a:solidFill>
+                        <a:srgbClr val="CCCCCC"/>
+                      </a:solidFill>
+                      <a:prstDash val="solid"/>
+                      <a:round/>
+                      <a:headEnd type="none" w="med" len="med"/>
+                      <a:tailEnd type="none" w="med" len="med"/>
+                    </a:lnB>
+                    <a:solidFill>
+                      <a:srgbClr val="FFFFFF"/>
+                    </a:solidFill>
+                  </a:tcPr>
+                </a:tc>
+              </a:tr>
+              <a:tr h="0">
+                <a:tc>
+                  <a:txBody>
+                    <a:bodyPr/>
+                    <a:lstStyle/>
+                    <a:p>
+                      <a:pPr algn="ctr" indent="0" marL="0">
+                        <a:buNone/>
+                      </a:pPr>
+                      <a:r>
+                        <a:rPr lang="en-US" sz="800" dirty="0">
+                          <a:solidFill>
+                            <a:srgbClr val="000000"/>
+                          </a:solidFill>
+                          <a:latin typeface="Arial" pitchFamily="34" charset="0"/>
+                          <a:ea typeface="Arial" pitchFamily="34" charset="-122"/>
+                          <a:cs typeface="Arial" pitchFamily="34" charset="-120"/>
+                        </a:rPr>
+                        <a:t>楽天トラベル</a:t>
+                      </a:r>
+                      <a:endParaRPr lang="en-US" sz="800" dirty="0">
+                        <a:latin typeface="Arial" charset="0"/>
+                        <a:ea typeface="Arial" charset="0"/>
+                        <a:cs typeface="Arial" charset="0"/>
+                      </a:endParaRPr>
+                    </a:p>
+                  </a:txBody>
+                  <a:tcPr marL="91440" marR="91440" marT="45720" marB="45720">
+                    <a:lnL w="6350" cap="flat" cmpd="sng" algn="ctr">
+                      <a:solidFill>
+                        <a:srgbClr val="CCCCCC"/>
+                      </a:solidFill>
+                      <a:prstDash val="solid"/>
+                      <a:round/>
+                      <a:headEnd type="none" w="med" len="med"/>
+                      <a:tailEnd type="none" w="med" len="med"/>
+                    </a:lnL>
+                    <a:lnR w="6350" cap="flat" cmpd="sng" algn="ctr">
+                      <a:solidFill>
+                        <a:srgbClr val="CCCCCC"/>
+                      </a:solidFill>
+                      <a:prstDash val="solid"/>
+                      <a:round/>
+                      <a:headEnd type="none" w="med" len="med"/>
+                      <a:tailEnd type="none" w="med" len="med"/>
+                    </a:lnR>
+                    <a:lnT w="6350" cap="flat" cmpd="sng" algn="ctr">
+                      <a:solidFill>
+                        <a:srgbClr val="CCCCCC"/>
+                      </a:solidFill>
+                      <a:prstDash val="solid"/>
+                      <a:round/>
+                      <a:headEnd type="none" w="med" len="med"/>
+                      <a:tailEnd type="none" w="med" len="med"/>
+                    </a:lnT>
+                    <a:lnB w="6350" cap="flat" cmpd="sng" algn="ctr">
+                      <a:solidFill>
+                        <a:srgbClr val="CCCCCC"/>
+                      </a:solidFill>
+                      <a:prstDash val="solid"/>
+                      <a:round/>
+                      <a:headEnd type="none" w="med" len="med"/>
+                      <a:tailEnd type="none" w="med" len="med"/>
+                    </a:lnB>
+                    <a:solidFill>
+                      <a:srgbClr val="FFFFFF"/>
+                    </a:solidFill>
+                  </a:tcPr>
+                </a:tc>
+                <a:tc>
+                  <a:txBody>
+                    <a:bodyPr/>
+                    <a:lstStyle/>
+                    <a:p>
+                      <a:pPr algn="ctr" indent="0" marL="0">
+                        <a:buNone/>
+                      </a:pPr>
+                      <a:r>
+                        <a:rPr lang="en-US" sz="800" dirty="0">
+                          <a:solidFill>
+                            <a:srgbClr val="000000"/>
+                          </a:solidFill>
+                          <a:latin typeface="Arial" pitchFamily="34" charset="0"/>
+                          <a:ea typeface="Arial" pitchFamily="34" charset="-122"/>
+                          <a:cs typeface="Arial" pitchFamily="34" charset="-120"/>
+                        </a:rPr>
+                        <a:t>23</a:t>
+                      </a:r>
+                      <a:endParaRPr lang="en-US" sz="800" dirty="0">
+                        <a:latin typeface="Arial" charset="0"/>
+                        <a:ea typeface="Arial" charset="0"/>
+                        <a:cs typeface="Arial" charset="0"/>
+                      </a:endParaRPr>
+                    </a:p>
+                  </a:txBody>
+                  <a:tcPr marL="91440" marR="91440" marT="45720" marB="45720">
+                    <a:lnL w="6350" cap="flat" cmpd="sng" algn="ctr">
+                      <a:solidFill>
+                        <a:srgbClr val="CCCCCC"/>
+                      </a:solidFill>
+                      <a:prstDash val="solid"/>
+                      <a:round/>
+                      <a:headEnd type="none" w="med" len="med"/>
+                      <a:tailEnd type="none" w="med" len="med"/>
+                    </a:lnL>
+                    <a:lnR w="6350" cap="flat" cmpd="sng" algn="ctr">
+                      <a:solidFill>
+                        <a:srgbClr val="CCCCCC"/>
+                      </a:solidFill>
+                      <a:prstDash val="solid"/>
+                      <a:round/>
+                      <a:headEnd type="none" w="med" len="med"/>
+                      <a:tailEnd type="none" w="med" len="med"/>
+                    </a:lnR>
+                    <a:lnT w="6350" cap="flat" cmpd="sng" algn="ctr">
+                      <a:solidFill>
+                        <a:srgbClr val="CCCCCC"/>
+                      </a:solidFill>
+                      <a:prstDash val="solid"/>
+                      <a:round/>
+                      <a:headEnd type="none" w="med" len="med"/>
+                      <a:tailEnd type="none" w="med" len="med"/>
+                    </a:lnT>
+                    <a:lnB w="6350" cap="flat" cmpd="sng" algn="ctr">
+                      <a:solidFill>
+                        <a:srgbClr val="CCCCCC"/>
+                      </a:solidFill>
+                      <a:prstDash val="solid"/>
+                      <a:round/>
+                      <a:headEnd type="none" w="med" len="med"/>
+                      <a:tailEnd type="none" w="med" len="med"/>
+                    </a:lnB>
+                    <a:solidFill>
+                      <a:srgbClr val="FFFFFF"/>
+                    </a:solidFill>
+                  </a:tcPr>
+                </a:tc>
+                <a:tc>
+                  <a:txBody>
+                    <a:bodyPr/>
+                    <a:lstStyle/>
+                    <a:p>
+                      <a:pPr algn="ctr" indent="0" marL="0">
+                        <a:buNone/>
+                      </a:pPr>
+                      <a:r>
+                        <a:rPr lang="en-US" sz="800" dirty="0">
+                          <a:solidFill>
+                            <a:srgbClr val="000000"/>
+                          </a:solidFill>
+                          <a:latin typeface="Arial" pitchFamily="34" charset="0"/>
+                          <a:ea typeface="Arial" pitchFamily="34" charset="-122"/>
+                          <a:cs typeface="Arial" pitchFamily="34" charset="-120"/>
+                        </a:rPr>
+                        <a:t>4.17/5</a:t>
+                      </a:r>
+                      <a:endParaRPr lang="en-US" sz="800" dirty="0">
+                        <a:latin typeface="Arial" charset="0"/>
+                        <a:ea typeface="Arial" charset="0"/>
+                        <a:cs typeface="Arial" charset="0"/>
+                      </a:endParaRPr>
+                    </a:p>
+                  </a:txBody>
+                  <a:tcPr marL="91440" marR="91440" marT="45720" marB="45720">
+                    <a:lnL w="6350" cap="flat" cmpd="sng" algn="ctr">
+                      <a:solidFill>
+                        <a:srgbClr val="CCCCCC"/>
+                      </a:solidFill>
+                      <a:prstDash val="solid"/>
+                      <a:round/>
+                      <a:headEnd type="none" w="med" len="med"/>
+                      <a:tailEnd type="none" w="med" len="med"/>
+                    </a:lnL>
+                    <a:lnR w="6350" cap="flat" cmpd="sng" algn="ctr">
+                      <a:solidFill>
+                        <a:srgbClr val="CCCCCC"/>
+                      </a:solidFill>
+                      <a:prstDash val="solid"/>
+                      <a:round/>
+                      <a:headEnd type="none" w="med" len="med"/>
+                      <a:tailEnd type="none" w="med" len="med"/>
+                    </a:lnR>
+                    <a:lnT w="6350" cap="flat" cmpd="sng" algn="ctr">
+                      <a:solidFill>
+                        <a:srgbClr val="CCCCCC"/>
+                      </a:solidFill>
+                      <a:prstDash val="solid"/>
+                      <a:round/>
+                      <a:headEnd type="none" w="med" len="med"/>
+                      <a:tailEnd type="none" w="med" len="med"/>
+                    </a:lnT>
+                    <a:lnB w="6350" cap="flat" cmpd="sng" algn="ctr">
+                      <a:solidFill>
+                        <a:srgbClr val="CCCCCC"/>
+                      </a:solidFill>
+                      <a:prstDash val="solid"/>
+                      <a:round/>
+                      <a:headEnd type="none" w="med" len="med"/>
+                      <a:tailEnd type="none" w="med" len="med"/>
+                    </a:lnB>
+                    <a:solidFill>
+                      <a:srgbClr val="FFFFFF"/>
+                    </a:solidFill>
+                  </a:tcPr>
+                </a:tc>
+                <a:tc>
+                  <a:txBody>
+                    <a:bodyPr/>
+                    <a:lstStyle/>
+                    <a:p>
+                      <a:pPr algn="ctr" indent="0" marL="0">
+                        <a:buNone/>
+                      </a:pPr>
+                      <a:r>
+                        <a:rPr lang="en-US" sz="800" dirty="0">
+                          <a:solidFill>
+                            <a:srgbClr val="000000"/>
+                          </a:solidFill>
+                          <a:latin typeface="Arial" pitchFamily="34" charset="0"/>
+                          <a:ea typeface="Arial" pitchFamily="34" charset="-122"/>
+                          <a:cs typeface="Arial" pitchFamily="34" charset="-120"/>
+                        </a:rPr>
+                        <a:t>8.35</a:t>
+                      </a:r>
+                      <a:endParaRPr lang="en-US" sz="800" dirty="0">
+                        <a:latin typeface="Arial" charset="0"/>
+                        <a:ea typeface="Arial" charset="0"/>
+                        <a:cs typeface="Arial" charset="0"/>
+                      </a:endParaRPr>
+                    </a:p>
+                  </a:txBody>
+                  <a:tcPr marL="91440" marR="91440" marT="45720" marB="45720">
+                    <a:lnL w="6350" cap="flat" cmpd="sng" algn="ctr">
+                      <a:solidFill>
+                        <a:srgbClr val="CCCCCC"/>
+                      </a:solidFill>
+                      <a:prstDash val="solid"/>
+                      <a:round/>
+                      <a:headEnd type="none" w="med" len="med"/>
+                      <a:tailEnd type="none" w="med" len="med"/>
+                    </a:lnL>
+                    <a:lnR w="6350" cap="flat" cmpd="sng" algn="ctr">
+                      <a:solidFill>
+                        <a:srgbClr val="CCCCCC"/>
+                      </a:solidFill>
+                      <a:prstDash val="solid"/>
+                      <a:round/>
+                      <a:headEnd type="none" w="med" len="med"/>
+                      <a:tailEnd type="none" w="med" len="med"/>
+                    </a:lnR>
+                    <a:lnT w="6350" cap="flat" cmpd="sng" algn="ctr">
+                      <a:solidFill>
+                        <a:srgbClr val="CCCCCC"/>
+                      </a:solidFill>
+                      <a:prstDash val="solid"/>
+                      <a:round/>
+                      <a:headEnd type="none" w="med" len="med"/>
+                      <a:tailEnd type="none" w="med" len="med"/>
+                    </a:lnT>
+                    <a:lnB w="6350" cap="flat" cmpd="sng" algn="ctr">
+                      <a:solidFill>
+                        <a:srgbClr val="CCCCCC"/>
+                      </a:solidFill>
+                      <a:prstDash val="solid"/>
+                      <a:round/>
+                      <a:headEnd type="none" w="med" len="med"/>
+                      <a:tailEnd type="none" w="med" len="med"/>
+                    </a:lnB>
+                    <a:solidFill>
+                      <a:srgbClr val="FFFFFF"/>
+                    </a:solidFill>
+                  </a:tcPr>
+                </a:tc>
+                <a:tc>
+                  <a:txBody>
+                    <a:bodyPr/>
+                    <a:lstStyle/>
+                    <a:p>
+                      <a:pPr algn="ctr" indent="0" marL="0">
+                        <a:buNone/>
+                      </a:pPr>
+                      <a:r>
+                        <a:rPr lang="en-US" sz="800" dirty="0">
+                          <a:solidFill>
+                            <a:srgbClr val="000000"/>
+                          </a:solidFill>
+                          <a:latin typeface="Arial" pitchFamily="34" charset="0"/>
+                          <a:ea typeface="Arial" pitchFamily="34" charset="-122"/>
+                          <a:cs typeface="Arial" pitchFamily="34" charset="-120"/>
+                        </a:rPr>
+                        <a:t>良好</a:t>
                       </a:r>
                       <a:endParaRPr lang="en-US" sz="800" dirty="0">
                         <a:latin typeface="Arial" charset="0"/>
@@ -5031,7 +5373,7 @@
                           <a:ea typeface="Arial" pitchFamily="34" charset="-122"/>
                           <a:cs typeface="Arial" pitchFamily="34" charset="-120"/>
                         </a:rPr>
-                        <a:t>55</a:t>
+                        <a:t>58</a:t>
                       </a:r>
                       <a:endParaRPr lang="en-US" sz="800" dirty="0">
                         <a:latin typeface="Arial" charset="0"/>
@@ -5099,7 +5441,7 @@
                           <a:ea typeface="Arial" pitchFamily="34" charset="-122"/>
                           <a:cs typeface="Arial" pitchFamily="34" charset="-120"/>
                         </a:rPr>
-                        <a:t>8.36/10</a:t>
+                        <a:t>8.28/10</a:t>
                       </a:r>
                       <a:endParaRPr lang="en-US" sz="800" dirty="0">
                         <a:latin typeface="Arial" charset="0"/>
@@ -5167,349 +5509,7 @@
                           <a:ea typeface="Arial" pitchFamily="34" charset="-122"/>
                           <a:cs typeface="Arial" pitchFamily="34" charset="-120"/>
                         </a:rPr>
-                        <a:t>8.36</a:t>
-                      </a:r>
-                      <a:endParaRPr lang="en-US" sz="800" dirty="0">
-                        <a:latin typeface="Arial" charset="0"/>
-                        <a:ea typeface="Arial" charset="0"/>
-                        <a:cs typeface="Arial" charset="0"/>
-                      </a:endParaRPr>
-                    </a:p>
-                  </a:txBody>
-                  <a:tcPr marL="91440" marR="91440" marT="45720" marB="45720">
-                    <a:lnL w="6350" cap="flat" cmpd="sng" algn="ctr">
-                      <a:solidFill>
-                        <a:srgbClr val="CCCCCC"/>
-                      </a:solidFill>
-                      <a:prstDash val="solid"/>
-                      <a:round/>
-                      <a:headEnd type="none" w="med" len="med"/>
-                      <a:tailEnd type="none" w="med" len="med"/>
-                    </a:lnL>
-                    <a:lnR w="6350" cap="flat" cmpd="sng" algn="ctr">
-                      <a:solidFill>
-                        <a:srgbClr val="CCCCCC"/>
-                      </a:solidFill>
-                      <a:prstDash val="solid"/>
-                      <a:round/>
-                      <a:headEnd type="none" w="med" len="med"/>
-                      <a:tailEnd type="none" w="med" len="med"/>
-                    </a:lnR>
-                    <a:lnT w="6350" cap="flat" cmpd="sng" algn="ctr">
-                      <a:solidFill>
-                        <a:srgbClr val="CCCCCC"/>
-                      </a:solidFill>
-                      <a:prstDash val="solid"/>
-                      <a:round/>
-                      <a:headEnd type="none" w="med" len="med"/>
-                      <a:tailEnd type="none" w="med" len="med"/>
-                    </a:lnT>
-                    <a:lnB w="6350" cap="flat" cmpd="sng" algn="ctr">
-                      <a:solidFill>
-                        <a:srgbClr val="CCCCCC"/>
-                      </a:solidFill>
-                      <a:prstDash val="solid"/>
-                      <a:round/>
-                      <a:headEnd type="none" w="med" len="med"/>
-                      <a:tailEnd type="none" w="med" len="med"/>
-                    </a:lnB>
-                    <a:solidFill>
-                      <a:srgbClr val="FFFFFF"/>
-                    </a:solidFill>
-                  </a:tcPr>
-                </a:tc>
-                <a:tc>
-                  <a:txBody>
-                    <a:bodyPr/>
-                    <a:lstStyle/>
-                    <a:p>
-                      <a:pPr algn="ctr" indent="0" marL="0">
-                        <a:buNone/>
-                      </a:pPr>
-                      <a:r>
-                        <a:rPr lang="en-US" sz="800" dirty="0">
-                          <a:solidFill>
-                            <a:srgbClr val="000000"/>
-                          </a:solidFill>
-                          <a:latin typeface="Arial" pitchFamily="34" charset="0"/>
-                          <a:ea typeface="Arial" pitchFamily="34" charset="-122"/>
-                          <a:cs typeface="Arial" pitchFamily="34" charset="-120"/>
-                        </a:rPr>
-                        <a:t>良好</a:t>
-                      </a:r>
-                      <a:endParaRPr lang="en-US" sz="800" dirty="0">
-                        <a:latin typeface="Arial" charset="0"/>
-                        <a:ea typeface="Arial" charset="0"/>
-                        <a:cs typeface="Arial" charset="0"/>
-                      </a:endParaRPr>
-                    </a:p>
-                  </a:txBody>
-                  <a:tcPr marL="91440" marR="91440" marT="45720" marB="45720">
-                    <a:lnL w="6350" cap="flat" cmpd="sng" algn="ctr">
-                      <a:solidFill>
-                        <a:srgbClr val="CCCCCC"/>
-                      </a:solidFill>
-                      <a:prstDash val="solid"/>
-                      <a:round/>
-                      <a:headEnd type="none" w="med" len="med"/>
-                      <a:tailEnd type="none" w="med" len="med"/>
-                    </a:lnL>
-                    <a:lnR w="6350" cap="flat" cmpd="sng" algn="ctr">
-                      <a:solidFill>
-                        <a:srgbClr val="CCCCCC"/>
-                      </a:solidFill>
-                      <a:prstDash val="solid"/>
-                      <a:round/>
-                      <a:headEnd type="none" w="med" len="med"/>
-                      <a:tailEnd type="none" w="med" len="med"/>
-                    </a:lnR>
-                    <a:lnT w="6350" cap="flat" cmpd="sng" algn="ctr">
-                      <a:solidFill>
-                        <a:srgbClr val="CCCCCC"/>
-                      </a:solidFill>
-                      <a:prstDash val="solid"/>
-                      <a:round/>
-                      <a:headEnd type="none" w="med" len="med"/>
-                      <a:tailEnd type="none" w="med" len="med"/>
-                    </a:lnT>
-                    <a:lnB w="6350" cap="flat" cmpd="sng" algn="ctr">
-                      <a:solidFill>
-                        <a:srgbClr val="CCCCCC"/>
-                      </a:solidFill>
-                      <a:prstDash val="solid"/>
-                      <a:round/>
-                      <a:headEnd type="none" w="med" len="med"/>
-                      <a:tailEnd type="none" w="med" len="med"/>
-                    </a:lnB>
-                    <a:solidFill>
-                      <a:srgbClr val="FFFFFF"/>
-                    </a:solidFill>
-                  </a:tcPr>
-                </a:tc>
-              </a:tr>
-              <a:tr h="0">
-                <a:tc>
-                  <a:txBody>
-                    <a:bodyPr/>
-                    <a:lstStyle/>
-                    <a:p>
-                      <a:pPr algn="ctr" indent="0" marL="0">
-                        <a:buNone/>
-                      </a:pPr>
-                      <a:r>
-                        <a:rPr lang="en-US" sz="800" dirty="0">
-                          <a:solidFill>
-                            <a:srgbClr val="000000"/>
-                          </a:solidFill>
-                          <a:latin typeface="Arial" pitchFamily="34" charset="0"/>
-                          <a:ea typeface="Arial" pitchFamily="34" charset="-122"/>
-                          <a:cs typeface="Arial" pitchFamily="34" charset="-120"/>
-                        </a:rPr>
-                        <a:t>楽天トラベル</a:t>
-                      </a:r>
-                      <a:endParaRPr lang="en-US" sz="800" dirty="0">
-                        <a:latin typeface="Arial" charset="0"/>
-                        <a:ea typeface="Arial" charset="0"/>
-                        <a:cs typeface="Arial" charset="0"/>
-                      </a:endParaRPr>
-                    </a:p>
-                  </a:txBody>
-                  <a:tcPr marL="91440" marR="91440" marT="45720" marB="45720">
-                    <a:lnL w="6350" cap="flat" cmpd="sng" algn="ctr">
-                      <a:solidFill>
-                        <a:srgbClr val="CCCCCC"/>
-                      </a:solidFill>
-                      <a:prstDash val="solid"/>
-                      <a:round/>
-                      <a:headEnd type="none" w="med" len="med"/>
-                      <a:tailEnd type="none" w="med" len="med"/>
-                    </a:lnL>
-                    <a:lnR w="6350" cap="flat" cmpd="sng" algn="ctr">
-                      <a:solidFill>
-                        <a:srgbClr val="CCCCCC"/>
-                      </a:solidFill>
-                      <a:prstDash val="solid"/>
-                      <a:round/>
-                      <a:headEnd type="none" w="med" len="med"/>
-                      <a:tailEnd type="none" w="med" len="med"/>
-                    </a:lnR>
-                    <a:lnT w="6350" cap="flat" cmpd="sng" algn="ctr">
-                      <a:solidFill>
-                        <a:srgbClr val="CCCCCC"/>
-                      </a:solidFill>
-                      <a:prstDash val="solid"/>
-                      <a:round/>
-                      <a:headEnd type="none" w="med" len="med"/>
-                      <a:tailEnd type="none" w="med" len="med"/>
-                    </a:lnT>
-                    <a:lnB w="6350" cap="flat" cmpd="sng" algn="ctr">
-                      <a:solidFill>
-                        <a:srgbClr val="CCCCCC"/>
-                      </a:solidFill>
-                      <a:prstDash val="solid"/>
-                      <a:round/>
-                      <a:headEnd type="none" w="med" len="med"/>
-                      <a:tailEnd type="none" w="med" len="med"/>
-                    </a:lnB>
-                    <a:solidFill>
-                      <a:srgbClr val="FFFFFF"/>
-                    </a:solidFill>
-                  </a:tcPr>
-                </a:tc>
-                <a:tc>
-                  <a:txBody>
-                    <a:bodyPr/>
-                    <a:lstStyle/>
-                    <a:p>
-                      <a:pPr algn="ctr" indent="0" marL="0">
-                        <a:buNone/>
-                      </a:pPr>
-                      <a:r>
-                        <a:rPr lang="en-US" sz="800" dirty="0">
-                          <a:solidFill>
-                            <a:srgbClr val="000000"/>
-                          </a:solidFill>
-                          <a:latin typeface="Arial" pitchFamily="34" charset="0"/>
-                          <a:ea typeface="Arial" pitchFamily="34" charset="-122"/>
-                          <a:cs typeface="Arial" pitchFamily="34" charset="-120"/>
-                        </a:rPr>
-                        <a:t>23</a:t>
-                      </a:r>
-                      <a:endParaRPr lang="en-US" sz="800" dirty="0">
-                        <a:latin typeface="Arial" charset="0"/>
-                        <a:ea typeface="Arial" charset="0"/>
-                        <a:cs typeface="Arial" charset="0"/>
-                      </a:endParaRPr>
-                    </a:p>
-                  </a:txBody>
-                  <a:tcPr marL="91440" marR="91440" marT="45720" marB="45720">
-                    <a:lnL w="6350" cap="flat" cmpd="sng" algn="ctr">
-                      <a:solidFill>
-                        <a:srgbClr val="CCCCCC"/>
-                      </a:solidFill>
-                      <a:prstDash val="solid"/>
-                      <a:round/>
-                      <a:headEnd type="none" w="med" len="med"/>
-                      <a:tailEnd type="none" w="med" len="med"/>
-                    </a:lnL>
-                    <a:lnR w="6350" cap="flat" cmpd="sng" algn="ctr">
-                      <a:solidFill>
-                        <a:srgbClr val="CCCCCC"/>
-                      </a:solidFill>
-                      <a:prstDash val="solid"/>
-                      <a:round/>
-                      <a:headEnd type="none" w="med" len="med"/>
-                      <a:tailEnd type="none" w="med" len="med"/>
-                    </a:lnR>
-                    <a:lnT w="6350" cap="flat" cmpd="sng" algn="ctr">
-                      <a:solidFill>
-                        <a:srgbClr val="CCCCCC"/>
-                      </a:solidFill>
-                      <a:prstDash val="solid"/>
-                      <a:round/>
-                      <a:headEnd type="none" w="med" len="med"/>
-                      <a:tailEnd type="none" w="med" len="med"/>
-                    </a:lnT>
-                    <a:lnB w="6350" cap="flat" cmpd="sng" algn="ctr">
-                      <a:solidFill>
-                        <a:srgbClr val="CCCCCC"/>
-                      </a:solidFill>
-                      <a:prstDash val="solid"/>
-                      <a:round/>
-                      <a:headEnd type="none" w="med" len="med"/>
-                      <a:tailEnd type="none" w="med" len="med"/>
-                    </a:lnB>
-                    <a:solidFill>
-                      <a:srgbClr val="FFFFFF"/>
-                    </a:solidFill>
-                  </a:tcPr>
-                </a:tc>
-                <a:tc>
-                  <a:txBody>
-                    <a:bodyPr/>
-                    <a:lstStyle/>
-                    <a:p>
-                      <a:pPr algn="ctr" indent="0" marL="0">
-                        <a:buNone/>
-                      </a:pPr>
-                      <a:r>
-                        <a:rPr lang="en-US" sz="800" dirty="0">
-                          <a:solidFill>
-                            <a:srgbClr val="000000"/>
-                          </a:solidFill>
-                          <a:latin typeface="Arial" pitchFamily="34" charset="0"/>
-                          <a:ea typeface="Arial" pitchFamily="34" charset="-122"/>
-                          <a:cs typeface="Arial" pitchFamily="34" charset="-120"/>
-                        </a:rPr>
-                        <a:t>4.17/5</a:t>
-                      </a:r>
-                      <a:endParaRPr lang="en-US" sz="800" dirty="0">
-                        <a:latin typeface="Arial" charset="0"/>
-                        <a:ea typeface="Arial" charset="0"/>
-                        <a:cs typeface="Arial" charset="0"/>
-                      </a:endParaRPr>
-                    </a:p>
-                  </a:txBody>
-                  <a:tcPr marL="91440" marR="91440" marT="45720" marB="45720">
-                    <a:lnL w="6350" cap="flat" cmpd="sng" algn="ctr">
-                      <a:solidFill>
-                        <a:srgbClr val="CCCCCC"/>
-                      </a:solidFill>
-                      <a:prstDash val="solid"/>
-                      <a:round/>
-                      <a:headEnd type="none" w="med" len="med"/>
-                      <a:tailEnd type="none" w="med" len="med"/>
-                    </a:lnL>
-                    <a:lnR w="6350" cap="flat" cmpd="sng" algn="ctr">
-                      <a:solidFill>
-                        <a:srgbClr val="CCCCCC"/>
-                      </a:solidFill>
-                      <a:prstDash val="solid"/>
-                      <a:round/>
-                      <a:headEnd type="none" w="med" len="med"/>
-                      <a:tailEnd type="none" w="med" len="med"/>
-                    </a:lnR>
-                    <a:lnT w="6350" cap="flat" cmpd="sng" algn="ctr">
-                      <a:solidFill>
-                        <a:srgbClr val="CCCCCC"/>
-                      </a:solidFill>
-                      <a:prstDash val="solid"/>
-                      <a:round/>
-                      <a:headEnd type="none" w="med" len="med"/>
-                      <a:tailEnd type="none" w="med" len="med"/>
-                    </a:lnT>
-                    <a:lnB w="6350" cap="flat" cmpd="sng" algn="ctr">
-                      <a:solidFill>
-                        <a:srgbClr val="CCCCCC"/>
-                      </a:solidFill>
-                      <a:prstDash val="solid"/>
-                      <a:round/>
-                      <a:headEnd type="none" w="med" len="med"/>
-                      <a:tailEnd type="none" w="med" len="med"/>
-                    </a:lnB>
-                    <a:solidFill>
-                      <a:srgbClr val="FFFFFF"/>
-                    </a:solidFill>
-                  </a:tcPr>
-                </a:tc>
-                <a:tc>
-                  <a:txBody>
-                    <a:bodyPr/>
-                    <a:lstStyle/>
-                    <a:p>
-                      <a:pPr algn="ctr" indent="0" marL="0">
-                        <a:buNone/>
-                      </a:pPr>
-                      <a:r>
-                        <a:rPr lang="en-US" sz="800" dirty="0">
-                          <a:solidFill>
-                            <a:srgbClr val="000000"/>
-                          </a:solidFill>
-                          <a:latin typeface="Arial" pitchFamily="34" charset="0"/>
-                          <a:ea typeface="Arial" pitchFamily="34" charset="-122"/>
-                          <a:cs typeface="Arial" pitchFamily="34" charset="-120"/>
-                        </a:rPr>
-                        <a:t>8.35</a:t>
+                        <a:t>8.28</a:t>
                       </a:r>
                       <a:endParaRPr lang="en-US" sz="800" dirty="0">
                         <a:latin typeface="Arial" charset="0"/>
@@ -6057,7 +6057,7 @@
                           <a:ea typeface="Arial" pitchFamily="34" charset="-122"/>
                           <a:cs typeface="Arial" pitchFamily="34" charset="-120"/>
                         </a:rPr>
-                        <a:t>9</a:t>
+                        <a:t>10</a:t>
                       </a:r>
                       <a:endParaRPr lang="en-US" sz="800" dirty="0">
                         <a:latin typeface="Arial" charset="0"/>
@@ -6125,7 +6125,7 @@
                           <a:ea typeface="Arial" pitchFamily="34" charset="-122"/>
                           <a:cs typeface="Arial" pitchFamily="34" charset="-120"/>
                         </a:rPr>
-                        <a:t>6.78/10</a:t>
+                        <a:t>7.20/10</a:t>
                       </a:r>
                       <a:endParaRPr lang="en-US" sz="800" dirty="0">
                         <a:latin typeface="Arial" charset="0"/>
@@ -6193,7 +6193,7 @@
                           <a:ea typeface="Arial" pitchFamily="34" charset="-122"/>
                           <a:cs typeface="Arial" pitchFamily="34" charset="-120"/>
                         </a:rPr>
-                        <a:t>6.78</a:t>
+                        <a:t>7.20</a:t>
                       </a:r>
                       <a:endParaRPr lang="en-US" sz="800" dirty="0">
                         <a:latin typeface="Arial" charset="0"/>
@@ -6261,7 +6261,7 @@
                           <a:ea typeface="Arial" pitchFamily="34" charset="-122"/>
                           <a:cs typeface="Arial" pitchFamily="34" charset="-120"/>
                         </a:rPr>
-                        <a:t>要改善</a:t>
+                        <a:t>概ね良好</a:t>
                       </a:r>
                       <a:endParaRPr lang="en-US" sz="800" dirty="0">
                         <a:latin typeface="Arial" charset="0"/>
@@ -6646,7 +6646,7 @@
                 <a:ea typeface="Arial" pitchFamily="34" charset="-122"/>
                 <a:cs typeface="Arial" pitchFamily="34" charset="-120"/>
               </a:rPr>
-              <a:t>109件（79.6%）</a:t>
+              <a:t>111件（79.3%）</a:t>
             </a:r>
             <a:endParaRPr lang="en-US" sz="1600" dirty="0"/>
           </a:p>
@@ -6744,7 +6744,7 @@
                 <a:ea typeface="Arial" pitchFamily="34" charset="-122"/>
                 <a:cs typeface="Arial" pitchFamily="34" charset="-120"/>
               </a:rPr>
-              <a:t>24件（17.5%）</a:t>
+              <a:t>24件（17.1%）</a:t>
             </a:r>
             <a:endParaRPr lang="en-US" sz="1600" dirty="0"/>
           </a:p>
@@ -6842,7 +6842,7 @@
                 <a:ea typeface="Arial" pitchFamily="34" charset="-122"/>
                 <a:cs typeface="Arial" pitchFamily="34" charset="-120"/>
               </a:rPr>
-              <a:t>4件（2.9%）</a:t>
+              <a:t>5件（3.6%）</a:t>
             </a:r>
             <a:endParaRPr lang="en-US" sz="1600" dirty="0"/>
           </a:p>
@@ -7004,7 +7004,7 @@
                 <a:ea typeface="Arial" pitchFamily="34" charset="-122"/>
                 <a:cs typeface="Arial" pitchFamily="34" charset="-120"/>
               </a:rPr>
-              <a:t>高評価レビュー（8-10点: 109件）の分析から、主要な強みテーマを抽出しています。立地・アクセス、客室清潔感、スタッフ対応が高評価の中心的テーマです。</a:t>
+              <a:t>高評価レビュー（8-10点: 111件）の分析から、主要な強みテーマを抽出しています。立地・アクセス、客室清潔感、スタッフ対応が高評価の中心的テーマです。</a:t>
             </a:r>
             <a:endParaRPr lang="en-US" sz="1200" dirty="0"/>
           </a:p>
@@ -7264,7 +7264,7 @@
                 <a:ea typeface="Arial" pitchFamily="34" charset="-122"/>
                 <a:cs typeface="Arial" pitchFamily="34" charset="-120"/>
               </a:rPr>
-              <a:t>低評価・中評価レビュー（28件）から改善課題を優先度別に整理しています。S/A/B/Cの4段階で優先度を設定し、計画的な改善を推進します。</a:t>
+              <a:t>低評価・中評価レビュー（29件）から改善課題を優先度別に整理しています。S/A/B/Cの4段階で優先度を設定し、計画的な改善を推進します。</a:t>
             </a:r>
             <a:endParaRPr lang="en-US" sz="1200" dirty="0"/>
           </a:p>
@@ -8044,7 +8044,7 @@
                 <a:ea typeface="Arial" pitchFamily="34" charset="-122"/>
                 <a:cs typeface="Arial" pitchFamily="34" charset="-120"/>
               </a:rPr>
-              <a:t>全体平均 8.50点 → 目標 9.00点</a:t>
+              <a:t>全体平均 8.46点 → 目標 8.96点</a:t>
             </a:r>
             <a:endParaRPr lang="en-US" sz="1200" dirty="0"/>
           </a:p>
@@ -8061,7 +8061,7 @@
                 <a:ea typeface="Arial" pitchFamily="34" charset="-122"/>
                 <a:cs typeface="Arial" pitchFamily="34" charset="-120"/>
               </a:rPr>
-              <a:t>高評価率 79.6% → 目標 84.6%</a:t>
+              <a:t>高評価率 79.3% → 目標 84.3%</a:t>
             </a:r>
             <a:endParaRPr lang="en-US" sz="1200" dirty="0"/>
           </a:p>
@@ -8078,7 +8078,7 @@
                 <a:ea typeface="Arial" pitchFamily="34" charset="-122"/>
                 <a:cs typeface="Arial" pitchFamily="34" charset="-120"/>
               </a:rPr>
-              <a:t>低評価率 2.9% → 目標 0.9%</a:t>
+              <a:t>低評価率 3.6% → 目標 1.6%</a:t>
             </a:r>
             <a:endParaRPr lang="en-US" sz="1200" dirty="0"/>
           </a:p>

--- a/納品レポート/ホテル別レポート/comfort_narita_口コミ分析レポート.pptx
+++ b/納品レポート/ホテル別レポート/comfort_narita_口コミ分析レポート.pptx
@@ -274,16 +274,16 @@
                 <c:formatCode>General</c:formatCode>
                 <c:ptCount val="6"/>
                 <c:pt idx="0">
-                  <c:v>9.53</c:v>
+                  <c:v>9.55</c:v>
                 </c:pt>
                 <c:pt idx="1">
                   <c:v>9</c:v>
                 </c:pt>
                 <c:pt idx="2">
-                  <c:v>8.35</c:v>
+                  <c:v>8.45</c:v>
                 </c:pt>
                 <c:pt idx="3">
-                  <c:v>8.28</c:v>
+                  <c:v>8.26</c:v>
                 </c:pt>
                 <c:pt idx="4">
                   <c:v>8</c:v>
@@ -628,19 +628,19 @@
                 <c:formatCode>General</c:formatCode>
                 <c:ptCount val="8"/>
                 <c:pt idx="0">
-                  <c:v>54</c:v>
+                  <c:v>55</c:v>
                 </c:pt>
                 <c:pt idx="1">
-                  <c:v>19</c:v>
+                  <c:v>18</c:v>
                 </c:pt>
                 <c:pt idx="2">
-                  <c:v>38</c:v>
+                  <c:v>39</c:v>
                 </c:pt>
                 <c:pt idx="3">
                   <c:v>9</c:v>
                 </c:pt>
                 <c:pt idx="4">
-                  <c:v>14</c:v>
+                  <c:v>13</c:v>
                 </c:pt>
                 <c:pt idx="5">
                   <c:v>1</c:v>
@@ -2817,7 +2817,7 @@
                 <a:ea typeface="Arial" pitchFamily="34" charset="-122"/>
                 <a:cs typeface="Arial" pitchFamily="34" charset="-120"/>
               </a:rPr>
-              <a:t>コンフォートホテル成田は全体平均8.46点（10pt換算）、高評価率79.3%を達成しています。本レポートで示した改善施策を段階的に実施することで、さらなる顧客満足度向上が期待できます。</a:t>
+              <a:t>コンフォートホテル成田は全体平均8.49点（10pt換算）、高評価率80.0%を達成しています。本レポートで示した改善施策を段階的に実施することで、さらなる顧客満足度向上が期待できます。</a:t>
             </a:r>
             <a:endParaRPr lang="en-US" sz="1200" dirty="0"/>
           </a:p>
@@ -3254,7 +3254,7 @@
                 <a:ea typeface="Arial" pitchFamily="34" charset="-122"/>
                 <a:cs typeface="Arial" pitchFamily="34" charset="-120"/>
               </a:rPr>
-              <a:t>8.46</a:t>
+              <a:t>8.49</a:t>
             </a:r>
             <a:endParaRPr lang="en-US" sz="2800" dirty="0"/>
           </a:p>
@@ -3372,7 +3372,7 @@
                 <a:ea typeface="Arial" pitchFamily="34" charset="-122"/>
                 <a:cs typeface="Arial" pitchFamily="34" charset="-120"/>
               </a:rPr>
-              <a:t>79.3%</a:t>
+              <a:t>80.0%</a:t>
             </a:r>
             <a:endParaRPr lang="en-US" sz="2800" dirty="0"/>
           </a:p>
@@ -4347,7 +4347,7 @@
                           <a:ea typeface="Arial" pitchFamily="34" charset="-122"/>
                           <a:cs typeface="Arial" pitchFamily="34" charset="-120"/>
                         </a:rPr>
-                        <a:t>19</a:t>
+                        <a:t>20</a:t>
                       </a:r>
                       <a:endParaRPr lang="en-US" sz="800" dirty="0">
                         <a:latin typeface="Arial" charset="0"/>
@@ -4415,7 +4415,7 @@
                           <a:ea typeface="Arial" pitchFamily="34" charset="-122"/>
                           <a:cs typeface="Arial" pitchFamily="34" charset="-120"/>
                         </a:rPr>
-                        <a:t>9.53/10</a:t>
+                        <a:t>9.55/10</a:t>
                       </a:r>
                       <a:endParaRPr lang="en-US" sz="800" dirty="0">
                         <a:latin typeface="Arial" charset="0"/>
@@ -4483,7 +4483,7 @@
                           <a:ea typeface="Arial" pitchFamily="34" charset="-122"/>
                           <a:cs typeface="Arial" pitchFamily="34" charset="-120"/>
                         </a:rPr>
-                        <a:t>9.53</a:t>
+                        <a:t>9.55</a:t>
                       </a:r>
                       <a:endParaRPr lang="en-US" sz="800" dirty="0">
                         <a:latin typeface="Arial" charset="0"/>
@@ -5031,7 +5031,7 @@
                           <a:ea typeface="Arial" pitchFamily="34" charset="-122"/>
                           <a:cs typeface="Arial" pitchFamily="34" charset="-120"/>
                         </a:rPr>
-                        <a:t>23</a:t>
+                        <a:t>22</a:t>
                       </a:r>
                       <a:endParaRPr lang="en-US" sz="800" dirty="0">
                         <a:latin typeface="Arial" charset="0"/>
@@ -5099,7 +5099,7 @@
                           <a:ea typeface="Arial" pitchFamily="34" charset="-122"/>
                           <a:cs typeface="Arial" pitchFamily="34" charset="-120"/>
                         </a:rPr>
-                        <a:t>4.17/5</a:t>
+                        <a:t>4.23/5</a:t>
                       </a:r>
                       <a:endParaRPr lang="en-US" sz="800" dirty="0">
                         <a:latin typeface="Arial" charset="0"/>
@@ -5167,7 +5167,7 @@
                           <a:ea typeface="Arial" pitchFamily="34" charset="-122"/>
                           <a:cs typeface="Arial" pitchFamily="34" charset="-120"/>
                         </a:rPr>
-                        <a:t>8.35</a:t>
+                        <a:t>8.45</a:t>
                       </a:r>
                       <a:endParaRPr lang="en-US" sz="800" dirty="0">
                         <a:latin typeface="Arial" charset="0"/>
@@ -5373,7 +5373,7 @@
                           <a:ea typeface="Arial" pitchFamily="34" charset="-122"/>
                           <a:cs typeface="Arial" pitchFamily="34" charset="-120"/>
                         </a:rPr>
-                        <a:t>58</a:t>
+                        <a:t>57</a:t>
                       </a:r>
                       <a:endParaRPr lang="en-US" sz="800" dirty="0">
                         <a:latin typeface="Arial" charset="0"/>
@@ -5441,7 +5441,7 @@
                           <a:ea typeface="Arial" pitchFamily="34" charset="-122"/>
                           <a:cs typeface="Arial" pitchFamily="34" charset="-120"/>
                         </a:rPr>
-                        <a:t>8.28/10</a:t>
+                        <a:t>8.26/10</a:t>
                       </a:r>
                       <a:endParaRPr lang="en-US" sz="800" dirty="0">
                         <a:latin typeface="Arial" charset="0"/>
@@ -5509,7 +5509,7 @@
                           <a:ea typeface="Arial" pitchFamily="34" charset="-122"/>
                           <a:cs typeface="Arial" pitchFamily="34" charset="-120"/>
                         </a:rPr>
-                        <a:t>8.28</a:t>
+                        <a:t>8.26</a:t>
                       </a:r>
                       <a:endParaRPr lang="en-US" sz="800" dirty="0">
                         <a:latin typeface="Arial" charset="0"/>
@@ -5715,7 +5715,7 @@
                           <a:ea typeface="Arial" pitchFamily="34" charset="-122"/>
                           <a:cs typeface="Arial" pitchFamily="34" charset="-120"/>
                         </a:rPr>
-                        <a:t>10</a:t>
+                        <a:t>11</a:t>
                       </a:r>
                       <a:endParaRPr lang="en-US" sz="800" dirty="0">
                         <a:latin typeface="Arial" charset="0"/>
@@ -6646,7 +6646,7 @@
                 <a:ea typeface="Arial" pitchFamily="34" charset="-122"/>
                 <a:cs typeface="Arial" pitchFamily="34" charset="-120"/>
               </a:rPr>
-              <a:t>111件（79.3%）</a:t>
+              <a:t>112件（80.0%）</a:t>
             </a:r>
             <a:endParaRPr lang="en-US" sz="1600" dirty="0"/>
           </a:p>
@@ -6744,7 +6744,7 @@
                 <a:ea typeface="Arial" pitchFamily="34" charset="-122"/>
                 <a:cs typeface="Arial" pitchFamily="34" charset="-120"/>
               </a:rPr>
-              <a:t>24件（17.1%）</a:t>
+              <a:t>23件（16.4%）</a:t>
             </a:r>
             <a:endParaRPr lang="en-US" sz="1600" dirty="0"/>
           </a:p>
@@ -7004,7 +7004,7 @@
                 <a:ea typeface="Arial" pitchFamily="34" charset="-122"/>
                 <a:cs typeface="Arial" pitchFamily="34" charset="-120"/>
               </a:rPr>
-              <a:t>高評価レビュー（8-10点: 111件）の分析から、主要な強みテーマを抽出しています。立地・アクセス、客室清潔感、スタッフ対応が高評価の中心的テーマです。</a:t>
+              <a:t>高評価レビュー（8-10点: 112件）の分析から、主要な強みテーマを抽出しています。立地・アクセス、客室清潔感、スタッフ対応が高評価の中心的テーマです。</a:t>
             </a:r>
             <a:endParaRPr lang="en-US" sz="1200" dirty="0"/>
           </a:p>
@@ -7264,7 +7264,7 @@
                 <a:ea typeface="Arial" pitchFamily="34" charset="-122"/>
                 <a:cs typeface="Arial" pitchFamily="34" charset="-120"/>
               </a:rPr>
-              <a:t>低評価・中評価レビュー（29件）から改善課題を優先度別に整理しています。S/A/B/Cの4段階で優先度を設定し、計画的な改善を推進します。</a:t>
+              <a:t>低評価・中評価レビュー（28件）から改善課題を優先度別に整理しています。S/A/B/Cの4段階で優先度を設定し、計画的な改善を推進します。</a:t>
             </a:r>
             <a:endParaRPr lang="en-US" sz="1200" dirty="0"/>
           </a:p>
@@ -8044,7 +8044,7 @@
                 <a:ea typeface="Arial" pitchFamily="34" charset="-122"/>
                 <a:cs typeface="Arial" pitchFamily="34" charset="-120"/>
               </a:rPr>
-              <a:t>全体平均 8.46点 → 目標 8.96点</a:t>
+              <a:t>全体平均 8.49点 → 目標 8.99点</a:t>
             </a:r>
             <a:endParaRPr lang="en-US" sz="1200" dirty="0"/>
           </a:p>
@@ -8061,7 +8061,7 @@
                 <a:ea typeface="Arial" pitchFamily="34" charset="-122"/>
                 <a:cs typeface="Arial" pitchFamily="34" charset="-120"/>
               </a:rPr>
-              <a:t>高評価率 79.3% → 目標 84.3%</a:t>
+              <a:t>高評価率 80.0% → 目標 85.0%</a:t>
             </a:r>
             <a:endParaRPr lang="en-US" sz="1200" dirty="0"/>
           </a:p>

--- a/納品レポート/ホテル別レポート/comfort_narita_口コミ分析レポート.pptx
+++ b/納品レポート/ホテル別レポート/comfort_narita_口コミ分析レポート.pptx
@@ -274,22 +274,22 @@
                 <c:formatCode>General</c:formatCode>
                 <c:ptCount val="6"/>
                 <c:pt idx="0">
-                  <c:v>9.55</c:v>
+                  <c:v>9.57</c:v>
                 </c:pt>
                 <c:pt idx="1">
-                  <c:v>9</c:v>
+                  <c:v>8.78</c:v>
                 </c:pt>
                 <c:pt idx="2">
-                  <c:v>8.45</c:v>
+                  <c:v>8.57</c:v>
                 </c:pt>
                 <c:pt idx="3">
-                  <c:v>8.26</c:v>
+                  <c:v>8.22</c:v>
                 </c:pt>
                 <c:pt idx="4">
-                  <c:v>8</c:v>
+                  <c:v>8.13</c:v>
                 </c:pt>
                 <c:pt idx="5">
-                  <c:v>7.2</c:v>
+                  <c:v>7.27</c:v>
                 </c:pt>
               </c:numCache>
             </c:numRef>
@@ -628,19 +628,19 @@
                 <c:formatCode>General</c:formatCode>
                 <c:ptCount val="8"/>
                 <c:pt idx="0">
-                  <c:v>55</c:v>
+                  <c:v>53</c:v>
                 </c:pt>
                 <c:pt idx="1">
-                  <c:v>18</c:v>
+                  <c:v>17</c:v>
                 </c:pt>
                 <c:pt idx="2">
-                  <c:v>39</c:v>
+                  <c:v>44</c:v>
                 </c:pt>
                 <c:pt idx="3">
                   <c:v>9</c:v>
                 </c:pt>
                 <c:pt idx="4">
-                  <c:v>13</c:v>
+                  <c:v>12</c:v>
                 </c:pt>
                 <c:pt idx="5">
                   <c:v>1</c:v>
@@ -2537,7 +2537,7 @@
                 <a:ea typeface="Arial" pitchFamily="34" charset="-122"/>
                 <a:cs typeface="Arial" pitchFamily="34" charset="-120"/>
               </a:rPr>
-              <a:t>レビュー総数：140件</a:t>
+              <a:t>レビュー総数：141件</a:t>
             </a:r>
             <a:endParaRPr lang="en-US" sz="1000" dirty="0"/>
           </a:p>
@@ -2817,7 +2817,7 @@
                 <a:ea typeface="Arial" pitchFamily="34" charset="-122"/>
                 <a:cs typeface="Arial" pitchFamily="34" charset="-120"/>
               </a:rPr>
-              <a:t>コンフォートホテル成田は全体平均8.49点（10pt換算）、高評価率80.0%を達成しています。本レポートで示した改善施策を段階的に実施することで、さらなる顧客満足度向上が期待できます。</a:t>
+              <a:t>コンフォートホテル成田は全体平均8.46点（10pt換算）、高評価率80.9%を達成しています。本レポートで示した改善施策を段階的に実施することで、さらなる顧客満足度向上が期待できます。</a:t>
             </a:r>
             <a:endParaRPr lang="en-US" sz="1200" dirty="0"/>
           </a:p>
@@ -3254,7 +3254,7 @@
                 <a:ea typeface="Arial" pitchFamily="34" charset="-122"/>
                 <a:cs typeface="Arial" pitchFamily="34" charset="-120"/>
               </a:rPr>
-              <a:t>8.49</a:t>
+              <a:t>8.46</a:t>
             </a:r>
             <a:endParaRPr lang="en-US" sz="2800" dirty="0"/>
           </a:p>
@@ -3372,7 +3372,7 @@
                 <a:ea typeface="Arial" pitchFamily="34" charset="-122"/>
                 <a:cs typeface="Arial" pitchFamily="34" charset="-120"/>
               </a:rPr>
-              <a:t>80.0%</a:t>
+              <a:t>80.9%</a:t>
             </a:r>
             <a:endParaRPr lang="en-US" sz="2800" dirty="0"/>
           </a:p>
@@ -3490,7 +3490,7 @@
                 <a:ea typeface="Arial" pitchFamily="34" charset="-122"/>
                 <a:cs typeface="Arial" pitchFamily="34" charset="-120"/>
               </a:rPr>
-              <a:t>3.6%</a:t>
+              <a:t>3.5%</a:t>
             </a:r>
             <a:endParaRPr lang="en-US" sz="2800" dirty="0"/>
           </a:p>
@@ -3608,7 +3608,7 @@
                 <a:ea typeface="Arial" pitchFamily="34" charset="-122"/>
                 <a:cs typeface="Arial" pitchFamily="34" charset="-120"/>
               </a:rPr>
-              <a:t>140件</a:t>
+              <a:t>141件</a:t>
             </a:r>
             <a:endParaRPr lang="en-US" sz="2800" dirty="0"/>
           </a:p>
@@ -4347,7 +4347,7 @@
                           <a:ea typeface="Arial" pitchFamily="34" charset="-122"/>
                           <a:cs typeface="Arial" pitchFamily="34" charset="-120"/>
                         </a:rPr>
-                        <a:t>20</a:t>
+                        <a:t>21</a:t>
                       </a:r>
                       <a:endParaRPr lang="en-US" sz="800" dirty="0">
                         <a:latin typeface="Arial" charset="0"/>
@@ -4415,7 +4415,7 @@
                           <a:ea typeface="Arial" pitchFamily="34" charset="-122"/>
                           <a:cs typeface="Arial" pitchFamily="34" charset="-120"/>
                         </a:rPr>
-                        <a:t>9.55/10</a:t>
+                        <a:t>9.57/10</a:t>
                       </a:r>
                       <a:endParaRPr lang="en-US" sz="800" dirty="0">
                         <a:latin typeface="Arial" charset="0"/>
@@ -4483,7 +4483,7 @@
                           <a:ea typeface="Arial" pitchFamily="34" charset="-122"/>
                           <a:cs typeface="Arial" pitchFamily="34" charset="-120"/>
                         </a:rPr>
-                        <a:t>9.55</a:t>
+                        <a:t>9.57</a:t>
                       </a:r>
                       <a:endParaRPr lang="en-US" sz="800" dirty="0">
                         <a:latin typeface="Arial" charset="0"/>
@@ -4689,7 +4689,7 @@
                           <a:ea typeface="Arial" pitchFamily="34" charset="-122"/>
                           <a:cs typeface="Arial" pitchFamily="34" charset="-120"/>
                         </a:rPr>
-                        <a:t>20</a:t>
+                        <a:t>18</a:t>
                       </a:r>
                       <a:endParaRPr lang="en-US" sz="800" dirty="0">
                         <a:latin typeface="Arial" charset="0"/>
@@ -4757,7 +4757,7 @@
                           <a:ea typeface="Arial" pitchFamily="34" charset="-122"/>
                           <a:cs typeface="Arial" pitchFamily="34" charset="-120"/>
                         </a:rPr>
-                        <a:t>4.50/5</a:t>
+                        <a:t>4.39/5</a:t>
                       </a:r>
                       <a:endParaRPr lang="en-US" sz="800" dirty="0">
                         <a:latin typeface="Arial" charset="0"/>
@@ -4825,7 +4825,7 @@
                           <a:ea typeface="Arial" pitchFamily="34" charset="-122"/>
                           <a:cs typeface="Arial" pitchFamily="34" charset="-120"/>
                         </a:rPr>
-                        <a:t>9.00</a:t>
+                        <a:t>8.78</a:t>
                       </a:r>
                       <a:endParaRPr lang="en-US" sz="800" dirty="0">
                         <a:latin typeface="Arial" charset="0"/>
@@ -4893,7 +4893,7 @@
                           <a:ea typeface="Arial" pitchFamily="34" charset="-122"/>
                           <a:cs typeface="Arial" pitchFamily="34" charset="-120"/>
                         </a:rPr>
-                        <a:t>優秀</a:t>
+                        <a:t>良好</a:t>
                       </a:r>
                       <a:endParaRPr lang="en-US" sz="800" dirty="0">
                         <a:latin typeface="Arial" charset="0"/>
@@ -5031,7 +5031,7 @@
                           <a:ea typeface="Arial" pitchFamily="34" charset="-122"/>
                           <a:cs typeface="Arial" pitchFamily="34" charset="-120"/>
                         </a:rPr>
-                        <a:t>22</a:t>
+                        <a:t>21</a:t>
                       </a:r>
                       <a:endParaRPr lang="en-US" sz="800" dirty="0">
                         <a:latin typeface="Arial" charset="0"/>
@@ -5099,7 +5099,7 @@
                           <a:ea typeface="Arial" pitchFamily="34" charset="-122"/>
                           <a:cs typeface="Arial" pitchFamily="34" charset="-120"/>
                         </a:rPr>
-                        <a:t>4.23/5</a:t>
+                        <a:t>4.29/5</a:t>
                       </a:r>
                       <a:endParaRPr lang="en-US" sz="800" dirty="0">
                         <a:latin typeface="Arial" charset="0"/>
@@ -5167,7 +5167,7 @@
                           <a:ea typeface="Arial" pitchFamily="34" charset="-122"/>
                           <a:cs typeface="Arial" pitchFamily="34" charset="-120"/>
                         </a:rPr>
-                        <a:t>8.45</a:t>
+                        <a:t>8.57</a:t>
                       </a:r>
                       <a:endParaRPr lang="en-US" sz="800" dirty="0">
                         <a:latin typeface="Arial" charset="0"/>
@@ -5373,7 +5373,7 @@
                           <a:ea typeface="Arial" pitchFamily="34" charset="-122"/>
                           <a:cs typeface="Arial" pitchFamily="34" charset="-120"/>
                         </a:rPr>
-                        <a:t>57</a:t>
+                        <a:t>55</a:t>
                       </a:r>
                       <a:endParaRPr lang="en-US" sz="800" dirty="0">
                         <a:latin typeface="Arial" charset="0"/>
@@ -5441,7 +5441,7 @@
                           <a:ea typeface="Arial" pitchFamily="34" charset="-122"/>
                           <a:cs typeface="Arial" pitchFamily="34" charset="-120"/>
                         </a:rPr>
-                        <a:t>8.26/10</a:t>
+                        <a:t>8.22/10</a:t>
                       </a:r>
                       <a:endParaRPr lang="en-US" sz="800" dirty="0">
                         <a:latin typeface="Arial" charset="0"/>
@@ -5509,7 +5509,7 @@
                           <a:ea typeface="Arial" pitchFamily="34" charset="-122"/>
                           <a:cs typeface="Arial" pitchFamily="34" charset="-120"/>
                         </a:rPr>
-                        <a:t>8.26</a:t>
+                        <a:t>8.22</a:t>
                       </a:r>
                       <a:endParaRPr lang="en-US" sz="800" dirty="0">
                         <a:latin typeface="Arial" charset="0"/>
@@ -5715,7 +5715,7 @@
                           <a:ea typeface="Arial" pitchFamily="34" charset="-122"/>
                           <a:cs typeface="Arial" pitchFamily="34" charset="-120"/>
                         </a:rPr>
-                        <a:t>11</a:t>
+                        <a:t>15</a:t>
                       </a:r>
                       <a:endParaRPr lang="en-US" sz="800" dirty="0">
                         <a:latin typeface="Arial" charset="0"/>
@@ -5783,7 +5783,7 @@
                           <a:ea typeface="Arial" pitchFamily="34" charset="-122"/>
                           <a:cs typeface="Arial" pitchFamily="34" charset="-120"/>
                         </a:rPr>
-                        <a:t>4.00/5</a:t>
+                        <a:t>4.07/5</a:t>
                       </a:r>
                       <a:endParaRPr lang="en-US" sz="800" dirty="0">
                         <a:latin typeface="Arial" charset="0"/>
@@ -5851,7 +5851,7 @@
                           <a:ea typeface="Arial" pitchFamily="34" charset="-122"/>
                           <a:cs typeface="Arial" pitchFamily="34" charset="-120"/>
                         </a:rPr>
-                        <a:t>8.00</a:t>
+                        <a:t>8.13</a:t>
                       </a:r>
                       <a:endParaRPr lang="en-US" sz="800" dirty="0">
                         <a:latin typeface="Arial" charset="0"/>
@@ -6057,7 +6057,7 @@
                           <a:ea typeface="Arial" pitchFamily="34" charset="-122"/>
                           <a:cs typeface="Arial" pitchFamily="34" charset="-120"/>
                         </a:rPr>
-                        <a:t>10</a:t>
+                        <a:t>11</a:t>
                       </a:r>
                       <a:endParaRPr lang="en-US" sz="800" dirty="0">
                         <a:latin typeface="Arial" charset="0"/>
@@ -6125,7 +6125,7 @@
                           <a:ea typeface="Arial" pitchFamily="34" charset="-122"/>
                           <a:cs typeface="Arial" pitchFamily="34" charset="-120"/>
                         </a:rPr>
-                        <a:t>7.20/10</a:t>
+                        <a:t>7.27/10</a:t>
                       </a:r>
                       <a:endParaRPr lang="en-US" sz="800" dirty="0">
                         <a:latin typeface="Arial" charset="0"/>
@@ -6193,7 +6193,7 @@
                           <a:ea typeface="Arial" pitchFamily="34" charset="-122"/>
                           <a:cs typeface="Arial" pitchFamily="34" charset="-120"/>
                         </a:rPr>
-                        <a:t>7.20</a:t>
+                        <a:t>7.27</a:t>
                       </a:r>
                       <a:endParaRPr lang="en-US" sz="800" dirty="0">
                         <a:latin typeface="Arial" charset="0"/>
@@ -6646,7 +6646,7 @@
                 <a:ea typeface="Arial" pitchFamily="34" charset="-122"/>
                 <a:cs typeface="Arial" pitchFamily="34" charset="-120"/>
               </a:rPr>
-              <a:t>112件（80.0%）</a:t>
+              <a:t>114件（80.9%）</a:t>
             </a:r>
             <a:endParaRPr lang="en-US" sz="1600" dirty="0"/>
           </a:p>
@@ -6744,7 +6744,7 @@
                 <a:ea typeface="Arial" pitchFamily="34" charset="-122"/>
                 <a:cs typeface="Arial" pitchFamily="34" charset="-120"/>
               </a:rPr>
-              <a:t>23件（16.4%）</a:t>
+              <a:t>22件（15.6%）</a:t>
             </a:r>
             <a:endParaRPr lang="en-US" sz="1600" dirty="0"/>
           </a:p>
@@ -6842,7 +6842,7 @@
                 <a:ea typeface="Arial" pitchFamily="34" charset="-122"/>
                 <a:cs typeface="Arial" pitchFamily="34" charset="-120"/>
               </a:rPr>
-              <a:t>5件（3.6%）</a:t>
+              <a:t>5件（3.5%）</a:t>
             </a:r>
             <a:endParaRPr lang="en-US" sz="1600" dirty="0"/>
           </a:p>
@@ -7004,7 +7004,7 @@
                 <a:ea typeface="Arial" pitchFamily="34" charset="-122"/>
                 <a:cs typeface="Arial" pitchFamily="34" charset="-120"/>
               </a:rPr>
-              <a:t>高評価レビュー（8-10点: 112件）の分析から、主要な強みテーマを抽出しています。立地・アクセス、客室清潔感、スタッフ対応が高評価の中心的テーマです。</a:t>
+              <a:t>高評価レビュー（8-10点: 114件）の分析から、主要な強みテーマを抽出しています。立地・アクセス、客室清潔感、スタッフ対応が高評価の中心的テーマです。</a:t>
             </a:r>
             <a:endParaRPr lang="en-US" sz="1200" dirty="0"/>
           </a:p>
@@ -7264,7 +7264,7 @@
                 <a:ea typeface="Arial" pitchFamily="34" charset="-122"/>
                 <a:cs typeface="Arial" pitchFamily="34" charset="-120"/>
               </a:rPr>
-              <a:t>低評価・中評価レビュー（28件）から改善課題を優先度別に整理しています。S/A/B/Cの4段階で優先度を設定し、計画的な改善を推進します。</a:t>
+              <a:t>低評価・中評価レビュー（27件）から改善課題を優先度別に整理しています。S/A/B/Cの4段階で優先度を設定し、計画的な改善を推進します。</a:t>
             </a:r>
             <a:endParaRPr lang="en-US" sz="1200" dirty="0"/>
           </a:p>
@@ -8044,7 +8044,7 @@
                 <a:ea typeface="Arial" pitchFamily="34" charset="-122"/>
                 <a:cs typeface="Arial" pitchFamily="34" charset="-120"/>
               </a:rPr>
-              <a:t>全体平均 8.49点 → 目標 8.99点</a:t>
+              <a:t>全体平均 8.46点 → 目標 8.96点</a:t>
             </a:r>
             <a:endParaRPr lang="en-US" sz="1200" dirty="0"/>
           </a:p>
@@ -8061,7 +8061,7 @@
                 <a:ea typeface="Arial" pitchFamily="34" charset="-122"/>
                 <a:cs typeface="Arial" pitchFamily="34" charset="-120"/>
               </a:rPr>
-              <a:t>高評価率 80.0% → 目標 85.0%</a:t>
+              <a:t>高評価率 80.9% → 目標 85.9%</a:t>
             </a:r>
             <a:endParaRPr lang="en-US" sz="1200" dirty="0"/>
           </a:p>
@@ -8078,7 +8078,7 @@
                 <a:ea typeface="Arial" pitchFamily="34" charset="-122"/>
                 <a:cs typeface="Arial" pitchFamily="34" charset="-120"/>
               </a:rPr>
-              <a:t>低評価率 3.6% → 目標 1.6%</a:t>
+              <a:t>低評価率 3.5% → 目標 1.5%</a:t>
             </a:r>
             <a:endParaRPr lang="en-US" sz="1200" dirty="0"/>
           </a:p>

--- a/納品レポート/ホテル別レポート/comfort_narita_口コミ分析レポート.pptx
+++ b/納品レポート/ホテル別レポート/comfort_narita_口コミ分析レポート.pptx
@@ -249,16 +249,16 @@
                     <c:v>Trip.com</c:v>
                   </c:pt>
                   <c:pt idx="1">
+                    <c:v>楽天トラベル</c:v>
+                  </c:pt>
+                  <c:pt idx="2">
                     <c:v>Google</c:v>
                   </c:pt>
-                  <c:pt idx="2">
-                    <c:v>楽天トラベル</c:v>
-                  </c:pt>
                   <c:pt idx="3">
-                    <c:v>Booking.com</c:v>
+                    <c:v>じゃらん</c:v>
                   </c:pt>
                   <c:pt idx="4">
-                    <c:v>じゃらん</c:v>
+                    <c:v>Booking.com</c:v>
                   </c:pt>
                   <c:pt idx="5">
                     <c:v>Agoda</c:v>
@@ -274,22 +274,22 @@
                 <c:formatCode>General</c:formatCode>
                 <c:ptCount val="6"/>
                 <c:pt idx="0">
-                  <c:v>9.57</c:v>
+                  <c:v>9.4</c:v>
                 </c:pt>
                 <c:pt idx="1">
-                  <c:v>8.78</c:v>
+                  <c:v>8.83</c:v>
                 </c:pt>
                 <c:pt idx="2">
-                  <c:v>8.57</c:v>
+                  <c:v>8.55</c:v>
                 </c:pt>
                 <c:pt idx="3">
-                  <c:v>8.22</c:v>
+                  <c:v>8.5</c:v>
                 </c:pt>
                 <c:pt idx="4">
-                  <c:v>8.13</c:v>
+                  <c:v>8.37</c:v>
                 </c:pt>
                 <c:pt idx="5">
-                  <c:v>7.27</c:v>
+                  <c:v>7.4</c:v>
                 </c:pt>
               </c:numCache>
             </c:numRef>
@@ -560,7 +560,7 @@
             <c:bubble3D val="0"/>
             <c:spPr>
               <a:solidFill>
-                <a:srgbClr val="EA580C"/>
+                <a:srgbClr val="DC2626"/>
               </a:solidFill>
               <a:effectLst/>
             </c:spPr>
@@ -576,22 +576,11 @@
               <a:effectLst/>
             </c:spPr>
           </c:dPt>
-          <c:dPt>
-            <c:idx val="7"/>
-            <c:invertIfNegative val="0"/>
-            <c:bubble3D val="0"/>
-            <c:spPr>
-              <a:solidFill>
-                <a:srgbClr val="DC2626"/>
-              </a:solidFill>
-              <a:effectLst/>
-            </c:spPr>
-          </c:dPt>
           <c:cat>
             <c:multiLvlStrRef>
-              <c:f>Sheet1!$A$2:$A$9</c:f>
+              <c:f>Sheet1!$A$2:$A$8</c:f>
               <c:multiLvlStrCache>
-                <c:ptCount val="8"/>
+                <c:ptCount val="7"/>
                 <c:lvl>
                   <c:pt idx="0">
                     <c:v>10点</c:v>
@@ -609,12 +598,9 @@
                     <c:v>6点</c:v>
                   </c:pt>
                   <c:pt idx="5">
-                    <c:v>5点</c:v>
+                    <c:v>4点</c:v>
                   </c:pt>
                   <c:pt idx="6">
-                    <c:v>4点</c:v>
-                  </c:pt>
-                  <c:pt idx="7">
                     <c:v>3点</c:v>
                   </c:pt>
                 </c:lvl>
@@ -623,33 +609,30 @@
           </c:cat>
           <c:val>
             <c:numRef>
-              <c:f>Sheet1!$B$2:$B$9</c:f>
+              <c:f>Sheet1!$B$2:$B$8</c:f>
               <c:numCache>
                 <c:formatCode>General</c:formatCode>
-                <c:ptCount val="8"/>
+                <c:ptCount val="7"/>
                 <c:pt idx="0">
-                  <c:v>53</c:v>
+                  <c:v>28</c:v>
                 </c:pt>
                 <c:pt idx="1">
-                  <c:v>17</c:v>
+                  <c:v>10</c:v>
                 </c:pt>
                 <c:pt idx="2">
-                  <c:v>44</c:v>
+                  <c:v>23</c:v>
                 </c:pt>
                 <c:pt idx="3">
-                  <c:v>9</c:v>
+                  <c:v>4</c:v>
                 </c:pt>
                 <c:pt idx="4">
-                  <c:v>12</c:v>
+                  <c:v>6</c:v>
                 </c:pt>
                 <c:pt idx="5">
                   <c:v>1</c:v>
                 </c:pt>
                 <c:pt idx="6">
-                  <c:v>3</c:v>
-                </c:pt>
-                <c:pt idx="7">
-                  <c:v>2</c:v>
+                  <c:v>1</c:v>
                 </c:pt>
               </c:numCache>
             </c:numRef>
@@ -2537,7 +2520,7 @@
                 <a:ea typeface="Arial" pitchFamily="34" charset="-122"/>
                 <a:cs typeface="Arial" pitchFamily="34" charset="-120"/>
               </a:rPr>
-              <a:t>レビュー総数：141件</a:t>
+              <a:t>レビュー総数：73件</a:t>
             </a:r>
             <a:endParaRPr lang="en-US" sz="1000" dirty="0"/>
           </a:p>
@@ -2817,7 +2800,7 @@
                 <a:ea typeface="Arial" pitchFamily="34" charset="-122"/>
                 <a:cs typeface="Arial" pitchFamily="34" charset="-120"/>
               </a:rPr>
-              <a:t>コンフォートホテル成田は全体平均8.46点（10pt換算）、高評価率80.9%を達成しています。本レポートで示した改善施策を段階的に実施することで、さらなる顧客満足度向上が期待できます。</a:t>
+              <a:t>コンフォートホテル成田は全体平均8.56点（10pt換算）、高評価率83.6%を達成しています。本レポートで示した改善施策を段階的に実施することで、さらなる顧客満足度向上が期待できます。</a:t>
             </a:r>
             <a:endParaRPr lang="en-US" sz="1200" dirty="0"/>
           </a:p>
@@ -3254,7 +3237,7 @@
                 <a:ea typeface="Arial" pitchFamily="34" charset="-122"/>
                 <a:cs typeface="Arial" pitchFamily="34" charset="-120"/>
               </a:rPr>
-              <a:t>8.46</a:t>
+              <a:t>8.56</a:t>
             </a:r>
             <a:endParaRPr lang="en-US" sz="2800" dirty="0"/>
           </a:p>
@@ -3372,7 +3355,7 @@
                 <a:ea typeface="Arial" pitchFamily="34" charset="-122"/>
                 <a:cs typeface="Arial" pitchFamily="34" charset="-120"/>
               </a:rPr>
-              <a:t>80.9%</a:t>
+              <a:t>83.6%</a:t>
             </a:r>
             <a:endParaRPr lang="en-US" sz="2800" dirty="0"/>
           </a:p>
@@ -3490,7 +3473,7 @@
                 <a:ea typeface="Arial" pitchFamily="34" charset="-122"/>
                 <a:cs typeface="Arial" pitchFamily="34" charset="-120"/>
               </a:rPr>
-              <a:t>3.5%</a:t>
+              <a:t>2.7%</a:t>
             </a:r>
             <a:endParaRPr lang="en-US" sz="2800" dirty="0"/>
           </a:p>
@@ -3608,7 +3591,7 @@
                 <a:ea typeface="Arial" pitchFamily="34" charset="-122"/>
                 <a:cs typeface="Arial" pitchFamily="34" charset="-120"/>
               </a:rPr>
-              <a:t>141件</a:t>
+              <a:t>73件</a:t>
             </a:r>
             <a:endParaRPr lang="en-US" sz="2800" dirty="0"/>
           </a:p>
@@ -4347,7 +4330,7 @@
                           <a:ea typeface="Arial" pitchFamily="34" charset="-122"/>
                           <a:cs typeface="Arial" pitchFamily="34" charset="-120"/>
                         </a:rPr>
-                        <a:t>21</a:t>
+                        <a:t>10</a:t>
                       </a:r>
                       <a:endParaRPr lang="en-US" sz="800" dirty="0">
                         <a:latin typeface="Arial" charset="0"/>
@@ -4415,7 +4398,7 @@
                           <a:ea typeface="Arial" pitchFamily="34" charset="-122"/>
                           <a:cs typeface="Arial" pitchFamily="34" charset="-120"/>
                         </a:rPr>
-                        <a:t>9.57/10</a:t>
+                        <a:t>9.40/10</a:t>
                       </a:r>
                       <a:endParaRPr lang="en-US" sz="800" dirty="0">
                         <a:latin typeface="Arial" charset="0"/>
@@ -4483,7 +4466,7 @@
                           <a:ea typeface="Arial" pitchFamily="34" charset="-122"/>
                           <a:cs typeface="Arial" pitchFamily="34" charset="-120"/>
                         </a:rPr>
-                        <a:t>9.57</a:t>
+                        <a:t>9.40</a:t>
                       </a:r>
                       <a:endParaRPr lang="en-US" sz="800" dirty="0">
                         <a:latin typeface="Arial" charset="0"/>
@@ -4552,6 +4535,348 @@
                           <a:cs typeface="Arial" pitchFamily="34" charset="-120"/>
                         </a:rPr>
                         <a:t>優秀</a:t>
+                      </a:r>
+                      <a:endParaRPr lang="en-US" sz="800" dirty="0">
+                        <a:latin typeface="Arial" charset="0"/>
+                        <a:ea typeface="Arial" charset="0"/>
+                        <a:cs typeface="Arial" charset="0"/>
+                      </a:endParaRPr>
+                    </a:p>
+                  </a:txBody>
+                  <a:tcPr marL="91440" marR="91440" marT="45720" marB="45720">
+                    <a:lnL w="6350" cap="flat" cmpd="sng" algn="ctr">
+                      <a:solidFill>
+                        <a:srgbClr val="CCCCCC"/>
+                      </a:solidFill>
+                      <a:prstDash val="solid"/>
+                      <a:round/>
+                      <a:headEnd type="none" w="med" len="med"/>
+                      <a:tailEnd type="none" w="med" len="med"/>
+                    </a:lnL>
+                    <a:lnR w="6350" cap="flat" cmpd="sng" algn="ctr">
+                      <a:solidFill>
+                        <a:srgbClr val="CCCCCC"/>
+                      </a:solidFill>
+                      <a:prstDash val="solid"/>
+                      <a:round/>
+                      <a:headEnd type="none" w="med" len="med"/>
+                      <a:tailEnd type="none" w="med" len="med"/>
+                    </a:lnR>
+                    <a:lnT w="6350" cap="flat" cmpd="sng" algn="ctr">
+                      <a:solidFill>
+                        <a:srgbClr val="CCCCCC"/>
+                      </a:solidFill>
+                      <a:prstDash val="solid"/>
+                      <a:round/>
+                      <a:headEnd type="none" w="med" len="med"/>
+                      <a:tailEnd type="none" w="med" len="med"/>
+                    </a:lnT>
+                    <a:lnB w="6350" cap="flat" cmpd="sng" algn="ctr">
+                      <a:solidFill>
+                        <a:srgbClr val="CCCCCC"/>
+                      </a:solidFill>
+                      <a:prstDash val="solid"/>
+                      <a:round/>
+                      <a:headEnd type="none" w="med" len="med"/>
+                      <a:tailEnd type="none" w="med" len="med"/>
+                    </a:lnB>
+                    <a:solidFill>
+                      <a:srgbClr val="FFFFFF"/>
+                    </a:solidFill>
+                  </a:tcPr>
+                </a:tc>
+              </a:tr>
+              <a:tr h="0">
+                <a:tc>
+                  <a:txBody>
+                    <a:bodyPr/>
+                    <a:lstStyle/>
+                    <a:p>
+                      <a:pPr algn="ctr" indent="0" marL="0">
+                        <a:buNone/>
+                      </a:pPr>
+                      <a:r>
+                        <a:rPr lang="en-US" sz="800" dirty="0">
+                          <a:solidFill>
+                            <a:srgbClr val="000000"/>
+                          </a:solidFill>
+                          <a:latin typeface="Arial" pitchFamily="34" charset="0"/>
+                          <a:ea typeface="Arial" pitchFamily="34" charset="-122"/>
+                          <a:cs typeface="Arial" pitchFamily="34" charset="-120"/>
+                        </a:rPr>
+                        <a:t>楽天トラベル</a:t>
+                      </a:r>
+                      <a:endParaRPr lang="en-US" sz="800" dirty="0">
+                        <a:latin typeface="Arial" charset="0"/>
+                        <a:ea typeface="Arial" charset="0"/>
+                        <a:cs typeface="Arial" charset="0"/>
+                      </a:endParaRPr>
+                    </a:p>
+                  </a:txBody>
+                  <a:tcPr marL="91440" marR="91440" marT="45720" marB="45720">
+                    <a:lnL w="6350" cap="flat" cmpd="sng" algn="ctr">
+                      <a:solidFill>
+                        <a:srgbClr val="CCCCCC"/>
+                      </a:solidFill>
+                      <a:prstDash val="solid"/>
+                      <a:round/>
+                      <a:headEnd type="none" w="med" len="med"/>
+                      <a:tailEnd type="none" w="med" len="med"/>
+                    </a:lnL>
+                    <a:lnR w="6350" cap="flat" cmpd="sng" algn="ctr">
+                      <a:solidFill>
+                        <a:srgbClr val="CCCCCC"/>
+                      </a:solidFill>
+                      <a:prstDash val="solid"/>
+                      <a:round/>
+                      <a:headEnd type="none" w="med" len="med"/>
+                      <a:tailEnd type="none" w="med" len="med"/>
+                    </a:lnR>
+                    <a:lnT w="6350" cap="flat" cmpd="sng" algn="ctr">
+                      <a:solidFill>
+                        <a:srgbClr val="CCCCCC"/>
+                      </a:solidFill>
+                      <a:prstDash val="solid"/>
+                      <a:round/>
+                      <a:headEnd type="none" w="med" len="med"/>
+                      <a:tailEnd type="none" w="med" len="med"/>
+                    </a:lnT>
+                    <a:lnB w="6350" cap="flat" cmpd="sng" algn="ctr">
+                      <a:solidFill>
+                        <a:srgbClr val="CCCCCC"/>
+                      </a:solidFill>
+                      <a:prstDash val="solid"/>
+                      <a:round/>
+                      <a:headEnd type="none" w="med" len="med"/>
+                      <a:tailEnd type="none" w="med" len="med"/>
+                    </a:lnB>
+                    <a:solidFill>
+                      <a:srgbClr val="FFFFFF"/>
+                    </a:solidFill>
+                  </a:tcPr>
+                </a:tc>
+                <a:tc>
+                  <a:txBody>
+                    <a:bodyPr/>
+                    <a:lstStyle/>
+                    <a:p>
+                      <a:pPr algn="ctr" indent="0" marL="0">
+                        <a:buNone/>
+                      </a:pPr>
+                      <a:r>
+                        <a:rPr lang="en-US" sz="800" dirty="0">
+                          <a:solidFill>
+                            <a:srgbClr val="000000"/>
+                          </a:solidFill>
+                          <a:latin typeface="Arial" pitchFamily="34" charset="0"/>
+                          <a:ea typeface="Arial" pitchFamily="34" charset="-122"/>
+                          <a:cs typeface="Arial" pitchFamily="34" charset="-120"/>
+                        </a:rPr>
+                        <a:t>12</a:t>
+                      </a:r>
+                      <a:endParaRPr lang="en-US" sz="800" dirty="0">
+                        <a:latin typeface="Arial" charset="0"/>
+                        <a:ea typeface="Arial" charset="0"/>
+                        <a:cs typeface="Arial" charset="0"/>
+                      </a:endParaRPr>
+                    </a:p>
+                  </a:txBody>
+                  <a:tcPr marL="91440" marR="91440" marT="45720" marB="45720">
+                    <a:lnL w="6350" cap="flat" cmpd="sng" algn="ctr">
+                      <a:solidFill>
+                        <a:srgbClr val="CCCCCC"/>
+                      </a:solidFill>
+                      <a:prstDash val="solid"/>
+                      <a:round/>
+                      <a:headEnd type="none" w="med" len="med"/>
+                      <a:tailEnd type="none" w="med" len="med"/>
+                    </a:lnL>
+                    <a:lnR w="6350" cap="flat" cmpd="sng" algn="ctr">
+                      <a:solidFill>
+                        <a:srgbClr val="CCCCCC"/>
+                      </a:solidFill>
+                      <a:prstDash val="solid"/>
+                      <a:round/>
+                      <a:headEnd type="none" w="med" len="med"/>
+                      <a:tailEnd type="none" w="med" len="med"/>
+                    </a:lnR>
+                    <a:lnT w="6350" cap="flat" cmpd="sng" algn="ctr">
+                      <a:solidFill>
+                        <a:srgbClr val="CCCCCC"/>
+                      </a:solidFill>
+                      <a:prstDash val="solid"/>
+                      <a:round/>
+                      <a:headEnd type="none" w="med" len="med"/>
+                      <a:tailEnd type="none" w="med" len="med"/>
+                    </a:lnT>
+                    <a:lnB w="6350" cap="flat" cmpd="sng" algn="ctr">
+                      <a:solidFill>
+                        <a:srgbClr val="CCCCCC"/>
+                      </a:solidFill>
+                      <a:prstDash val="solid"/>
+                      <a:round/>
+                      <a:headEnd type="none" w="med" len="med"/>
+                      <a:tailEnd type="none" w="med" len="med"/>
+                    </a:lnB>
+                    <a:solidFill>
+                      <a:srgbClr val="FFFFFF"/>
+                    </a:solidFill>
+                  </a:tcPr>
+                </a:tc>
+                <a:tc>
+                  <a:txBody>
+                    <a:bodyPr/>
+                    <a:lstStyle/>
+                    <a:p>
+                      <a:pPr algn="ctr" indent="0" marL="0">
+                        <a:buNone/>
+                      </a:pPr>
+                      <a:r>
+                        <a:rPr lang="en-US" sz="800" dirty="0">
+                          <a:solidFill>
+                            <a:srgbClr val="000000"/>
+                          </a:solidFill>
+                          <a:latin typeface="Arial" pitchFamily="34" charset="0"/>
+                          <a:ea typeface="Arial" pitchFamily="34" charset="-122"/>
+                          <a:cs typeface="Arial" pitchFamily="34" charset="-120"/>
+                        </a:rPr>
+                        <a:t>4.42/5</a:t>
+                      </a:r>
+                      <a:endParaRPr lang="en-US" sz="800" dirty="0">
+                        <a:latin typeface="Arial" charset="0"/>
+                        <a:ea typeface="Arial" charset="0"/>
+                        <a:cs typeface="Arial" charset="0"/>
+                      </a:endParaRPr>
+                    </a:p>
+                  </a:txBody>
+                  <a:tcPr marL="91440" marR="91440" marT="45720" marB="45720">
+                    <a:lnL w="6350" cap="flat" cmpd="sng" algn="ctr">
+                      <a:solidFill>
+                        <a:srgbClr val="CCCCCC"/>
+                      </a:solidFill>
+                      <a:prstDash val="solid"/>
+                      <a:round/>
+                      <a:headEnd type="none" w="med" len="med"/>
+                      <a:tailEnd type="none" w="med" len="med"/>
+                    </a:lnL>
+                    <a:lnR w="6350" cap="flat" cmpd="sng" algn="ctr">
+                      <a:solidFill>
+                        <a:srgbClr val="CCCCCC"/>
+                      </a:solidFill>
+                      <a:prstDash val="solid"/>
+                      <a:round/>
+                      <a:headEnd type="none" w="med" len="med"/>
+                      <a:tailEnd type="none" w="med" len="med"/>
+                    </a:lnR>
+                    <a:lnT w="6350" cap="flat" cmpd="sng" algn="ctr">
+                      <a:solidFill>
+                        <a:srgbClr val="CCCCCC"/>
+                      </a:solidFill>
+                      <a:prstDash val="solid"/>
+                      <a:round/>
+                      <a:headEnd type="none" w="med" len="med"/>
+                      <a:tailEnd type="none" w="med" len="med"/>
+                    </a:lnT>
+                    <a:lnB w="6350" cap="flat" cmpd="sng" algn="ctr">
+                      <a:solidFill>
+                        <a:srgbClr val="CCCCCC"/>
+                      </a:solidFill>
+                      <a:prstDash val="solid"/>
+                      <a:round/>
+                      <a:headEnd type="none" w="med" len="med"/>
+                      <a:tailEnd type="none" w="med" len="med"/>
+                    </a:lnB>
+                    <a:solidFill>
+                      <a:srgbClr val="FFFFFF"/>
+                    </a:solidFill>
+                  </a:tcPr>
+                </a:tc>
+                <a:tc>
+                  <a:txBody>
+                    <a:bodyPr/>
+                    <a:lstStyle/>
+                    <a:p>
+                      <a:pPr algn="ctr" indent="0" marL="0">
+                        <a:buNone/>
+                      </a:pPr>
+                      <a:r>
+                        <a:rPr lang="en-US" sz="800" dirty="0">
+                          <a:solidFill>
+                            <a:srgbClr val="000000"/>
+                          </a:solidFill>
+                          <a:latin typeface="Arial" pitchFamily="34" charset="0"/>
+                          <a:ea typeface="Arial" pitchFamily="34" charset="-122"/>
+                          <a:cs typeface="Arial" pitchFamily="34" charset="-120"/>
+                        </a:rPr>
+                        <a:t>8.83</a:t>
+                      </a:r>
+                      <a:endParaRPr lang="en-US" sz="800" dirty="0">
+                        <a:latin typeface="Arial" charset="0"/>
+                        <a:ea typeface="Arial" charset="0"/>
+                        <a:cs typeface="Arial" charset="0"/>
+                      </a:endParaRPr>
+                    </a:p>
+                  </a:txBody>
+                  <a:tcPr marL="91440" marR="91440" marT="45720" marB="45720">
+                    <a:lnL w="6350" cap="flat" cmpd="sng" algn="ctr">
+                      <a:solidFill>
+                        <a:srgbClr val="CCCCCC"/>
+                      </a:solidFill>
+                      <a:prstDash val="solid"/>
+                      <a:round/>
+                      <a:headEnd type="none" w="med" len="med"/>
+                      <a:tailEnd type="none" w="med" len="med"/>
+                    </a:lnL>
+                    <a:lnR w="6350" cap="flat" cmpd="sng" algn="ctr">
+                      <a:solidFill>
+                        <a:srgbClr val="CCCCCC"/>
+                      </a:solidFill>
+                      <a:prstDash val="solid"/>
+                      <a:round/>
+                      <a:headEnd type="none" w="med" len="med"/>
+                      <a:tailEnd type="none" w="med" len="med"/>
+                    </a:lnR>
+                    <a:lnT w="6350" cap="flat" cmpd="sng" algn="ctr">
+                      <a:solidFill>
+                        <a:srgbClr val="CCCCCC"/>
+                      </a:solidFill>
+                      <a:prstDash val="solid"/>
+                      <a:round/>
+                      <a:headEnd type="none" w="med" len="med"/>
+                      <a:tailEnd type="none" w="med" len="med"/>
+                    </a:lnT>
+                    <a:lnB w="6350" cap="flat" cmpd="sng" algn="ctr">
+                      <a:solidFill>
+                        <a:srgbClr val="CCCCCC"/>
+                      </a:solidFill>
+                      <a:prstDash val="solid"/>
+                      <a:round/>
+                      <a:headEnd type="none" w="med" len="med"/>
+                      <a:tailEnd type="none" w="med" len="med"/>
+                    </a:lnB>
+                    <a:solidFill>
+                      <a:srgbClr val="FFFFFF"/>
+                    </a:solidFill>
+                  </a:tcPr>
+                </a:tc>
+                <a:tc>
+                  <a:txBody>
+                    <a:bodyPr/>
+                    <a:lstStyle/>
+                    <a:p>
+                      <a:pPr algn="ctr" indent="0" marL="0">
+                        <a:buNone/>
+                      </a:pPr>
+                      <a:r>
+                        <a:rPr lang="en-US" sz="800" dirty="0">
+                          <a:solidFill>
+                            <a:srgbClr val="000000"/>
+                          </a:solidFill>
+                          <a:latin typeface="Arial" pitchFamily="34" charset="0"/>
+                          <a:ea typeface="Arial" pitchFamily="34" charset="-122"/>
+                          <a:cs typeface="Arial" pitchFamily="34" charset="-120"/>
+                        </a:rPr>
+                        <a:t>良好</a:t>
                       </a:r>
                       <a:endParaRPr lang="en-US" sz="800" dirty="0">
                         <a:latin typeface="Arial" charset="0"/>
@@ -4689,7 +5014,7 @@
                           <a:ea typeface="Arial" pitchFamily="34" charset="-122"/>
                           <a:cs typeface="Arial" pitchFamily="34" charset="-120"/>
                         </a:rPr>
-                        <a:t>18</a:t>
+                        <a:t>11</a:t>
                       </a:r>
                       <a:endParaRPr lang="en-US" sz="800" dirty="0">
                         <a:latin typeface="Arial" charset="0"/>
@@ -4757,7 +5082,7 @@
                           <a:ea typeface="Arial" pitchFamily="34" charset="-122"/>
                           <a:cs typeface="Arial" pitchFamily="34" charset="-120"/>
                         </a:rPr>
-                        <a:t>4.39/5</a:t>
+                        <a:t>4.27/5</a:t>
                       </a:r>
                       <a:endParaRPr lang="en-US" sz="800" dirty="0">
                         <a:latin typeface="Arial" charset="0"/>
@@ -4825,7 +5150,7 @@
                           <a:ea typeface="Arial" pitchFamily="34" charset="-122"/>
                           <a:cs typeface="Arial" pitchFamily="34" charset="-120"/>
                         </a:rPr>
-                        <a:t>8.78</a:t>
+                        <a:t>8.55</a:t>
                       </a:r>
                       <a:endParaRPr lang="en-US" sz="800" dirty="0">
                         <a:latin typeface="Arial" charset="0"/>
@@ -4963,7 +5288,7 @@
                           <a:ea typeface="Arial" pitchFamily="34" charset="-122"/>
                           <a:cs typeface="Arial" pitchFamily="34" charset="-120"/>
                         </a:rPr>
-                        <a:t>楽天トラベル</a:t>
+                        <a:t>じゃらん</a:t>
                       </a:r>
                       <a:endParaRPr lang="en-US" sz="800" dirty="0">
                         <a:latin typeface="Arial" charset="0"/>
@@ -5031,7 +5356,7 @@
                           <a:ea typeface="Arial" pitchFamily="34" charset="-122"/>
                           <a:cs typeface="Arial" pitchFamily="34" charset="-120"/>
                         </a:rPr>
-                        <a:t>21</a:t>
+                        <a:t>8</a:t>
                       </a:r>
                       <a:endParaRPr lang="en-US" sz="800" dirty="0">
                         <a:latin typeface="Arial" charset="0"/>
@@ -5099,7 +5424,7 @@
                           <a:ea typeface="Arial" pitchFamily="34" charset="-122"/>
                           <a:cs typeface="Arial" pitchFamily="34" charset="-120"/>
                         </a:rPr>
-                        <a:t>4.29/5</a:t>
+                        <a:t>4.25/5</a:t>
                       </a:r>
                       <a:endParaRPr lang="en-US" sz="800" dirty="0">
                         <a:latin typeface="Arial" charset="0"/>
@@ -5167,7 +5492,7 @@
                           <a:ea typeface="Arial" pitchFamily="34" charset="-122"/>
                           <a:cs typeface="Arial" pitchFamily="34" charset="-120"/>
                         </a:rPr>
-                        <a:t>8.57</a:t>
+                        <a:t>8.50</a:t>
                       </a:r>
                       <a:endParaRPr lang="en-US" sz="800" dirty="0">
                         <a:latin typeface="Arial" charset="0"/>
@@ -5373,7 +5698,7 @@
                           <a:ea typeface="Arial" pitchFamily="34" charset="-122"/>
                           <a:cs typeface="Arial" pitchFamily="34" charset="-120"/>
                         </a:rPr>
-                        <a:t>55</a:t>
+                        <a:t>27</a:t>
                       </a:r>
                       <a:endParaRPr lang="en-US" sz="800" dirty="0">
                         <a:latin typeface="Arial" charset="0"/>
@@ -5441,7 +5766,7 @@
                           <a:ea typeface="Arial" pitchFamily="34" charset="-122"/>
                           <a:cs typeface="Arial" pitchFamily="34" charset="-120"/>
                         </a:rPr>
-                        <a:t>8.22/10</a:t>
+                        <a:t>8.37/10</a:t>
                       </a:r>
                       <a:endParaRPr lang="en-US" sz="800" dirty="0">
                         <a:latin typeface="Arial" charset="0"/>
@@ -5509,349 +5834,7 @@
                           <a:ea typeface="Arial" pitchFamily="34" charset="-122"/>
                           <a:cs typeface="Arial" pitchFamily="34" charset="-120"/>
                         </a:rPr>
-                        <a:t>8.22</a:t>
-                      </a:r>
-                      <a:endParaRPr lang="en-US" sz="800" dirty="0">
-                        <a:latin typeface="Arial" charset="0"/>
-                        <a:ea typeface="Arial" charset="0"/>
-                        <a:cs typeface="Arial" charset="0"/>
-                      </a:endParaRPr>
-                    </a:p>
-                  </a:txBody>
-                  <a:tcPr marL="91440" marR="91440" marT="45720" marB="45720">
-                    <a:lnL w="6350" cap="flat" cmpd="sng" algn="ctr">
-                      <a:solidFill>
-                        <a:srgbClr val="CCCCCC"/>
-                      </a:solidFill>
-                      <a:prstDash val="solid"/>
-                      <a:round/>
-                      <a:headEnd type="none" w="med" len="med"/>
-                      <a:tailEnd type="none" w="med" len="med"/>
-                    </a:lnL>
-                    <a:lnR w="6350" cap="flat" cmpd="sng" algn="ctr">
-                      <a:solidFill>
-                        <a:srgbClr val="CCCCCC"/>
-                      </a:solidFill>
-                      <a:prstDash val="solid"/>
-                      <a:round/>
-                      <a:headEnd type="none" w="med" len="med"/>
-                      <a:tailEnd type="none" w="med" len="med"/>
-                    </a:lnR>
-                    <a:lnT w="6350" cap="flat" cmpd="sng" algn="ctr">
-                      <a:solidFill>
-                        <a:srgbClr val="CCCCCC"/>
-                      </a:solidFill>
-                      <a:prstDash val="solid"/>
-                      <a:round/>
-                      <a:headEnd type="none" w="med" len="med"/>
-                      <a:tailEnd type="none" w="med" len="med"/>
-                    </a:lnT>
-                    <a:lnB w="6350" cap="flat" cmpd="sng" algn="ctr">
-                      <a:solidFill>
-                        <a:srgbClr val="CCCCCC"/>
-                      </a:solidFill>
-                      <a:prstDash val="solid"/>
-                      <a:round/>
-                      <a:headEnd type="none" w="med" len="med"/>
-                      <a:tailEnd type="none" w="med" len="med"/>
-                    </a:lnB>
-                    <a:solidFill>
-                      <a:srgbClr val="FFFFFF"/>
-                    </a:solidFill>
-                  </a:tcPr>
-                </a:tc>
-                <a:tc>
-                  <a:txBody>
-                    <a:bodyPr/>
-                    <a:lstStyle/>
-                    <a:p>
-                      <a:pPr algn="ctr" indent="0" marL="0">
-                        <a:buNone/>
-                      </a:pPr>
-                      <a:r>
-                        <a:rPr lang="en-US" sz="800" dirty="0">
-                          <a:solidFill>
-                            <a:srgbClr val="000000"/>
-                          </a:solidFill>
-                          <a:latin typeface="Arial" pitchFamily="34" charset="0"/>
-                          <a:ea typeface="Arial" pitchFamily="34" charset="-122"/>
-                          <a:cs typeface="Arial" pitchFamily="34" charset="-120"/>
-                        </a:rPr>
-                        <a:t>良好</a:t>
-                      </a:r>
-                      <a:endParaRPr lang="en-US" sz="800" dirty="0">
-                        <a:latin typeface="Arial" charset="0"/>
-                        <a:ea typeface="Arial" charset="0"/>
-                        <a:cs typeface="Arial" charset="0"/>
-                      </a:endParaRPr>
-                    </a:p>
-                  </a:txBody>
-                  <a:tcPr marL="91440" marR="91440" marT="45720" marB="45720">
-                    <a:lnL w="6350" cap="flat" cmpd="sng" algn="ctr">
-                      <a:solidFill>
-                        <a:srgbClr val="CCCCCC"/>
-                      </a:solidFill>
-                      <a:prstDash val="solid"/>
-                      <a:round/>
-                      <a:headEnd type="none" w="med" len="med"/>
-                      <a:tailEnd type="none" w="med" len="med"/>
-                    </a:lnL>
-                    <a:lnR w="6350" cap="flat" cmpd="sng" algn="ctr">
-                      <a:solidFill>
-                        <a:srgbClr val="CCCCCC"/>
-                      </a:solidFill>
-                      <a:prstDash val="solid"/>
-                      <a:round/>
-                      <a:headEnd type="none" w="med" len="med"/>
-                      <a:tailEnd type="none" w="med" len="med"/>
-                    </a:lnR>
-                    <a:lnT w="6350" cap="flat" cmpd="sng" algn="ctr">
-                      <a:solidFill>
-                        <a:srgbClr val="CCCCCC"/>
-                      </a:solidFill>
-                      <a:prstDash val="solid"/>
-                      <a:round/>
-                      <a:headEnd type="none" w="med" len="med"/>
-                      <a:tailEnd type="none" w="med" len="med"/>
-                    </a:lnT>
-                    <a:lnB w="6350" cap="flat" cmpd="sng" algn="ctr">
-                      <a:solidFill>
-                        <a:srgbClr val="CCCCCC"/>
-                      </a:solidFill>
-                      <a:prstDash val="solid"/>
-                      <a:round/>
-                      <a:headEnd type="none" w="med" len="med"/>
-                      <a:tailEnd type="none" w="med" len="med"/>
-                    </a:lnB>
-                    <a:solidFill>
-                      <a:srgbClr val="FFFFFF"/>
-                    </a:solidFill>
-                  </a:tcPr>
-                </a:tc>
-              </a:tr>
-              <a:tr h="0">
-                <a:tc>
-                  <a:txBody>
-                    <a:bodyPr/>
-                    <a:lstStyle/>
-                    <a:p>
-                      <a:pPr algn="ctr" indent="0" marL="0">
-                        <a:buNone/>
-                      </a:pPr>
-                      <a:r>
-                        <a:rPr lang="en-US" sz="800" dirty="0">
-                          <a:solidFill>
-                            <a:srgbClr val="000000"/>
-                          </a:solidFill>
-                          <a:latin typeface="Arial" pitchFamily="34" charset="0"/>
-                          <a:ea typeface="Arial" pitchFamily="34" charset="-122"/>
-                          <a:cs typeface="Arial" pitchFamily="34" charset="-120"/>
-                        </a:rPr>
-                        <a:t>じゃらん</a:t>
-                      </a:r>
-                      <a:endParaRPr lang="en-US" sz="800" dirty="0">
-                        <a:latin typeface="Arial" charset="0"/>
-                        <a:ea typeface="Arial" charset="0"/>
-                        <a:cs typeface="Arial" charset="0"/>
-                      </a:endParaRPr>
-                    </a:p>
-                  </a:txBody>
-                  <a:tcPr marL="91440" marR="91440" marT="45720" marB="45720">
-                    <a:lnL w="6350" cap="flat" cmpd="sng" algn="ctr">
-                      <a:solidFill>
-                        <a:srgbClr val="CCCCCC"/>
-                      </a:solidFill>
-                      <a:prstDash val="solid"/>
-                      <a:round/>
-                      <a:headEnd type="none" w="med" len="med"/>
-                      <a:tailEnd type="none" w="med" len="med"/>
-                    </a:lnL>
-                    <a:lnR w="6350" cap="flat" cmpd="sng" algn="ctr">
-                      <a:solidFill>
-                        <a:srgbClr val="CCCCCC"/>
-                      </a:solidFill>
-                      <a:prstDash val="solid"/>
-                      <a:round/>
-                      <a:headEnd type="none" w="med" len="med"/>
-                      <a:tailEnd type="none" w="med" len="med"/>
-                    </a:lnR>
-                    <a:lnT w="6350" cap="flat" cmpd="sng" algn="ctr">
-                      <a:solidFill>
-                        <a:srgbClr val="CCCCCC"/>
-                      </a:solidFill>
-                      <a:prstDash val="solid"/>
-                      <a:round/>
-                      <a:headEnd type="none" w="med" len="med"/>
-                      <a:tailEnd type="none" w="med" len="med"/>
-                    </a:lnT>
-                    <a:lnB w="6350" cap="flat" cmpd="sng" algn="ctr">
-                      <a:solidFill>
-                        <a:srgbClr val="CCCCCC"/>
-                      </a:solidFill>
-                      <a:prstDash val="solid"/>
-                      <a:round/>
-                      <a:headEnd type="none" w="med" len="med"/>
-                      <a:tailEnd type="none" w="med" len="med"/>
-                    </a:lnB>
-                    <a:solidFill>
-                      <a:srgbClr val="FFFFFF"/>
-                    </a:solidFill>
-                  </a:tcPr>
-                </a:tc>
-                <a:tc>
-                  <a:txBody>
-                    <a:bodyPr/>
-                    <a:lstStyle/>
-                    <a:p>
-                      <a:pPr algn="ctr" indent="0" marL="0">
-                        <a:buNone/>
-                      </a:pPr>
-                      <a:r>
-                        <a:rPr lang="en-US" sz="800" dirty="0">
-                          <a:solidFill>
-                            <a:srgbClr val="000000"/>
-                          </a:solidFill>
-                          <a:latin typeface="Arial" pitchFamily="34" charset="0"/>
-                          <a:ea typeface="Arial" pitchFamily="34" charset="-122"/>
-                          <a:cs typeface="Arial" pitchFamily="34" charset="-120"/>
-                        </a:rPr>
-                        <a:t>15</a:t>
-                      </a:r>
-                      <a:endParaRPr lang="en-US" sz="800" dirty="0">
-                        <a:latin typeface="Arial" charset="0"/>
-                        <a:ea typeface="Arial" charset="0"/>
-                        <a:cs typeface="Arial" charset="0"/>
-                      </a:endParaRPr>
-                    </a:p>
-                  </a:txBody>
-                  <a:tcPr marL="91440" marR="91440" marT="45720" marB="45720">
-                    <a:lnL w="6350" cap="flat" cmpd="sng" algn="ctr">
-                      <a:solidFill>
-                        <a:srgbClr val="CCCCCC"/>
-                      </a:solidFill>
-                      <a:prstDash val="solid"/>
-                      <a:round/>
-                      <a:headEnd type="none" w="med" len="med"/>
-                      <a:tailEnd type="none" w="med" len="med"/>
-                    </a:lnL>
-                    <a:lnR w="6350" cap="flat" cmpd="sng" algn="ctr">
-                      <a:solidFill>
-                        <a:srgbClr val="CCCCCC"/>
-                      </a:solidFill>
-                      <a:prstDash val="solid"/>
-                      <a:round/>
-                      <a:headEnd type="none" w="med" len="med"/>
-                      <a:tailEnd type="none" w="med" len="med"/>
-                    </a:lnR>
-                    <a:lnT w="6350" cap="flat" cmpd="sng" algn="ctr">
-                      <a:solidFill>
-                        <a:srgbClr val="CCCCCC"/>
-                      </a:solidFill>
-                      <a:prstDash val="solid"/>
-                      <a:round/>
-                      <a:headEnd type="none" w="med" len="med"/>
-                      <a:tailEnd type="none" w="med" len="med"/>
-                    </a:lnT>
-                    <a:lnB w="6350" cap="flat" cmpd="sng" algn="ctr">
-                      <a:solidFill>
-                        <a:srgbClr val="CCCCCC"/>
-                      </a:solidFill>
-                      <a:prstDash val="solid"/>
-                      <a:round/>
-                      <a:headEnd type="none" w="med" len="med"/>
-                      <a:tailEnd type="none" w="med" len="med"/>
-                    </a:lnB>
-                    <a:solidFill>
-                      <a:srgbClr val="FFFFFF"/>
-                    </a:solidFill>
-                  </a:tcPr>
-                </a:tc>
-                <a:tc>
-                  <a:txBody>
-                    <a:bodyPr/>
-                    <a:lstStyle/>
-                    <a:p>
-                      <a:pPr algn="ctr" indent="0" marL="0">
-                        <a:buNone/>
-                      </a:pPr>
-                      <a:r>
-                        <a:rPr lang="en-US" sz="800" dirty="0">
-                          <a:solidFill>
-                            <a:srgbClr val="000000"/>
-                          </a:solidFill>
-                          <a:latin typeface="Arial" pitchFamily="34" charset="0"/>
-                          <a:ea typeface="Arial" pitchFamily="34" charset="-122"/>
-                          <a:cs typeface="Arial" pitchFamily="34" charset="-120"/>
-                        </a:rPr>
-                        <a:t>4.07/5</a:t>
-                      </a:r>
-                      <a:endParaRPr lang="en-US" sz="800" dirty="0">
-                        <a:latin typeface="Arial" charset="0"/>
-                        <a:ea typeface="Arial" charset="0"/>
-                        <a:cs typeface="Arial" charset="0"/>
-                      </a:endParaRPr>
-                    </a:p>
-                  </a:txBody>
-                  <a:tcPr marL="91440" marR="91440" marT="45720" marB="45720">
-                    <a:lnL w="6350" cap="flat" cmpd="sng" algn="ctr">
-                      <a:solidFill>
-                        <a:srgbClr val="CCCCCC"/>
-                      </a:solidFill>
-                      <a:prstDash val="solid"/>
-                      <a:round/>
-                      <a:headEnd type="none" w="med" len="med"/>
-                      <a:tailEnd type="none" w="med" len="med"/>
-                    </a:lnL>
-                    <a:lnR w="6350" cap="flat" cmpd="sng" algn="ctr">
-                      <a:solidFill>
-                        <a:srgbClr val="CCCCCC"/>
-                      </a:solidFill>
-                      <a:prstDash val="solid"/>
-                      <a:round/>
-                      <a:headEnd type="none" w="med" len="med"/>
-                      <a:tailEnd type="none" w="med" len="med"/>
-                    </a:lnR>
-                    <a:lnT w="6350" cap="flat" cmpd="sng" algn="ctr">
-                      <a:solidFill>
-                        <a:srgbClr val="CCCCCC"/>
-                      </a:solidFill>
-                      <a:prstDash val="solid"/>
-                      <a:round/>
-                      <a:headEnd type="none" w="med" len="med"/>
-                      <a:tailEnd type="none" w="med" len="med"/>
-                    </a:lnT>
-                    <a:lnB w="6350" cap="flat" cmpd="sng" algn="ctr">
-                      <a:solidFill>
-                        <a:srgbClr val="CCCCCC"/>
-                      </a:solidFill>
-                      <a:prstDash val="solid"/>
-                      <a:round/>
-                      <a:headEnd type="none" w="med" len="med"/>
-                      <a:tailEnd type="none" w="med" len="med"/>
-                    </a:lnB>
-                    <a:solidFill>
-                      <a:srgbClr val="FFFFFF"/>
-                    </a:solidFill>
-                  </a:tcPr>
-                </a:tc>
-                <a:tc>
-                  <a:txBody>
-                    <a:bodyPr/>
-                    <a:lstStyle/>
-                    <a:p>
-                      <a:pPr algn="ctr" indent="0" marL="0">
-                        <a:buNone/>
-                      </a:pPr>
-                      <a:r>
-                        <a:rPr lang="en-US" sz="800" dirty="0">
-                          <a:solidFill>
-                            <a:srgbClr val="000000"/>
-                          </a:solidFill>
-                          <a:latin typeface="Arial" pitchFamily="34" charset="0"/>
-                          <a:ea typeface="Arial" pitchFamily="34" charset="-122"/>
-                          <a:cs typeface="Arial" pitchFamily="34" charset="-120"/>
-                        </a:rPr>
-                        <a:t>8.13</a:t>
+                        <a:t>8.37</a:t>
                       </a:r>
                       <a:endParaRPr lang="en-US" sz="800" dirty="0">
                         <a:latin typeface="Arial" charset="0"/>
@@ -6057,7 +6040,7 @@
                           <a:ea typeface="Arial" pitchFamily="34" charset="-122"/>
                           <a:cs typeface="Arial" pitchFamily="34" charset="-120"/>
                         </a:rPr>
-                        <a:t>11</a:t>
+                        <a:t>5</a:t>
                       </a:r>
                       <a:endParaRPr lang="en-US" sz="800" dirty="0">
                         <a:latin typeface="Arial" charset="0"/>
@@ -6125,7 +6108,7 @@
                           <a:ea typeface="Arial" pitchFamily="34" charset="-122"/>
                           <a:cs typeface="Arial" pitchFamily="34" charset="-120"/>
                         </a:rPr>
-                        <a:t>7.27/10</a:t>
+                        <a:t>7.40/10</a:t>
                       </a:r>
                       <a:endParaRPr lang="en-US" sz="800" dirty="0">
                         <a:latin typeface="Arial" charset="0"/>
@@ -6193,7 +6176,7 @@
                           <a:ea typeface="Arial" pitchFamily="34" charset="-122"/>
                           <a:cs typeface="Arial" pitchFamily="34" charset="-120"/>
                         </a:rPr>
-                        <a:t>7.27</a:t>
+                        <a:t>7.40</a:t>
                       </a:r>
                       <a:endParaRPr lang="en-US" sz="800" dirty="0">
                         <a:latin typeface="Arial" charset="0"/>
@@ -6646,7 +6629,7 @@
                 <a:ea typeface="Arial" pitchFamily="34" charset="-122"/>
                 <a:cs typeface="Arial" pitchFamily="34" charset="-120"/>
               </a:rPr>
-              <a:t>114件（80.9%）</a:t>
+              <a:t>61件（83.6%）</a:t>
             </a:r>
             <a:endParaRPr lang="en-US" sz="1600" dirty="0"/>
           </a:p>
@@ -6744,7 +6727,7 @@
                 <a:ea typeface="Arial" pitchFamily="34" charset="-122"/>
                 <a:cs typeface="Arial" pitchFamily="34" charset="-120"/>
               </a:rPr>
-              <a:t>22件（15.6%）</a:t>
+              <a:t>10件（13.7%）</a:t>
             </a:r>
             <a:endParaRPr lang="en-US" sz="1600" dirty="0"/>
           </a:p>
@@ -6842,7 +6825,7 @@
                 <a:ea typeface="Arial" pitchFamily="34" charset="-122"/>
                 <a:cs typeface="Arial" pitchFamily="34" charset="-120"/>
               </a:rPr>
-              <a:t>5件（3.5%）</a:t>
+              <a:t>2件（2.7%）</a:t>
             </a:r>
             <a:endParaRPr lang="en-US" sz="1600" dirty="0"/>
           </a:p>
@@ -7004,7 +6987,7 @@
                 <a:ea typeface="Arial" pitchFamily="34" charset="-122"/>
                 <a:cs typeface="Arial" pitchFamily="34" charset="-120"/>
               </a:rPr>
-              <a:t>高評価レビュー（8-10点: 114件）の分析から、主要な強みテーマを抽出しています。立地・アクセス、客室清潔感、スタッフ対応が高評価の中心的テーマです。</a:t>
+              <a:t>高評価レビュー（8-10点: 61件）の分析から、主要な強みテーマを抽出しています。立地・アクセス、客室清潔感、スタッフ対応が高評価の中心的テーマです。</a:t>
             </a:r>
             <a:endParaRPr lang="en-US" sz="1200" dirty="0"/>
           </a:p>
@@ -7264,7 +7247,7 @@
                 <a:ea typeface="Arial" pitchFamily="34" charset="-122"/>
                 <a:cs typeface="Arial" pitchFamily="34" charset="-120"/>
               </a:rPr>
-              <a:t>低評価・中評価レビュー（27件）から改善課題を優先度別に整理しています。S/A/B/Cの4段階で優先度を設定し、計画的な改善を推進します。</a:t>
+              <a:t>低評価・中評価レビュー（12件）から改善課題を優先度別に整理しています。S/A/B/Cの4段階で優先度を設定し、計画的な改善を推進します。</a:t>
             </a:r>
             <a:endParaRPr lang="en-US" sz="1200" dirty="0"/>
           </a:p>
@@ -8044,7 +8027,7 @@
                 <a:ea typeface="Arial" pitchFamily="34" charset="-122"/>
                 <a:cs typeface="Arial" pitchFamily="34" charset="-120"/>
               </a:rPr>
-              <a:t>全体平均 8.46点 → 目標 8.96点</a:t>
+              <a:t>全体平均 8.56点 → 目標 9.06点</a:t>
             </a:r>
             <a:endParaRPr lang="en-US" sz="1200" dirty="0"/>
           </a:p>
@@ -8061,7 +8044,7 @@
                 <a:ea typeface="Arial" pitchFamily="34" charset="-122"/>
                 <a:cs typeface="Arial" pitchFamily="34" charset="-120"/>
               </a:rPr>
-              <a:t>高評価率 80.9% → 目標 85.9%</a:t>
+              <a:t>高評価率 83.6% → 目標 88.6%</a:t>
             </a:r>
             <a:endParaRPr lang="en-US" sz="1200" dirty="0"/>
           </a:p>
@@ -8078,7 +8061,7 @@
                 <a:ea typeface="Arial" pitchFamily="34" charset="-122"/>
                 <a:cs typeface="Arial" pitchFamily="34" charset="-120"/>
               </a:rPr>
-              <a:t>低評価率 3.5% → 目標 1.5%</a:t>
+              <a:t>低評価率 2.7% → 目標 0.7%</a:t>
             </a:r>
             <a:endParaRPr lang="en-US" sz="1200" dirty="0"/>
           </a:p>

--- a/納品レポート/ホテル別レポート/comfort_narita_口コミ分析レポート.pptx
+++ b/納品レポート/ホテル別レポート/comfort_narita_口コミ分析レポート.pptx
@@ -183,16 +183,16 @@
                     <c:v>Trip.com</c:v>
                   </c:pt>
                   <c:pt idx="1">
+                    <c:v>楽天トラベル</c:v>
+                  </c:pt>
+                  <c:pt idx="2">
                     <c:v>Google</c:v>
                   </c:pt>
-                  <c:pt idx="2">
-                    <c:v>楽天トラベル</c:v>
-                  </c:pt>
                   <c:pt idx="3">
-                    <c:v>Booking.com</c:v>
+                    <c:v>じゃらん</c:v>
                   </c:pt>
                   <c:pt idx="4">
-                    <c:v>じゃらん</c:v>
+                    <c:v>Booking.com</c:v>
                   </c:pt>
                   <c:pt idx="5">
                     <c:v>Agoda</c:v>
@@ -208,22 +208,22 @@
                 <c:formatCode>General</c:formatCode>
                 <c:ptCount val="6"/>
                 <c:pt idx="0">
-                  <c:v>9.57</c:v>
+                  <c:v>9.5</c:v>
                 </c:pt>
                 <c:pt idx="1">
-                  <c:v>8.78</c:v>
+                  <c:v>8.83</c:v>
                 </c:pt>
                 <c:pt idx="2">
-                  <c:v>8.57</c:v>
+                  <c:v>8.75</c:v>
                 </c:pt>
                 <c:pt idx="3">
-                  <c:v>8.22</c:v>
+                  <c:v>8.5</c:v>
                 </c:pt>
                 <c:pt idx="4">
-                  <c:v>8.13</c:v>
+                  <c:v>8.43</c:v>
                 </c:pt>
                 <c:pt idx="5">
-                  <c:v>7.27</c:v>
+                  <c:v>7.4</c:v>
                 </c:pt>
               </c:numCache>
             </c:numRef>
@@ -566,13 +566,13 @@
               <c:numCache>
                 <c:ptCount val="3"/>
                 <c:pt idx="0">
-                  <c:v>114</c:v>
+                  <c:v>73</c:v>
                 </c:pt>
                 <c:pt idx="1">
-                  <c:v>22</c:v>
+                  <c:v>10</c:v>
                 </c:pt>
                 <c:pt idx="2">
-                  <c:v>5</c:v>
+                  <c:v>2</c:v>
                 </c:pt>
               </c:numCache>
             </c:numRef>
@@ -741,7 +741,7 @@
             <c:bubble3D val="0"/>
             <c:spPr>
               <a:solidFill>
-                <a:srgbClr val="D4A843"/>
+                <a:srgbClr val="DC2626"/>
               </a:solidFill>
               <a:effectLst/>
             </c:spPr>
@@ -757,22 +757,11 @@
               <a:effectLst/>
             </c:spPr>
           </c:dPt>
-          <c:dPt>
-            <c:idx val="7"/>
-            <c:invertIfNegative val="0"/>
-            <c:bubble3D val="0"/>
-            <c:spPr>
-              <a:solidFill>
-                <a:srgbClr val="DC2626"/>
-              </a:solidFill>
-              <a:effectLst/>
-            </c:spPr>
-          </c:dPt>
           <c:cat>
             <c:multiLvlStrRef>
-              <c:f>Sheet1!$A$2:$A$9</c:f>
+              <c:f>Sheet1!$A$2:$A$8</c:f>
               <c:multiLvlStrCache>
-                <c:ptCount val="8"/>
+                <c:ptCount val="7"/>
                 <c:lvl>
                   <c:pt idx="0">
                     <c:v>10点</c:v>
@@ -790,12 +779,9 @@
                     <c:v>6点</c:v>
                   </c:pt>
                   <c:pt idx="5">
-                    <c:v>5点</c:v>
+                    <c:v>4点</c:v>
                   </c:pt>
                   <c:pt idx="6">
-                    <c:v>4点</c:v>
-                  </c:pt>
-                  <c:pt idx="7">
                     <c:v>3点</c:v>
                   </c:pt>
                 </c:lvl>
@@ -804,33 +790,30 @@
           </c:cat>
           <c:val>
             <c:numRef>
-              <c:f>Sheet1!$B$2:$B$9</c:f>
+              <c:f>Sheet1!$B$2:$B$8</c:f>
               <c:numCache>
                 <c:formatCode>General</c:formatCode>
-                <c:ptCount val="8"/>
+                <c:ptCount val="7"/>
                 <c:pt idx="0">
-                  <c:v>53</c:v>
+                  <c:v>35</c:v>
                 </c:pt>
                 <c:pt idx="1">
-                  <c:v>17</c:v>
+                  <c:v>12</c:v>
                 </c:pt>
                 <c:pt idx="2">
-                  <c:v>44</c:v>
+                  <c:v>26</c:v>
                 </c:pt>
                 <c:pt idx="3">
-                  <c:v>9</c:v>
+                  <c:v>4</c:v>
                 </c:pt>
                 <c:pt idx="4">
-                  <c:v>12</c:v>
+                  <c:v>6</c:v>
                 </c:pt>
                 <c:pt idx="5">
                   <c:v>1</c:v>
                 </c:pt>
                 <c:pt idx="6">
-                  <c:v>3</c:v>
-                </c:pt>
-                <c:pt idx="7">
-                  <c:v>2</c:v>
+                  <c:v>1</c:v>
                 </c:pt>
               </c:numCache>
             </c:numRef>
@@ -2761,7 +2744,7 @@
                 <a:ea typeface="Arial" pitchFamily="34" charset="-122"/>
                 <a:cs typeface="Arial" pitchFamily="34" charset="-120"/>
               </a:rPr>
-              <a:t>分析対象期間：2026年2月〜3月</a:t>
+              <a:t>分析対象期間：2026年3月〜4月</a:t>
             </a:r>
             <a:endParaRPr lang="en-US" sz="1000" dirty="0"/>
           </a:p>
@@ -2781,7 +2764,7 @@
                 <a:ea typeface="Arial" pitchFamily="34" charset="-122"/>
                 <a:cs typeface="Arial" pitchFamily="34" charset="-120"/>
               </a:rPr>
-              <a:t>レビュー総数：141件（6サイト）</a:t>
+              <a:t>レビュー総数：85件（6サイト）</a:t>
             </a:r>
             <a:endParaRPr lang="en-US" sz="1000" dirty="0"/>
           </a:p>
@@ -2801,7 +2784,7 @@
                 <a:ea typeface="Arial" pitchFamily="34" charset="-122"/>
                 <a:cs typeface="Arial" pitchFamily="34" charset="-120"/>
               </a:rPr>
-              <a:t>作成日：2026年4月2日</a:t>
+              <a:t>作成日：2026年4月5日</a:t>
             </a:r>
             <a:endParaRPr lang="en-US" sz="1000" dirty="0"/>
           </a:p>
@@ -3347,7 +3330,7 @@
                           <a:ea typeface="Arial" pitchFamily="34" charset="-122"/>
                           <a:cs typeface="Arial" pitchFamily="34" charset="-120"/>
                         </a:rPr>
-                        <a:t>8.46点</a:t>
+                        <a:t>8.67点</a:t>
                       </a:r>
                       <a:endParaRPr lang="en-US" sz="1000" dirty="0">
                         <a:latin typeface="Arial" charset="0"/>
@@ -3415,7 +3398,7 @@
                           <a:ea typeface="Arial" pitchFamily="34" charset="-122"/>
                           <a:cs typeface="Arial" pitchFamily="34" charset="-120"/>
                         </a:rPr>
-                        <a:t>8.8点以上</a:t>
+                        <a:t>9.0点以上</a:t>
                       </a:r>
                       <a:endParaRPr lang="en-US" sz="1000" dirty="0">
                         <a:latin typeface="Arial" charset="0"/>
@@ -3621,7 +3604,7 @@
                           <a:ea typeface="Arial" pitchFamily="34" charset="-122"/>
                           <a:cs typeface="Arial" pitchFamily="34" charset="-120"/>
                         </a:rPr>
-                        <a:t>80.9%</a:t>
+                        <a:t>85.9%</a:t>
                       </a:r>
                       <a:endParaRPr lang="en-US" sz="1000" dirty="0">
                         <a:latin typeface="Arial" charset="0"/>
@@ -3689,7 +3672,7 @@
                           <a:ea typeface="Arial" pitchFamily="34" charset="-122"/>
                           <a:cs typeface="Arial" pitchFamily="34" charset="-120"/>
                         </a:rPr>
-                        <a:t>86%以上</a:t>
+                        <a:t>91%以上</a:t>
                       </a:r>
                       <a:endParaRPr lang="en-US" sz="1000" dirty="0">
                         <a:latin typeface="Arial" charset="0"/>
@@ -3895,7 +3878,7 @@
                           <a:ea typeface="Arial" pitchFamily="34" charset="-122"/>
                           <a:cs typeface="Arial" pitchFamily="34" charset="-120"/>
                         </a:rPr>
-                        <a:t>3.5%</a:t>
+                        <a:t>2.4%</a:t>
                       </a:r>
                       <a:endParaRPr lang="en-US" sz="1000" dirty="0">
                         <a:latin typeface="Arial" charset="0"/>
@@ -3963,7 +3946,7 @@
                           <a:ea typeface="Arial" pitchFamily="34" charset="-122"/>
                           <a:cs typeface="Arial" pitchFamily="34" charset="-120"/>
                         </a:rPr>
-                        <a:t>1%以下</a:t>
+                        <a:t>0%以下</a:t>
                       </a:r>
                       <a:endParaRPr lang="en-US" sz="1000" dirty="0">
                         <a:latin typeface="Arial" charset="0"/>
@@ -4169,7 +4152,7 @@
                           <a:ea typeface="Arial" pitchFamily="34" charset="-122"/>
                           <a:cs typeface="Arial" pitchFamily="34" charset="-120"/>
                         </a:rPr>
-                        <a:t>7.3点</a:t>
+                        <a:t>7.4点</a:t>
                       </a:r>
                       <a:endParaRPr lang="en-US" sz="1000" dirty="0">
                         <a:latin typeface="Arial" charset="0"/>
@@ -4237,7 +4220,7 @@
                           <a:ea typeface="Arial" pitchFamily="34" charset="-122"/>
                           <a:cs typeface="Arial" pitchFamily="34" charset="-120"/>
                         </a:rPr>
-                        <a:t>8.3点以上</a:t>
+                        <a:t>8.4点以上</a:t>
                       </a:r>
                       <a:endParaRPr lang="en-US" sz="1000" dirty="0">
                         <a:latin typeface="Arial" charset="0"/>
@@ -4717,7 +4700,7 @@
                           <a:ea typeface="Arial" pitchFamily="34" charset="-122"/>
                           <a:cs typeface="Arial" pitchFamily="34" charset="-120"/>
                         </a:rPr>
-                        <a:t>約16件/期間</a:t>
+                        <a:t>約12件/期間</a:t>
                       </a:r>
                       <a:endParaRPr lang="en-US" sz="1000" dirty="0">
                         <a:latin typeface="Arial" charset="0"/>
@@ -4785,7 +4768,7 @@
                           <a:ea typeface="Arial" pitchFamily="34" charset="-122"/>
                           <a:cs typeface="Arial" pitchFamily="34" charset="-120"/>
                         </a:rPr>
-                        <a:t>8件以下</a:t>
+                        <a:t>6件以下</a:t>
                       </a:r>
                       <a:endParaRPr lang="en-US" sz="1000" dirty="0">
                         <a:latin typeface="Arial" charset="0"/>
@@ -5356,7 +5339,7 @@
                 <a:ea typeface="Arial" pitchFamily="34" charset="-122"/>
                 <a:cs typeface="Arial" pitchFamily="34" charset="-120"/>
               </a:rPr>
-              <a:t>8.46</a:t>
+              <a:t>8.67</a:t>
             </a:r>
             <a:endParaRPr lang="en-US" sz="3200" dirty="0"/>
           </a:p>
@@ -5481,7 +5464,7 @@
                 <a:ea typeface="Arial" pitchFamily="34" charset="-122"/>
                 <a:cs typeface="Arial" pitchFamily="34" charset="-120"/>
               </a:rPr>
-              <a:t>80.9%</a:t>
+              <a:t>85.9%</a:t>
             </a:r>
             <a:endParaRPr lang="en-US" sz="3200" dirty="0"/>
           </a:p>
@@ -5606,7 +5589,7 @@
                 <a:ea typeface="Arial" pitchFamily="34" charset="-122"/>
                 <a:cs typeface="Arial" pitchFamily="34" charset="-120"/>
               </a:rPr>
-              <a:t>3.5%</a:t>
+              <a:t>2.4%</a:t>
             </a:r>
             <a:endParaRPr lang="en-US" sz="3200" dirty="0"/>
           </a:p>
@@ -5731,7 +5714,7 @@
                 <a:ea typeface="Arial" pitchFamily="34" charset="-122"/>
                 <a:cs typeface="Arial" pitchFamily="34" charset="-120"/>
               </a:rPr>
-              <a:t>141件</a:t>
+              <a:t>85件</a:t>
             </a:r>
             <a:endParaRPr lang="en-US" sz="3200" dirty="0"/>
           </a:p>
@@ -5859,7 +5842,7 @@
                 <a:ea typeface="Arial" pitchFamily="34" charset="-122"/>
                 <a:cs typeface="Arial" pitchFamily="34" charset="-120"/>
               </a:rPr>
-              <a:t>朝食 </a:t>
+              <a:t>スタッフの対応 </a:t>
             </a:r>
             <a:endParaRPr lang="en-US" sz="1100" dirty="0"/>
           </a:p>
@@ -5879,7 +5862,7 @@
                 <a:ea typeface="Arial" pitchFamily="34" charset="-122"/>
                 <a:cs typeface="Arial" pitchFamily="34" charset="-120"/>
               </a:rPr>
-              <a:t>  朝食で「これは…」と少し思った出来事があり近くのスタッフさんにお伝えしたところ、大変丁寧に対応してくださいました</a:t>
+              <a:t>  成田空港近くのホテルは古いまま以上してるところが多い一方、コンフォート成田は清潔、かつとてもきめ細やかなサービスな...</a:t>
             </a:r>
             <a:endParaRPr lang="en-US" sz="1100" dirty="0"/>
           </a:p>
@@ -5899,7 +5882,7 @@
                 <a:ea typeface="Arial" pitchFamily="34" charset="-122"/>
                 <a:cs typeface="Arial" pitchFamily="34" charset="-120"/>
               </a:rPr>
-              <a:t>スタッフの対応 </a:t>
+              <a:t>朝食 </a:t>
             </a:r>
             <a:endParaRPr lang="en-US" sz="1100" dirty="0"/>
           </a:p>
@@ -5919,7 +5902,7 @@
                 <a:ea typeface="Arial" pitchFamily="34" charset="-122"/>
                 <a:cs typeface="Arial" pitchFamily="34" charset="-120"/>
               </a:rPr>
-              <a:t>  朝食で「これは…」と少し思った出来事があり近くのスタッフさんにお伝えしたところ、大変丁寧に対応してくださいました</a:t>
+              <a:t>  朝食サービスが内容、時間共に最高でした</a:t>
             </a:r>
             <a:endParaRPr lang="en-US" sz="1100" dirty="0"/>
           </a:p>
@@ -5959,7 +5942,7 @@
                 <a:ea typeface="Arial" pitchFamily="34" charset="-122"/>
                 <a:cs typeface="Arial" pitchFamily="34" charset="-120"/>
               </a:rPr>
-              <a:t>  Bahkan 1 hari setelah nya rambut masih halus  Udah 2x ngi...</a:t>
+              <a:t>  ที่พักอาจจะเก่าไปนิด แต่สะดวกเพราะอยู่ใกล้รถไฟ ใกล้สนามบิ...</a:t>
             </a:r>
             <a:endParaRPr lang="en-US" sz="1100" dirty="0"/>
           </a:p>
@@ -6107,7 +6090,7 @@
                 <a:ea typeface="Arial" pitchFamily="34" charset="-122"/>
                 <a:cs typeface="Arial" pitchFamily="34" charset="-120"/>
               </a:rPr>
-              <a:t>  冬でも暖房の温度を自分で調整できるので、暑すぎることもなく、とても快適でした</a:t>
+              <a:t>  The staff at this place were very helpful and friendly</a:t>
             </a:r>
             <a:endParaRPr lang="en-US" sz="1100" dirty="0"/>
           </a:p>
@@ -6167,7 +6150,7 @@
                 <a:ea typeface="Arial" pitchFamily="34" charset="-122"/>
                 <a:cs typeface="Arial" pitchFamily="34" charset="-120"/>
               </a:rPr>
-              <a:t>臭い・匂い </a:t>
+              <a:t>設備の老朽化 </a:t>
             </a:r>
             <a:endParaRPr lang="en-US" sz="1100" dirty="0"/>
           </a:p>
@@ -6187,7 +6170,7 @@
                 <a:ea typeface="Arial" pitchFamily="34" charset="-122"/>
                 <a:cs typeface="Arial" pitchFamily="34" charset="-120"/>
               </a:rPr>
-              <a:t>  部屋の方はリニューアル後の為、綺麗でタバコの臭いもなく広さも充分</a:t>
+              <a:t>  ที่พักอาจจะเก่าไปนิด แต่สะดวกเพราะอยู่ใกล้รถไฟ ใกล้สนามบิ...</a:t>
             </a:r>
             <a:endParaRPr lang="en-US" sz="1100" dirty="0"/>
           </a:p>
@@ -6540,7 +6523,7 @@
                 <a:ea typeface="Arial" pitchFamily="34" charset="-122"/>
                 <a:cs typeface="Arial" pitchFamily="34" charset="-120"/>
               </a:rPr>
-              <a:t>8.46</a:t>
+              <a:t>8.67</a:t>
             </a:r>
             <a:endParaRPr lang="en-US" sz="3200" dirty="0"/>
           </a:p>
@@ -6665,7 +6648,7 @@
                 <a:ea typeface="Arial" pitchFamily="34" charset="-122"/>
                 <a:cs typeface="Arial" pitchFamily="34" charset="-120"/>
               </a:rPr>
-              <a:t>80.9%</a:t>
+              <a:t>85.9%</a:t>
             </a:r>
             <a:endParaRPr lang="en-US" sz="3200" dirty="0"/>
           </a:p>
@@ -6790,7 +6773,7 @@
                 <a:ea typeface="Arial" pitchFamily="34" charset="-122"/>
                 <a:cs typeface="Arial" pitchFamily="34" charset="-120"/>
               </a:rPr>
-              <a:t>3.5%</a:t>
+              <a:t>2.4%</a:t>
             </a:r>
             <a:endParaRPr lang="en-US" sz="3200" dirty="0"/>
           </a:p>
@@ -6915,7 +6898,7 @@
                 <a:ea typeface="Arial" pitchFamily="34" charset="-122"/>
                 <a:cs typeface="Arial" pitchFamily="34" charset="-120"/>
               </a:rPr>
-              <a:t>141件</a:t>
+              <a:t>85件</a:t>
             </a:r>
             <a:endParaRPr lang="en-US" sz="3200" dirty="0"/>
           </a:p>
@@ -7336,7 +7319,7 @@
                 <a:ea typeface="Arial" pitchFamily="34" charset="-122"/>
                 <a:cs typeface="Arial" pitchFamily="34" charset="-120"/>
               </a:rPr>
-              <a:t>Trip.com(9.57)が最高スコア。</a:t>
+              <a:t>Trip.com(9.50)が最高スコア。</a:t>
             </a:r>
             <a:endParaRPr lang="en-US" sz="1100" dirty="0"/>
           </a:p>
@@ -7385,7 +7368,7 @@
                 <a:ea typeface="Arial" pitchFamily="34" charset="-122"/>
                 <a:cs typeface="Arial" pitchFamily="34" charset="-120"/>
               </a:rPr>
-              <a:t>Agoda(7.3)が相対的に低い。口コミ返信の強化が急務</a:t>
+              <a:t>Agoda(7.4)が相対的に低い。口コミ返信の強化が急務</a:t>
             </a:r>
             <a:endParaRPr lang="en-US" sz="1100" dirty="0"/>
           </a:p>
@@ -7894,7 +7877,7 @@
                           <a:ea typeface="Arial" pitchFamily="34" charset="-122"/>
                           <a:cs typeface="Arial" pitchFamily="34" charset="-120"/>
                         </a:rPr>
-                        <a:t>21</a:t>
+                        <a:t>14</a:t>
                       </a:r>
                       <a:endParaRPr lang="en-US" sz="900" dirty="0">
                         <a:latin typeface="Arial" charset="0"/>
@@ -7962,7 +7945,7 @@
                           <a:ea typeface="Arial" pitchFamily="34" charset="-122"/>
                           <a:cs typeface="Arial" pitchFamily="34" charset="-120"/>
                         </a:rPr>
-                        <a:t>9.57</a:t>
+                        <a:t>9.5</a:t>
                       </a:r>
                       <a:endParaRPr lang="en-US" sz="900" dirty="0">
                         <a:latin typeface="Arial" charset="0"/>
@@ -8098,7 +8081,7 @@
                           <a:ea typeface="Arial" pitchFamily="34" charset="-122"/>
                           <a:cs typeface="Arial" pitchFamily="34" charset="-120"/>
                         </a:rPr>
-                        <a:t>9.57</a:t>
+                        <a:t>9.5</a:t>
                       </a:r>
                       <a:endParaRPr lang="en-US" sz="900" dirty="0">
                         <a:latin typeface="Arial" charset="0"/>
@@ -8168,7 +8151,7 @@
                           <a:ea typeface="Arial" pitchFamily="34" charset="-122"/>
                           <a:cs typeface="Arial" pitchFamily="34" charset="-120"/>
                         </a:rPr>
-                        <a:t>Google</a:t>
+                        <a:t>楽天トラベル</a:t>
                       </a:r>
                       <a:endParaRPr lang="en-US" sz="900" dirty="0">
                         <a:latin typeface="Arial" charset="0"/>
@@ -8236,7 +8219,7 @@
                           <a:ea typeface="Arial" pitchFamily="34" charset="-122"/>
                           <a:cs typeface="Arial" pitchFamily="34" charset="-120"/>
                         </a:rPr>
-                        <a:t>18</a:t>
+                        <a:t>12</a:t>
                       </a:r>
                       <a:endParaRPr lang="en-US" sz="900" dirty="0">
                         <a:latin typeface="Arial" charset="0"/>
@@ -8304,7 +8287,7 @@
                           <a:ea typeface="Arial" pitchFamily="34" charset="-122"/>
                           <a:cs typeface="Arial" pitchFamily="34" charset="-120"/>
                         </a:rPr>
-                        <a:t>4.39</a:t>
+                        <a:t>4.42</a:t>
                       </a:r>
                       <a:endParaRPr lang="en-US" sz="900" dirty="0">
                         <a:latin typeface="Arial" charset="0"/>
@@ -8440,7 +8423,7 @@
                           <a:ea typeface="Arial" pitchFamily="34" charset="-122"/>
                           <a:cs typeface="Arial" pitchFamily="34" charset="-120"/>
                         </a:rPr>
-                        <a:t>8.78</a:t>
+                        <a:t>8.83</a:t>
                       </a:r>
                       <a:endParaRPr lang="en-US" sz="900" dirty="0">
                         <a:latin typeface="Arial" charset="0"/>
@@ -8510,7 +8493,7 @@
                           <a:ea typeface="Arial" pitchFamily="34" charset="-122"/>
                           <a:cs typeface="Arial" pitchFamily="34" charset="-120"/>
                         </a:rPr>
-                        <a:t>楽天トラベル</a:t>
+                        <a:t>Google</a:t>
                       </a:r>
                       <a:endParaRPr lang="en-US" sz="900" dirty="0">
                         <a:latin typeface="Arial" charset="0"/>
@@ -8578,7 +8561,7 @@
                           <a:ea typeface="Arial" pitchFamily="34" charset="-122"/>
                           <a:cs typeface="Arial" pitchFamily="34" charset="-120"/>
                         </a:rPr>
-                        <a:t>21</a:t>
+                        <a:t>16</a:t>
                       </a:r>
                       <a:endParaRPr lang="en-US" sz="900" dirty="0">
                         <a:latin typeface="Arial" charset="0"/>
@@ -8646,7 +8629,7 @@
                           <a:ea typeface="Arial" pitchFamily="34" charset="-122"/>
                           <a:cs typeface="Arial" pitchFamily="34" charset="-120"/>
                         </a:rPr>
-                        <a:t>4.29</a:t>
+                        <a:t>4.38</a:t>
                       </a:r>
                       <a:endParaRPr lang="en-US" sz="900" dirty="0">
                         <a:latin typeface="Arial" charset="0"/>
@@ -8782,7 +8765,7 @@
                           <a:ea typeface="Arial" pitchFamily="34" charset="-122"/>
                           <a:cs typeface="Arial" pitchFamily="34" charset="-120"/>
                         </a:rPr>
-                        <a:t>8.57</a:t>
+                        <a:t>8.75</a:t>
                       </a:r>
                       <a:endParaRPr lang="en-US" sz="900" dirty="0">
                         <a:latin typeface="Arial" charset="0"/>
@@ -8830,6 +8813,348 @@
                     </a:lnB>
                     <a:solidFill>
                       <a:srgbClr val="E8EFF8"/>
+                    </a:solidFill>
+                  </a:tcPr>
+                </a:tc>
+              </a:tr>
+              <a:tr h="201168">
+                <a:tc>
+                  <a:txBody>
+                    <a:bodyPr/>
+                    <a:lstStyle/>
+                    <a:p>
+                      <a:pPr algn="ctr" indent="0" marL="0">
+                        <a:buNone/>
+                      </a:pPr>
+                      <a:r>
+                        <a:rPr lang="en-US" sz="900" dirty="0">
+                          <a:solidFill>
+                            <a:srgbClr val="000000"/>
+                          </a:solidFill>
+                          <a:latin typeface="Arial" pitchFamily="34" charset="0"/>
+                          <a:ea typeface="Arial" pitchFamily="34" charset="-122"/>
+                          <a:cs typeface="Arial" pitchFamily="34" charset="-120"/>
+                        </a:rPr>
+                        <a:t>じゃらん</a:t>
+                      </a:r>
+                      <a:endParaRPr lang="en-US" sz="900" dirty="0">
+                        <a:latin typeface="Arial" charset="0"/>
+                        <a:ea typeface="Arial" charset="0"/>
+                        <a:cs typeface="Arial" charset="0"/>
+                      </a:endParaRPr>
+                    </a:p>
+                  </a:txBody>
+                  <a:tcPr marL="91440" marR="91440" marT="45720" marB="45720">
+                    <a:lnL w="6350" cap="flat" cmpd="sng" algn="ctr">
+                      <a:solidFill>
+                        <a:srgbClr val="CBD5E1"/>
+                      </a:solidFill>
+                      <a:prstDash val="solid"/>
+                      <a:round/>
+                      <a:headEnd type="none" w="med" len="med"/>
+                      <a:tailEnd type="none" w="med" len="med"/>
+                    </a:lnL>
+                    <a:lnR w="6350" cap="flat" cmpd="sng" algn="ctr">
+                      <a:solidFill>
+                        <a:srgbClr val="CBD5E1"/>
+                      </a:solidFill>
+                      <a:prstDash val="solid"/>
+                      <a:round/>
+                      <a:headEnd type="none" w="med" len="med"/>
+                      <a:tailEnd type="none" w="med" len="med"/>
+                    </a:lnR>
+                    <a:lnT w="6350" cap="flat" cmpd="sng" algn="ctr">
+                      <a:solidFill>
+                        <a:srgbClr val="CBD5E1"/>
+                      </a:solidFill>
+                      <a:prstDash val="solid"/>
+                      <a:round/>
+                      <a:headEnd type="none" w="med" len="med"/>
+                      <a:tailEnd type="none" w="med" len="med"/>
+                    </a:lnT>
+                    <a:lnB w="6350" cap="flat" cmpd="sng" algn="ctr">
+                      <a:solidFill>
+                        <a:srgbClr val="CBD5E1"/>
+                      </a:solidFill>
+                      <a:prstDash val="solid"/>
+                      <a:round/>
+                      <a:headEnd type="none" w="med" len="med"/>
+                      <a:tailEnd type="none" w="med" len="med"/>
+                    </a:lnB>
+                    <a:solidFill>
+                      <a:srgbClr val="FFFFFF"/>
+                    </a:solidFill>
+                  </a:tcPr>
+                </a:tc>
+                <a:tc>
+                  <a:txBody>
+                    <a:bodyPr/>
+                    <a:lstStyle/>
+                    <a:p>
+                      <a:pPr algn="ctr" indent="0" marL="0">
+                        <a:buNone/>
+                      </a:pPr>
+                      <a:r>
+                        <a:rPr lang="en-US" sz="900" dirty="0">
+                          <a:solidFill>
+                            <a:srgbClr val="000000"/>
+                          </a:solidFill>
+                          <a:latin typeface="Arial" pitchFamily="34" charset="0"/>
+                          <a:ea typeface="Arial" pitchFamily="34" charset="-122"/>
+                          <a:cs typeface="Arial" pitchFamily="34" charset="-120"/>
+                        </a:rPr>
+                        <a:t>8</a:t>
+                      </a:r>
+                      <a:endParaRPr lang="en-US" sz="900" dirty="0">
+                        <a:latin typeface="Arial" charset="0"/>
+                        <a:ea typeface="Arial" charset="0"/>
+                        <a:cs typeface="Arial" charset="0"/>
+                      </a:endParaRPr>
+                    </a:p>
+                  </a:txBody>
+                  <a:tcPr marL="91440" marR="91440" marT="45720" marB="45720">
+                    <a:lnL w="6350" cap="flat" cmpd="sng" algn="ctr">
+                      <a:solidFill>
+                        <a:srgbClr val="CBD5E1"/>
+                      </a:solidFill>
+                      <a:prstDash val="solid"/>
+                      <a:round/>
+                      <a:headEnd type="none" w="med" len="med"/>
+                      <a:tailEnd type="none" w="med" len="med"/>
+                    </a:lnL>
+                    <a:lnR w="6350" cap="flat" cmpd="sng" algn="ctr">
+                      <a:solidFill>
+                        <a:srgbClr val="CBD5E1"/>
+                      </a:solidFill>
+                      <a:prstDash val="solid"/>
+                      <a:round/>
+                      <a:headEnd type="none" w="med" len="med"/>
+                      <a:tailEnd type="none" w="med" len="med"/>
+                    </a:lnR>
+                    <a:lnT w="6350" cap="flat" cmpd="sng" algn="ctr">
+                      <a:solidFill>
+                        <a:srgbClr val="CBD5E1"/>
+                      </a:solidFill>
+                      <a:prstDash val="solid"/>
+                      <a:round/>
+                      <a:headEnd type="none" w="med" len="med"/>
+                      <a:tailEnd type="none" w="med" len="med"/>
+                    </a:lnT>
+                    <a:lnB w="6350" cap="flat" cmpd="sng" algn="ctr">
+                      <a:solidFill>
+                        <a:srgbClr val="CBD5E1"/>
+                      </a:solidFill>
+                      <a:prstDash val="solid"/>
+                      <a:round/>
+                      <a:headEnd type="none" w="med" len="med"/>
+                      <a:tailEnd type="none" w="med" len="med"/>
+                    </a:lnB>
+                    <a:solidFill>
+                      <a:srgbClr val="FFFFFF"/>
+                    </a:solidFill>
+                  </a:tcPr>
+                </a:tc>
+                <a:tc>
+                  <a:txBody>
+                    <a:bodyPr/>
+                    <a:lstStyle/>
+                    <a:p>
+                      <a:pPr algn="ctr" indent="0" marL="0">
+                        <a:buNone/>
+                      </a:pPr>
+                      <a:r>
+                        <a:rPr lang="en-US" sz="900" dirty="0">
+                          <a:solidFill>
+                            <a:srgbClr val="000000"/>
+                          </a:solidFill>
+                          <a:latin typeface="Arial" pitchFamily="34" charset="0"/>
+                          <a:ea typeface="Arial" pitchFamily="34" charset="-122"/>
+                          <a:cs typeface="Arial" pitchFamily="34" charset="-120"/>
+                        </a:rPr>
+                        <a:t>4.25</a:t>
+                      </a:r>
+                      <a:endParaRPr lang="en-US" sz="900" dirty="0">
+                        <a:latin typeface="Arial" charset="0"/>
+                        <a:ea typeface="Arial" charset="0"/>
+                        <a:cs typeface="Arial" charset="0"/>
+                      </a:endParaRPr>
+                    </a:p>
+                  </a:txBody>
+                  <a:tcPr marL="91440" marR="91440" marT="45720" marB="45720">
+                    <a:lnL w="6350" cap="flat" cmpd="sng" algn="ctr">
+                      <a:solidFill>
+                        <a:srgbClr val="CBD5E1"/>
+                      </a:solidFill>
+                      <a:prstDash val="solid"/>
+                      <a:round/>
+                      <a:headEnd type="none" w="med" len="med"/>
+                      <a:tailEnd type="none" w="med" len="med"/>
+                    </a:lnL>
+                    <a:lnR w="6350" cap="flat" cmpd="sng" algn="ctr">
+                      <a:solidFill>
+                        <a:srgbClr val="CBD5E1"/>
+                      </a:solidFill>
+                      <a:prstDash val="solid"/>
+                      <a:round/>
+                      <a:headEnd type="none" w="med" len="med"/>
+                      <a:tailEnd type="none" w="med" len="med"/>
+                    </a:lnR>
+                    <a:lnT w="6350" cap="flat" cmpd="sng" algn="ctr">
+                      <a:solidFill>
+                        <a:srgbClr val="CBD5E1"/>
+                      </a:solidFill>
+                      <a:prstDash val="solid"/>
+                      <a:round/>
+                      <a:headEnd type="none" w="med" len="med"/>
+                      <a:tailEnd type="none" w="med" len="med"/>
+                    </a:lnT>
+                    <a:lnB w="6350" cap="flat" cmpd="sng" algn="ctr">
+                      <a:solidFill>
+                        <a:srgbClr val="CBD5E1"/>
+                      </a:solidFill>
+                      <a:prstDash val="solid"/>
+                      <a:round/>
+                      <a:headEnd type="none" w="med" len="med"/>
+                      <a:tailEnd type="none" w="med" len="med"/>
+                    </a:lnB>
+                    <a:solidFill>
+                      <a:srgbClr val="FFFFFF"/>
+                    </a:solidFill>
+                  </a:tcPr>
+                </a:tc>
+                <a:tc>
+                  <a:txBody>
+                    <a:bodyPr/>
+                    <a:lstStyle/>
+                    <a:p>
+                      <a:pPr algn="ctr" indent="0" marL="0">
+                        <a:buNone/>
+                      </a:pPr>
+                      <a:r>
+                        <a:rPr lang="en-US" sz="900" dirty="0">
+                          <a:solidFill>
+                            <a:srgbClr val="000000"/>
+                          </a:solidFill>
+                          <a:latin typeface="Arial" pitchFamily="34" charset="0"/>
+                          <a:ea typeface="Arial" pitchFamily="34" charset="-122"/>
+                          <a:cs typeface="Arial" pitchFamily="34" charset="-120"/>
+                        </a:rPr>
+                        <a:t>/5 (×2)</a:t>
+                      </a:r>
+                      <a:endParaRPr lang="en-US" sz="900" dirty="0">
+                        <a:latin typeface="Arial" charset="0"/>
+                        <a:ea typeface="Arial" charset="0"/>
+                        <a:cs typeface="Arial" charset="0"/>
+                      </a:endParaRPr>
+                    </a:p>
+                  </a:txBody>
+                  <a:tcPr marL="91440" marR="91440" marT="45720" marB="45720">
+                    <a:lnL w="6350" cap="flat" cmpd="sng" algn="ctr">
+                      <a:solidFill>
+                        <a:srgbClr val="CBD5E1"/>
+                      </a:solidFill>
+                      <a:prstDash val="solid"/>
+                      <a:round/>
+                      <a:headEnd type="none" w="med" len="med"/>
+                      <a:tailEnd type="none" w="med" len="med"/>
+                    </a:lnL>
+                    <a:lnR w="6350" cap="flat" cmpd="sng" algn="ctr">
+                      <a:solidFill>
+                        <a:srgbClr val="CBD5E1"/>
+                      </a:solidFill>
+                      <a:prstDash val="solid"/>
+                      <a:round/>
+                      <a:headEnd type="none" w="med" len="med"/>
+                      <a:tailEnd type="none" w="med" len="med"/>
+                    </a:lnR>
+                    <a:lnT w="6350" cap="flat" cmpd="sng" algn="ctr">
+                      <a:solidFill>
+                        <a:srgbClr val="CBD5E1"/>
+                      </a:solidFill>
+                      <a:prstDash val="solid"/>
+                      <a:round/>
+                      <a:headEnd type="none" w="med" len="med"/>
+                      <a:tailEnd type="none" w="med" len="med"/>
+                    </a:lnT>
+                    <a:lnB w="6350" cap="flat" cmpd="sng" algn="ctr">
+                      <a:solidFill>
+                        <a:srgbClr val="CBD5E1"/>
+                      </a:solidFill>
+                      <a:prstDash val="solid"/>
+                      <a:round/>
+                      <a:headEnd type="none" w="med" len="med"/>
+                      <a:tailEnd type="none" w="med" len="med"/>
+                    </a:lnB>
+                    <a:solidFill>
+                      <a:srgbClr val="FFFFFF"/>
+                    </a:solidFill>
+                  </a:tcPr>
+                </a:tc>
+                <a:tc>
+                  <a:txBody>
+                    <a:bodyPr/>
+                    <a:lstStyle/>
+                    <a:p>
+                      <a:pPr algn="ctr" indent="0" marL="0">
+                        <a:buNone/>
+                      </a:pPr>
+                      <a:r>
+                        <a:rPr lang="en-US" sz="900" dirty="0">
+                          <a:solidFill>
+                            <a:srgbClr val="000000"/>
+                          </a:solidFill>
+                          <a:latin typeface="Arial" pitchFamily="34" charset="0"/>
+                          <a:ea typeface="Arial" pitchFamily="34" charset="-122"/>
+                          <a:cs typeface="Arial" pitchFamily="34" charset="-120"/>
+                        </a:rPr>
+                        <a:t>8.5</a:t>
+                      </a:r>
+                      <a:endParaRPr lang="en-US" sz="900" dirty="0">
+                        <a:latin typeface="Arial" charset="0"/>
+                        <a:ea typeface="Arial" charset="0"/>
+                        <a:cs typeface="Arial" charset="0"/>
+                      </a:endParaRPr>
+                    </a:p>
+                  </a:txBody>
+                  <a:tcPr marL="91440" marR="91440" marT="45720" marB="45720">
+                    <a:lnL w="6350" cap="flat" cmpd="sng" algn="ctr">
+                      <a:solidFill>
+                        <a:srgbClr val="CBD5E1"/>
+                      </a:solidFill>
+                      <a:prstDash val="solid"/>
+                      <a:round/>
+                      <a:headEnd type="none" w="med" len="med"/>
+                      <a:tailEnd type="none" w="med" len="med"/>
+                    </a:lnL>
+                    <a:lnR w="6350" cap="flat" cmpd="sng" algn="ctr">
+                      <a:solidFill>
+                        <a:srgbClr val="CBD5E1"/>
+                      </a:solidFill>
+                      <a:prstDash val="solid"/>
+                      <a:round/>
+                      <a:headEnd type="none" w="med" len="med"/>
+                      <a:tailEnd type="none" w="med" len="med"/>
+                    </a:lnR>
+                    <a:lnT w="6350" cap="flat" cmpd="sng" algn="ctr">
+                      <a:solidFill>
+                        <a:srgbClr val="CBD5E1"/>
+                      </a:solidFill>
+                      <a:prstDash val="solid"/>
+                      <a:round/>
+                      <a:headEnd type="none" w="med" len="med"/>
+                      <a:tailEnd type="none" w="med" len="med"/>
+                    </a:lnT>
+                    <a:lnB w="6350" cap="flat" cmpd="sng" algn="ctr">
+                      <a:solidFill>
+                        <a:srgbClr val="CBD5E1"/>
+                      </a:solidFill>
+                      <a:prstDash val="solid"/>
+                      <a:round/>
+                      <a:headEnd type="none" w="med" len="med"/>
+                      <a:tailEnd type="none" w="med" len="med"/>
+                    </a:lnB>
+                    <a:solidFill>
+                      <a:srgbClr val="FFFFFF"/>
                     </a:solidFill>
                   </a:tcPr>
                 </a:tc>
@@ -8899,7 +9224,7 @@
                       <a:tailEnd type="none" w="med" len="med"/>
                     </a:lnB>
                     <a:solidFill>
-                      <a:srgbClr val="FFFFFF"/>
+                      <a:srgbClr val="E8EFF8"/>
                     </a:solidFill>
                   </a:tcPr>
                 </a:tc>
@@ -8920,7 +9245,7 @@
                           <a:ea typeface="Arial" pitchFamily="34" charset="-122"/>
                           <a:cs typeface="Arial" pitchFamily="34" charset="-120"/>
                         </a:rPr>
-                        <a:t>55</a:t>
+                        <a:t>30</a:t>
                       </a:r>
                       <a:endParaRPr lang="en-US" sz="900" dirty="0">
                         <a:latin typeface="Arial" charset="0"/>
@@ -8967,7 +9292,7 @@
                       <a:tailEnd type="none" w="med" len="med"/>
                     </a:lnB>
                     <a:solidFill>
-                      <a:srgbClr val="FFFFFF"/>
+                      <a:srgbClr val="E8EFF8"/>
                     </a:solidFill>
                   </a:tcPr>
                 </a:tc>
@@ -8988,7 +9313,7 @@
                           <a:ea typeface="Arial" pitchFamily="34" charset="-122"/>
                           <a:cs typeface="Arial" pitchFamily="34" charset="-120"/>
                         </a:rPr>
-                        <a:t>8.22</a:t>
+                        <a:t>8.43</a:t>
                       </a:r>
                       <a:endParaRPr lang="en-US" sz="900" dirty="0">
                         <a:latin typeface="Arial" charset="0"/>
@@ -9035,7 +9360,7 @@
                       <a:tailEnd type="none" w="med" len="med"/>
                     </a:lnB>
                     <a:solidFill>
-                      <a:srgbClr val="FFFFFF"/>
+                      <a:srgbClr val="E8EFF8"/>
                     </a:solidFill>
                   </a:tcPr>
                 </a:tc>
@@ -9103,144 +9428,6 @@
                       <a:tailEnd type="none" w="med" len="med"/>
                     </a:lnB>
                     <a:solidFill>
-                      <a:srgbClr val="FFFFFF"/>
-                    </a:solidFill>
-                  </a:tcPr>
-                </a:tc>
-                <a:tc>
-                  <a:txBody>
-                    <a:bodyPr/>
-                    <a:lstStyle/>
-                    <a:p>
-                      <a:pPr algn="ctr" indent="0" marL="0">
-                        <a:buNone/>
-                      </a:pPr>
-                      <a:r>
-                        <a:rPr lang="en-US" sz="900" dirty="0">
-                          <a:solidFill>
-                            <a:srgbClr val="000000"/>
-                          </a:solidFill>
-                          <a:latin typeface="Arial" pitchFamily="34" charset="0"/>
-                          <a:ea typeface="Arial" pitchFamily="34" charset="-122"/>
-                          <a:cs typeface="Arial" pitchFamily="34" charset="-120"/>
-                        </a:rPr>
-                        <a:t>8.22</a:t>
-                      </a:r>
-                      <a:endParaRPr lang="en-US" sz="900" dirty="0">
-                        <a:latin typeface="Arial" charset="0"/>
-                        <a:ea typeface="Arial" charset="0"/>
-                        <a:cs typeface="Arial" charset="0"/>
-                      </a:endParaRPr>
-                    </a:p>
-                  </a:txBody>
-                  <a:tcPr marL="91440" marR="91440" marT="45720" marB="45720">
-                    <a:lnL w="6350" cap="flat" cmpd="sng" algn="ctr">
-                      <a:solidFill>
-                        <a:srgbClr val="CBD5E1"/>
-                      </a:solidFill>
-                      <a:prstDash val="solid"/>
-                      <a:round/>
-                      <a:headEnd type="none" w="med" len="med"/>
-                      <a:tailEnd type="none" w="med" len="med"/>
-                    </a:lnL>
-                    <a:lnR w="6350" cap="flat" cmpd="sng" algn="ctr">
-                      <a:solidFill>
-                        <a:srgbClr val="CBD5E1"/>
-                      </a:solidFill>
-                      <a:prstDash val="solid"/>
-                      <a:round/>
-                      <a:headEnd type="none" w="med" len="med"/>
-                      <a:tailEnd type="none" w="med" len="med"/>
-                    </a:lnR>
-                    <a:lnT w="6350" cap="flat" cmpd="sng" algn="ctr">
-                      <a:solidFill>
-                        <a:srgbClr val="CBD5E1"/>
-                      </a:solidFill>
-                      <a:prstDash val="solid"/>
-                      <a:round/>
-                      <a:headEnd type="none" w="med" len="med"/>
-                      <a:tailEnd type="none" w="med" len="med"/>
-                    </a:lnT>
-                    <a:lnB w="6350" cap="flat" cmpd="sng" algn="ctr">
-                      <a:solidFill>
-                        <a:srgbClr val="CBD5E1"/>
-                      </a:solidFill>
-                      <a:prstDash val="solid"/>
-                      <a:round/>
-                      <a:headEnd type="none" w="med" len="med"/>
-                      <a:tailEnd type="none" w="med" len="med"/>
-                    </a:lnB>
-                    <a:solidFill>
-                      <a:srgbClr val="FFFFFF"/>
-                    </a:solidFill>
-                  </a:tcPr>
-                </a:tc>
-              </a:tr>
-              <a:tr h="201168">
-                <a:tc>
-                  <a:txBody>
-                    <a:bodyPr/>
-                    <a:lstStyle/>
-                    <a:p>
-                      <a:pPr algn="ctr" indent="0" marL="0">
-                        <a:buNone/>
-                      </a:pPr>
-                      <a:r>
-                        <a:rPr lang="en-US" sz="900" dirty="0">
-                          <a:solidFill>
-                            <a:srgbClr val="000000"/>
-                          </a:solidFill>
-                          <a:latin typeface="Arial" pitchFamily="34" charset="0"/>
-                          <a:ea typeface="Arial" pitchFamily="34" charset="-122"/>
-                          <a:cs typeface="Arial" pitchFamily="34" charset="-120"/>
-                        </a:rPr>
-                        <a:t>じゃらん</a:t>
-                      </a:r>
-                      <a:endParaRPr lang="en-US" sz="900" dirty="0">
-                        <a:latin typeface="Arial" charset="0"/>
-                        <a:ea typeface="Arial" charset="0"/>
-                        <a:cs typeface="Arial" charset="0"/>
-                      </a:endParaRPr>
-                    </a:p>
-                  </a:txBody>
-                  <a:tcPr marL="91440" marR="91440" marT="45720" marB="45720">
-                    <a:lnL w="6350" cap="flat" cmpd="sng" algn="ctr">
-                      <a:solidFill>
-                        <a:srgbClr val="CBD5E1"/>
-                      </a:solidFill>
-                      <a:prstDash val="solid"/>
-                      <a:round/>
-                      <a:headEnd type="none" w="med" len="med"/>
-                      <a:tailEnd type="none" w="med" len="med"/>
-                    </a:lnL>
-                    <a:lnR w="6350" cap="flat" cmpd="sng" algn="ctr">
-                      <a:solidFill>
-                        <a:srgbClr val="CBD5E1"/>
-                      </a:solidFill>
-                      <a:prstDash val="solid"/>
-                      <a:round/>
-                      <a:headEnd type="none" w="med" len="med"/>
-                      <a:tailEnd type="none" w="med" len="med"/>
-                    </a:lnR>
-                    <a:lnT w="6350" cap="flat" cmpd="sng" algn="ctr">
-                      <a:solidFill>
-                        <a:srgbClr val="CBD5E1"/>
-                      </a:solidFill>
-                      <a:prstDash val="solid"/>
-                      <a:round/>
-                      <a:headEnd type="none" w="med" len="med"/>
-                      <a:tailEnd type="none" w="med" len="med"/>
-                    </a:lnT>
-                    <a:lnB w="6350" cap="flat" cmpd="sng" algn="ctr">
-                      <a:solidFill>
-                        <a:srgbClr val="CBD5E1"/>
-                      </a:solidFill>
-                      <a:prstDash val="solid"/>
-                      <a:round/>
-                      <a:headEnd type="none" w="med" len="med"/>
-                      <a:tailEnd type="none" w="med" len="med"/>
-                    </a:lnB>
-                    <a:solidFill>
                       <a:srgbClr val="E8EFF8"/>
                     </a:solidFill>
                   </a:tcPr>
@@ -9262,211 +9449,7 @@
                           <a:ea typeface="Arial" pitchFamily="34" charset="-122"/>
                           <a:cs typeface="Arial" pitchFamily="34" charset="-120"/>
                         </a:rPr>
-                        <a:t>15</a:t>
-                      </a:r>
-                      <a:endParaRPr lang="en-US" sz="900" dirty="0">
-                        <a:latin typeface="Arial" charset="0"/>
-                        <a:ea typeface="Arial" charset="0"/>
-                        <a:cs typeface="Arial" charset="0"/>
-                      </a:endParaRPr>
-                    </a:p>
-                  </a:txBody>
-                  <a:tcPr marL="91440" marR="91440" marT="45720" marB="45720">
-                    <a:lnL w="6350" cap="flat" cmpd="sng" algn="ctr">
-                      <a:solidFill>
-                        <a:srgbClr val="CBD5E1"/>
-                      </a:solidFill>
-                      <a:prstDash val="solid"/>
-                      <a:round/>
-                      <a:headEnd type="none" w="med" len="med"/>
-                      <a:tailEnd type="none" w="med" len="med"/>
-                    </a:lnL>
-                    <a:lnR w="6350" cap="flat" cmpd="sng" algn="ctr">
-                      <a:solidFill>
-                        <a:srgbClr val="CBD5E1"/>
-                      </a:solidFill>
-                      <a:prstDash val="solid"/>
-                      <a:round/>
-                      <a:headEnd type="none" w="med" len="med"/>
-                      <a:tailEnd type="none" w="med" len="med"/>
-                    </a:lnR>
-                    <a:lnT w="6350" cap="flat" cmpd="sng" algn="ctr">
-                      <a:solidFill>
-                        <a:srgbClr val="CBD5E1"/>
-                      </a:solidFill>
-                      <a:prstDash val="solid"/>
-                      <a:round/>
-                      <a:headEnd type="none" w="med" len="med"/>
-                      <a:tailEnd type="none" w="med" len="med"/>
-                    </a:lnT>
-                    <a:lnB w="6350" cap="flat" cmpd="sng" algn="ctr">
-                      <a:solidFill>
-                        <a:srgbClr val="CBD5E1"/>
-                      </a:solidFill>
-                      <a:prstDash val="solid"/>
-                      <a:round/>
-                      <a:headEnd type="none" w="med" len="med"/>
-                      <a:tailEnd type="none" w="med" len="med"/>
-                    </a:lnB>
-                    <a:solidFill>
-                      <a:srgbClr val="E8EFF8"/>
-                    </a:solidFill>
-                  </a:tcPr>
-                </a:tc>
-                <a:tc>
-                  <a:txBody>
-                    <a:bodyPr/>
-                    <a:lstStyle/>
-                    <a:p>
-                      <a:pPr algn="ctr" indent="0" marL="0">
-                        <a:buNone/>
-                      </a:pPr>
-                      <a:r>
-                        <a:rPr lang="en-US" sz="900" dirty="0">
-                          <a:solidFill>
-                            <a:srgbClr val="000000"/>
-                          </a:solidFill>
-                          <a:latin typeface="Arial" pitchFamily="34" charset="0"/>
-                          <a:ea typeface="Arial" pitchFamily="34" charset="-122"/>
-                          <a:cs typeface="Arial" pitchFamily="34" charset="-120"/>
-                        </a:rPr>
-                        <a:t>4.07</a:t>
-                      </a:r>
-                      <a:endParaRPr lang="en-US" sz="900" dirty="0">
-                        <a:latin typeface="Arial" charset="0"/>
-                        <a:ea typeface="Arial" charset="0"/>
-                        <a:cs typeface="Arial" charset="0"/>
-                      </a:endParaRPr>
-                    </a:p>
-                  </a:txBody>
-                  <a:tcPr marL="91440" marR="91440" marT="45720" marB="45720">
-                    <a:lnL w="6350" cap="flat" cmpd="sng" algn="ctr">
-                      <a:solidFill>
-                        <a:srgbClr val="CBD5E1"/>
-                      </a:solidFill>
-                      <a:prstDash val="solid"/>
-                      <a:round/>
-                      <a:headEnd type="none" w="med" len="med"/>
-                      <a:tailEnd type="none" w="med" len="med"/>
-                    </a:lnL>
-                    <a:lnR w="6350" cap="flat" cmpd="sng" algn="ctr">
-                      <a:solidFill>
-                        <a:srgbClr val="CBD5E1"/>
-                      </a:solidFill>
-                      <a:prstDash val="solid"/>
-                      <a:round/>
-                      <a:headEnd type="none" w="med" len="med"/>
-                      <a:tailEnd type="none" w="med" len="med"/>
-                    </a:lnR>
-                    <a:lnT w="6350" cap="flat" cmpd="sng" algn="ctr">
-                      <a:solidFill>
-                        <a:srgbClr val="CBD5E1"/>
-                      </a:solidFill>
-                      <a:prstDash val="solid"/>
-                      <a:round/>
-                      <a:headEnd type="none" w="med" len="med"/>
-                      <a:tailEnd type="none" w="med" len="med"/>
-                    </a:lnT>
-                    <a:lnB w="6350" cap="flat" cmpd="sng" algn="ctr">
-                      <a:solidFill>
-                        <a:srgbClr val="CBD5E1"/>
-                      </a:solidFill>
-                      <a:prstDash val="solid"/>
-                      <a:round/>
-                      <a:headEnd type="none" w="med" len="med"/>
-                      <a:tailEnd type="none" w="med" len="med"/>
-                    </a:lnB>
-                    <a:solidFill>
-                      <a:srgbClr val="E8EFF8"/>
-                    </a:solidFill>
-                  </a:tcPr>
-                </a:tc>
-                <a:tc>
-                  <a:txBody>
-                    <a:bodyPr/>
-                    <a:lstStyle/>
-                    <a:p>
-                      <a:pPr algn="ctr" indent="0" marL="0">
-                        <a:buNone/>
-                      </a:pPr>
-                      <a:r>
-                        <a:rPr lang="en-US" sz="900" dirty="0">
-                          <a:solidFill>
-                            <a:srgbClr val="000000"/>
-                          </a:solidFill>
-                          <a:latin typeface="Arial" pitchFamily="34" charset="0"/>
-                          <a:ea typeface="Arial" pitchFamily="34" charset="-122"/>
-                          <a:cs typeface="Arial" pitchFamily="34" charset="-120"/>
-                        </a:rPr>
-                        <a:t>/5 (×2)</a:t>
-                      </a:r>
-                      <a:endParaRPr lang="en-US" sz="900" dirty="0">
-                        <a:latin typeface="Arial" charset="0"/>
-                        <a:ea typeface="Arial" charset="0"/>
-                        <a:cs typeface="Arial" charset="0"/>
-                      </a:endParaRPr>
-                    </a:p>
-                  </a:txBody>
-                  <a:tcPr marL="91440" marR="91440" marT="45720" marB="45720">
-                    <a:lnL w="6350" cap="flat" cmpd="sng" algn="ctr">
-                      <a:solidFill>
-                        <a:srgbClr val="CBD5E1"/>
-                      </a:solidFill>
-                      <a:prstDash val="solid"/>
-                      <a:round/>
-                      <a:headEnd type="none" w="med" len="med"/>
-                      <a:tailEnd type="none" w="med" len="med"/>
-                    </a:lnL>
-                    <a:lnR w="6350" cap="flat" cmpd="sng" algn="ctr">
-                      <a:solidFill>
-                        <a:srgbClr val="CBD5E1"/>
-                      </a:solidFill>
-                      <a:prstDash val="solid"/>
-                      <a:round/>
-                      <a:headEnd type="none" w="med" len="med"/>
-                      <a:tailEnd type="none" w="med" len="med"/>
-                    </a:lnR>
-                    <a:lnT w="6350" cap="flat" cmpd="sng" algn="ctr">
-                      <a:solidFill>
-                        <a:srgbClr val="CBD5E1"/>
-                      </a:solidFill>
-                      <a:prstDash val="solid"/>
-                      <a:round/>
-                      <a:headEnd type="none" w="med" len="med"/>
-                      <a:tailEnd type="none" w="med" len="med"/>
-                    </a:lnT>
-                    <a:lnB w="6350" cap="flat" cmpd="sng" algn="ctr">
-                      <a:solidFill>
-                        <a:srgbClr val="CBD5E1"/>
-                      </a:solidFill>
-                      <a:prstDash val="solid"/>
-                      <a:round/>
-                      <a:headEnd type="none" w="med" len="med"/>
-                      <a:tailEnd type="none" w="med" len="med"/>
-                    </a:lnB>
-                    <a:solidFill>
-                      <a:srgbClr val="E8EFF8"/>
-                    </a:solidFill>
-                  </a:tcPr>
-                </a:tc>
-                <a:tc>
-                  <a:txBody>
-                    <a:bodyPr/>
-                    <a:lstStyle/>
-                    <a:p>
-                      <a:pPr algn="ctr" indent="0" marL="0">
-                        <a:buNone/>
-                      </a:pPr>
-                      <a:r>
-                        <a:rPr lang="en-US" sz="900" dirty="0">
-                          <a:solidFill>
-                            <a:srgbClr val="000000"/>
-                          </a:solidFill>
-                          <a:latin typeface="Arial" pitchFamily="34" charset="0"/>
-                          <a:ea typeface="Arial" pitchFamily="34" charset="-122"/>
-                          <a:cs typeface="Arial" pitchFamily="34" charset="-120"/>
-                        </a:rPr>
-                        <a:t>8.13</a:t>
+                        <a:t>8.43</a:t>
                       </a:r>
                       <a:endParaRPr lang="en-US" sz="900" dirty="0">
                         <a:latin typeface="Arial" charset="0"/>
@@ -9604,7 +9587,7 @@
                           <a:ea typeface="Arial" pitchFamily="34" charset="-122"/>
                           <a:cs typeface="Arial" pitchFamily="34" charset="-120"/>
                         </a:rPr>
-                        <a:t>11</a:t>
+                        <a:t>5</a:t>
                       </a:r>
                       <a:endParaRPr lang="en-US" sz="900" dirty="0">
                         <a:latin typeface="Arial" charset="0"/>
@@ -9672,7 +9655,7 @@
                           <a:ea typeface="Arial" pitchFamily="34" charset="-122"/>
                           <a:cs typeface="Arial" pitchFamily="34" charset="-120"/>
                         </a:rPr>
-                        <a:t>7.27</a:t>
+                        <a:t>7.4</a:t>
                       </a:r>
                       <a:endParaRPr lang="en-US" sz="900" dirty="0">
                         <a:latin typeface="Arial" charset="0"/>
@@ -9808,7 +9791,7 @@
                           <a:ea typeface="Arial" pitchFamily="34" charset="-122"/>
                           <a:cs typeface="Arial" pitchFamily="34" charset="-120"/>
                         </a:rPr>
-                        <a:t>7.27</a:t>
+                        <a:t>7.4</a:t>
                       </a:r>
                       <a:endParaRPr lang="en-US" sz="900" dirty="0">
                         <a:latin typeface="Arial" charset="0"/>
@@ -10216,7 +10199,7 @@
                 <a:ea typeface="Arial" pitchFamily="34" charset="-122"/>
                 <a:cs typeface="Arial" pitchFamily="34" charset="-120"/>
               </a:rPr>
-              <a:t>114件（80.9%）</a:t>
+              <a:t>73件（85.9%）</a:t>
             </a:r>
             <a:endParaRPr lang="en-US" sz="1100" dirty="0"/>
           </a:p>
@@ -10314,7 +10297,7 @@
                 <a:ea typeface="Arial" pitchFamily="34" charset="-122"/>
                 <a:cs typeface="Arial" pitchFamily="34" charset="-120"/>
               </a:rPr>
-              <a:t>22件（15.6%）</a:t>
+              <a:t>10件（11.8%）</a:t>
             </a:r>
             <a:endParaRPr lang="en-US" sz="1100" dirty="0"/>
           </a:p>
@@ -10412,7 +10395,7 @@
                 <a:ea typeface="Arial" pitchFamily="34" charset="-122"/>
                 <a:cs typeface="Arial" pitchFamily="34" charset="-120"/>
               </a:rPr>
-              <a:t>5件（3.5%）</a:t>
+              <a:t>2件（2.4%）</a:t>
             </a:r>
             <a:endParaRPr lang="en-US" sz="1100" dirty="0"/>
           </a:p>
@@ -10746,7 +10729,7 @@
                 <a:ea typeface="Arial" pitchFamily="34" charset="-122"/>
                 <a:cs typeface="Arial" pitchFamily="34" charset="-120"/>
               </a:rPr>
-              <a:t>50件+</a:t>
+              <a:t>20件+</a:t>
             </a:r>
             <a:endParaRPr lang="en-US" sz="900" dirty="0"/>
           </a:p>
@@ -10761,6 +10744,229 @@
         <p:spPr>
           <a:xfrm>
             <a:off x="594360" y="1124712"/>
+            <a:ext cx="1645920" cy="274320"/>
+          </a:xfrm>
+          <a:prstGeom prst="rect">
+            <a:avLst/>
+          </a:prstGeom>
+          <a:noFill/>
+          <a:ln/>
+        </p:spPr>
+        <p:txBody>
+          <a:bodyPr wrap="square" lIns="0" tIns="0" rIns="0" bIns="0" rtlCol="0" anchor="ctr"/>
+          <a:lstStyle/>
+          <a:p>
+            <a:pPr indent="0" marL="0">
+              <a:buNone/>
+            </a:pPr>
+            <a:r>
+              <a:rPr lang="en-US" sz="1300" b="1" dirty="0">
+                <a:solidFill>
+                  <a:srgbClr val="1A2744"/>
+                </a:solidFill>
+                <a:latin typeface="Arial" pitchFamily="34" charset="0"/>
+                <a:ea typeface="Arial" pitchFamily="34" charset="-122"/>
+                <a:cs typeface="Arial" pitchFamily="34" charset="-120"/>
+              </a:rPr>
+              <a:t>スタッフの対応</a:t>
+            </a:r>
+            <a:endParaRPr lang="en-US" sz="1300" dirty="0"/>
+          </a:p>
+        </p:txBody>
+      </p:sp>
+      <p:sp>
+        <p:nvSpPr>
+          <p:cNvPr id="10" name="Text 8"/>
+          <p:cNvSpPr/>
+          <p:nvPr/>
+        </p:nvSpPr>
+        <p:spPr>
+          <a:xfrm>
+            <a:off x="594360" y="1417320"/>
+            <a:ext cx="2377440" cy="365760"/>
+          </a:xfrm>
+          <a:prstGeom prst="rect">
+            <a:avLst/>
+          </a:prstGeom>
+          <a:noFill/>
+          <a:ln/>
+        </p:spPr>
+        <p:txBody>
+          <a:bodyPr wrap="square" lIns="0" tIns="0" rIns="0" bIns="0" rtlCol="0" anchor="ctr"/>
+          <a:lstStyle/>
+          <a:p>
+            <a:pPr indent="0" marL="0">
+              <a:buNone/>
+            </a:pPr>
+            <a:r>
+              <a:rPr lang="en-US" sz="900" dirty="0">
+                <a:solidFill>
+                  <a:srgbClr val="64748B"/>
+                </a:solidFill>
+                <a:latin typeface="Arial" pitchFamily="34" charset="0"/>
+                <a:ea typeface="Arial" pitchFamily="34" charset="-122"/>
+                <a:cs typeface="Arial" pitchFamily="34" charset="-120"/>
+              </a:rPr>
+              <a:t>成田空港近くのホテルは古いまま以上してるところが多い一方、コンフォート成田は清潔、かつとてもきめ細やかなサービスな...</a:t>
+            </a:r>
+            <a:endParaRPr lang="en-US" sz="900" dirty="0"/>
+          </a:p>
+        </p:txBody>
+      </p:sp>
+      <p:sp>
+        <p:nvSpPr>
+          <p:cNvPr id="11" name="Text 9"/>
+          <p:cNvSpPr/>
+          <p:nvPr/>
+        </p:nvSpPr>
+        <p:spPr>
+          <a:xfrm>
+            <a:off x="594360" y="1828800"/>
+            <a:ext cx="2377440" cy="640080"/>
+          </a:xfrm>
+          <a:prstGeom prst="rect">
+            <a:avLst/>
+          </a:prstGeom>
+          <a:noFill/>
+          <a:ln/>
+        </p:spPr>
+        <p:txBody>
+          <a:bodyPr wrap="square" lIns="0" tIns="0" rIns="0" bIns="0" rtlCol="0" anchor="ctr"/>
+          <a:lstStyle/>
+          <a:p>
+            <a:pPr indent="0" marL="0">
+              <a:buNone/>
+            </a:pPr>
+            <a:r>
+              <a:rPr lang="en-US" sz="900" i="1" dirty="0">
+                <a:solidFill>
+                  <a:srgbClr val="3B7DD8"/>
+                </a:solidFill>
+                <a:latin typeface="Arial" pitchFamily="34" charset="0"/>
+                <a:ea typeface="Arial" pitchFamily="34" charset="-122"/>
+                <a:cs typeface="Arial" pitchFamily="34" charset="-120"/>
+              </a:rPr>
+              <a:t>「朝食サービスが内容、時間共に最高でした」</a:t>
+            </a:r>
+            <a:endParaRPr lang="en-US" sz="900" dirty="0"/>
+          </a:p>
+        </p:txBody>
+      </p:sp>
+      <p:sp>
+        <p:nvSpPr>
+          <p:cNvPr id="12" name="Shape 10"/>
+          <p:cNvSpPr/>
+          <p:nvPr/>
+        </p:nvSpPr>
+        <p:spPr>
+          <a:xfrm>
+            <a:off x="3291840" y="1051560"/>
+            <a:ext cx="2651760" cy="1600200"/>
+          </a:xfrm>
+          <a:prstGeom prst="rect">
+            <a:avLst/>
+          </a:prstGeom>
+          <a:solidFill>
+            <a:srgbClr val="FFFFFF"/>
+          </a:solidFill>
+          <a:ln/>
+          <a:effectLst>
+            <a:outerShdw sx="100000" sy="100000" kx="0" ky="0" algn="bl" rotWithShape="0" blurRad="50800" dist="25400" dir="8100000">
+              <a:srgbClr val="000000">
+                <a:alpha val="10000"/>
+              </a:srgbClr>
+            </a:outerShdw>
+          </a:effectLst>
+        </p:spPr>
+      </p:sp>
+      <p:sp>
+        <p:nvSpPr>
+          <p:cNvPr id="13" name="Shape 11"/>
+          <p:cNvSpPr/>
+          <p:nvPr/>
+        </p:nvSpPr>
+        <p:spPr>
+          <a:xfrm>
+            <a:off x="3291840" y="1051560"/>
+            <a:ext cx="54864" cy="1600200"/>
+          </a:xfrm>
+          <a:prstGeom prst="rect">
+            <a:avLst/>
+          </a:prstGeom>
+          <a:solidFill>
+            <a:srgbClr val="16A34A"/>
+          </a:solidFill>
+          <a:ln/>
+        </p:spPr>
+      </p:sp>
+      <p:sp>
+        <p:nvSpPr>
+          <p:cNvPr id="14" name="Shape 12"/>
+          <p:cNvSpPr/>
+          <p:nvPr/>
+        </p:nvSpPr>
+        <p:spPr>
+          <a:xfrm>
+            <a:off x="5120640" y="1124712"/>
+            <a:ext cx="658368" cy="228600"/>
+          </a:xfrm>
+          <a:prstGeom prst="rect">
+            <a:avLst/>
+          </a:prstGeom>
+          <a:solidFill>
+            <a:srgbClr val="DCFCE7"/>
+          </a:solidFill>
+          <a:ln/>
+        </p:spPr>
+      </p:sp>
+      <p:sp>
+        <p:nvSpPr>
+          <p:cNvPr id="15" name="Text 13"/>
+          <p:cNvSpPr/>
+          <p:nvPr/>
+        </p:nvSpPr>
+        <p:spPr>
+          <a:xfrm>
+            <a:off x="5120640" y="1124712"/>
+            <a:ext cx="658368" cy="228600"/>
+          </a:xfrm>
+          <a:prstGeom prst="rect">
+            <a:avLst/>
+          </a:prstGeom>
+          <a:noFill/>
+          <a:ln/>
+        </p:spPr>
+        <p:txBody>
+          <a:bodyPr wrap="square" lIns="0" tIns="0" rIns="0" bIns="0" rtlCol="0" anchor="ctr"/>
+          <a:lstStyle/>
+          <a:p>
+            <a:pPr algn="ctr" indent="0" marL="0">
+              <a:buNone/>
+            </a:pPr>
+            <a:r>
+              <a:rPr lang="en-US" sz="900" b="1" dirty="0">
+                <a:solidFill>
+                  <a:srgbClr val="16A34A"/>
+                </a:solidFill>
+                <a:latin typeface="Arial" pitchFamily="34" charset="0"/>
+                <a:ea typeface="Arial" pitchFamily="34" charset="-122"/>
+                <a:cs typeface="Arial" pitchFamily="34" charset="-120"/>
+              </a:rPr>
+              <a:t>20件+</a:t>
+            </a:r>
+            <a:endParaRPr lang="en-US" sz="900" dirty="0"/>
+          </a:p>
+        </p:txBody>
+      </p:sp>
+      <p:sp>
+        <p:nvSpPr>
+          <p:cNvPr id="16" name="Text 14"/>
+          <p:cNvSpPr/>
+          <p:nvPr/>
+        </p:nvSpPr>
+        <p:spPr>
+          <a:xfrm>
+            <a:off x="3429000" y="1124712"/>
             <a:ext cx="1645920" cy="274320"/>
           </a:xfrm>
           <a:prstGeom prst="rect">
@@ -10793,13 +10999,13 @@
       </p:sp>
       <p:sp>
         <p:nvSpPr>
-          <p:cNvPr id="10" name="Text 8"/>
-          <p:cNvSpPr/>
-          <p:nvPr/>
-        </p:nvSpPr>
-        <p:spPr>
-          <a:xfrm>
-            <a:off x="594360" y="1417320"/>
+          <p:cNvPr id="17" name="Text 15"/>
+          <p:cNvSpPr/>
+          <p:nvPr/>
+        </p:nvSpPr>
+        <p:spPr>
+          <a:xfrm>
+            <a:off x="3429000" y="1417320"/>
             <a:ext cx="2377440" cy="365760"/>
           </a:xfrm>
           <a:prstGeom prst="rect">
@@ -10824,7 +11030,7 @@
                 <a:ea typeface="Arial" pitchFamily="34" charset="-122"/>
                 <a:cs typeface="Arial" pitchFamily="34" charset="-120"/>
               </a:rPr>
-              <a:t>朝食で「これは…」と少し思った出来事があり近くのスタッフさんにお伝えしたところ、大変丁寧に対応してくださいました</a:t>
+              <a:t>朝食サービスが内容、時間共に最高でした</a:t>
             </a:r>
             <a:endParaRPr lang="en-US" sz="900" dirty="0"/>
           </a:p>
@@ -10832,13 +11038,13 @@
       </p:sp>
       <p:sp>
         <p:nvSpPr>
-          <p:cNvPr id="11" name="Text 9"/>
-          <p:cNvSpPr/>
-          <p:nvPr/>
-        </p:nvSpPr>
-        <p:spPr>
-          <a:xfrm>
-            <a:off x="594360" y="1828800"/>
+          <p:cNvPr id="18" name="Text 16"/>
+          <p:cNvSpPr/>
+          <p:nvPr/>
+        </p:nvSpPr>
+        <p:spPr>
+          <a:xfrm>
+            <a:off x="3429000" y="1828800"/>
             <a:ext cx="2377440" cy="640080"/>
           </a:xfrm>
           <a:prstGeom prst="rect">
@@ -10863,7 +11069,7 @@
                 <a:ea typeface="Arial" pitchFamily="34" charset="-122"/>
                 <a:cs typeface="Arial" pitchFamily="34" charset="-120"/>
               </a:rPr>
-              <a:t>「無料の朝食が用意されていてとても良かったです」</a:t>
+              <a:t>「朝食で「これは…」と少し思った出来事があり近くのスタッフさんにお伝えしたところ、大変丁寧に対応してくださいました」</a:t>
             </a:r>
             <a:endParaRPr lang="en-US" sz="900" dirty="0"/>
           </a:p>
@@ -10871,13 +11077,13 @@
       </p:sp>
       <p:sp>
         <p:nvSpPr>
-          <p:cNvPr id="12" name="Shape 10"/>
-          <p:cNvSpPr/>
-          <p:nvPr/>
-        </p:nvSpPr>
-        <p:spPr>
-          <a:xfrm>
-            <a:off x="3291840" y="1051560"/>
+          <p:cNvPr id="19" name="Shape 17"/>
+          <p:cNvSpPr/>
+          <p:nvPr/>
+        </p:nvSpPr>
+        <p:spPr>
+          <a:xfrm>
+            <a:off x="6126480" y="1051560"/>
             <a:ext cx="2651760" cy="1600200"/>
           </a:xfrm>
           <a:prstGeom prst="rect">
@@ -10898,13 +11104,13 @@
       </p:sp>
       <p:sp>
         <p:nvSpPr>
-          <p:cNvPr id="13" name="Shape 11"/>
-          <p:cNvSpPr/>
-          <p:nvPr/>
-        </p:nvSpPr>
-        <p:spPr>
-          <a:xfrm>
-            <a:off x="3291840" y="1051560"/>
+          <p:cNvPr id="20" name="Shape 18"/>
+          <p:cNvSpPr/>
+          <p:nvPr/>
+        </p:nvSpPr>
+        <p:spPr>
+          <a:xfrm>
+            <a:off x="6126480" y="1051560"/>
             <a:ext cx="54864" cy="1600200"/>
           </a:xfrm>
           <a:prstGeom prst="rect">
@@ -10918,13 +11124,13 @@
       </p:sp>
       <p:sp>
         <p:nvSpPr>
-          <p:cNvPr id="14" name="Shape 12"/>
-          <p:cNvSpPr/>
-          <p:nvPr/>
-        </p:nvSpPr>
-        <p:spPr>
-          <a:xfrm>
-            <a:off x="5120640" y="1124712"/>
+          <p:cNvPr id="21" name="Shape 19"/>
+          <p:cNvSpPr/>
+          <p:nvPr/>
+        </p:nvSpPr>
+        <p:spPr>
+          <a:xfrm>
+            <a:off x="7955280" y="1124712"/>
             <a:ext cx="658368" cy="228600"/>
           </a:xfrm>
           <a:prstGeom prst="rect">
@@ -10938,13 +11144,13 @@
       </p:sp>
       <p:sp>
         <p:nvSpPr>
-          <p:cNvPr id="15" name="Text 13"/>
-          <p:cNvSpPr/>
-          <p:nvPr/>
-        </p:nvSpPr>
-        <p:spPr>
-          <a:xfrm>
-            <a:off x="5120640" y="1124712"/>
+          <p:cNvPr id="22" name="Text 20"/>
+          <p:cNvSpPr/>
+          <p:nvPr/>
+        </p:nvSpPr>
+        <p:spPr>
+          <a:xfrm>
+            <a:off x="7955280" y="1124712"/>
             <a:ext cx="658368" cy="228600"/>
           </a:xfrm>
           <a:prstGeom prst="rect">
@@ -10977,13 +11183,13 @@
       </p:sp>
       <p:sp>
         <p:nvSpPr>
-          <p:cNvPr id="16" name="Text 14"/>
-          <p:cNvSpPr/>
-          <p:nvPr/>
-        </p:nvSpPr>
-        <p:spPr>
-          <a:xfrm>
-            <a:off x="3429000" y="1124712"/>
+          <p:cNvPr id="23" name="Text 21"/>
+          <p:cNvSpPr/>
+          <p:nvPr/>
+        </p:nvSpPr>
+        <p:spPr>
+          <a:xfrm>
+            <a:off x="6263640" y="1124712"/>
             <a:ext cx="1645920" cy="274320"/>
           </a:xfrm>
           <a:prstGeom prst="rect">
@@ -11008,7 +11214,7 @@
                 <a:ea typeface="Arial" pitchFamily="34" charset="-122"/>
                 <a:cs typeface="Arial" pitchFamily="34" charset="-120"/>
               </a:rPr>
-              <a:t>スタッフの対応</a:t>
+              <a:t>立地・アクセス</a:t>
             </a:r>
             <a:endParaRPr lang="en-US" sz="1300" dirty="0"/>
           </a:p>
@@ -11016,13 +11222,13 @@
       </p:sp>
       <p:sp>
         <p:nvSpPr>
-          <p:cNvPr id="17" name="Text 15"/>
-          <p:cNvSpPr/>
-          <p:nvPr/>
-        </p:nvSpPr>
-        <p:spPr>
-          <a:xfrm>
-            <a:off x="3429000" y="1417320"/>
+          <p:cNvPr id="24" name="Text 22"/>
+          <p:cNvSpPr/>
+          <p:nvPr/>
+        </p:nvSpPr>
+        <p:spPr>
+          <a:xfrm>
+            <a:off x="6263640" y="1417320"/>
             <a:ext cx="2377440" cy="365760"/>
           </a:xfrm>
           <a:prstGeom prst="rect">
@@ -11047,7 +11253,7 @@
                 <a:ea typeface="Arial" pitchFamily="34" charset="-122"/>
                 <a:cs typeface="Arial" pitchFamily="34" charset="-120"/>
               </a:rPr>
-              <a:t>朝食で「これは…」と少し思った出来事があり近くのスタッフさんにお伝えしたところ、大変丁寧に対応してくださいました</a:t>
+              <a:t>ที่พักอาจจะเก่าไปนิด แต่สะดวกเพราะอยู่ใกล้รถไฟ ใกล้สนามบิ...</a:t>
             </a:r>
             <a:endParaRPr lang="en-US" sz="900" dirty="0"/>
           </a:p>
@@ -11055,13 +11261,13 @@
       </p:sp>
       <p:sp>
         <p:nvSpPr>
-          <p:cNvPr id="18" name="Text 16"/>
-          <p:cNvSpPr/>
-          <p:nvPr/>
-        </p:nvSpPr>
-        <p:spPr>
-          <a:xfrm>
-            <a:off x="3429000" y="1828800"/>
+          <p:cNvPr id="25" name="Text 23"/>
+          <p:cNvSpPr/>
+          <p:nvPr/>
+        </p:nvSpPr>
+        <p:spPr>
+          <a:xfrm>
+            <a:off x="6263640" y="1828800"/>
             <a:ext cx="2377440" cy="640080"/>
           </a:xfrm>
           <a:prstGeom prst="rect">
@@ -11086,7 +11292,7 @@
                 <a:ea typeface="Arial" pitchFamily="34" charset="-122"/>
                 <a:cs typeface="Arial" pitchFamily="34" charset="-120"/>
               </a:rPr>
-              <a:t>「スタッフのサービスがとても良く、丁寧で気持ちの良い対応でした」</a:t>
+              <a:t>「成田空港近くのホテルは古いまま以上してるところが多い一方、コンフォート成田は清潔、かつとてもきめ細やかなサービスな...」</a:t>
             </a:r>
             <a:endParaRPr lang="en-US" sz="900" dirty="0"/>
           </a:p>
@@ -11094,13 +11300,13 @@
       </p:sp>
       <p:sp>
         <p:nvSpPr>
-          <p:cNvPr id="19" name="Shape 17"/>
-          <p:cNvSpPr/>
-          <p:nvPr/>
-        </p:nvSpPr>
-        <p:spPr>
-          <a:xfrm>
-            <a:off x="6126480" y="1051560"/>
+          <p:cNvPr id="26" name="Shape 24"/>
+          <p:cNvSpPr/>
+          <p:nvPr/>
+        </p:nvSpPr>
+        <p:spPr>
+          <a:xfrm>
+            <a:off x="457200" y="2880360"/>
             <a:ext cx="2651760" cy="1600200"/>
           </a:xfrm>
           <a:prstGeom prst="rect">
@@ -11121,13 +11327,13 @@
       </p:sp>
       <p:sp>
         <p:nvSpPr>
-          <p:cNvPr id="20" name="Shape 18"/>
-          <p:cNvSpPr/>
-          <p:nvPr/>
-        </p:nvSpPr>
-        <p:spPr>
-          <a:xfrm>
-            <a:off x="6126480" y="1051560"/>
+          <p:cNvPr id="27" name="Shape 25"/>
+          <p:cNvSpPr/>
+          <p:nvPr/>
+        </p:nvSpPr>
+        <p:spPr>
+          <a:xfrm>
+            <a:off x="457200" y="2880360"/>
             <a:ext cx="54864" cy="1600200"/>
           </a:xfrm>
           <a:prstGeom prst="rect">
@@ -11141,13 +11347,13 @@
       </p:sp>
       <p:sp>
         <p:nvSpPr>
-          <p:cNvPr id="21" name="Shape 19"/>
-          <p:cNvSpPr/>
-          <p:nvPr/>
-        </p:nvSpPr>
-        <p:spPr>
-          <a:xfrm>
-            <a:off x="7955280" y="1124712"/>
+          <p:cNvPr id="28" name="Shape 26"/>
+          <p:cNvSpPr/>
+          <p:nvPr/>
+        </p:nvSpPr>
+        <p:spPr>
+          <a:xfrm>
+            <a:off x="2286000" y="2953512"/>
             <a:ext cx="658368" cy="228600"/>
           </a:xfrm>
           <a:prstGeom prst="rect">
@@ -11161,13 +11367,13 @@
       </p:sp>
       <p:sp>
         <p:nvSpPr>
-          <p:cNvPr id="22" name="Text 20"/>
-          <p:cNvSpPr/>
-          <p:nvPr/>
-        </p:nvSpPr>
-        <p:spPr>
-          <a:xfrm>
-            <a:off x="7955280" y="1124712"/>
+          <p:cNvPr id="29" name="Text 27"/>
+          <p:cNvSpPr/>
+          <p:nvPr/>
+        </p:nvSpPr>
+        <p:spPr>
+          <a:xfrm>
+            <a:off x="2286000" y="2953512"/>
             <a:ext cx="658368" cy="228600"/>
           </a:xfrm>
           <a:prstGeom prst="rect">
@@ -11200,229 +11406,6 @@
       </p:sp>
       <p:sp>
         <p:nvSpPr>
-          <p:cNvPr id="23" name="Text 21"/>
-          <p:cNvSpPr/>
-          <p:nvPr/>
-        </p:nvSpPr>
-        <p:spPr>
-          <a:xfrm>
-            <a:off x="6263640" y="1124712"/>
-            <a:ext cx="1645920" cy="274320"/>
-          </a:xfrm>
-          <a:prstGeom prst="rect">
-            <a:avLst/>
-          </a:prstGeom>
-          <a:noFill/>
-          <a:ln/>
-        </p:spPr>
-        <p:txBody>
-          <a:bodyPr wrap="square" lIns="0" tIns="0" rIns="0" bIns="0" rtlCol="0" anchor="ctr"/>
-          <a:lstStyle/>
-          <a:p>
-            <a:pPr indent="0" marL="0">
-              <a:buNone/>
-            </a:pPr>
-            <a:r>
-              <a:rPr lang="en-US" sz="1300" b="1" dirty="0">
-                <a:solidFill>
-                  <a:srgbClr val="1A2744"/>
-                </a:solidFill>
-                <a:latin typeface="Arial" pitchFamily="34" charset="0"/>
-                <a:ea typeface="Arial" pitchFamily="34" charset="-122"/>
-                <a:cs typeface="Arial" pitchFamily="34" charset="-120"/>
-              </a:rPr>
-              <a:t>立地・アクセス</a:t>
-            </a:r>
-            <a:endParaRPr lang="en-US" sz="1300" dirty="0"/>
-          </a:p>
-        </p:txBody>
-      </p:sp>
-      <p:sp>
-        <p:nvSpPr>
-          <p:cNvPr id="24" name="Text 22"/>
-          <p:cNvSpPr/>
-          <p:nvPr/>
-        </p:nvSpPr>
-        <p:spPr>
-          <a:xfrm>
-            <a:off x="6263640" y="1417320"/>
-            <a:ext cx="2377440" cy="365760"/>
-          </a:xfrm>
-          <a:prstGeom prst="rect">
-            <a:avLst/>
-          </a:prstGeom>
-          <a:noFill/>
-          <a:ln/>
-        </p:spPr>
-        <p:txBody>
-          <a:bodyPr wrap="square" lIns="0" tIns="0" rIns="0" bIns="0" rtlCol="0" anchor="ctr"/>
-          <a:lstStyle/>
-          <a:p>
-            <a:pPr indent="0" marL="0">
-              <a:buNone/>
-            </a:pPr>
-            <a:r>
-              <a:rPr lang="en-US" sz="900" dirty="0">
-                <a:solidFill>
-                  <a:srgbClr val="64748B"/>
-                </a:solidFill>
-                <a:latin typeface="Arial" pitchFamily="34" charset="0"/>
-                <a:ea typeface="Arial" pitchFamily="34" charset="-122"/>
-                <a:cs typeface="Arial" pitchFamily="34" charset="-120"/>
-              </a:rPr>
-              <a:t>Bahkan 1 hari setelah nya rambut masih halus  Udah 2x ngi...</a:t>
-            </a:r>
-            <a:endParaRPr lang="en-US" sz="900" dirty="0"/>
-          </a:p>
-        </p:txBody>
-      </p:sp>
-      <p:sp>
-        <p:nvSpPr>
-          <p:cNvPr id="25" name="Text 23"/>
-          <p:cNvSpPr/>
-          <p:nvPr/>
-        </p:nvSpPr>
-        <p:spPr>
-          <a:xfrm>
-            <a:off x="6263640" y="1828800"/>
-            <a:ext cx="2377440" cy="640080"/>
-          </a:xfrm>
-          <a:prstGeom prst="rect">
-            <a:avLst/>
-          </a:prstGeom>
-          <a:noFill/>
-          <a:ln/>
-        </p:spPr>
-        <p:txBody>
-          <a:bodyPr wrap="square" lIns="0" tIns="0" rIns="0" bIns="0" rtlCol="0" anchor="ctr"/>
-          <a:lstStyle/>
-          <a:p>
-            <a:pPr indent="0" marL="0">
-              <a:buNone/>
-            </a:pPr>
-            <a:r>
-              <a:rPr lang="en-US" sz="900" i="1" dirty="0">
-                <a:solidFill>
-                  <a:srgbClr val="3B7DD8"/>
-                </a:solidFill>
-                <a:latin typeface="Arial" pitchFamily="34" charset="0"/>
-                <a:ea typeface="Arial" pitchFamily="34" charset="-122"/>
-                <a:cs typeface="Arial" pitchFamily="34" charset="-120"/>
-              </a:rPr>
-              <a:t>「駅近く、飲食店やショップも多く便利でした」</a:t>
-            </a:r>
-            <a:endParaRPr lang="en-US" sz="900" dirty="0"/>
-          </a:p>
-        </p:txBody>
-      </p:sp>
-      <p:sp>
-        <p:nvSpPr>
-          <p:cNvPr id="26" name="Shape 24"/>
-          <p:cNvSpPr/>
-          <p:nvPr/>
-        </p:nvSpPr>
-        <p:spPr>
-          <a:xfrm>
-            <a:off x="457200" y="2880360"/>
-            <a:ext cx="2651760" cy="1600200"/>
-          </a:xfrm>
-          <a:prstGeom prst="rect">
-            <a:avLst/>
-          </a:prstGeom>
-          <a:solidFill>
-            <a:srgbClr val="FFFFFF"/>
-          </a:solidFill>
-          <a:ln/>
-          <a:effectLst>
-            <a:outerShdw sx="100000" sy="100000" kx="0" ky="0" algn="bl" rotWithShape="0" blurRad="50800" dist="25400" dir="8100000">
-              <a:srgbClr val="000000">
-                <a:alpha val="10000"/>
-              </a:srgbClr>
-            </a:outerShdw>
-          </a:effectLst>
-        </p:spPr>
-      </p:sp>
-      <p:sp>
-        <p:nvSpPr>
-          <p:cNvPr id="27" name="Shape 25"/>
-          <p:cNvSpPr/>
-          <p:nvPr/>
-        </p:nvSpPr>
-        <p:spPr>
-          <a:xfrm>
-            <a:off x="457200" y="2880360"/>
-            <a:ext cx="54864" cy="1600200"/>
-          </a:xfrm>
-          <a:prstGeom prst="rect">
-            <a:avLst/>
-          </a:prstGeom>
-          <a:solidFill>
-            <a:srgbClr val="16A34A"/>
-          </a:solidFill>
-          <a:ln/>
-        </p:spPr>
-      </p:sp>
-      <p:sp>
-        <p:nvSpPr>
-          <p:cNvPr id="28" name="Shape 26"/>
-          <p:cNvSpPr/>
-          <p:nvPr/>
-        </p:nvSpPr>
-        <p:spPr>
-          <a:xfrm>
-            <a:off x="2286000" y="2953512"/>
-            <a:ext cx="658368" cy="228600"/>
-          </a:xfrm>
-          <a:prstGeom prst="rect">
-            <a:avLst/>
-          </a:prstGeom>
-          <a:solidFill>
-            <a:srgbClr val="DCFCE7"/>
-          </a:solidFill>
-          <a:ln/>
-        </p:spPr>
-      </p:sp>
-      <p:sp>
-        <p:nvSpPr>
-          <p:cNvPr id="29" name="Text 27"/>
-          <p:cNvSpPr/>
-          <p:nvPr/>
-        </p:nvSpPr>
-        <p:spPr>
-          <a:xfrm>
-            <a:off x="2286000" y="2953512"/>
-            <a:ext cx="658368" cy="228600"/>
-          </a:xfrm>
-          <a:prstGeom prst="rect">
-            <a:avLst/>
-          </a:prstGeom>
-          <a:noFill/>
-          <a:ln/>
-        </p:spPr>
-        <p:txBody>
-          <a:bodyPr wrap="square" lIns="0" tIns="0" rIns="0" bIns="0" rtlCol="0" anchor="ctr"/>
-          <a:lstStyle/>
-          <a:p>
-            <a:pPr algn="ctr" indent="0" marL="0">
-              <a:buNone/>
-            </a:pPr>
-            <a:r>
-              <a:rPr lang="en-US" sz="900" b="1" dirty="0">
-                <a:solidFill>
-                  <a:srgbClr val="16A34A"/>
-                </a:solidFill>
-                <a:latin typeface="Arial" pitchFamily="34" charset="0"/>
-                <a:ea typeface="Arial" pitchFamily="34" charset="-122"/>
-                <a:cs typeface="Arial" pitchFamily="34" charset="-120"/>
-              </a:rPr>
-              <a:t>20件+</a:t>
-            </a:r>
-            <a:endParaRPr lang="en-US" sz="900" dirty="0"/>
-          </a:p>
-        </p:txBody>
-      </p:sp>
-      <p:sp>
-        <p:nvSpPr>
           <p:cNvPr id="30" name="Text 28"/>
           <p:cNvSpPr/>
           <p:nvPr/>
@@ -11493,7 +11476,7 @@
                 <a:ea typeface="Arial" pitchFamily="34" charset="-122"/>
                 <a:cs typeface="Arial" pitchFamily="34" charset="-120"/>
               </a:rPr>
-              <a:t>サービスがとても良く、スタッフの対応も親切で快適に過ごせました</a:t>
+              <a:t>客室は広々としていて、とても快適でした</a:t>
             </a:r>
             <a:endParaRPr lang="en-US" sz="900" dirty="0"/>
           </a:p>
@@ -11532,7 +11515,7 @@
                 <a:ea typeface="Arial" pitchFamily="34" charset="-122"/>
                 <a:cs typeface="Arial" pitchFamily="34" charset="-120"/>
               </a:rPr>
-              <a:t>「部屋はコンパクトですが何も不自由することなく快適に過ごせました」</a:t>
+              <a:t>「福岡で泊まったホテルよりも断然快適でした」</a:t>
             </a:r>
             <a:endParaRPr lang="en-US" sz="900" dirty="0"/>
           </a:p>
@@ -11638,7 +11621,7 @@
                 <a:ea typeface="Arial" pitchFamily="34" charset="-122"/>
                 <a:cs typeface="Arial" pitchFamily="34" charset="-120"/>
               </a:rPr>
-              <a:t>20件+</a:t>
+              <a:t>10件+</a:t>
             </a:r>
             <a:endParaRPr lang="en-US" sz="900" dirty="0"/>
           </a:p>
@@ -11716,7 +11699,7 @@
                 <a:ea typeface="Arial" pitchFamily="34" charset="-122"/>
                 <a:cs typeface="Arial" pitchFamily="34" charset="-120"/>
               </a:rPr>
-              <a:t>また他の部屋の掃除をしているスタッフさんが全員必ず「おはようございます」と挨拶をして下さり、とにかく全体的に接客面...</a:t>
+              <a:t>成田空港近くのホテルは古いまま以上してるところが多い一方、コンフォート成田は清潔、かつとてもきめ細やかなサービスな...</a:t>
             </a:r>
             <a:endParaRPr lang="en-US" sz="900" dirty="0"/>
           </a:p>
@@ -11755,7 +11738,7 @@
                 <a:ea typeface="Arial" pitchFamily="34" charset="-122"/>
                 <a:cs typeface="Arial" pitchFamily="34" charset="-120"/>
               </a:rPr>
-              <a:t>「部屋も清潔で居心地がよく、ゆっくり休むことができました」</a:t>
+              <a:t>「また他の部屋の掃除をしているスタッフさんが全員必ず「おはようございます」と挨拶をして下さり、とにかく全体的に接客面...」</a:t>
             </a:r>
             <a:endParaRPr lang="en-US" sz="900" dirty="0"/>
           </a:p>
@@ -11861,7 +11844,7 @@
                 <a:ea typeface="Arial" pitchFamily="34" charset="-122"/>
                 <a:cs typeface="Arial" pitchFamily="34" charset="-120"/>
               </a:rPr>
-              <a:t>10件+</a:t>
+              <a:t>6件</a:t>
             </a:r>
             <a:endParaRPr lang="en-US" sz="900" dirty="0"/>
           </a:p>
@@ -12668,7 +12651,7 @@
                           <a:ea typeface="Arial" pitchFamily="34" charset="-122"/>
                           <a:cs typeface="Arial" pitchFamily="34" charset="-120"/>
                         </a:rPr>
-                        <a:t>冬でも暖房の温度を自分で調整できるので、暑すぎることもなく、とても快適でした</a:t>
+                        <a:t>The staff at this place were very helpful and friendly</a:t>
                       </a:r>
                       <a:endParaRPr lang="en-US" sz="900" dirty="0">
                         <a:latin typeface="Arial" charset="0"/>
@@ -12736,7 +12719,7 @@
                           <a:ea typeface="Arial" pitchFamily="34" charset="-122"/>
                           <a:cs typeface="Arial" pitchFamily="34" charset="-120"/>
                         </a:rPr>
-                        <a:t>16件</a:t>
+                        <a:t>12件</a:t>
                       </a:r>
                       <a:endParaRPr lang="en-US" sz="900" dirty="0">
                         <a:latin typeface="Arial" charset="0"/>
@@ -13010,7 +12993,7 @@
                           <a:ea typeface="Arial" pitchFamily="34" charset="-122"/>
                           <a:cs typeface="Arial" pitchFamily="34" charset="-120"/>
                         </a:rPr>
-                        <a:t>10件</a:t>
+                        <a:t>8件</a:t>
                       </a:r>
                       <a:endParaRPr lang="en-US" sz="900" dirty="0">
                         <a:latin typeface="Arial" charset="0"/>
@@ -13148,7 +13131,7 @@
                           <a:ea typeface="Arial" pitchFamily="34" charset="-122"/>
                           <a:cs typeface="Arial" pitchFamily="34" charset="-120"/>
                         </a:rPr>
-                        <a:t>臭い・匂い</a:t>
+                        <a:t>設備の老朽化</a:t>
                       </a:r>
                       <a:endParaRPr lang="en-US" sz="900" dirty="0">
                         <a:latin typeface="Arial" charset="0"/>
@@ -13216,7 +13199,7 @@
                           <a:ea typeface="Arial" pitchFamily="34" charset="-122"/>
                           <a:cs typeface="Arial" pitchFamily="34" charset="-120"/>
                         </a:rPr>
-                        <a:t>部屋の方はリニューアル後の為、綺麗でタバコの臭いもなく広さも充分</a:t>
+                        <a:t>ที่พักอาจจะเก่าไปนิด แต่สะดวกเพราะอยู่ใกล้รถไฟ ใกล้สนามบิ...</a:t>
                       </a:r>
                       <a:endParaRPr lang="en-US" sz="900" dirty="0">
                         <a:latin typeface="Arial" charset="0"/>
@@ -13422,7 +13405,7 @@
                           <a:ea typeface="Arial" pitchFamily="34" charset="-122"/>
                           <a:cs typeface="Arial" pitchFamily="34" charset="-120"/>
                         </a:rPr>
-                        <a:t>清掃不備</a:t>
+                        <a:t>部屋の狭さ</a:t>
                       </a:r>
                       <a:endParaRPr lang="en-US" sz="900" dirty="0">
                         <a:latin typeface="Arial" charset="0"/>
@@ -13490,7 +13473,7 @@
                           <a:ea typeface="Arial" pitchFamily="34" charset="-122"/>
                           <a:cs typeface="Arial" pitchFamily="34" charset="-120"/>
                         </a:rPr>
-                        <a:t>バスルームの隅々に少し埃や汚れがありました</a:t>
+                        <a:t>It also overlooks a small part of the city</a:t>
                       </a:r>
                       <a:endParaRPr lang="en-US" sz="900" dirty="0">
                         <a:latin typeface="Arial" charset="0"/>
@@ -13558,7 +13541,7 @@
                           <a:ea typeface="Arial" pitchFamily="34" charset="-122"/>
                           <a:cs typeface="Arial" pitchFamily="34" charset="-120"/>
                         </a:rPr>
-                        <a:t>5件</a:t>
+                        <a:t>3件</a:t>
                       </a:r>
                       <a:endParaRPr lang="en-US" sz="900" dirty="0">
                         <a:latin typeface="Arial" charset="0"/>
@@ -13696,7 +13679,7 @@
                           <a:ea typeface="Arial" pitchFamily="34" charset="-122"/>
                           <a:cs typeface="Arial" pitchFamily="34" charset="-120"/>
                         </a:rPr>
-                        <a:t>部屋の狭さ</a:t>
+                        <a:t>窓・採光</a:t>
                       </a:r>
                       <a:endParaRPr lang="en-US" sz="900" dirty="0">
                         <a:latin typeface="Arial" charset="0"/>
@@ -13764,7 +13747,7 @@
                           <a:ea typeface="Arial" pitchFamily="34" charset="-122"/>
                           <a:cs typeface="Arial" pitchFamily="34" charset="-120"/>
                         </a:rPr>
-                        <a:t>Bahkan 1 hari setelah nya rambut masih halus  Udah 2x ngi...</a:t>
+                        <a:t>スタッフの皆さんが、明るく、丁寧にもてなしてくださり、朝食も素晴らしく、安心して滞在できました</a:t>
                       </a:r>
                       <a:endParaRPr lang="en-US" sz="900" dirty="0">
                         <a:latin typeface="Arial" charset="0"/>
@@ -13832,7 +13815,7 @@
                           <a:ea typeface="Arial" pitchFamily="34" charset="-122"/>
                           <a:cs typeface="Arial" pitchFamily="34" charset="-120"/>
                         </a:rPr>
-                        <a:t>4件</a:t>
+                        <a:t>2件</a:t>
                       </a:r>
                       <a:endParaRPr lang="en-US" sz="900" dirty="0">
                         <a:latin typeface="Arial" charset="0"/>
@@ -13970,7 +13953,7 @@
                           <a:ea typeface="Arial" pitchFamily="34" charset="-122"/>
                           <a:cs typeface="Arial" pitchFamily="34" charset="-120"/>
                         </a:rPr>
-                        <a:t>設備の老朽化</a:t>
+                        <a:t>清掃不備</a:t>
                       </a:r>
                       <a:endParaRPr lang="en-US" sz="900" dirty="0">
                         <a:latin typeface="Arial" charset="0"/>
@@ -14038,7 +14021,7 @@
                           <a:ea typeface="Arial" pitchFamily="34" charset="-122"/>
                           <a:cs typeface="Arial" pitchFamily="34" charset="-120"/>
                         </a:rPr>
-                        <a:t>設備は少し古いですが、とても清潔で快適です</a:t>
+                        <a:t>バスルームの隅々に少し埃や汚れがありました</a:t>
                       </a:r>
                       <a:endParaRPr lang="en-US" sz="900" dirty="0">
                         <a:latin typeface="Arial" charset="0"/>
@@ -14106,7 +14089,7 @@
                           <a:ea typeface="Arial" pitchFamily="34" charset="-122"/>
                           <a:cs typeface="Arial" pitchFamily="34" charset="-120"/>
                         </a:rPr>
-                        <a:t>3件</a:t>
+                        <a:t>2件</a:t>
                       </a:r>
                       <a:endParaRPr lang="en-US" sz="900" dirty="0">
                         <a:latin typeface="Arial" charset="0"/>
@@ -14244,7 +14227,7 @@
                           <a:ea typeface="Arial" pitchFamily="34" charset="-122"/>
                           <a:cs typeface="Arial" pitchFamily="34" charset="-120"/>
                         </a:rPr>
-                        <a:t>対応・サービスの不満</a:t>
+                        <a:t>防音性能</a:t>
                       </a:r>
                       <a:endParaRPr lang="en-US" sz="900" dirty="0">
                         <a:latin typeface="Arial" charset="0"/>
@@ -14312,7 +14295,7 @@
                           <a:ea typeface="Arial" pitchFamily="34" charset="-122"/>
                           <a:cs typeface="Arial" pitchFamily="34" charset="-120"/>
                         </a:rPr>
-                        <a:t>員工態度親切 一進房間有股臭味（發霉味），地毯稍嫌不乾淨 部屋に入るとカビ臭い匂いがして、カーペットも少し汚れていた</a:t>
+                        <a:t>空調電源を切ってるのに 奥でずっと音がしていて寝れない 朝ごはんは美味しい 駅の近くで立地は良いです 空調電源を切...</a:t>
                       </a:r>
                       <a:endParaRPr lang="en-US" sz="900" dirty="0">
                         <a:latin typeface="Arial" charset="0"/>
@@ -14380,555 +14363,7 @@
                           <a:ea typeface="Arial" pitchFamily="34" charset="-122"/>
                           <a:cs typeface="Arial" pitchFamily="34" charset="-120"/>
                         </a:rPr>
-                        <a:t>3件</a:t>
-                      </a:r>
-                      <a:endParaRPr lang="en-US" sz="900" dirty="0">
-                        <a:latin typeface="Arial" charset="0"/>
-                        <a:ea typeface="Arial" charset="0"/>
-                        <a:cs typeface="Arial" charset="0"/>
-                      </a:endParaRPr>
-                    </a:p>
-                  </a:txBody>
-                  <a:tcPr marL="91440" marR="91440" marT="45720" marB="45720">
-                    <a:lnL w="6350" cap="flat" cmpd="sng" algn="ctr">
-                      <a:solidFill>
-                        <a:srgbClr val="CBD5E1"/>
-                      </a:solidFill>
-                      <a:prstDash val="solid"/>
-                      <a:round/>
-                      <a:headEnd type="none" w="med" len="med"/>
-                      <a:tailEnd type="none" w="med" len="med"/>
-                    </a:lnL>
-                    <a:lnR w="6350" cap="flat" cmpd="sng" algn="ctr">
-                      <a:solidFill>
-                        <a:srgbClr val="CBD5E1"/>
-                      </a:solidFill>
-                      <a:prstDash val="solid"/>
-                      <a:round/>
-                      <a:headEnd type="none" w="med" len="med"/>
-                      <a:tailEnd type="none" w="med" len="med"/>
-                    </a:lnR>
-                    <a:lnT w="6350" cap="flat" cmpd="sng" algn="ctr">
-                      <a:solidFill>
-                        <a:srgbClr val="CBD5E1"/>
-                      </a:solidFill>
-                      <a:prstDash val="solid"/>
-                      <a:round/>
-                      <a:headEnd type="none" w="med" len="med"/>
-                      <a:tailEnd type="none" w="med" len="med"/>
-                    </a:lnT>
-                    <a:lnB w="6350" cap="flat" cmpd="sng" algn="ctr">
-                      <a:solidFill>
-                        <a:srgbClr val="CBD5E1"/>
-                      </a:solidFill>
-                      <a:prstDash val="solid"/>
-                      <a:round/>
-                      <a:headEnd type="none" w="med" len="med"/>
-                      <a:tailEnd type="none" w="med" len="med"/>
-                    </a:lnB>
-                    <a:solidFill>
-                      <a:srgbClr val="E8EFF8"/>
-                    </a:solidFill>
-                  </a:tcPr>
-                </a:tc>
-              </a:tr>
-              <a:tr h="320040">
-                <a:tc>
-                  <a:txBody>
-                    <a:bodyPr/>
-                    <a:lstStyle/>
-                    <a:p>
-                      <a:pPr algn="ctr" indent="0" marL="0">
-                        <a:buNone/>
-                      </a:pPr>
-                      <a:r>
-                        <a:rPr lang="en-US" sz="1200" b="1" dirty="0">
-                          <a:solidFill>
-                            <a:srgbClr val="94A3B8"/>
-                          </a:solidFill>
-                          <a:latin typeface="Arial" pitchFamily="34" charset="0"/>
-                          <a:ea typeface="Arial" pitchFamily="34" charset="-122"/>
-                          <a:cs typeface="Arial" pitchFamily="34" charset="-120"/>
-                        </a:rPr>
-                        <a:t>C</a:t>
-                      </a:r>
-                      <a:endParaRPr lang="en-US" sz="1200" dirty="0">
-                        <a:latin typeface="Arial" charset="0"/>
-                        <a:ea typeface="Arial" charset="0"/>
-                        <a:cs typeface="Arial" charset="0"/>
-                      </a:endParaRPr>
-                    </a:p>
-                  </a:txBody>
-                  <a:tcPr marL="91440" marR="91440" marT="45720" marB="45720">
-                    <a:lnL w="6350" cap="flat" cmpd="sng" algn="ctr">
-                      <a:solidFill>
-                        <a:srgbClr val="CBD5E1"/>
-                      </a:solidFill>
-                      <a:prstDash val="solid"/>
-                      <a:round/>
-                      <a:headEnd type="none" w="med" len="med"/>
-                      <a:tailEnd type="none" w="med" len="med"/>
-                    </a:lnL>
-                    <a:lnR w="6350" cap="flat" cmpd="sng" algn="ctr">
-                      <a:solidFill>
-                        <a:srgbClr val="CBD5E1"/>
-                      </a:solidFill>
-                      <a:prstDash val="solid"/>
-                      <a:round/>
-                      <a:headEnd type="none" w="med" len="med"/>
-                      <a:tailEnd type="none" w="med" len="med"/>
-                    </a:lnR>
-                    <a:lnT w="6350" cap="flat" cmpd="sng" algn="ctr">
-                      <a:solidFill>
-                        <a:srgbClr val="CBD5E1"/>
-                      </a:solidFill>
-                      <a:prstDash val="solid"/>
-                      <a:round/>
-                      <a:headEnd type="none" w="med" len="med"/>
-                      <a:tailEnd type="none" w="med" len="med"/>
-                    </a:lnT>
-                    <a:lnB w="6350" cap="flat" cmpd="sng" algn="ctr">
-                      <a:solidFill>
-                        <a:srgbClr val="CBD5E1"/>
-                      </a:solidFill>
-                      <a:prstDash val="solid"/>
-                      <a:round/>
-                      <a:headEnd type="none" w="med" len="med"/>
-                      <a:tailEnd type="none" w="med" len="med"/>
-                    </a:lnB>
-                    <a:solidFill>
-                      <a:srgbClr val="FFFFFF"/>
-                    </a:solidFill>
-                  </a:tcPr>
-                </a:tc>
-                <a:tc>
-                  <a:txBody>
-                    <a:bodyPr/>
-                    <a:lstStyle/>
-                    <a:p>
-                      <a:pPr indent="0" marL="0">
-                        <a:buNone/>
-                      </a:pPr>
-                      <a:r>
-                        <a:rPr lang="en-US" sz="900" b="1" dirty="0">
-                          <a:solidFill>
-                            <a:srgbClr val="334155"/>
-                          </a:solidFill>
-                          <a:latin typeface="Arial" pitchFamily="34" charset="0"/>
-                          <a:ea typeface="Arial" pitchFamily="34" charset="-122"/>
-                          <a:cs typeface="Arial" pitchFamily="34" charset="-120"/>
-                        </a:rPr>
-                        <a:t>朝食の改善要望</a:t>
-                      </a:r>
-                      <a:endParaRPr lang="en-US" sz="900" dirty="0">
-                        <a:latin typeface="Arial" charset="0"/>
-                        <a:ea typeface="Arial" charset="0"/>
-                        <a:cs typeface="Arial" charset="0"/>
-                      </a:endParaRPr>
-                    </a:p>
-                  </a:txBody>
-                  <a:tcPr marL="91440" marR="91440" marT="45720" marB="45720">
-                    <a:lnL w="6350" cap="flat" cmpd="sng" algn="ctr">
-                      <a:solidFill>
-                        <a:srgbClr val="CBD5E1"/>
-                      </a:solidFill>
-                      <a:prstDash val="solid"/>
-                      <a:round/>
-                      <a:headEnd type="none" w="med" len="med"/>
-                      <a:tailEnd type="none" w="med" len="med"/>
-                    </a:lnL>
-                    <a:lnR w="6350" cap="flat" cmpd="sng" algn="ctr">
-                      <a:solidFill>
-                        <a:srgbClr val="CBD5E1"/>
-                      </a:solidFill>
-                      <a:prstDash val="solid"/>
-                      <a:round/>
-                      <a:headEnd type="none" w="med" len="med"/>
-                      <a:tailEnd type="none" w="med" len="med"/>
-                    </a:lnR>
-                    <a:lnT w="6350" cap="flat" cmpd="sng" algn="ctr">
-                      <a:solidFill>
-                        <a:srgbClr val="CBD5E1"/>
-                      </a:solidFill>
-                      <a:prstDash val="solid"/>
-                      <a:round/>
-                      <a:headEnd type="none" w="med" len="med"/>
-                      <a:tailEnd type="none" w="med" len="med"/>
-                    </a:lnT>
-                    <a:lnB w="6350" cap="flat" cmpd="sng" algn="ctr">
-                      <a:solidFill>
-                        <a:srgbClr val="CBD5E1"/>
-                      </a:solidFill>
-                      <a:prstDash val="solid"/>
-                      <a:round/>
-                      <a:headEnd type="none" w="med" len="med"/>
-                      <a:tailEnd type="none" w="med" len="med"/>
-                    </a:lnB>
-                    <a:solidFill>
-                      <a:srgbClr val="FFFFFF"/>
-                    </a:solidFill>
-                  </a:tcPr>
-                </a:tc>
-                <a:tc>
-                  <a:txBody>
-                    <a:bodyPr/>
-                    <a:lstStyle/>
-                    <a:p>
-                      <a:pPr indent="0" marL="0">
-                        <a:buNone/>
-                      </a:pPr>
-                      <a:r>
-                        <a:rPr lang="en-US" sz="900" dirty="0">
-                          <a:solidFill>
-                            <a:srgbClr val="64748B"/>
-                          </a:solidFill>
-                          <a:latin typeface="Arial" pitchFamily="34" charset="0"/>
-                          <a:ea typeface="Arial" pitchFamily="34" charset="-122"/>
-                          <a:cs typeface="Arial" pitchFamily="34" charset="-120"/>
-                        </a:rPr>
-                        <a:t>朝食は品数は多くはないが充分、野菜を沢山食べました</a:t>
-                      </a:r>
-                      <a:endParaRPr lang="en-US" sz="900" dirty="0">
-                        <a:latin typeface="Arial" charset="0"/>
-                        <a:ea typeface="Arial" charset="0"/>
-                        <a:cs typeface="Arial" charset="0"/>
-                      </a:endParaRPr>
-                    </a:p>
-                  </a:txBody>
-                  <a:tcPr marL="91440" marR="91440" marT="45720" marB="45720">
-                    <a:lnL w="6350" cap="flat" cmpd="sng" algn="ctr">
-                      <a:solidFill>
-                        <a:srgbClr val="CBD5E1"/>
-                      </a:solidFill>
-                      <a:prstDash val="solid"/>
-                      <a:round/>
-                      <a:headEnd type="none" w="med" len="med"/>
-                      <a:tailEnd type="none" w="med" len="med"/>
-                    </a:lnL>
-                    <a:lnR w="6350" cap="flat" cmpd="sng" algn="ctr">
-                      <a:solidFill>
-                        <a:srgbClr val="CBD5E1"/>
-                      </a:solidFill>
-                      <a:prstDash val="solid"/>
-                      <a:round/>
-                      <a:headEnd type="none" w="med" len="med"/>
-                      <a:tailEnd type="none" w="med" len="med"/>
-                    </a:lnR>
-                    <a:lnT w="6350" cap="flat" cmpd="sng" algn="ctr">
-                      <a:solidFill>
-                        <a:srgbClr val="CBD5E1"/>
-                      </a:solidFill>
-                      <a:prstDash val="solid"/>
-                      <a:round/>
-                      <a:headEnd type="none" w="med" len="med"/>
-                      <a:tailEnd type="none" w="med" len="med"/>
-                    </a:lnT>
-                    <a:lnB w="6350" cap="flat" cmpd="sng" algn="ctr">
-                      <a:solidFill>
-                        <a:srgbClr val="CBD5E1"/>
-                      </a:solidFill>
-                      <a:prstDash val="solid"/>
-                      <a:round/>
-                      <a:headEnd type="none" w="med" len="med"/>
-                      <a:tailEnd type="none" w="med" len="med"/>
-                    </a:lnB>
-                    <a:solidFill>
-                      <a:srgbClr val="FFFFFF"/>
-                    </a:solidFill>
-                  </a:tcPr>
-                </a:tc>
-                <a:tc>
-                  <a:txBody>
-                    <a:bodyPr/>
-                    <a:lstStyle/>
-                    <a:p>
-                      <a:pPr algn="ctr" indent="0" marL="0">
-                        <a:buNone/>
-                      </a:pPr>
-                      <a:r>
-                        <a:rPr lang="en-US" sz="900" dirty="0">
-                          <a:solidFill>
-                            <a:srgbClr val="334155"/>
-                          </a:solidFill>
-                          <a:latin typeface="Arial" pitchFamily="34" charset="0"/>
-                          <a:ea typeface="Arial" pitchFamily="34" charset="-122"/>
-                          <a:cs typeface="Arial" pitchFamily="34" charset="-120"/>
-                        </a:rPr>
-                        <a:t>2件</a:t>
-                      </a:r>
-                      <a:endParaRPr lang="en-US" sz="900" dirty="0">
-                        <a:latin typeface="Arial" charset="0"/>
-                        <a:ea typeface="Arial" charset="0"/>
-                        <a:cs typeface="Arial" charset="0"/>
-                      </a:endParaRPr>
-                    </a:p>
-                  </a:txBody>
-                  <a:tcPr marL="91440" marR="91440" marT="45720" marB="45720">
-                    <a:lnL w="6350" cap="flat" cmpd="sng" algn="ctr">
-                      <a:solidFill>
-                        <a:srgbClr val="CBD5E1"/>
-                      </a:solidFill>
-                      <a:prstDash val="solid"/>
-                      <a:round/>
-                      <a:headEnd type="none" w="med" len="med"/>
-                      <a:tailEnd type="none" w="med" len="med"/>
-                    </a:lnL>
-                    <a:lnR w="6350" cap="flat" cmpd="sng" algn="ctr">
-                      <a:solidFill>
-                        <a:srgbClr val="CBD5E1"/>
-                      </a:solidFill>
-                      <a:prstDash val="solid"/>
-                      <a:round/>
-                      <a:headEnd type="none" w="med" len="med"/>
-                      <a:tailEnd type="none" w="med" len="med"/>
-                    </a:lnR>
-                    <a:lnT w="6350" cap="flat" cmpd="sng" algn="ctr">
-                      <a:solidFill>
-                        <a:srgbClr val="CBD5E1"/>
-                      </a:solidFill>
-                      <a:prstDash val="solid"/>
-                      <a:round/>
-                      <a:headEnd type="none" w="med" len="med"/>
-                      <a:tailEnd type="none" w="med" len="med"/>
-                    </a:lnT>
-                    <a:lnB w="6350" cap="flat" cmpd="sng" algn="ctr">
-                      <a:solidFill>
-                        <a:srgbClr val="CBD5E1"/>
-                      </a:solidFill>
-                      <a:prstDash val="solid"/>
-                      <a:round/>
-                      <a:headEnd type="none" w="med" len="med"/>
-                      <a:tailEnd type="none" w="med" len="med"/>
-                    </a:lnB>
-                    <a:solidFill>
-                      <a:srgbClr val="FFFFFF"/>
-                    </a:solidFill>
-                  </a:tcPr>
-                </a:tc>
-              </a:tr>
-              <a:tr h="320040">
-                <a:tc>
-                  <a:txBody>
-                    <a:bodyPr/>
-                    <a:lstStyle/>
-                    <a:p>
-                      <a:pPr algn="ctr" indent="0" marL="0">
-                        <a:buNone/>
-                      </a:pPr>
-                      <a:r>
-                        <a:rPr lang="en-US" sz="1200" b="1" dirty="0">
-                          <a:solidFill>
-                            <a:srgbClr val="94A3B8"/>
-                          </a:solidFill>
-                          <a:latin typeface="Arial" pitchFamily="34" charset="0"/>
-                          <a:ea typeface="Arial" pitchFamily="34" charset="-122"/>
-                          <a:cs typeface="Arial" pitchFamily="34" charset="-120"/>
-                        </a:rPr>
-                        <a:t>C</a:t>
-                      </a:r>
-                      <a:endParaRPr lang="en-US" sz="1200" dirty="0">
-                        <a:latin typeface="Arial" charset="0"/>
-                        <a:ea typeface="Arial" charset="0"/>
-                        <a:cs typeface="Arial" charset="0"/>
-                      </a:endParaRPr>
-                    </a:p>
-                  </a:txBody>
-                  <a:tcPr marL="91440" marR="91440" marT="45720" marB="45720">
-                    <a:lnL w="6350" cap="flat" cmpd="sng" algn="ctr">
-                      <a:solidFill>
-                        <a:srgbClr val="CBD5E1"/>
-                      </a:solidFill>
-                      <a:prstDash val="solid"/>
-                      <a:round/>
-                      <a:headEnd type="none" w="med" len="med"/>
-                      <a:tailEnd type="none" w="med" len="med"/>
-                    </a:lnL>
-                    <a:lnR w="6350" cap="flat" cmpd="sng" algn="ctr">
-                      <a:solidFill>
-                        <a:srgbClr val="CBD5E1"/>
-                      </a:solidFill>
-                      <a:prstDash val="solid"/>
-                      <a:round/>
-                      <a:headEnd type="none" w="med" len="med"/>
-                      <a:tailEnd type="none" w="med" len="med"/>
-                    </a:lnR>
-                    <a:lnT w="6350" cap="flat" cmpd="sng" algn="ctr">
-                      <a:solidFill>
-                        <a:srgbClr val="CBD5E1"/>
-                      </a:solidFill>
-                      <a:prstDash val="solid"/>
-                      <a:round/>
-                      <a:headEnd type="none" w="med" len="med"/>
-                      <a:tailEnd type="none" w="med" len="med"/>
-                    </a:lnT>
-                    <a:lnB w="6350" cap="flat" cmpd="sng" algn="ctr">
-                      <a:solidFill>
-                        <a:srgbClr val="CBD5E1"/>
-                      </a:solidFill>
-                      <a:prstDash val="solid"/>
-                      <a:round/>
-                      <a:headEnd type="none" w="med" len="med"/>
-                      <a:tailEnd type="none" w="med" len="med"/>
-                    </a:lnB>
-                    <a:solidFill>
-                      <a:srgbClr val="E8EFF8"/>
-                    </a:solidFill>
-                  </a:tcPr>
-                </a:tc>
-                <a:tc>
-                  <a:txBody>
-                    <a:bodyPr/>
-                    <a:lstStyle/>
-                    <a:p>
-                      <a:pPr indent="0" marL="0">
-                        <a:buNone/>
-                      </a:pPr>
-                      <a:r>
-                        <a:rPr lang="en-US" sz="900" b="1" dirty="0">
-                          <a:solidFill>
-                            <a:srgbClr val="334155"/>
-                          </a:solidFill>
-                          <a:latin typeface="Arial" pitchFamily="34" charset="0"/>
-                          <a:ea typeface="Arial" pitchFamily="34" charset="-122"/>
-                          <a:cs typeface="Arial" pitchFamily="34" charset="-120"/>
-                        </a:rPr>
-                        <a:t>窓・採光</a:t>
-                      </a:r>
-                      <a:endParaRPr lang="en-US" sz="900" dirty="0">
-                        <a:latin typeface="Arial" charset="0"/>
-                        <a:ea typeface="Arial" charset="0"/>
-                        <a:cs typeface="Arial" charset="0"/>
-                      </a:endParaRPr>
-                    </a:p>
-                  </a:txBody>
-                  <a:tcPr marL="91440" marR="91440" marT="45720" marB="45720">
-                    <a:lnL w="6350" cap="flat" cmpd="sng" algn="ctr">
-                      <a:solidFill>
-                        <a:srgbClr val="CBD5E1"/>
-                      </a:solidFill>
-                      <a:prstDash val="solid"/>
-                      <a:round/>
-                      <a:headEnd type="none" w="med" len="med"/>
-                      <a:tailEnd type="none" w="med" len="med"/>
-                    </a:lnL>
-                    <a:lnR w="6350" cap="flat" cmpd="sng" algn="ctr">
-                      <a:solidFill>
-                        <a:srgbClr val="CBD5E1"/>
-                      </a:solidFill>
-                      <a:prstDash val="solid"/>
-                      <a:round/>
-                      <a:headEnd type="none" w="med" len="med"/>
-                      <a:tailEnd type="none" w="med" len="med"/>
-                    </a:lnR>
-                    <a:lnT w="6350" cap="flat" cmpd="sng" algn="ctr">
-                      <a:solidFill>
-                        <a:srgbClr val="CBD5E1"/>
-                      </a:solidFill>
-                      <a:prstDash val="solid"/>
-                      <a:round/>
-                      <a:headEnd type="none" w="med" len="med"/>
-                      <a:tailEnd type="none" w="med" len="med"/>
-                    </a:lnT>
-                    <a:lnB w="6350" cap="flat" cmpd="sng" algn="ctr">
-                      <a:solidFill>
-                        <a:srgbClr val="CBD5E1"/>
-                      </a:solidFill>
-                      <a:prstDash val="solid"/>
-                      <a:round/>
-                      <a:headEnd type="none" w="med" len="med"/>
-                      <a:tailEnd type="none" w="med" len="med"/>
-                    </a:lnB>
-                    <a:solidFill>
-                      <a:srgbClr val="E8EFF8"/>
-                    </a:solidFill>
-                  </a:tcPr>
-                </a:tc>
-                <a:tc>
-                  <a:txBody>
-                    <a:bodyPr/>
-                    <a:lstStyle/>
-                    <a:p>
-                      <a:pPr indent="0" marL="0">
-                        <a:buNone/>
-                      </a:pPr>
-                      <a:r>
-                        <a:rPr lang="en-US" sz="900" dirty="0">
-                          <a:solidFill>
-                            <a:srgbClr val="64748B"/>
-                          </a:solidFill>
-                          <a:latin typeface="Arial" pitchFamily="34" charset="0"/>
-                          <a:ea typeface="Arial" pitchFamily="34" charset="-122"/>
-                          <a:cs typeface="Arial" pitchFamily="34" charset="-120"/>
-                        </a:rPr>
-                        <a:t>スタッフの皆さんが、明るく、丁寧にもてなしてくださり、朝食も素晴らしく、安心して滞在できました</a:t>
-                      </a:r>
-                      <a:endParaRPr lang="en-US" sz="900" dirty="0">
-                        <a:latin typeface="Arial" charset="0"/>
-                        <a:ea typeface="Arial" charset="0"/>
-                        <a:cs typeface="Arial" charset="0"/>
-                      </a:endParaRPr>
-                    </a:p>
-                  </a:txBody>
-                  <a:tcPr marL="91440" marR="91440" marT="45720" marB="45720">
-                    <a:lnL w="6350" cap="flat" cmpd="sng" algn="ctr">
-                      <a:solidFill>
-                        <a:srgbClr val="CBD5E1"/>
-                      </a:solidFill>
-                      <a:prstDash val="solid"/>
-                      <a:round/>
-                      <a:headEnd type="none" w="med" len="med"/>
-                      <a:tailEnd type="none" w="med" len="med"/>
-                    </a:lnL>
-                    <a:lnR w="6350" cap="flat" cmpd="sng" algn="ctr">
-                      <a:solidFill>
-                        <a:srgbClr val="CBD5E1"/>
-                      </a:solidFill>
-                      <a:prstDash val="solid"/>
-                      <a:round/>
-                      <a:headEnd type="none" w="med" len="med"/>
-                      <a:tailEnd type="none" w="med" len="med"/>
-                    </a:lnR>
-                    <a:lnT w="6350" cap="flat" cmpd="sng" algn="ctr">
-                      <a:solidFill>
-                        <a:srgbClr val="CBD5E1"/>
-                      </a:solidFill>
-                      <a:prstDash val="solid"/>
-                      <a:round/>
-                      <a:headEnd type="none" w="med" len="med"/>
-                      <a:tailEnd type="none" w="med" len="med"/>
-                    </a:lnT>
-                    <a:lnB w="6350" cap="flat" cmpd="sng" algn="ctr">
-                      <a:solidFill>
-                        <a:srgbClr val="CBD5E1"/>
-                      </a:solidFill>
-                      <a:prstDash val="solid"/>
-                      <a:round/>
-                      <a:headEnd type="none" w="med" len="med"/>
-                      <a:tailEnd type="none" w="med" len="med"/>
-                    </a:lnB>
-                    <a:solidFill>
-                      <a:srgbClr val="E8EFF8"/>
-                    </a:solidFill>
-                  </a:tcPr>
-                </a:tc>
-                <a:tc>
-                  <a:txBody>
-                    <a:bodyPr/>
-                    <a:lstStyle/>
-                    <a:p>
-                      <a:pPr algn="ctr" indent="0" marL="0">
-                        <a:buNone/>
-                      </a:pPr>
-                      <a:r>
-                        <a:rPr lang="en-US" sz="900" dirty="0">
-                          <a:solidFill>
-                            <a:srgbClr val="334155"/>
-                          </a:solidFill>
-                          <a:latin typeface="Arial" pitchFamily="34" charset="0"/>
-                          <a:ea typeface="Arial" pitchFamily="34" charset="-122"/>
-                          <a:cs typeface="Arial" pitchFamily="34" charset="-120"/>
-                        </a:rPr>
-                        <a:t>2件</a:t>
+                        <a:t>1件</a:t>
                       </a:r>
                       <a:endParaRPr lang="en-US" sz="900" dirty="0">
                         <a:latin typeface="Arial" charset="0"/>
@@ -15468,7 +14903,7 @@
                 <a:ea typeface="Arial" pitchFamily="34" charset="-122"/>
                 <a:cs typeface="Arial" pitchFamily="34" charset="-120"/>
               </a:rPr>
-              <a:t>客室の消臭対策の強化</a:t>
+              <a:t>清掃品質の向上</a:t>
             </a:r>
             <a:endParaRPr lang="en-US" sz="1200" dirty="0"/>
           </a:p>
@@ -15483,177 +14918,6 @@
         <p:spPr>
           <a:xfrm>
             <a:off x="594360" y="1600200"/>
-            <a:ext cx="3657600" cy="1188720"/>
-          </a:xfrm>
-          <a:prstGeom prst="rect">
-            <a:avLst/>
-          </a:prstGeom>
-          <a:noFill/>
-          <a:ln/>
-        </p:spPr>
-        <p:txBody>
-          <a:bodyPr wrap="square" lIns="0" tIns="0" rIns="0" bIns="0" rtlCol="0" anchor="ctr"/>
-          <a:lstStyle/>
-          <a:p>
-            <a:pPr marL="342900" indent="-342900">
-              <a:spcAft>
-                <a:spcPts val="300"/>
-              </a:spcAft>
-              <a:buSzPct val="100000"/>
-              <a:buChar char="•"/>
-            </a:pPr>
-            <a:r>
-              <a:rPr lang="en-US" sz="900" dirty="0">
-                <a:solidFill>
-                  <a:srgbClr val="334155"/>
-                </a:solidFill>
-                <a:latin typeface="Arial" pitchFamily="34" charset="0"/>
-                <a:ea typeface="Arial" pitchFamily="34" charset="-122"/>
-                <a:cs typeface="Arial" pitchFamily="34" charset="-120"/>
-              </a:rPr>
-              <a:t>チェックアウト後の換気・消臭スプレー処理の徹底</a:t>
-            </a:r>
-            <a:endParaRPr lang="en-US" sz="900" dirty="0"/>
-          </a:p>
-          <a:p>
-            <a:pPr marL="342900" indent="-342900">
-              <a:spcAft>
-                <a:spcPts val="300"/>
-              </a:spcAft>
-              <a:buSzPct val="100000"/>
-              <a:buChar char="•"/>
-            </a:pPr>
-            <a:r>
-              <a:rPr lang="en-US" sz="900" dirty="0">
-                <a:solidFill>
-                  <a:srgbClr val="334155"/>
-                </a:solidFill>
-                <a:latin typeface="Arial" pitchFamily="34" charset="0"/>
-                <a:ea typeface="Arial" pitchFamily="34" charset="-122"/>
-                <a:cs typeface="Arial" pitchFamily="34" charset="-120"/>
-              </a:rPr>
-              <a:t>定期的な脱臭剤の設置と交換フローの確立</a:t>
-            </a:r>
-            <a:endParaRPr lang="en-US" sz="900" dirty="0"/>
-          </a:p>
-          <a:p>
-            <a:pPr marL="342900" indent="-342900">
-              <a:spcAft>
-                <a:spcPts val="300"/>
-              </a:spcAft>
-              <a:buSzPct val="100000"/>
-              <a:buChar char="•"/>
-            </a:pPr>
-            <a:r>
-              <a:rPr lang="en-US" sz="900" dirty="0">
-                <a:solidFill>
-                  <a:srgbClr val="334155"/>
-                </a:solidFill>
-                <a:latin typeface="Arial" pitchFamily="34" charset="0"/>
-                <a:ea typeface="Arial" pitchFamily="34" charset="-122"/>
-                <a:cs typeface="Arial" pitchFamily="34" charset="-120"/>
-              </a:rPr>
-              <a:t>喫煙・臭いに関するクレーム発生時の即座対応マニュアル作成</a:t>
-            </a:r>
-            <a:endParaRPr lang="en-US" sz="900" dirty="0"/>
-          </a:p>
-        </p:txBody>
-      </p:sp>
-      <p:sp>
-        <p:nvSpPr>
-          <p:cNvPr id="10" name="Shape 8"/>
-          <p:cNvSpPr/>
-          <p:nvPr/>
-        </p:nvSpPr>
-        <p:spPr>
-          <a:xfrm>
-            <a:off x="4663440" y="1234440"/>
-            <a:ext cx="3977640" cy="1600200"/>
-          </a:xfrm>
-          <a:prstGeom prst="rect">
-            <a:avLst/>
-          </a:prstGeom>
-          <a:solidFill>
-            <a:srgbClr val="FFFFFF"/>
-          </a:solidFill>
-          <a:ln/>
-          <a:effectLst>
-            <a:outerShdw sx="100000" sy="100000" kx="0" ky="0" algn="bl" rotWithShape="0" blurRad="50800" dist="25400" dir="8100000">
-              <a:srgbClr val="000000">
-                <a:alpha val="10000"/>
-              </a:srgbClr>
-            </a:outerShdw>
-          </a:effectLst>
-        </p:spPr>
-      </p:sp>
-      <p:sp>
-        <p:nvSpPr>
-          <p:cNvPr id="11" name="Shape 9"/>
-          <p:cNvSpPr/>
-          <p:nvPr/>
-        </p:nvSpPr>
-        <p:spPr>
-          <a:xfrm>
-            <a:off x="4663440" y="1234440"/>
-            <a:ext cx="54864" cy="1600200"/>
-          </a:xfrm>
-          <a:prstGeom prst="rect">
-            <a:avLst/>
-          </a:prstGeom>
-          <a:solidFill>
-            <a:srgbClr val="3B7DD8"/>
-          </a:solidFill>
-          <a:ln/>
-        </p:spPr>
-      </p:sp>
-      <p:sp>
-        <p:nvSpPr>
-          <p:cNvPr id="12" name="Text 10"/>
-          <p:cNvSpPr/>
-          <p:nvPr/>
-        </p:nvSpPr>
-        <p:spPr>
-          <a:xfrm>
-            <a:off x="4800600" y="1280160"/>
-            <a:ext cx="3657600" cy="320040"/>
-          </a:xfrm>
-          <a:prstGeom prst="rect">
-            <a:avLst/>
-          </a:prstGeom>
-          <a:noFill/>
-          <a:ln/>
-        </p:spPr>
-        <p:txBody>
-          <a:bodyPr wrap="square" lIns="0" tIns="0" rIns="0" bIns="0" rtlCol="0" anchor="ctr"/>
-          <a:lstStyle/>
-          <a:p>
-            <a:pPr indent="0" marL="0">
-              <a:buNone/>
-            </a:pPr>
-            <a:r>
-              <a:rPr lang="en-US" sz="1200" b="1" dirty="0">
-                <a:solidFill>
-                  <a:srgbClr val="1A2744"/>
-                </a:solidFill>
-                <a:latin typeface="Arial" pitchFamily="34" charset="0"/>
-                <a:ea typeface="Arial" pitchFamily="34" charset="-122"/>
-                <a:cs typeface="Arial" pitchFamily="34" charset="-120"/>
-              </a:rPr>
-              <a:t>清掃品質の向上</a:t>
-            </a:r>
-            <a:endParaRPr lang="en-US" sz="1200" dirty="0"/>
-          </a:p>
-        </p:txBody>
-      </p:sp>
-      <p:sp>
-        <p:nvSpPr>
-          <p:cNvPr id="13" name="Text 11"/>
-          <p:cNvSpPr/>
-          <p:nvPr/>
-        </p:nvSpPr>
-        <p:spPr>
-          <a:xfrm>
-            <a:off x="4800600" y="1600200"/>
             <a:ext cx="3657600" cy="1188720"/>
           </a:xfrm>
           <a:prstGeom prst="rect">
@@ -15732,13 +14996,13 @@
       </p:sp>
       <p:sp>
         <p:nvSpPr>
-          <p:cNvPr id="14" name="Shape 12"/>
-          <p:cNvSpPr/>
-          <p:nvPr/>
-        </p:nvSpPr>
-        <p:spPr>
-          <a:xfrm>
-            <a:off x="457200" y="3017520"/>
+          <p:cNvPr id="10" name="Shape 8"/>
+          <p:cNvSpPr/>
+          <p:nvPr/>
+        </p:nvSpPr>
+        <p:spPr>
+          <a:xfrm>
+            <a:off x="4663440" y="1234440"/>
             <a:ext cx="3977640" cy="1600200"/>
           </a:xfrm>
           <a:prstGeom prst="rect">
@@ -15759,13 +15023,13 @@
       </p:sp>
       <p:sp>
         <p:nvSpPr>
-          <p:cNvPr id="15" name="Shape 13"/>
-          <p:cNvSpPr/>
-          <p:nvPr/>
-        </p:nvSpPr>
-        <p:spPr>
-          <a:xfrm>
-            <a:off x="457200" y="3017520"/>
+          <p:cNvPr id="11" name="Shape 9"/>
+          <p:cNvSpPr/>
+          <p:nvPr/>
+        </p:nvSpPr>
+        <p:spPr>
+          <a:xfrm>
+            <a:off x="4663440" y="1234440"/>
             <a:ext cx="54864" cy="1600200"/>
           </a:xfrm>
           <a:prstGeom prst="rect">
@@ -15779,184 +15043,13 @@
       </p:sp>
       <p:sp>
         <p:nvSpPr>
-          <p:cNvPr id="16" name="Text 14"/>
-          <p:cNvSpPr/>
-          <p:nvPr/>
-        </p:nvSpPr>
-        <p:spPr>
-          <a:xfrm>
-            <a:off x="594360" y="3063240"/>
-            <a:ext cx="3657600" cy="320040"/>
-          </a:xfrm>
-          <a:prstGeom prst="rect">
-            <a:avLst/>
-          </a:prstGeom>
-          <a:noFill/>
-          <a:ln/>
-        </p:spPr>
-        <p:txBody>
-          <a:bodyPr wrap="square" lIns="0" tIns="0" rIns="0" bIns="0" rtlCol="0" anchor="ctr"/>
-          <a:lstStyle/>
-          <a:p>
-            <a:pPr indent="0" marL="0">
-              <a:buNone/>
-            </a:pPr>
-            <a:r>
-              <a:rPr lang="en-US" sz="1200" b="1" dirty="0">
-                <a:solidFill>
-                  <a:srgbClr val="1A2744"/>
-                </a:solidFill>
-                <a:latin typeface="Arial" pitchFamily="34" charset="0"/>
-                <a:ea typeface="Arial" pitchFamily="34" charset="-122"/>
-                <a:cs typeface="Arial" pitchFamily="34" charset="-120"/>
-              </a:rPr>
-              <a:t>朝食サービスの改善</a:t>
-            </a:r>
-            <a:endParaRPr lang="en-US" sz="1200" dirty="0"/>
-          </a:p>
-        </p:txBody>
-      </p:sp>
-      <p:sp>
-        <p:nvSpPr>
-          <p:cNvPr id="17" name="Text 15"/>
-          <p:cNvSpPr/>
-          <p:nvPr/>
-        </p:nvSpPr>
-        <p:spPr>
-          <a:xfrm>
-            <a:off x="594360" y="3383280"/>
-            <a:ext cx="3657600" cy="1188720"/>
-          </a:xfrm>
-          <a:prstGeom prst="rect">
-            <a:avLst/>
-          </a:prstGeom>
-          <a:noFill/>
-          <a:ln/>
-        </p:spPr>
-        <p:txBody>
-          <a:bodyPr wrap="square" lIns="0" tIns="0" rIns="0" bIns="0" rtlCol="0" anchor="ctr"/>
-          <a:lstStyle/>
-          <a:p>
-            <a:pPr marL="342900" indent="-342900">
-              <a:spcAft>
-                <a:spcPts val="300"/>
-              </a:spcAft>
-              <a:buSzPct val="100000"/>
-              <a:buChar char="•"/>
-            </a:pPr>
-            <a:r>
-              <a:rPr lang="en-US" sz="900" dirty="0">
-                <a:solidFill>
-                  <a:srgbClr val="334155"/>
-                </a:solidFill>
-                <a:latin typeface="Arial" pitchFamily="34" charset="0"/>
-                <a:ea typeface="Arial" pitchFamily="34" charset="-122"/>
-                <a:cs typeface="Arial" pitchFamily="34" charset="-120"/>
-              </a:rPr>
-              <a:t>メニューの定期的な見直しとバリエーション追加</a:t>
-            </a:r>
-            <a:endParaRPr lang="en-US" sz="900" dirty="0"/>
-          </a:p>
-          <a:p>
-            <a:pPr marL="342900" indent="-342900">
-              <a:spcAft>
-                <a:spcPts val="300"/>
-              </a:spcAft>
-              <a:buSzPct val="100000"/>
-              <a:buChar char="•"/>
-            </a:pPr>
-            <a:r>
-              <a:rPr lang="en-US" sz="900" dirty="0">
-                <a:solidFill>
-                  <a:srgbClr val="334155"/>
-                </a:solidFill>
-                <a:latin typeface="Arial" pitchFamily="34" charset="0"/>
-                <a:ea typeface="Arial" pitchFamily="34" charset="-122"/>
-                <a:cs typeface="Arial" pitchFamily="34" charset="-120"/>
-              </a:rPr>
-              <a:t>補充頻度の向上と品切れ防止</a:t>
-            </a:r>
-            <a:endParaRPr lang="en-US" sz="900" dirty="0"/>
-          </a:p>
-          <a:p>
-            <a:pPr marL="342900" indent="-342900">
-              <a:spcAft>
-                <a:spcPts val="300"/>
-              </a:spcAft>
-              <a:buSzPct val="100000"/>
-              <a:buChar char="•"/>
-            </a:pPr>
-            <a:r>
-              <a:rPr lang="en-US" sz="900" dirty="0">
-                <a:solidFill>
-                  <a:srgbClr val="334155"/>
-                </a:solidFill>
-                <a:latin typeface="Arial" pitchFamily="34" charset="0"/>
-                <a:ea typeface="Arial" pitchFamily="34" charset="-122"/>
-                <a:cs typeface="Arial" pitchFamily="34" charset="-120"/>
-              </a:rPr>
-              <a:t>宿泊客数に応じた朝食準備量の最適化</a:t>
-            </a:r>
-            <a:endParaRPr lang="en-US" sz="900" dirty="0"/>
-          </a:p>
-        </p:txBody>
-      </p:sp>
-      <p:sp>
-        <p:nvSpPr>
-          <p:cNvPr id="18" name="Shape 16"/>
-          <p:cNvSpPr/>
-          <p:nvPr/>
-        </p:nvSpPr>
-        <p:spPr>
-          <a:xfrm>
-            <a:off x="4663440" y="3017520"/>
-            <a:ext cx="3977640" cy="1600200"/>
-          </a:xfrm>
-          <a:prstGeom prst="rect">
-            <a:avLst/>
-          </a:prstGeom>
-          <a:solidFill>
-            <a:srgbClr val="FFFFFF"/>
-          </a:solidFill>
-          <a:ln/>
-          <a:effectLst>
-            <a:outerShdw sx="100000" sy="100000" kx="0" ky="0" algn="bl" rotWithShape="0" blurRad="50800" dist="25400" dir="8100000">
-              <a:srgbClr val="000000">
-                <a:alpha val="10000"/>
-              </a:srgbClr>
-            </a:outerShdw>
-          </a:effectLst>
-        </p:spPr>
-      </p:sp>
-      <p:sp>
-        <p:nvSpPr>
-          <p:cNvPr id="19" name="Shape 17"/>
-          <p:cNvSpPr/>
-          <p:nvPr/>
-        </p:nvSpPr>
-        <p:spPr>
-          <a:xfrm>
-            <a:off x="4663440" y="3017520"/>
-            <a:ext cx="54864" cy="1600200"/>
-          </a:xfrm>
-          <a:prstGeom prst="rect">
-            <a:avLst/>
-          </a:prstGeom>
-          <a:solidFill>
-            <a:srgbClr val="3B7DD8"/>
-          </a:solidFill>
-          <a:ln/>
-        </p:spPr>
-      </p:sp>
-      <p:sp>
-        <p:nvSpPr>
-          <p:cNvPr id="20" name="Text 18"/>
-          <p:cNvSpPr/>
-          <p:nvPr/>
-        </p:nvSpPr>
-        <p:spPr>
-          <a:xfrm>
-            <a:off x="4800600" y="3063240"/>
+          <p:cNvPr id="12" name="Text 10"/>
+          <p:cNvSpPr/>
+          <p:nvPr/>
+        </p:nvSpPr>
+        <p:spPr>
+          <a:xfrm>
+            <a:off x="4800600" y="1280160"/>
             <a:ext cx="3657600" cy="320040"/>
           </a:xfrm>
           <a:prstGeom prst="rect">
@@ -15989,13 +15082,13 @@
       </p:sp>
       <p:sp>
         <p:nvSpPr>
-          <p:cNvPr id="21" name="Text 19"/>
-          <p:cNvSpPr/>
-          <p:nvPr/>
-        </p:nvSpPr>
-        <p:spPr>
-          <a:xfrm>
-            <a:off x="4800600" y="3383280"/>
+          <p:cNvPr id="13" name="Text 11"/>
+          <p:cNvSpPr/>
+          <p:nvPr/>
+        </p:nvSpPr>
+        <p:spPr>
+          <a:xfrm>
+            <a:off x="4800600" y="1600200"/>
             <a:ext cx="3657600" cy="1188720"/>
           </a:xfrm>
           <a:prstGeom prst="rect">
@@ -16074,7 +15167,178 @@
       </p:sp>
       <p:sp>
         <p:nvSpPr>
-          <p:cNvPr id="22" name="Shape 20"/>
+          <p:cNvPr id="14" name="Shape 12"/>
+          <p:cNvSpPr/>
+          <p:nvPr/>
+        </p:nvSpPr>
+        <p:spPr>
+          <a:xfrm>
+            <a:off x="457200" y="3017520"/>
+            <a:ext cx="3977640" cy="1600200"/>
+          </a:xfrm>
+          <a:prstGeom prst="rect">
+            <a:avLst/>
+          </a:prstGeom>
+          <a:solidFill>
+            <a:srgbClr val="FFFFFF"/>
+          </a:solidFill>
+          <a:ln/>
+          <a:effectLst>
+            <a:outerShdw sx="100000" sy="100000" kx="0" ky="0" algn="bl" rotWithShape="0" blurRad="50800" dist="25400" dir="8100000">
+              <a:srgbClr val="000000">
+                <a:alpha val="10000"/>
+              </a:srgbClr>
+            </a:outerShdw>
+          </a:effectLst>
+        </p:spPr>
+      </p:sp>
+      <p:sp>
+        <p:nvSpPr>
+          <p:cNvPr id="15" name="Shape 13"/>
+          <p:cNvSpPr/>
+          <p:nvPr/>
+        </p:nvSpPr>
+        <p:spPr>
+          <a:xfrm>
+            <a:off x="457200" y="3017520"/>
+            <a:ext cx="54864" cy="1600200"/>
+          </a:xfrm>
+          <a:prstGeom prst="rect">
+            <a:avLst/>
+          </a:prstGeom>
+          <a:solidFill>
+            <a:srgbClr val="3B7DD8"/>
+          </a:solidFill>
+          <a:ln/>
+        </p:spPr>
+      </p:sp>
+      <p:sp>
+        <p:nvSpPr>
+          <p:cNvPr id="16" name="Text 14"/>
+          <p:cNvSpPr/>
+          <p:nvPr/>
+        </p:nvSpPr>
+        <p:spPr>
+          <a:xfrm>
+            <a:off x="594360" y="3063240"/>
+            <a:ext cx="3657600" cy="320040"/>
+          </a:xfrm>
+          <a:prstGeom prst="rect">
+            <a:avLst/>
+          </a:prstGeom>
+          <a:noFill/>
+          <a:ln/>
+        </p:spPr>
+        <p:txBody>
+          <a:bodyPr wrap="square" lIns="0" tIns="0" rIns="0" bIns="0" rtlCol="0" anchor="ctr"/>
+          <a:lstStyle/>
+          <a:p>
+            <a:pPr indent="0" marL="0">
+              <a:buNone/>
+            </a:pPr>
+            <a:r>
+              <a:rPr lang="en-US" sz="1200" b="1" dirty="0">
+                <a:solidFill>
+                  <a:srgbClr val="1A2744"/>
+                </a:solidFill>
+                <a:latin typeface="Arial" pitchFamily="34" charset="0"/>
+                <a:ea typeface="Arial" pitchFamily="34" charset="-122"/>
+                <a:cs typeface="Arial" pitchFamily="34" charset="-120"/>
+              </a:rPr>
+              <a:t>ゲストコミュニケーションの強化</a:t>
+            </a:r>
+            <a:endParaRPr lang="en-US" sz="1200" dirty="0"/>
+          </a:p>
+        </p:txBody>
+      </p:sp>
+      <p:sp>
+        <p:nvSpPr>
+          <p:cNvPr id="17" name="Text 15"/>
+          <p:cNvSpPr/>
+          <p:nvPr/>
+        </p:nvSpPr>
+        <p:spPr>
+          <a:xfrm>
+            <a:off x="594360" y="3383280"/>
+            <a:ext cx="3657600" cy="1188720"/>
+          </a:xfrm>
+          <a:prstGeom prst="rect">
+            <a:avLst/>
+          </a:prstGeom>
+          <a:noFill/>
+          <a:ln/>
+        </p:spPr>
+        <p:txBody>
+          <a:bodyPr wrap="square" lIns="0" tIns="0" rIns="0" bIns="0" rtlCol="0" anchor="ctr"/>
+          <a:lstStyle/>
+          <a:p>
+            <a:pPr marL="342900" indent="-342900">
+              <a:spcAft>
+                <a:spcPts val="300"/>
+              </a:spcAft>
+              <a:buSzPct val="100000"/>
+              <a:buChar char="•"/>
+            </a:pPr>
+            <a:r>
+              <a:rPr lang="en-US" sz="900" dirty="0">
+                <a:solidFill>
+                  <a:srgbClr val="334155"/>
+                </a:solidFill>
+                <a:latin typeface="Arial" pitchFamily="34" charset="0"/>
+                <a:ea typeface="Arial" pitchFamily="34" charset="-122"/>
+                <a:cs typeface="Arial" pitchFamily="34" charset="-120"/>
+              </a:rPr>
+              <a:t>チェックイン時の挨拶・案内の標準化</a:t>
+            </a:r>
+            <a:endParaRPr lang="en-US" sz="900" dirty="0"/>
+          </a:p>
+          <a:p>
+            <a:pPr marL="342900" indent="-342900">
+              <a:spcAft>
+                <a:spcPts val="300"/>
+              </a:spcAft>
+              <a:buSzPct val="100000"/>
+              <a:buChar char="•"/>
+            </a:pPr>
+            <a:r>
+              <a:rPr lang="en-US" sz="900" dirty="0">
+                <a:solidFill>
+                  <a:srgbClr val="334155"/>
+                </a:solidFill>
+                <a:latin typeface="Arial" pitchFamily="34" charset="0"/>
+                <a:ea typeface="Arial" pitchFamily="34" charset="-122"/>
+                <a:cs typeface="Arial" pitchFamily="34" charset="-120"/>
+              </a:rPr>
+              <a:t>チェックアウト時の簡易アンケート実施</a:t>
+            </a:r>
+            <a:endParaRPr lang="en-US" sz="900" dirty="0"/>
+          </a:p>
+          <a:p>
+            <a:pPr marL="342900" indent="-342900">
+              <a:spcAft>
+                <a:spcPts val="300"/>
+              </a:spcAft>
+              <a:buSzPct val="100000"/>
+              <a:buChar char="•"/>
+            </a:pPr>
+            <a:r>
+              <a:rPr lang="en-US" sz="900" dirty="0">
+                <a:solidFill>
+                  <a:srgbClr val="334155"/>
+                </a:solidFill>
+                <a:latin typeface="Arial" pitchFamily="34" charset="0"/>
+                <a:ea typeface="Arial" pitchFamily="34" charset="-122"/>
+                <a:cs typeface="Arial" pitchFamily="34" charset="-120"/>
+              </a:rPr>
+              <a:t>リピーターへの感謝メッセージの導入</a:t>
+            </a:r>
+            <a:endParaRPr lang="en-US" sz="900" dirty="0"/>
+          </a:p>
+        </p:txBody>
+      </p:sp>
+      <p:sp>
+        <p:nvSpPr>
+          <p:cNvPr id="18" name="Shape 16"/>
           <p:cNvSpPr/>
           <p:nvPr/>
         </p:nvSpPr>
@@ -16094,7 +15358,7 @@
       </p:sp>
       <p:sp>
         <p:nvSpPr>
-          <p:cNvPr id="23" name="Text 21"/>
+          <p:cNvPr id="19" name="Text 17"/>
           <p:cNvSpPr/>
           <p:nvPr/>
         </p:nvSpPr>
@@ -16133,7 +15397,7 @@
       </p:sp>
       <p:sp>
         <p:nvSpPr>
-          <p:cNvPr id="24" name="Text 22"/>
+          <p:cNvPr id="20" name="Text 18"/>
           <p:cNvSpPr/>
           <p:nvPr/>
         </p:nvSpPr>

--- a/納品レポート/ホテル別レポート/comfort_narita_口コミ分析レポート.pptx
+++ b/納品レポート/ホテル別レポート/comfort_narita_口コミ分析レポート.pptx
@@ -2784,7 +2784,7 @@
                 <a:ea typeface="Arial" pitchFamily="34" charset="-122"/>
                 <a:cs typeface="Arial" pitchFamily="34" charset="-120"/>
               </a:rPr>
-              <a:t>作成日：2026年4月6日</a:t>
+              <a:t>作成日：2026年4月7日</a:t>
             </a:r>
             <a:endParaRPr lang="en-US" sz="1000" dirty="0"/>
           </a:p>

--- a/納品レポート/ホテル別レポート/comfort_narita_口コミ分析レポート.pptx
+++ b/納品レポート/ホテル別レポート/comfort_narita_口コミ分析レポート.pptx
@@ -183,16 +183,16 @@
                     <c:v>Trip.com</c:v>
                   </c:pt>
                   <c:pt idx="1">
+                    <c:v>Google</c:v>
+                  </c:pt>
+                  <c:pt idx="2">
                     <c:v>楽天トラベル</c:v>
                   </c:pt>
-                  <c:pt idx="2">
-                    <c:v>Google</c:v>
-                  </c:pt>
                   <c:pt idx="3">
-                    <c:v>じゃらん</c:v>
+                    <c:v>Booking.com</c:v>
                   </c:pt>
                   <c:pt idx="4">
-                    <c:v>Booking.com</c:v>
+                    <c:v>じゃらん</c:v>
                   </c:pt>
                   <c:pt idx="5">
                     <c:v>Agoda</c:v>
@@ -208,22 +208,22 @@
                 <c:formatCode>General</c:formatCode>
                 <c:ptCount val="6"/>
                 <c:pt idx="0">
-                  <c:v>9.5</c:v>
+                  <c:v>9.57</c:v>
                 </c:pt>
                 <c:pt idx="1">
-                  <c:v>8.77</c:v>
+                  <c:v>8.78</c:v>
                 </c:pt>
                 <c:pt idx="2">
-                  <c:v>8.75</c:v>
+                  <c:v>8.57</c:v>
                 </c:pt>
                 <c:pt idx="3">
-                  <c:v>8.5</c:v>
+                  <c:v>8.22</c:v>
                 </c:pt>
                 <c:pt idx="4">
-                  <c:v>8.43</c:v>
+                  <c:v>8.13</c:v>
                 </c:pt>
                 <c:pt idx="5">
-                  <c:v>7.4</c:v>
+                  <c:v>7.27</c:v>
                 </c:pt>
               </c:numCache>
             </c:numRef>
@@ -566,13 +566,13 @@
               <c:numCache>
                 <c:ptCount val="3"/>
                 <c:pt idx="0">
-                  <c:v>74</c:v>
+                  <c:v>114</c:v>
                 </c:pt>
                 <c:pt idx="1">
-                  <c:v>10</c:v>
+                  <c:v>22</c:v>
                 </c:pt>
                 <c:pt idx="2">
-                  <c:v>2</c:v>
+                  <c:v>5</c:v>
                 </c:pt>
               </c:numCache>
             </c:numRef>
@@ -741,7 +741,7 @@
             <c:bubble3D val="0"/>
             <c:spPr>
               <a:solidFill>
-                <a:srgbClr val="DC2626"/>
+                <a:srgbClr val="D4A843"/>
               </a:solidFill>
               <a:effectLst/>
             </c:spPr>
@@ -757,11 +757,22 @@
               <a:effectLst/>
             </c:spPr>
           </c:dPt>
+          <c:dPt>
+            <c:idx val="7"/>
+            <c:invertIfNegative val="0"/>
+            <c:bubble3D val="0"/>
+            <c:spPr>
+              <a:solidFill>
+                <a:srgbClr val="DC2626"/>
+              </a:solidFill>
+              <a:effectLst/>
+            </c:spPr>
+          </c:dPt>
           <c:cat>
             <c:multiLvlStrRef>
-              <c:f>Sheet1!$A$2:$A$8</c:f>
+              <c:f>Sheet1!$A$2:$A$9</c:f>
               <c:multiLvlStrCache>
-                <c:ptCount val="7"/>
+                <c:ptCount val="8"/>
                 <c:lvl>
                   <c:pt idx="0">
                     <c:v>10点</c:v>
@@ -779,9 +790,12 @@
                     <c:v>6点</c:v>
                   </c:pt>
                   <c:pt idx="5">
+                    <c:v>5点</c:v>
+                  </c:pt>
+                  <c:pt idx="6">
                     <c:v>4点</c:v>
                   </c:pt>
-                  <c:pt idx="6">
+                  <c:pt idx="7">
                     <c:v>3点</c:v>
                   </c:pt>
                 </c:lvl>
@@ -790,30 +804,33 @@
           </c:cat>
           <c:val>
             <c:numRef>
-              <c:f>Sheet1!$B$2:$B$8</c:f>
+              <c:f>Sheet1!$B$2:$B$9</c:f>
               <c:numCache>
                 <c:formatCode>General</c:formatCode>
-                <c:ptCount val="7"/>
+                <c:ptCount val="8"/>
                 <c:pt idx="0">
-                  <c:v>35</c:v>
+                  <c:v>53</c:v>
                 </c:pt>
                 <c:pt idx="1">
-                  <c:v>12</c:v>
+                  <c:v>17</c:v>
                 </c:pt>
                 <c:pt idx="2">
-                  <c:v>27</c:v>
+                  <c:v>44</c:v>
                 </c:pt>
                 <c:pt idx="3">
-                  <c:v>4</c:v>
+                  <c:v>9</c:v>
                 </c:pt>
                 <c:pt idx="4">
-                  <c:v>6</c:v>
+                  <c:v>12</c:v>
                 </c:pt>
                 <c:pt idx="5">
                   <c:v>1</c:v>
                 </c:pt>
                 <c:pt idx="6">
-                  <c:v>1</c:v>
+                  <c:v>3</c:v>
+                </c:pt>
+                <c:pt idx="7">
+                  <c:v>2</c:v>
                 </c:pt>
               </c:numCache>
             </c:numRef>
@@ -2744,7 +2761,7 @@
                 <a:ea typeface="Arial" pitchFamily="34" charset="-122"/>
                 <a:cs typeface="Arial" pitchFamily="34" charset="-120"/>
               </a:rPr>
-              <a:t>分析対象期間：2026年3月〜4月</a:t>
+              <a:t>分析対象期間：2026年2月〜3月</a:t>
             </a:r>
             <a:endParaRPr lang="en-US" sz="1000" dirty="0"/>
           </a:p>
@@ -2764,7 +2781,7 @@
                 <a:ea typeface="Arial" pitchFamily="34" charset="-122"/>
                 <a:cs typeface="Arial" pitchFamily="34" charset="-120"/>
               </a:rPr>
-              <a:t>レビュー総数：86件（6サイト）</a:t>
+              <a:t>レビュー総数：141件（6サイト）</a:t>
             </a:r>
             <a:endParaRPr lang="en-US" sz="1000" dirty="0"/>
           </a:p>
@@ -2784,7 +2801,7 @@
                 <a:ea typeface="Arial" pitchFamily="34" charset="-122"/>
                 <a:cs typeface="Arial" pitchFamily="34" charset="-120"/>
               </a:rPr>
-              <a:t>作成日：2026年4月7日</a:t>
+              <a:t>作成日：2026年4月8日</a:t>
             </a:r>
             <a:endParaRPr lang="en-US" sz="1000" dirty="0"/>
           </a:p>
@@ -3330,7 +3347,7 @@
                           <a:ea typeface="Arial" pitchFamily="34" charset="-122"/>
                           <a:cs typeface="Arial" pitchFamily="34" charset="-120"/>
                         </a:rPr>
-                        <a:t>8.66点</a:t>
+                        <a:t>8.46点</a:t>
                       </a:r>
                       <a:endParaRPr lang="en-US" sz="1000" dirty="0">
                         <a:latin typeface="Arial" charset="0"/>
@@ -3398,7 +3415,7 @@
                           <a:ea typeface="Arial" pitchFamily="34" charset="-122"/>
                           <a:cs typeface="Arial" pitchFamily="34" charset="-120"/>
                         </a:rPr>
-                        <a:t>9.0点以上</a:t>
+                        <a:t>8.8点以上</a:t>
                       </a:r>
                       <a:endParaRPr lang="en-US" sz="1000" dirty="0">
                         <a:latin typeface="Arial" charset="0"/>
@@ -3604,7 +3621,7 @@
                           <a:ea typeface="Arial" pitchFamily="34" charset="-122"/>
                           <a:cs typeface="Arial" pitchFamily="34" charset="-120"/>
                         </a:rPr>
-                        <a:t>86.0%</a:t>
+                        <a:t>80.9%</a:t>
                       </a:r>
                       <a:endParaRPr lang="en-US" sz="1000" dirty="0">
                         <a:latin typeface="Arial" charset="0"/>
@@ -3672,7 +3689,7 @@
                           <a:ea typeface="Arial" pitchFamily="34" charset="-122"/>
                           <a:cs typeface="Arial" pitchFamily="34" charset="-120"/>
                         </a:rPr>
-                        <a:t>91%以上</a:t>
+                        <a:t>86%以上</a:t>
                       </a:r>
                       <a:endParaRPr lang="en-US" sz="1000" dirty="0">
                         <a:latin typeface="Arial" charset="0"/>
@@ -3878,7 +3895,7 @@
                           <a:ea typeface="Arial" pitchFamily="34" charset="-122"/>
                           <a:cs typeface="Arial" pitchFamily="34" charset="-120"/>
                         </a:rPr>
-                        <a:t>2.3%</a:t>
+                        <a:t>3.5%</a:t>
                       </a:r>
                       <a:endParaRPr lang="en-US" sz="1000" dirty="0">
                         <a:latin typeface="Arial" charset="0"/>
@@ -3946,7 +3963,7 @@
                           <a:ea typeface="Arial" pitchFamily="34" charset="-122"/>
                           <a:cs typeface="Arial" pitchFamily="34" charset="-120"/>
                         </a:rPr>
-                        <a:t>0%以下</a:t>
+                        <a:t>1%以下</a:t>
                       </a:r>
                       <a:endParaRPr lang="en-US" sz="1000" dirty="0">
                         <a:latin typeface="Arial" charset="0"/>
@@ -4152,7 +4169,7 @@
                           <a:ea typeface="Arial" pitchFamily="34" charset="-122"/>
                           <a:cs typeface="Arial" pitchFamily="34" charset="-120"/>
                         </a:rPr>
-                        <a:t>7.4点</a:t>
+                        <a:t>7.3点</a:t>
                       </a:r>
                       <a:endParaRPr lang="en-US" sz="1000" dirty="0">
                         <a:latin typeface="Arial" charset="0"/>
@@ -4220,7 +4237,7 @@
                           <a:ea typeface="Arial" pitchFamily="34" charset="-122"/>
                           <a:cs typeface="Arial" pitchFamily="34" charset="-120"/>
                         </a:rPr>
-                        <a:t>8.4点以上</a:t>
+                        <a:t>8.3点以上</a:t>
                       </a:r>
                       <a:endParaRPr lang="en-US" sz="1000" dirty="0">
                         <a:latin typeface="Arial" charset="0"/>
@@ -4700,7 +4717,7 @@
                           <a:ea typeface="Arial" pitchFamily="34" charset="-122"/>
                           <a:cs typeface="Arial" pitchFamily="34" charset="-120"/>
                         </a:rPr>
-                        <a:t>約12件/期間</a:t>
+                        <a:t>約16件/期間</a:t>
                       </a:r>
                       <a:endParaRPr lang="en-US" sz="1000" dirty="0">
                         <a:latin typeface="Arial" charset="0"/>
@@ -4768,7 +4785,7 @@
                           <a:ea typeface="Arial" pitchFamily="34" charset="-122"/>
                           <a:cs typeface="Arial" pitchFamily="34" charset="-120"/>
                         </a:rPr>
-                        <a:t>6件以下</a:t>
+                        <a:t>8件以下</a:t>
                       </a:r>
                       <a:endParaRPr lang="en-US" sz="1000" dirty="0">
                         <a:latin typeface="Arial" charset="0"/>
@@ -5339,7 +5356,7 @@
                 <a:ea typeface="Arial" pitchFamily="34" charset="-122"/>
                 <a:cs typeface="Arial" pitchFamily="34" charset="-120"/>
               </a:rPr>
-              <a:t>8.66</a:t>
+              <a:t>8.46</a:t>
             </a:r>
             <a:endParaRPr lang="en-US" sz="3200" dirty="0"/>
           </a:p>
@@ -5464,7 +5481,7 @@
                 <a:ea typeface="Arial" pitchFamily="34" charset="-122"/>
                 <a:cs typeface="Arial" pitchFamily="34" charset="-120"/>
               </a:rPr>
-              <a:t>86.0%</a:t>
+              <a:t>80.9%</a:t>
             </a:r>
             <a:endParaRPr lang="en-US" sz="3200" dirty="0"/>
           </a:p>
@@ -5589,7 +5606,7 @@
                 <a:ea typeface="Arial" pitchFamily="34" charset="-122"/>
                 <a:cs typeface="Arial" pitchFamily="34" charset="-120"/>
               </a:rPr>
-              <a:t>2.3%</a:t>
+              <a:t>3.5%</a:t>
             </a:r>
             <a:endParaRPr lang="en-US" sz="3200" dirty="0"/>
           </a:p>
@@ -5714,7 +5731,7 @@
                 <a:ea typeface="Arial" pitchFamily="34" charset="-122"/>
                 <a:cs typeface="Arial" pitchFamily="34" charset="-120"/>
               </a:rPr>
-              <a:t>86件</a:t>
+              <a:t>141件</a:t>
             </a:r>
             <a:endParaRPr lang="en-US" sz="3200" dirty="0"/>
           </a:p>
@@ -5826,6 +5843,46 @@
         <p:txBody>
           <a:bodyPr wrap="square" lIns="0" tIns="0" rIns="0" bIns="0" rtlCol="0" anchor="ctr"/>
           <a:lstStyle/>
+          <a:p>
+            <a:pPr indent="0" marL="0">
+              <a:spcAft>
+                <a:spcPts val="200"/>
+              </a:spcAft>
+              <a:buNone/>
+            </a:pPr>
+            <a:r>
+              <a:rPr lang="en-US" sz="1100" b="1" dirty="0">
+                <a:solidFill>
+                  <a:srgbClr val="334155"/>
+                </a:solidFill>
+                <a:latin typeface="Arial" pitchFamily="34" charset="0"/>
+                <a:ea typeface="Arial" pitchFamily="34" charset="-122"/>
+                <a:cs typeface="Arial" pitchFamily="34" charset="-120"/>
+              </a:rPr>
+              <a:t>朝食 </a:t>
+            </a:r>
+            <a:endParaRPr lang="en-US" sz="1100" dirty="0"/>
+          </a:p>
+          <a:p>
+            <a:pPr indent="0" marL="0">
+              <a:spcAft>
+                <a:spcPts val="200"/>
+              </a:spcAft>
+              <a:buNone/>
+            </a:pPr>
+            <a:r>
+              <a:rPr lang="en-US" sz="900" dirty="0">
+                <a:solidFill>
+                  <a:srgbClr val="64748B"/>
+                </a:solidFill>
+                <a:latin typeface="Arial" pitchFamily="34" charset="0"/>
+                <a:ea typeface="Arial" pitchFamily="34" charset="-122"/>
+                <a:cs typeface="Arial" pitchFamily="34" charset="-120"/>
+              </a:rPr>
+              <a:t>  朝食で「これは…」と少し思った出来事があり近くのスタッフさんにお伝えしたところ、大変丁寧に対応してくださいました</a:t>
+            </a:r>
+            <a:endParaRPr lang="en-US" sz="1100" dirty="0"/>
+          </a:p>
           <a:p>
             <a:pPr indent="0" marL="0">
               <a:spcAft>
@@ -5862,47 +5919,7 @@
                 <a:ea typeface="Arial" pitchFamily="34" charset="-122"/>
                 <a:cs typeface="Arial" pitchFamily="34" charset="-120"/>
               </a:rPr>
-              <a:t>  スタッフのちょっとした対応が温かくてよかった</a:t>
-            </a:r>
-            <a:endParaRPr lang="en-US" sz="1100" dirty="0"/>
-          </a:p>
-          <a:p>
-            <a:pPr indent="0" marL="0">
-              <a:spcAft>
-                <a:spcPts val="200"/>
-              </a:spcAft>
-              <a:buNone/>
-            </a:pPr>
-            <a:r>
-              <a:rPr lang="en-US" sz="1100" b="1" dirty="0">
-                <a:solidFill>
-                  <a:srgbClr val="334155"/>
-                </a:solidFill>
-                <a:latin typeface="Arial" pitchFamily="34" charset="0"/>
-                <a:ea typeface="Arial" pitchFamily="34" charset="-122"/>
-                <a:cs typeface="Arial" pitchFamily="34" charset="-120"/>
-              </a:rPr>
-              <a:t>朝食 </a:t>
-            </a:r>
-            <a:endParaRPr lang="en-US" sz="1100" dirty="0"/>
-          </a:p>
-          <a:p>
-            <a:pPr indent="0" marL="0">
-              <a:spcAft>
-                <a:spcPts val="200"/>
-              </a:spcAft>
-              <a:buNone/>
-            </a:pPr>
-            <a:r>
-              <a:rPr lang="en-US" sz="900" dirty="0">
-                <a:solidFill>
-                  <a:srgbClr val="64748B"/>
-                </a:solidFill>
-                <a:latin typeface="Arial" pitchFamily="34" charset="0"/>
-                <a:ea typeface="Arial" pitchFamily="34" charset="-122"/>
-                <a:cs typeface="Arial" pitchFamily="34" charset="-120"/>
-              </a:rPr>
-              <a:t>  連泊だったけど、朝食も少しずつメニューを変えていてよかった</a:t>
+              <a:t>  朝食で「これは…」と少し思った出来事があり近くのスタッフさんにお伝えしたところ、大変丁寧に対応してくださいました</a:t>
             </a:r>
             <a:endParaRPr lang="en-US" sz="1100" dirty="0"/>
           </a:p>
@@ -5942,7 +5959,7 @@
                 <a:ea typeface="Arial" pitchFamily="34" charset="-122"/>
                 <a:cs typeface="Arial" pitchFamily="34" charset="-120"/>
               </a:rPr>
-              <a:t>  駅近くの立地で移動に便利</a:t>
+              <a:t>  Bahkan 1 hari setelah nya rambut masih halus  Udah 2x ngi...</a:t>
             </a:r>
             <a:endParaRPr lang="en-US" sz="1100" dirty="0"/>
           </a:p>
@@ -6090,7 +6107,7 @@
                 <a:ea typeface="Arial" pitchFamily="34" charset="-122"/>
                 <a:cs typeface="Arial" pitchFamily="34" charset="-120"/>
               </a:rPr>
-              <a:t>  The staff at this place were very helpful and friendly</a:t>
+              <a:t>  冬でも暖房の温度を自分で調整できるので、暑すぎることもなく、とても快適でした</a:t>
             </a:r>
             <a:endParaRPr lang="en-US" sz="1100" dirty="0"/>
           </a:p>
@@ -6150,7 +6167,7 @@
                 <a:ea typeface="Arial" pitchFamily="34" charset="-122"/>
                 <a:cs typeface="Arial" pitchFamily="34" charset="-120"/>
               </a:rPr>
-              <a:t>設備の老朽化 </a:t>
+              <a:t>臭い・匂い </a:t>
             </a:r>
             <a:endParaRPr lang="en-US" sz="1100" dirty="0"/>
           </a:p>
@@ -6170,7 +6187,7 @@
                 <a:ea typeface="Arial" pitchFamily="34" charset="-122"/>
                 <a:cs typeface="Arial" pitchFamily="34" charset="-120"/>
               </a:rPr>
-              <a:t>  ที่พักอาจจะเก่าไปนิด แต่สะดวกเพราะอยู่ใกล้รถไฟ ใกล้สนามบิ...</a:t>
+              <a:t>  部屋の方はリニューアル後の為、綺麗でタバコの臭いもなく広さも充分</a:t>
             </a:r>
             <a:endParaRPr lang="en-US" sz="1100" dirty="0"/>
           </a:p>
@@ -6523,7 +6540,7 @@
                 <a:ea typeface="Arial" pitchFamily="34" charset="-122"/>
                 <a:cs typeface="Arial" pitchFamily="34" charset="-120"/>
               </a:rPr>
-              <a:t>8.66</a:t>
+              <a:t>8.46</a:t>
             </a:r>
             <a:endParaRPr lang="en-US" sz="3200" dirty="0"/>
           </a:p>
@@ -6648,7 +6665,7 @@
                 <a:ea typeface="Arial" pitchFamily="34" charset="-122"/>
                 <a:cs typeface="Arial" pitchFamily="34" charset="-120"/>
               </a:rPr>
-              <a:t>86.0%</a:t>
+              <a:t>80.9%</a:t>
             </a:r>
             <a:endParaRPr lang="en-US" sz="3200" dirty="0"/>
           </a:p>
@@ -6773,7 +6790,7 @@
                 <a:ea typeface="Arial" pitchFamily="34" charset="-122"/>
                 <a:cs typeface="Arial" pitchFamily="34" charset="-120"/>
               </a:rPr>
-              <a:t>2.3%</a:t>
+              <a:t>3.5%</a:t>
             </a:r>
             <a:endParaRPr lang="en-US" sz="3200" dirty="0"/>
           </a:p>
@@ -6898,7 +6915,7 @@
                 <a:ea typeface="Arial" pitchFamily="34" charset="-122"/>
                 <a:cs typeface="Arial" pitchFamily="34" charset="-120"/>
               </a:rPr>
-              <a:t>86件</a:t>
+              <a:t>141件</a:t>
             </a:r>
             <a:endParaRPr lang="en-US" sz="3200" dirty="0"/>
           </a:p>
@@ -7319,7 +7336,7 @@
                 <a:ea typeface="Arial" pitchFamily="34" charset="-122"/>
                 <a:cs typeface="Arial" pitchFamily="34" charset="-120"/>
               </a:rPr>
-              <a:t>Trip.com(9.50)が最高スコア。</a:t>
+              <a:t>Trip.com(9.57)が最高スコア。</a:t>
             </a:r>
             <a:endParaRPr lang="en-US" sz="1100" dirty="0"/>
           </a:p>
@@ -7368,7 +7385,7 @@
                 <a:ea typeface="Arial" pitchFamily="34" charset="-122"/>
                 <a:cs typeface="Arial" pitchFamily="34" charset="-120"/>
               </a:rPr>
-              <a:t>Agoda(7.4)が相対的に低い。口コミ返信の強化が急務</a:t>
+              <a:t>Agoda(7.3)が相対的に低い。口コミ返信の強化が急務</a:t>
             </a:r>
             <a:endParaRPr lang="en-US" sz="1100" dirty="0"/>
           </a:p>
@@ -7877,7 +7894,7 @@
                           <a:ea typeface="Arial" pitchFamily="34" charset="-122"/>
                           <a:cs typeface="Arial" pitchFamily="34" charset="-120"/>
                         </a:rPr>
-                        <a:t>14</a:t>
+                        <a:t>21</a:t>
                       </a:r>
                       <a:endParaRPr lang="en-US" sz="900" dirty="0">
                         <a:latin typeface="Arial" charset="0"/>
@@ -7945,7 +7962,7 @@
                           <a:ea typeface="Arial" pitchFamily="34" charset="-122"/>
                           <a:cs typeface="Arial" pitchFamily="34" charset="-120"/>
                         </a:rPr>
-                        <a:t>9.5</a:t>
+                        <a:t>9.57</a:t>
                       </a:r>
                       <a:endParaRPr lang="en-US" sz="900" dirty="0">
                         <a:latin typeface="Arial" charset="0"/>
@@ -8081,7 +8098,7 @@
                           <a:ea typeface="Arial" pitchFamily="34" charset="-122"/>
                           <a:cs typeface="Arial" pitchFamily="34" charset="-120"/>
                         </a:rPr>
-                        <a:t>9.5</a:t>
+                        <a:t>9.57</a:t>
                       </a:r>
                       <a:endParaRPr lang="en-US" sz="900" dirty="0">
                         <a:latin typeface="Arial" charset="0"/>
@@ -8151,7 +8168,7 @@
                           <a:ea typeface="Arial" pitchFamily="34" charset="-122"/>
                           <a:cs typeface="Arial" pitchFamily="34" charset="-120"/>
                         </a:rPr>
-                        <a:t>楽天トラベル</a:t>
+                        <a:t>Google</a:t>
                       </a:r>
                       <a:endParaRPr lang="en-US" sz="900" dirty="0">
                         <a:latin typeface="Arial" charset="0"/>
@@ -8219,7 +8236,7 @@
                           <a:ea typeface="Arial" pitchFamily="34" charset="-122"/>
                           <a:cs typeface="Arial" pitchFamily="34" charset="-120"/>
                         </a:rPr>
-                        <a:t>13</a:t>
+                        <a:t>18</a:t>
                       </a:r>
                       <a:endParaRPr lang="en-US" sz="900" dirty="0">
                         <a:latin typeface="Arial" charset="0"/>
@@ -8287,7 +8304,7 @@
                           <a:ea typeface="Arial" pitchFamily="34" charset="-122"/>
                           <a:cs typeface="Arial" pitchFamily="34" charset="-120"/>
                         </a:rPr>
-                        <a:t>4.38</a:t>
+                        <a:t>4.39</a:t>
                       </a:r>
                       <a:endParaRPr lang="en-US" sz="900" dirty="0">
                         <a:latin typeface="Arial" charset="0"/>
@@ -8423,7 +8440,7 @@
                           <a:ea typeface="Arial" pitchFamily="34" charset="-122"/>
                           <a:cs typeface="Arial" pitchFamily="34" charset="-120"/>
                         </a:rPr>
-                        <a:t>8.77</a:t>
+                        <a:t>8.78</a:t>
                       </a:r>
                       <a:endParaRPr lang="en-US" sz="900" dirty="0">
                         <a:latin typeface="Arial" charset="0"/>
@@ -8493,7 +8510,7 @@
                           <a:ea typeface="Arial" pitchFamily="34" charset="-122"/>
                           <a:cs typeface="Arial" pitchFamily="34" charset="-120"/>
                         </a:rPr>
-                        <a:t>Google</a:t>
+                        <a:t>楽天トラベル</a:t>
                       </a:r>
                       <a:endParaRPr lang="en-US" sz="900" dirty="0">
                         <a:latin typeface="Arial" charset="0"/>
@@ -8561,7 +8578,7 @@
                           <a:ea typeface="Arial" pitchFamily="34" charset="-122"/>
                           <a:cs typeface="Arial" pitchFamily="34" charset="-120"/>
                         </a:rPr>
-                        <a:t>16</a:t>
+                        <a:t>21</a:t>
                       </a:r>
                       <a:endParaRPr lang="en-US" sz="900" dirty="0">
                         <a:latin typeface="Arial" charset="0"/>
@@ -8629,7 +8646,7 @@
                           <a:ea typeface="Arial" pitchFamily="34" charset="-122"/>
                           <a:cs typeface="Arial" pitchFamily="34" charset="-120"/>
                         </a:rPr>
-                        <a:t>4.38</a:t>
+                        <a:t>4.29</a:t>
                       </a:r>
                       <a:endParaRPr lang="en-US" sz="900" dirty="0">
                         <a:latin typeface="Arial" charset="0"/>
@@ -8765,7 +8782,7 @@
                           <a:ea typeface="Arial" pitchFamily="34" charset="-122"/>
                           <a:cs typeface="Arial" pitchFamily="34" charset="-120"/>
                         </a:rPr>
-                        <a:t>8.75</a:t>
+                        <a:t>8.57</a:t>
                       </a:r>
                       <a:endParaRPr lang="en-US" sz="900" dirty="0">
                         <a:latin typeface="Arial" charset="0"/>
@@ -8813,6 +8830,348 @@
                     </a:lnB>
                     <a:solidFill>
                       <a:srgbClr val="E8EFF8"/>
+                    </a:solidFill>
+                  </a:tcPr>
+                </a:tc>
+              </a:tr>
+              <a:tr h="201168">
+                <a:tc>
+                  <a:txBody>
+                    <a:bodyPr/>
+                    <a:lstStyle/>
+                    <a:p>
+                      <a:pPr algn="ctr" indent="0" marL="0">
+                        <a:buNone/>
+                      </a:pPr>
+                      <a:r>
+                        <a:rPr lang="en-US" sz="900" dirty="0">
+                          <a:solidFill>
+                            <a:srgbClr val="000000"/>
+                          </a:solidFill>
+                          <a:latin typeface="Arial" pitchFamily="34" charset="0"/>
+                          <a:ea typeface="Arial" pitchFamily="34" charset="-122"/>
+                          <a:cs typeface="Arial" pitchFamily="34" charset="-120"/>
+                        </a:rPr>
+                        <a:t>Booking.com</a:t>
+                      </a:r>
+                      <a:endParaRPr lang="en-US" sz="900" dirty="0">
+                        <a:latin typeface="Arial" charset="0"/>
+                        <a:ea typeface="Arial" charset="0"/>
+                        <a:cs typeface="Arial" charset="0"/>
+                      </a:endParaRPr>
+                    </a:p>
+                  </a:txBody>
+                  <a:tcPr marL="91440" marR="91440" marT="45720" marB="45720">
+                    <a:lnL w="6350" cap="flat" cmpd="sng" algn="ctr">
+                      <a:solidFill>
+                        <a:srgbClr val="CBD5E1"/>
+                      </a:solidFill>
+                      <a:prstDash val="solid"/>
+                      <a:round/>
+                      <a:headEnd type="none" w="med" len="med"/>
+                      <a:tailEnd type="none" w="med" len="med"/>
+                    </a:lnL>
+                    <a:lnR w="6350" cap="flat" cmpd="sng" algn="ctr">
+                      <a:solidFill>
+                        <a:srgbClr val="CBD5E1"/>
+                      </a:solidFill>
+                      <a:prstDash val="solid"/>
+                      <a:round/>
+                      <a:headEnd type="none" w="med" len="med"/>
+                      <a:tailEnd type="none" w="med" len="med"/>
+                    </a:lnR>
+                    <a:lnT w="6350" cap="flat" cmpd="sng" algn="ctr">
+                      <a:solidFill>
+                        <a:srgbClr val="CBD5E1"/>
+                      </a:solidFill>
+                      <a:prstDash val="solid"/>
+                      <a:round/>
+                      <a:headEnd type="none" w="med" len="med"/>
+                      <a:tailEnd type="none" w="med" len="med"/>
+                    </a:lnT>
+                    <a:lnB w="6350" cap="flat" cmpd="sng" algn="ctr">
+                      <a:solidFill>
+                        <a:srgbClr val="CBD5E1"/>
+                      </a:solidFill>
+                      <a:prstDash val="solid"/>
+                      <a:round/>
+                      <a:headEnd type="none" w="med" len="med"/>
+                      <a:tailEnd type="none" w="med" len="med"/>
+                    </a:lnB>
+                    <a:solidFill>
+                      <a:srgbClr val="FFFFFF"/>
+                    </a:solidFill>
+                  </a:tcPr>
+                </a:tc>
+                <a:tc>
+                  <a:txBody>
+                    <a:bodyPr/>
+                    <a:lstStyle/>
+                    <a:p>
+                      <a:pPr algn="ctr" indent="0" marL="0">
+                        <a:buNone/>
+                      </a:pPr>
+                      <a:r>
+                        <a:rPr lang="en-US" sz="900" dirty="0">
+                          <a:solidFill>
+                            <a:srgbClr val="000000"/>
+                          </a:solidFill>
+                          <a:latin typeface="Arial" pitchFamily="34" charset="0"/>
+                          <a:ea typeface="Arial" pitchFamily="34" charset="-122"/>
+                          <a:cs typeface="Arial" pitchFamily="34" charset="-120"/>
+                        </a:rPr>
+                        <a:t>55</a:t>
+                      </a:r>
+                      <a:endParaRPr lang="en-US" sz="900" dirty="0">
+                        <a:latin typeface="Arial" charset="0"/>
+                        <a:ea typeface="Arial" charset="0"/>
+                        <a:cs typeface="Arial" charset="0"/>
+                      </a:endParaRPr>
+                    </a:p>
+                  </a:txBody>
+                  <a:tcPr marL="91440" marR="91440" marT="45720" marB="45720">
+                    <a:lnL w="6350" cap="flat" cmpd="sng" algn="ctr">
+                      <a:solidFill>
+                        <a:srgbClr val="CBD5E1"/>
+                      </a:solidFill>
+                      <a:prstDash val="solid"/>
+                      <a:round/>
+                      <a:headEnd type="none" w="med" len="med"/>
+                      <a:tailEnd type="none" w="med" len="med"/>
+                    </a:lnL>
+                    <a:lnR w="6350" cap="flat" cmpd="sng" algn="ctr">
+                      <a:solidFill>
+                        <a:srgbClr val="CBD5E1"/>
+                      </a:solidFill>
+                      <a:prstDash val="solid"/>
+                      <a:round/>
+                      <a:headEnd type="none" w="med" len="med"/>
+                      <a:tailEnd type="none" w="med" len="med"/>
+                    </a:lnR>
+                    <a:lnT w="6350" cap="flat" cmpd="sng" algn="ctr">
+                      <a:solidFill>
+                        <a:srgbClr val="CBD5E1"/>
+                      </a:solidFill>
+                      <a:prstDash val="solid"/>
+                      <a:round/>
+                      <a:headEnd type="none" w="med" len="med"/>
+                      <a:tailEnd type="none" w="med" len="med"/>
+                    </a:lnT>
+                    <a:lnB w="6350" cap="flat" cmpd="sng" algn="ctr">
+                      <a:solidFill>
+                        <a:srgbClr val="CBD5E1"/>
+                      </a:solidFill>
+                      <a:prstDash val="solid"/>
+                      <a:round/>
+                      <a:headEnd type="none" w="med" len="med"/>
+                      <a:tailEnd type="none" w="med" len="med"/>
+                    </a:lnB>
+                    <a:solidFill>
+                      <a:srgbClr val="FFFFFF"/>
+                    </a:solidFill>
+                  </a:tcPr>
+                </a:tc>
+                <a:tc>
+                  <a:txBody>
+                    <a:bodyPr/>
+                    <a:lstStyle/>
+                    <a:p>
+                      <a:pPr algn="ctr" indent="0" marL="0">
+                        <a:buNone/>
+                      </a:pPr>
+                      <a:r>
+                        <a:rPr lang="en-US" sz="900" dirty="0">
+                          <a:solidFill>
+                            <a:srgbClr val="000000"/>
+                          </a:solidFill>
+                          <a:latin typeface="Arial" pitchFamily="34" charset="0"/>
+                          <a:ea typeface="Arial" pitchFamily="34" charset="-122"/>
+                          <a:cs typeface="Arial" pitchFamily="34" charset="-120"/>
+                        </a:rPr>
+                        <a:t>8.22</a:t>
+                      </a:r>
+                      <a:endParaRPr lang="en-US" sz="900" dirty="0">
+                        <a:latin typeface="Arial" charset="0"/>
+                        <a:ea typeface="Arial" charset="0"/>
+                        <a:cs typeface="Arial" charset="0"/>
+                      </a:endParaRPr>
+                    </a:p>
+                  </a:txBody>
+                  <a:tcPr marL="91440" marR="91440" marT="45720" marB="45720">
+                    <a:lnL w="6350" cap="flat" cmpd="sng" algn="ctr">
+                      <a:solidFill>
+                        <a:srgbClr val="CBD5E1"/>
+                      </a:solidFill>
+                      <a:prstDash val="solid"/>
+                      <a:round/>
+                      <a:headEnd type="none" w="med" len="med"/>
+                      <a:tailEnd type="none" w="med" len="med"/>
+                    </a:lnL>
+                    <a:lnR w="6350" cap="flat" cmpd="sng" algn="ctr">
+                      <a:solidFill>
+                        <a:srgbClr val="CBD5E1"/>
+                      </a:solidFill>
+                      <a:prstDash val="solid"/>
+                      <a:round/>
+                      <a:headEnd type="none" w="med" len="med"/>
+                      <a:tailEnd type="none" w="med" len="med"/>
+                    </a:lnR>
+                    <a:lnT w="6350" cap="flat" cmpd="sng" algn="ctr">
+                      <a:solidFill>
+                        <a:srgbClr val="CBD5E1"/>
+                      </a:solidFill>
+                      <a:prstDash val="solid"/>
+                      <a:round/>
+                      <a:headEnd type="none" w="med" len="med"/>
+                      <a:tailEnd type="none" w="med" len="med"/>
+                    </a:lnT>
+                    <a:lnB w="6350" cap="flat" cmpd="sng" algn="ctr">
+                      <a:solidFill>
+                        <a:srgbClr val="CBD5E1"/>
+                      </a:solidFill>
+                      <a:prstDash val="solid"/>
+                      <a:round/>
+                      <a:headEnd type="none" w="med" len="med"/>
+                      <a:tailEnd type="none" w="med" len="med"/>
+                    </a:lnB>
+                    <a:solidFill>
+                      <a:srgbClr val="FFFFFF"/>
+                    </a:solidFill>
+                  </a:tcPr>
+                </a:tc>
+                <a:tc>
+                  <a:txBody>
+                    <a:bodyPr/>
+                    <a:lstStyle/>
+                    <a:p>
+                      <a:pPr algn="ctr" indent="0" marL="0">
+                        <a:buNone/>
+                      </a:pPr>
+                      <a:r>
+                        <a:rPr lang="en-US" sz="900" dirty="0">
+                          <a:solidFill>
+                            <a:srgbClr val="000000"/>
+                          </a:solidFill>
+                          <a:latin typeface="Arial" pitchFamily="34" charset="0"/>
+                          <a:ea typeface="Arial" pitchFamily="34" charset="-122"/>
+                          <a:cs typeface="Arial" pitchFamily="34" charset="-120"/>
+                        </a:rPr>
+                        <a:t>/10</a:t>
+                      </a:r>
+                      <a:endParaRPr lang="en-US" sz="900" dirty="0">
+                        <a:latin typeface="Arial" charset="0"/>
+                        <a:ea typeface="Arial" charset="0"/>
+                        <a:cs typeface="Arial" charset="0"/>
+                      </a:endParaRPr>
+                    </a:p>
+                  </a:txBody>
+                  <a:tcPr marL="91440" marR="91440" marT="45720" marB="45720">
+                    <a:lnL w="6350" cap="flat" cmpd="sng" algn="ctr">
+                      <a:solidFill>
+                        <a:srgbClr val="CBD5E1"/>
+                      </a:solidFill>
+                      <a:prstDash val="solid"/>
+                      <a:round/>
+                      <a:headEnd type="none" w="med" len="med"/>
+                      <a:tailEnd type="none" w="med" len="med"/>
+                    </a:lnL>
+                    <a:lnR w="6350" cap="flat" cmpd="sng" algn="ctr">
+                      <a:solidFill>
+                        <a:srgbClr val="CBD5E1"/>
+                      </a:solidFill>
+                      <a:prstDash val="solid"/>
+                      <a:round/>
+                      <a:headEnd type="none" w="med" len="med"/>
+                      <a:tailEnd type="none" w="med" len="med"/>
+                    </a:lnR>
+                    <a:lnT w="6350" cap="flat" cmpd="sng" algn="ctr">
+                      <a:solidFill>
+                        <a:srgbClr val="CBD5E1"/>
+                      </a:solidFill>
+                      <a:prstDash val="solid"/>
+                      <a:round/>
+                      <a:headEnd type="none" w="med" len="med"/>
+                      <a:tailEnd type="none" w="med" len="med"/>
+                    </a:lnT>
+                    <a:lnB w="6350" cap="flat" cmpd="sng" algn="ctr">
+                      <a:solidFill>
+                        <a:srgbClr val="CBD5E1"/>
+                      </a:solidFill>
+                      <a:prstDash val="solid"/>
+                      <a:round/>
+                      <a:headEnd type="none" w="med" len="med"/>
+                      <a:tailEnd type="none" w="med" len="med"/>
+                    </a:lnB>
+                    <a:solidFill>
+                      <a:srgbClr val="FFFFFF"/>
+                    </a:solidFill>
+                  </a:tcPr>
+                </a:tc>
+                <a:tc>
+                  <a:txBody>
+                    <a:bodyPr/>
+                    <a:lstStyle/>
+                    <a:p>
+                      <a:pPr algn="ctr" indent="0" marL="0">
+                        <a:buNone/>
+                      </a:pPr>
+                      <a:r>
+                        <a:rPr lang="en-US" sz="900" dirty="0">
+                          <a:solidFill>
+                            <a:srgbClr val="000000"/>
+                          </a:solidFill>
+                          <a:latin typeface="Arial" pitchFamily="34" charset="0"/>
+                          <a:ea typeface="Arial" pitchFamily="34" charset="-122"/>
+                          <a:cs typeface="Arial" pitchFamily="34" charset="-120"/>
+                        </a:rPr>
+                        <a:t>8.22</a:t>
+                      </a:r>
+                      <a:endParaRPr lang="en-US" sz="900" dirty="0">
+                        <a:latin typeface="Arial" charset="0"/>
+                        <a:ea typeface="Arial" charset="0"/>
+                        <a:cs typeface="Arial" charset="0"/>
+                      </a:endParaRPr>
+                    </a:p>
+                  </a:txBody>
+                  <a:tcPr marL="91440" marR="91440" marT="45720" marB="45720">
+                    <a:lnL w="6350" cap="flat" cmpd="sng" algn="ctr">
+                      <a:solidFill>
+                        <a:srgbClr val="CBD5E1"/>
+                      </a:solidFill>
+                      <a:prstDash val="solid"/>
+                      <a:round/>
+                      <a:headEnd type="none" w="med" len="med"/>
+                      <a:tailEnd type="none" w="med" len="med"/>
+                    </a:lnL>
+                    <a:lnR w="6350" cap="flat" cmpd="sng" algn="ctr">
+                      <a:solidFill>
+                        <a:srgbClr val="CBD5E1"/>
+                      </a:solidFill>
+                      <a:prstDash val="solid"/>
+                      <a:round/>
+                      <a:headEnd type="none" w="med" len="med"/>
+                      <a:tailEnd type="none" w="med" len="med"/>
+                    </a:lnR>
+                    <a:lnT w="6350" cap="flat" cmpd="sng" algn="ctr">
+                      <a:solidFill>
+                        <a:srgbClr val="CBD5E1"/>
+                      </a:solidFill>
+                      <a:prstDash val="solid"/>
+                      <a:round/>
+                      <a:headEnd type="none" w="med" len="med"/>
+                      <a:tailEnd type="none" w="med" len="med"/>
+                    </a:lnT>
+                    <a:lnB w="6350" cap="flat" cmpd="sng" algn="ctr">
+                      <a:solidFill>
+                        <a:srgbClr val="CBD5E1"/>
+                      </a:solidFill>
+                      <a:prstDash val="solid"/>
+                      <a:round/>
+                      <a:headEnd type="none" w="med" len="med"/>
+                      <a:tailEnd type="none" w="med" len="med"/>
+                    </a:lnB>
+                    <a:solidFill>
+                      <a:srgbClr val="FFFFFF"/>
                     </a:solidFill>
                   </a:tcPr>
                 </a:tc>
@@ -8882,7 +9241,7 @@
                       <a:tailEnd type="none" w="med" len="med"/>
                     </a:lnB>
                     <a:solidFill>
-                      <a:srgbClr val="FFFFFF"/>
+                      <a:srgbClr val="E8EFF8"/>
                     </a:solidFill>
                   </a:tcPr>
                 </a:tc>
@@ -8903,7 +9262,7 @@
                           <a:ea typeface="Arial" pitchFamily="34" charset="-122"/>
                           <a:cs typeface="Arial" pitchFamily="34" charset="-120"/>
                         </a:rPr>
-                        <a:t>8</a:t>
+                        <a:t>15</a:t>
                       </a:r>
                       <a:endParaRPr lang="en-US" sz="900" dirty="0">
                         <a:latin typeface="Arial" charset="0"/>
@@ -8950,7 +9309,7 @@
                       <a:tailEnd type="none" w="med" len="med"/>
                     </a:lnB>
                     <a:solidFill>
-                      <a:srgbClr val="FFFFFF"/>
+                      <a:srgbClr val="E8EFF8"/>
                     </a:solidFill>
                   </a:tcPr>
                 </a:tc>
@@ -8971,7 +9330,7 @@
                           <a:ea typeface="Arial" pitchFamily="34" charset="-122"/>
                           <a:cs typeface="Arial" pitchFamily="34" charset="-120"/>
                         </a:rPr>
-                        <a:t>4.25</a:t>
+                        <a:t>4.07</a:t>
                       </a:r>
                       <a:endParaRPr lang="en-US" sz="900" dirty="0">
                         <a:latin typeface="Arial" charset="0"/>
@@ -9018,7 +9377,7 @@
                       <a:tailEnd type="none" w="med" len="med"/>
                     </a:lnB>
                     <a:solidFill>
-                      <a:srgbClr val="FFFFFF"/>
+                      <a:srgbClr val="E8EFF8"/>
                     </a:solidFill>
                   </a:tcPr>
                 </a:tc>
@@ -9086,144 +9445,6 @@
                       <a:tailEnd type="none" w="med" len="med"/>
                     </a:lnB>
                     <a:solidFill>
-                      <a:srgbClr val="FFFFFF"/>
-                    </a:solidFill>
-                  </a:tcPr>
-                </a:tc>
-                <a:tc>
-                  <a:txBody>
-                    <a:bodyPr/>
-                    <a:lstStyle/>
-                    <a:p>
-                      <a:pPr algn="ctr" indent="0" marL="0">
-                        <a:buNone/>
-                      </a:pPr>
-                      <a:r>
-                        <a:rPr lang="en-US" sz="900" dirty="0">
-                          <a:solidFill>
-                            <a:srgbClr val="000000"/>
-                          </a:solidFill>
-                          <a:latin typeface="Arial" pitchFamily="34" charset="0"/>
-                          <a:ea typeface="Arial" pitchFamily="34" charset="-122"/>
-                          <a:cs typeface="Arial" pitchFamily="34" charset="-120"/>
-                        </a:rPr>
-                        <a:t>8.5</a:t>
-                      </a:r>
-                      <a:endParaRPr lang="en-US" sz="900" dirty="0">
-                        <a:latin typeface="Arial" charset="0"/>
-                        <a:ea typeface="Arial" charset="0"/>
-                        <a:cs typeface="Arial" charset="0"/>
-                      </a:endParaRPr>
-                    </a:p>
-                  </a:txBody>
-                  <a:tcPr marL="91440" marR="91440" marT="45720" marB="45720">
-                    <a:lnL w="6350" cap="flat" cmpd="sng" algn="ctr">
-                      <a:solidFill>
-                        <a:srgbClr val="CBD5E1"/>
-                      </a:solidFill>
-                      <a:prstDash val="solid"/>
-                      <a:round/>
-                      <a:headEnd type="none" w="med" len="med"/>
-                      <a:tailEnd type="none" w="med" len="med"/>
-                    </a:lnL>
-                    <a:lnR w="6350" cap="flat" cmpd="sng" algn="ctr">
-                      <a:solidFill>
-                        <a:srgbClr val="CBD5E1"/>
-                      </a:solidFill>
-                      <a:prstDash val="solid"/>
-                      <a:round/>
-                      <a:headEnd type="none" w="med" len="med"/>
-                      <a:tailEnd type="none" w="med" len="med"/>
-                    </a:lnR>
-                    <a:lnT w="6350" cap="flat" cmpd="sng" algn="ctr">
-                      <a:solidFill>
-                        <a:srgbClr val="CBD5E1"/>
-                      </a:solidFill>
-                      <a:prstDash val="solid"/>
-                      <a:round/>
-                      <a:headEnd type="none" w="med" len="med"/>
-                      <a:tailEnd type="none" w="med" len="med"/>
-                    </a:lnT>
-                    <a:lnB w="6350" cap="flat" cmpd="sng" algn="ctr">
-                      <a:solidFill>
-                        <a:srgbClr val="CBD5E1"/>
-                      </a:solidFill>
-                      <a:prstDash val="solid"/>
-                      <a:round/>
-                      <a:headEnd type="none" w="med" len="med"/>
-                      <a:tailEnd type="none" w="med" len="med"/>
-                    </a:lnB>
-                    <a:solidFill>
-                      <a:srgbClr val="FFFFFF"/>
-                    </a:solidFill>
-                  </a:tcPr>
-                </a:tc>
-              </a:tr>
-              <a:tr h="201168">
-                <a:tc>
-                  <a:txBody>
-                    <a:bodyPr/>
-                    <a:lstStyle/>
-                    <a:p>
-                      <a:pPr algn="ctr" indent="0" marL="0">
-                        <a:buNone/>
-                      </a:pPr>
-                      <a:r>
-                        <a:rPr lang="en-US" sz="900" dirty="0">
-                          <a:solidFill>
-                            <a:srgbClr val="000000"/>
-                          </a:solidFill>
-                          <a:latin typeface="Arial" pitchFamily="34" charset="0"/>
-                          <a:ea typeface="Arial" pitchFamily="34" charset="-122"/>
-                          <a:cs typeface="Arial" pitchFamily="34" charset="-120"/>
-                        </a:rPr>
-                        <a:t>Booking.com</a:t>
-                      </a:r>
-                      <a:endParaRPr lang="en-US" sz="900" dirty="0">
-                        <a:latin typeface="Arial" charset="0"/>
-                        <a:ea typeface="Arial" charset="0"/>
-                        <a:cs typeface="Arial" charset="0"/>
-                      </a:endParaRPr>
-                    </a:p>
-                  </a:txBody>
-                  <a:tcPr marL="91440" marR="91440" marT="45720" marB="45720">
-                    <a:lnL w="6350" cap="flat" cmpd="sng" algn="ctr">
-                      <a:solidFill>
-                        <a:srgbClr val="CBD5E1"/>
-                      </a:solidFill>
-                      <a:prstDash val="solid"/>
-                      <a:round/>
-                      <a:headEnd type="none" w="med" len="med"/>
-                      <a:tailEnd type="none" w="med" len="med"/>
-                    </a:lnL>
-                    <a:lnR w="6350" cap="flat" cmpd="sng" algn="ctr">
-                      <a:solidFill>
-                        <a:srgbClr val="CBD5E1"/>
-                      </a:solidFill>
-                      <a:prstDash val="solid"/>
-                      <a:round/>
-                      <a:headEnd type="none" w="med" len="med"/>
-                      <a:tailEnd type="none" w="med" len="med"/>
-                    </a:lnR>
-                    <a:lnT w="6350" cap="flat" cmpd="sng" algn="ctr">
-                      <a:solidFill>
-                        <a:srgbClr val="CBD5E1"/>
-                      </a:solidFill>
-                      <a:prstDash val="solid"/>
-                      <a:round/>
-                      <a:headEnd type="none" w="med" len="med"/>
-                      <a:tailEnd type="none" w="med" len="med"/>
-                    </a:lnT>
-                    <a:lnB w="6350" cap="flat" cmpd="sng" algn="ctr">
-                      <a:solidFill>
-                        <a:srgbClr val="CBD5E1"/>
-                      </a:solidFill>
-                      <a:prstDash val="solid"/>
-                      <a:round/>
-                      <a:headEnd type="none" w="med" len="med"/>
-                      <a:tailEnd type="none" w="med" len="med"/>
-                    </a:lnB>
-                    <a:solidFill>
                       <a:srgbClr val="E8EFF8"/>
                     </a:solidFill>
                   </a:tcPr>
@@ -9245,211 +9466,7 @@
                           <a:ea typeface="Arial" pitchFamily="34" charset="-122"/>
                           <a:cs typeface="Arial" pitchFamily="34" charset="-120"/>
                         </a:rPr>
-                        <a:t>30</a:t>
-                      </a:r>
-                      <a:endParaRPr lang="en-US" sz="900" dirty="0">
-                        <a:latin typeface="Arial" charset="0"/>
-                        <a:ea typeface="Arial" charset="0"/>
-                        <a:cs typeface="Arial" charset="0"/>
-                      </a:endParaRPr>
-                    </a:p>
-                  </a:txBody>
-                  <a:tcPr marL="91440" marR="91440" marT="45720" marB="45720">
-                    <a:lnL w="6350" cap="flat" cmpd="sng" algn="ctr">
-                      <a:solidFill>
-                        <a:srgbClr val="CBD5E1"/>
-                      </a:solidFill>
-                      <a:prstDash val="solid"/>
-                      <a:round/>
-                      <a:headEnd type="none" w="med" len="med"/>
-                      <a:tailEnd type="none" w="med" len="med"/>
-                    </a:lnL>
-                    <a:lnR w="6350" cap="flat" cmpd="sng" algn="ctr">
-                      <a:solidFill>
-                        <a:srgbClr val="CBD5E1"/>
-                      </a:solidFill>
-                      <a:prstDash val="solid"/>
-                      <a:round/>
-                      <a:headEnd type="none" w="med" len="med"/>
-                      <a:tailEnd type="none" w="med" len="med"/>
-                    </a:lnR>
-                    <a:lnT w="6350" cap="flat" cmpd="sng" algn="ctr">
-                      <a:solidFill>
-                        <a:srgbClr val="CBD5E1"/>
-                      </a:solidFill>
-                      <a:prstDash val="solid"/>
-                      <a:round/>
-                      <a:headEnd type="none" w="med" len="med"/>
-                      <a:tailEnd type="none" w="med" len="med"/>
-                    </a:lnT>
-                    <a:lnB w="6350" cap="flat" cmpd="sng" algn="ctr">
-                      <a:solidFill>
-                        <a:srgbClr val="CBD5E1"/>
-                      </a:solidFill>
-                      <a:prstDash val="solid"/>
-                      <a:round/>
-                      <a:headEnd type="none" w="med" len="med"/>
-                      <a:tailEnd type="none" w="med" len="med"/>
-                    </a:lnB>
-                    <a:solidFill>
-                      <a:srgbClr val="E8EFF8"/>
-                    </a:solidFill>
-                  </a:tcPr>
-                </a:tc>
-                <a:tc>
-                  <a:txBody>
-                    <a:bodyPr/>
-                    <a:lstStyle/>
-                    <a:p>
-                      <a:pPr algn="ctr" indent="0" marL="0">
-                        <a:buNone/>
-                      </a:pPr>
-                      <a:r>
-                        <a:rPr lang="en-US" sz="900" dirty="0">
-                          <a:solidFill>
-                            <a:srgbClr val="000000"/>
-                          </a:solidFill>
-                          <a:latin typeface="Arial" pitchFamily="34" charset="0"/>
-                          <a:ea typeface="Arial" pitchFamily="34" charset="-122"/>
-                          <a:cs typeface="Arial" pitchFamily="34" charset="-120"/>
-                        </a:rPr>
-                        <a:t>8.43</a:t>
-                      </a:r>
-                      <a:endParaRPr lang="en-US" sz="900" dirty="0">
-                        <a:latin typeface="Arial" charset="0"/>
-                        <a:ea typeface="Arial" charset="0"/>
-                        <a:cs typeface="Arial" charset="0"/>
-                      </a:endParaRPr>
-                    </a:p>
-                  </a:txBody>
-                  <a:tcPr marL="91440" marR="91440" marT="45720" marB="45720">
-                    <a:lnL w="6350" cap="flat" cmpd="sng" algn="ctr">
-                      <a:solidFill>
-                        <a:srgbClr val="CBD5E1"/>
-                      </a:solidFill>
-                      <a:prstDash val="solid"/>
-                      <a:round/>
-                      <a:headEnd type="none" w="med" len="med"/>
-                      <a:tailEnd type="none" w="med" len="med"/>
-                    </a:lnL>
-                    <a:lnR w="6350" cap="flat" cmpd="sng" algn="ctr">
-                      <a:solidFill>
-                        <a:srgbClr val="CBD5E1"/>
-                      </a:solidFill>
-                      <a:prstDash val="solid"/>
-                      <a:round/>
-                      <a:headEnd type="none" w="med" len="med"/>
-                      <a:tailEnd type="none" w="med" len="med"/>
-                    </a:lnR>
-                    <a:lnT w="6350" cap="flat" cmpd="sng" algn="ctr">
-                      <a:solidFill>
-                        <a:srgbClr val="CBD5E1"/>
-                      </a:solidFill>
-                      <a:prstDash val="solid"/>
-                      <a:round/>
-                      <a:headEnd type="none" w="med" len="med"/>
-                      <a:tailEnd type="none" w="med" len="med"/>
-                    </a:lnT>
-                    <a:lnB w="6350" cap="flat" cmpd="sng" algn="ctr">
-                      <a:solidFill>
-                        <a:srgbClr val="CBD5E1"/>
-                      </a:solidFill>
-                      <a:prstDash val="solid"/>
-                      <a:round/>
-                      <a:headEnd type="none" w="med" len="med"/>
-                      <a:tailEnd type="none" w="med" len="med"/>
-                    </a:lnB>
-                    <a:solidFill>
-                      <a:srgbClr val="E8EFF8"/>
-                    </a:solidFill>
-                  </a:tcPr>
-                </a:tc>
-                <a:tc>
-                  <a:txBody>
-                    <a:bodyPr/>
-                    <a:lstStyle/>
-                    <a:p>
-                      <a:pPr algn="ctr" indent="0" marL="0">
-                        <a:buNone/>
-                      </a:pPr>
-                      <a:r>
-                        <a:rPr lang="en-US" sz="900" dirty="0">
-                          <a:solidFill>
-                            <a:srgbClr val="000000"/>
-                          </a:solidFill>
-                          <a:latin typeface="Arial" pitchFamily="34" charset="0"/>
-                          <a:ea typeface="Arial" pitchFamily="34" charset="-122"/>
-                          <a:cs typeface="Arial" pitchFamily="34" charset="-120"/>
-                        </a:rPr>
-                        <a:t>/10</a:t>
-                      </a:r>
-                      <a:endParaRPr lang="en-US" sz="900" dirty="0">
-                        <a:latin typeface="Arial" charset="0"/>
-                        <a:ea typeface="Arial" charset="0"/>
-                        <a:cs typeface="Arial" charset="0"/>
-                      </a:endParaRPr>
-                    </a:p>
-                  </a:txBody>
-                  <a:tcPr marL="91440" marR="91440" marT="45720" marB="45720">
-                    <a:lnL w="6350" cap="flat" cmpd="sng" algn="ctr">
-                      <a:solidFill>
-                        <a:srgbClr val="CBD5E1"/>
-                      </a:solidFill>
-                      <a:prstDash val="solid"/>
-                      <a:round/>
-                      <a:headEnd type="none" w="med" len="med"/>
-                      <a:tailEnd type="none" w="med" len="med"/>
-                    </a:lnL>
-                    <a:lnR w="6350" cap="flat" cmpd="sng" algn="ctr">
-                      <a:solidFill>
-                        <a:srgbClr val="CBD5E1"/>
-                      </a:solidFill>
-                      <a:prstDash val="solid"/>
-                      <a:round/>
-                      <a:headEnd type="none" w="med" len="med"/>
-                      <a:tailEnd type="none" w="med" len="med"/>
-                    </a:lnR>
-                    <a:lnT w="6350" cap="flat" cmpd="sng" algn="ctr">
-                      <a:solidFill>
-                        <a:srgbClr val="CBD5E1"/>
-                      </a:solidFill>
-                      <a:prstDash val="solid"/>
-                      <a:round/>
-                      <a:headEnd type="none" w="med" len="med"/>
-                      <a:tailEnd type="none" w="med" len="med"/>
-                    </a:lnT>
-                    <a:lnB w="6350" cap="flat" cmpd="sng" algn="ctr">
-                      <a:solidFill>
-                        <a:srgbClr val="CBD5E1"/>
-                      </a:solidFill>
-                      <a:prstDash val="solid"/>
-                      <a:round/>
-                      <a:headEnd type="none" w="med" len="med"/>
-                      <a:tailEnd type="none" w="med" len="med"/>
-                    </a:lnB>
-                    <a:solidFill>
-                      <a:srgbClr val="E8EFF8"/>
-                    </a:solidFill>
-                  </a:tcPr>
-                </a:tc>
-                <a:tc>
-                  <a:txBody>
-                    <a:bodyPr/>
-                    <a:lstStyle/>
-                    <a:p>
-                      <a:pPr algn="ctr" indent="0" marL="0">
-                        <a:buNone/>
-                      </a:pPr>
-                      <a:r>
-                        <a:rPr lang="en-US" sz="900" dirty="0">
-                          <a:solidFill>
-                            <a:srgbClr val="000000"/>
-                          </a:solidFill>
-                          <a:latin typeface="Arial" pitchFamily="34" charset="0"/>
-                          <a:ea typeface="Arial" pitchFamily="34" charset="-122"/>
-                          <a:cs typeface="Arial" pitchFamily="34" charset="-120"/>
-                        </a:rPr>
-                        <a:t>8.43</a:t>
+                        <a:t>8.13</a:t>
                       </a:r>
                       <a:endParaRPr lang="en-US" sz="900" dirty="0">
                         <a:latin typeface="Arial" charset="0"/>
@@ -9587,7 +9604,7 @@
                           <a:ea typeface="Arial" pitchFamily="34" charset="-122"/>
                           <a:cs typeface="Arial" pitchFamily="34" charset="-120"/>
                         </a:rPr>
-                        <a:t>5</a:t>
+                        <a:t>11</a:t>
                       </a:r>
                       <a:endParaRPr lang="en-US" sz="900" dirty="0">
                         <a:latin typeface="Arial" charset="0"/>
@@ -9655,7 +9672,7 @@
                           <a:ea typeface="Arial" pitchFamily="34" charset="-122"/>
                           <a:cs typeface="Arial" pitchFamily="34" charset="-120"/>
                         </a:rPr>
-                        <a:t>7.4</a:t>
+                        <a:t>7.27</a:t>
                       </a:r>
                       <a:endParaRPr lang="en-US" sz="900" dirty="0">
                         <a:latin typeface="Arial" charset="0"/>
@@ -9791,7 +9808,7 @@
                           <a:ea typeface="Arial" pitchFamily="34" charset="-122"/>
                           <a:cs typeface="Arial" pitchFamily="34" charset="-120"/>
                         </a:rPr>
-                        <a:t>7.4</a:t>
+                        <a:t>7.27</a:t>
                       </a:r>
                       <a:endParaRPr lang="en-US" sz="900" dirty="0">
                         <a:latin typeface="Arial" charset="0"/>
@@ -10199,7 +10216,7 @@
                 <a:ea typeface="Arial" pitchFamily="34" charset="-122"/>
                 <a:cs typeface="Arial" pitchFamily="34" charset="-120"/>
               </a:rPr>
-              <a:t>74件（86.0%）</a:t>
+              <a:t>114件（80.9%）</a:t>
             </a:r>
             <a:endParaRPr lang="en-US" sz="1100" dirty="0"/>
           </a:p>
@@ -10297,7 +10314,7 @@
                 <a:ea typeface="Arial" pitchFamily="34" charset="-122"/>
                 <a:cs typeface="Arial" pitchFamily="34" charset="-120"/>
               </a:rPr>
-              <a:t>10件（11.6%）</a:t>
+              <a:t>22件（15.6%）</a:t>
             </a:r>
             <a:endParaRPr lang="en-US" sz="1100" dirty="0"/>
           </a:p>
@@ -10395,7 +10412,7 @@
                 <a:ea typeface="Arial" pitchFamily="34" charset="-122"/>
                 <a:cs typeface="Arial" pitchFamily="34" charset="-120"/>
               </a:rPr>
-              <a:t>2件（2.3%）</a:t>
+              <a:t>5件（3.5%）</a:t>
             </a:r>
             <a:endParaRPr lang="en-US" sz="1100" dirty="0"/>
           </a:p>
@@ -10729,6 +10746,229 @@
                 <a:ea typeface="Arial" pitchFamily="34" charset="-122"/>
                 <a:cs typeface="Arial" pitchFamily="34" charset="-120"/>
               </a:rPr>
+              <a:t>50件+</a:t>
+            </a:r>
+            <a:endParaRPr lang="en-US" sz="900" dirty="0"/>
+          </a:p>
+        </p:txBody>
+      </p:sp>
+      <p:sp>
+        <p:nvSpPr>
+          <p:cNvPr id="9" name="Text 7"/>
+          <p:cNvSpPr/>
+          <p:nvPr/>
+        </p:nvSpPr>
+        <p:spPr>
+          <a:xfrm>
+            <a:off x="594360" y="1124712"/>
+            <a:ext cx="1645920" cy="274320"/>
+          </a:xfrm>
+          <a:prstGeom prst="rect">
+            <a:avLst/>
+          </a:prstGeom>
+          <a:noFill/>
+          <a:ln/>
+        </p:spPr>
+        <p:txBody>
+          <a:bodyPr wrap="square" lIns="0" tIns="0" rIns="0" bIns="0" rtlCol="0" anchor="ctr"/>
+          <a:lstStyle/>
+          <a:p>
+            <a:pPr indent="0" marL="0">
+              <a:buNone/>
+            </a:pPr>
+            <a:r>
+              <a:rPr lang="en-US" sz="1300" b="1" dirty="0">
+                <a:solidFill>
+                  <a:srgbClr val="1A2744"/>
+                </a:solidFill>
+                <a:latin typeface="Arial" pitchFamily="34" charset="0"/>
+                <a:ea typeface="Arial" pitchFamily="34" charset="-122"/>
+                <a:cs typeface="Arial" pitchFamily="34" charset="-120"/>
+              </a:rPr>
+              <a:t>朝食</a:t>
+            </a:r>
+            <a:endParaRPr lang="en-US" sz="1300" dirty="0"/>
+          </a:p>
+        </p:txBody>
+      </p:sp>
+      <p:sp>
+        <p:nvSpPr>
+          <p:cNvPr id="10" name="Text 8"/>
+          <p:cNvSpPr/>
+          <p:nvPr/>
+        </p:nvSpPr>
+        <p:spPr>
+          <a:xfrm>
+            <a:off x="594360" y="1417320"/>
+            <a:ext cx="2377440" cy="365760"/>
+          </a:xfrm>
+          <a:prstGeom prst="rect">
+            <a:avLst/>
+          </a:prstGeom>
+          <a:noFill/>
+          <a:ln/>
+        </p:spPr>
+        <p:txBody>
+          <a:bodyPr wrap="square" lIns="0" tIns="0" rIns="0" bIns="0" rtlCol="0" anchor="ctr"/>
+          <a:lstStyle/>
+          <a:p>
+            <a:pPr indent="0" marL="0">
+              <a:buNone/>
+            </a:pPr>
+            <a:r>
+              <a:rPr lang="en-US" sz="900" dirty="0">
+                <a:solidFill>
+                  <a:srgbClr val="64748B"/>
+                </a:solidFill>
+                <a:latin typeface="Arial" pitchFamily="34" charset="0"/>
+                <a:ea typeface="Arial" pitchFamily="34" charset="-122"/>
+                <a:cs typeface="Arial" pitchFamily="34" charset="-120"/>
+              </a:rPr>
+              <a:t>朝食で「これは…」と少し思った出来事があり近くのスタッフさんにお伝えしたところ、大変丁寧に対応してくださいました</a:t>
+            </a:r>
+            <a:endParaRPr lang="en-US" sz="900" dirty="0"/>
+          </a:p>
+        </p:txBody>
+      </p:sp>
+      <p:sp>
+        <p:nvSpPr>
+          <p:cNvPr id="11" name="Text 9"/>
+          <p:cNvSpPr/>
+          <p:nvPr/>
+        </p:nvSpPr>
+        <p:spPr>
+          <a:xfrm>
+            <a:off x="594360" y="1828800"/>
+            <a:ext cx="2377440" cy="640080"/>
+          </a:xfrm>
+          <a:prstGeom prst="rect">
+            <a:avLst/>
+          </a:prstGeom>
+          <a:noFill/>
+          <a:ln/>
+        </p:spPr>
+        <p:txBody>
+          <a:bodyPr wrap="square" lIns="0" tIns="0" rIns="0" bIns="0" rtlCol="0" anchor="ctr"/>
+          <a:lstStyle/>
+          <a:p>
+            <a:pPr indent="0" marL="0">
+              <a:buNone/>
+            </a:pPr>
+            <a:r>
+              <a:rPr lang="en-US" sz="900" i="1" dirty="0">
+                <a:solidFill>
+                  <a:srgbClr val="3B7DD8"/>
+                </a:solidFill>
+                <a:latin typeface="Arial" pitchFamily="34" charset="0"/>
+                <a:ea typeface="Arial" pitchFamily="34" charset="-122"/>
+                <a:cs typeface="Arial" pitchFamily="34" charset="-120"/>
+              </a:rPr>
+              <a:t>「無料の朝食が用意されていてとても良かったです」</a:t>
+            </a:r>
+            <a:endParaRPr lang="en-US" sz="900" dirty="0"/>
+          </a:p>
+        </p:txBody>
+      </p:sp>
+      <p:sp>
+        <p:nvSpPr>
+          <p:cNvPr id="12" name="Shape 10"/>
+          <p:cNvSpPr/>
+          <p:nvPr/>
+        </p:nvSpPr>
+        <p:spPr>
+          <a:xfrm>
+            <a:off x="3291840" y="1051560"/>
+            <a:ext cx="2651760" cy="1600200"/>
+          </a:xfrm>
+          <a:prstGeom prst="rect">
+            <a:avLst/>
+          </a:prstGeom>
+          <a:solidFill>
+            <a:srgbClr val="FFFFFF"/>
+          </a:solidFill>
+          <a:ln/>
+          <a:effectLst>
+            <a:outerShdw sx="100000" sy="100000" kx="0" ky="0" algn="bl" rotWithShape="0" blurRad="50800" dist="25400" dir="8100000">
+              <a:srgbClr val="000000">
+                <a:alpha val="10000"/>
+              </a:srgbClr>
+            </a:outerShdw>
+          </a:effectLst>
+        </p:spPr>
+      </p:sp>
+      <p:sp>
+        <p:nvSpPr>
+          <p:cNvPr id="13" name="Shape 11"/>
+          <p:cNvSpPr/>
+          <p:nvPr/>
+        </p:nvSpPr>
+        <p:spPr>
+          <a:xfrm>
+            <a:off x="3291840" y="1051560"/>
+            <a:ext cx="54864" cy="1600200"/>
+          </a:xfrm>
+          <a:prstGeom prst="rect">
+            <a:avLst/>
+          </a:prstGeom>
+          <a:solidFill>
+            <a:srgbClr val="16A34A"/>
+          </a:solidFill>
+          <a:ln/>
+        </p:spPr>
+      </p:sp>
+      <p:sp>
+        <p:nvSpPr>
+          <p:cNvPr id="14" name="Shape 12"/>
+          <p:cNvSpPr/>
+          <p:nvPr/>
+        </p:nvSpPr>
+        <p:spPr>
+          <a:xfrm>
+            <a:off x="5120640" y="1124712"/>
+            <a:ext cx="658368" cy="228600"/>
+          </a:xfrm>
+          <a:prstGeom prst="rect">
+            <a:avLst/>
+          </a:prstGeom>
+          <a:solidFill>
+            <a:srgbClr val="DCFCE7"/>
+          </a:solidFill>
+          <a:ln/>
+        </p:spPr>
+      </p:sp>
+      <p:sp>
+        <p:nvSpPr>
+          <p:cNvPr id="15" name="Text 13"/>
+          <p:cNvSpPr/>
+          <p:nvPr/>
+        </p:nvSpPr>
+        <p:spPr>
+          <a:xfrm>
+            <a:off x="5120640" y="1124712"/>
+            <a:ext cx="658368" cy="228600"/>
+          </a:xfrm>
+          <a:prstGeom prst="rect">
+            <a:avLst/>
+          </a:prstGeom>
+          <a:noFill/>
+          <a:ln/>
+        </p:spPr>
+        <p:txBody>
+          <a:bodyPr wrap="square" lIns="0" tIns="0" rIns="0" bIns="0" rtlCol="0" anchor="ctr"/>
+          <a:lstStyle/>
+          <a:p>
+            <a:pPr algn="ctr" indent="0" marL="0">
+              <a:buNone/>
+            </a:pPr>
+            <a:r>
+              <a:rPr lang="en-US" sz="900" b="1" dirty="0">
+                <a:solidFill>
+                  <a:srgbClr val="16A34A"/>
+                </a:solidFill>
+                <a:latin typeface="Arial" pitchFamily="34" charset="0"/>
+                <a:ea typeface="Arial" pitchFamily="34" charset="-122"/>
+                <a:cs typeface="Arial" pitchFamily="34" charset="-120"/>
+              </a:rPr>
               <a:t>20件+</a:t>
             </a:r>
             <a:endParaRPr lang="en-US" sz="900" dirty="0"/>
@@ -10737,13 +10977,13 @@
       </p:sp>
       <p:sp>
         <p:nvSpPr>
-          <p:cNvPr id="9" name="Text 7"/>
-          <p:cNvSpPr/>
-          <p:nvPr/>
-        </p:nvSpPr>
-        <p:spPr>
-          <a:xfrm>
-            <a:off x="594360" y="1124712"/>
+          <p:cNvPr id="16" name="Text 14"/>
+          <p:cNvSpPr/>
+          <p:nvPr/>
+        </p:nvSpPr>
+        <p:spPr>
+          <a:xfrm>
+            <a:off x="3429000" y="1124712"/>
             <a:ext cx="1645920" cy="274320"/>
           </a:xfrm>
           <a:prstGeom prst="rect">
@@ -10776,13 +11016,13 @@
       </p:sp>
       <p:sp>
         <p:nvSpPr>
-          <p:cNvPr id="10" name="Text 8"/>
-          <p:cNvSpPr/>
-          <p:nvPr/>
-        </p:nvSpPr>
-        <p:spPr>
-          <a:xfrm>
-            <a:off x="594360" y="1417320"/>
+          <p:cNvPr id="17" name="Text 15"/>
+          <p:cNvSpPr/>
+          <p:nvPr/>
+        </p:nvSpPr>
+        <p:spPr>
+          <a:xfrm>
+            <a:off x="3429000" y="1417320"/>
             <a:ext cx="2377440" cy="365760"/>
           </a:xfrm>
           <a:prstGeom prst="rect">
@@ -10807,7 +11047,7 @@
                 <a:ea typeface="Arial" pitchFamily="34" charset="-122"/>
                 <a:cs typeface="Arial" pitchFamily="34" charset="-120"/>
               </a:rPr>
-              <a:t>スタッフのちょっとした対応が温かくてよかった</a:t>
+              <a:t>朝食で「これは…」と少し思った出来事があり近くのスタッフさんにお伝えしたところ、大変丁寧に対応してくださいました</a:t>
             </a:r>
             <a:endParaRPr lang="en-US" sz="900" dirty="0"/>
           </a:p>
@@ -10815,13 +11055,13 @@
       </p:sp>
       <p:sp>
         <p:nvSpPr>
-          <p:cNvPr id="11" name="Text 9"/>
-          <p:cNvSpPr/>
-          <p:nvPr/>
-        </p:nvSpPr>
-        <p:spPr>
-          <a:xfrm>
-            <a:off x="594360" y="1828800"/>
+          <p:cNvPr id="18" name="Text 16"/>
+          <p:cNvSpPr/>
+          <p:nvPr/>
+        </p:nvSpPr>
+        <p:spPr>
+          <a:xfrm>
+            <a:off x="3429000" y="1828800"/>
             <a:ext cx="2377440" cy="640080"/>
           </a:xfrm>
           <a:prstGeom prst="rect">
@@ -10846,7 +11086,7 @@
                 <a:ea typeface="Arial" pitchFamily="34" charset="-122"/>
                 <a:cs typeface="Arial" pitchFamily="34" charset="-120"/>
               </a:rPr>
-              <a:t>「成田空港近くのホテルは古いまま以上してるところが多い一方、コンフォート成田は清潔、かつとてもきめ細やかなサービスな...」</a:t>
+              <a:t>「スタッフのサービスがとても良く、丁寧で気持ちの良い対応でした」</a:t>
             </a:r>
             <a:endParaRPr lang="en-US" sz="900" dirty="0"/>
           </a:p>
@@ -10854,13 +11094,13 @@
       </p:sp>
       <p:sp>
         <p:nvSpPr>
-          <p:cNvPr id="12" name="Shape 10"/>
-          <p:cNvSpPr/>
-          <p:nvPr/>
-        </p:nvSpPr>
-        <p:spPr>
-          <a:xfrm>
-            <a:off x="3291840" y="1051560"/>
+          <p:cNvPr id="19" name="Shape 17"/>
+          <p:cNvSpPr/>
+          <p:nvPr/>
+        </p:nvSpPr>
+        <p:spPr>
+          <a:xfrm>
+            <a:off x="6126480" y="1051560"/>
             <a:ext cx="2651760" cy="1600200"/>
           </a:xfrm>
           <a:prstGeom prst="rect">
@@ -10881,13 +11121,13 @@
       </p:sp>
       <p:sp>
         <p:nvSpPr>
-          <p:cNvPr id="13" name="Shape 11"/>
-          <p:cNvSpPr/>
-          <p:nvPr/>
-        </p:nvSpPr>
-        <p:spPr>
-          <a:xfrm>
-            <a:off x="3291840" y="1051560"/>
+          <p:cNvPr id="20" name="Shape 18"/>
+          <p:cNvSpPr/>
+          <p:nvPr/>
+        </p:nvSpPr>
+        <p:spPr>
+          <a:xfrm>
+            <a:off x="6126480" y="1051560"/>
             <a:ext cx="54864" cy="1600200"/>
           </a:xfrm>
           <a:prstGeom prst="rect">
@@ -10901,13 +11141,13 @@
       </p:sp>
       <p:sp>
         <p:nvSpPr>
-          <p:cNvPr id="14" name="Shape 12"/>
-          <p:cNvSpPr/>
-          <p:nvPr/>
-        </p:nvSpPr>
-        <p:spPr>
-          <a:xfrm>
-            <a:off x="5120640" y="1124712"/>
+          <p:cNvPr id="21" name="Shape 19"/>
+          <p:cNvSpPr/>
+          <p:nvPr/>
+        </p:nvSpPr>
+        <p:spPr>
+          <a:xfrm>
+            <a:off x="7955280" y="1124712"/>
             <a:ext cx="658368" cy="228600"/>
           </a:xfrm>
           <a:prstGeom prst="rect">
@@ -10921,13 +11161,13 @@
       </p:sp>
       <p:sp>
         <p:nvSpPr>
-          <p:cNvPr id="15" name="Text 13"/>
-          <p:cNvSpPr/>
-          <p:nvPr/>
-        </p:nvSpPr>
-        <p:spPr>
-          <a:xfrm>
-            <a:off x="5120640" y="1124712"/>
+          <p:cNvPr id="22" name="Text 20"/>
+          <p:cNvSpPr/>
+          <p:nvPr/>
+        </p:nvSpPr>
+        <p:spPr>
+          <a:xfrm>
+            <a:off x="7955280" y="1124712"/>
             <a:ext cx="658368" cy="228600"/>
           </a:xfrm>
           <a:prstGeom prst="rect">
@@ -10960,13 +11200,13 @@
       </p:sp>
       <p:sp>
         <p:nvSpPr>
-          <p:cNvPr id="16" name="Text 14"/>
-          <p:cNvSpPr/>
-          <p:nvPr/>
-        </p:nvSpPr>
-        <p:spPr>
-          <a:xfrm>
-            <a:off x="3429000" y="1124712"/>
+          <p:cNvPr id="23" name="Text 21"/>
+          <p:cNvSpPr/>
+          <p:nvPr/>
+        </p:nvSpPr>
+        <p:spPr>
+          <a:xfrm>
+            <a:off x="6263640" y="1124712"/>
             <a:ext cx="1645920" cy="274320"/>
           </a:xfrm>
           <a:prstGeom prst="rect">
@@ -10991,7 +11231,7 @@
                 <a:ea typeface="Arial" pitchFamily="34" charset="-122"/>
                 <a:cs typeface="Arial" pitchFamily="34" charset="-120"/>
               </a:rPr>
-              <a:t>朝食</a:t>
+              <a:t>立地・アクセス</a:t>
             </a:r>
             <a:endParaRPr lang="en-US" sz="1300" dirty="0"/>
           </a:p>
@@ -10999,13 +11239,13 @@
       </p:sp>
       <p:sp>
         <p:nvSpPr>
-          <p:cNvPr id="17" name="Text 15"/>
-          <p:cNvSpPr/>
-          <p:nvPr/>
-        </p:nvSpPr>
-        <p:spPr>
-          <a:xfrm>
-            <a:off x="3429000" y="1417320"/>
+          <p:cNvPr id="24" name="Text 22"/>
+          <p:cNvSpPr/>
+          <p:nvPr/>
+        </p:nvSpPr>
+        <p:spPr>
+          <a:xfrm>
+            <a:off x="6263640" y="1417320"/>
             <a:ext cx="2377440" cy="365760"/>
           </a:xfrm>
           <a:prstGeom prst="rect">
@@ -11030,7 +11270,7 @@
                 <a:ea typeface="Arial" pitchFamily="34" charset="-122"/>
                 <a:cs typeface="Arial" pitchFamily="34" charset="-120"/>
               </a:rPr>
-              <a:t>連泊だったけど、朝食も少しずつメニューを変えていてよかった</a:t>
+              <a:t>Bahkan 1 hari setelah nya rambut masih halus  Udah 2x ngi...</a:t>
             </a:r>
             <a:endParaRPr lang="en-US" sz="900" dirty="0"/>
           </a:p>
@@ -11038,13 +11278,13 @@
       </p:sp>
       <p:sp>
         <p:nvSpPr>
-          <p:cNvPr id="18" name="Text 16"/>
-          <p:cNvSpPr/>
-          <p:nvPr/>
-        </p:nvSpPr>
-        <p:spPr>
-          <a:xfrm>
-            <a:off x="3429000" y="1828800"/>
+          <p:cNvPr id="25" name="Text 23"/>
+          <p:cNvSpPr/>
+          <p:nvPr/>
+        </p:nvSpPr>
+        <p:spPr>
+          <a:xfrm>
+            <a:off x="6263640" y="1828800"/>
             <a:ext cx="2377440" cy="640080"/>
           </a:xfrm>
           <a:prstGeom prst="rect">
@@ -11069,7 +11309,7 @@
                 <a:ea typeface="Arial" pitchFamily="34" charset="-122"/>
                 <a:cs typeface="Arial" pitchFamily="34" charset="-120"/>
               </a:rPr>
-              <a:t>「朝食サービスが内容、時間共に最高でした」</a:t>
+              <a:t>「駅近く、飲食店やショップも多く便利でした」</a:t>
             </a:r>
             <a:endParaRPr lang="en-US" sz="900" dirty="0"/>
           </a:p>
@@ -11077,13 +11317,13 @@
       </p:sp>
       <p:sp>
         <p:nvSpPr>
-          <p:cNvPr id="19" name="Shape 17"/>
-          <p:cNvSpPr/>
-          <p:nvPr/>
-        </p:nvSpPr>
-        <p:spPr>
-          <a:xfrm>
-            <a:off x="6126480" y="1051560"/>
+          <p:cNvPr id="26" name="Shape 24"/>
+          <p:cNvSpPr/>
+          <p:nvPr/>
+        </p:nvSpPr>
+        <p:spPr>
+          <a:xfrm>
+            <a:off x="457200" y="2880360"/>
             <a:ext cx="2651760" cy="1600200"/>
           </a:xfrm>
           <a:prstGeom prst="rect">
@@ -11104,13 +11344,13 @@
       </p:sp>
       <p:sp>
         <p:nvSpPr>
-          <p:cNvPr id="20" name="Shape 18"/>
-          <p:cNvSpPr/>
-          <p:nvPr/>
-        </p:nvSpPr>
-        <p:spPr>
-          <a:xfrm>
-            <a:off x="6126480" y="1051560"/>
+          <p:cNvPr id="27" name="Shape 25"/>
+          <p:cNvSpPr/>
+          <p:nvPr/>
+        </p:nvSpPr>
+        <p:spPr>
+          <a:xfrm>
+            <a:off x="457200" y="2880360"/>
             <a:ext cx="54864" cy="1600200"/>
           </a:xfrm>
           <a:prstGeom prst="rect">
@@ -11124,13 +11364,13 @@
       </p:sp>
       <p:sp>
         <p:nvSpPr>
-          <p:cNvPr id="21" name="Shape 19"/>
-          <p:cNvSpPr/>
-          <p:nvPr/>
-        </p:nvSpPr>
-        <p:spPr>
-          <a:xfrm>
-            <a:off x="7955280" y="1124712"/>
+          <p:cNvPr id="28" name="Shape 26"/>
+          <p:cNvSpPr/>
+          <p:nvPr/>
+        </p:nvSpPr>
+        <p:spPr>
+          <a:xfrm>
+            <a:off x="2286000" y="2953512"/>
             <a:ext cx="658368" cy="228600"/>
           </a:xfrm>
           <a:prstGeom prst="rect">
@@ -11144,13 +11384,13 @@
       </p:sp>
       <p:sp>
         <p:nvSpPr>
-          <p:cNvPr id="22" name="Text 20"/>
-          <p:cNvSpPr/>
-          <p:nvPr/>
-        </p:nvSpPr>
-        <p:spPr>
-          <a:xfrm>
-            <a:off x="7955280" y="1124712"/>
+          <p:cNvPr id="29" name="Text 27"/>
+          <p:cNvSpPr/>
+          <p:nvPr/>
+        </p:nvSpPr>
+        <p:spPr>
+          <a:xfrm>
+            <a:off x="2286000" y="2953512"/>
             <a:ext cx="658368" cy="228600"/>
           </a:xfrm>
           <a:prstGeom prst="rect">
@@ -11183,13 +11423,13 @@
       </p:sp>
       <p:sp>
         <p:nvSpPr>
-          <p:cNvPr id="23" name="Text 21"/>
-          <p:cNvSpPr/>
-          <p:nvPr/>
-        </p:nvSpPr>
-        <p:spPr>
-          <a:xfrm>
-            <a:off x="6263640" y="1124712"/>
+          <p:cNvPr id="30" name="Text 28"/>
+          <p:cNvSpPr/>
+          <p:nvPr/>
+        </p:nvSpPr>
+        <p:spPr>
+          <a:xfrm>
+            <a:off x="594360" y="2953512"/>
             <a:ext cx="1645920" cy="274320"/>
           </a:xfrm>
           <a:prstGeom prst="rect">
@@ -11214,7 +11454,7 @@
                 <a:ea typeface="Arial" pitchFamily="34" charset="-122"/>
                 <a:cs typeface="Arial" pitchFamily="34" charset="-120"/>
               </a:rPr>
-              <a:t>立地・アクセス</a:t>
+              <a:t>快適さ・設備</a:t>
             </a:r>
             <a:endParaRPr lang="en-US" sz="1300" dirty="0"/>
           </a:p>
@@ -11222,13 +11462,13 @@
       </p:sp>
       <p:sp>
         <p:nvSpPr>
-          <p:cNvPr id="24" name="Text 22"/>
-          <p:cNvSpPr/>
-          <p:nvPr/>
-        </p:nvSpPr>
-        <p:spPr>
-          <a:xfrm>
-            <a:off x="6263640" y="1417320"/>
+          <p:cNvPr id="31" name="Text 29"/>
+          <p:cNvSpPr/>
+          <p:nvPr/>
+        </p:nvSpPr>
+        <p:spPr>
+          <a:xfrm>
+            <a:off x="594360" y="3246120"/>
             <a:ext cx="2377440" cy="365760"/>
           </a:xfrm>
           <a:prstGeom prst="rect">
@@ -11253,7 +11493,7 @@
                 <a:ea typeface="Arial" pitchFamily="34" charset="-122"/>
                 <a:cs typeface="Arial" pitchFamily="34" charset="-120"/>
               </a:rPr>
-              <a:t>駅近くの立地で移動に便利</a:t>
+              <a:t>サービスがとても良く、スタッフの対応も親切で快適に過ごせました</a:t>
             </a:r>
             <a:endParaRPr lang="en-US" sz="900" dirty="0"/>
           </a:p>
@@ -11261,13 +11501,13 @@
       </p:sp>
       <p:sp>
         <p:nvSpPr>
-          <p:cNvPr id="25" name="Text 23"/>
-          <p:cNvSpPr/>
-          <p:nvPr/>
-        </p:nvSpPr>
-        <p:spPr>
-          <a:xfrm>
-            <a:off x="6263640" y="1828800"/>
+          <p:cNvPr id="32" name="Text 30"/>
+          <p:cNvSpPr/>
+          <p:nvPr/>
+        </p:nvSpPr>
+        <p:spPr>
+          <a:xfrm>
+            <a:off x="594360" y="3657600"/>
             <a:ext cx="2377440" cy="640080"/>
           </a:xfrm>
           <a:prstGeom prst="rect">
@@ -11292,7 +11532,7 @@
                 <a:ea typeface="Arial" pitchFamily="34" charset="-122"/>
                 <a:cs typeface="Arial" pitchFamily="34" charset="-120"/>
               </a:rPr>
-              <a:t>「ที่พักอาจจะเก่าไปนิด แต่สะดวกเพราะอยู่ใกล้รถไฟ ใกล้สนามบิ...」</a:t>
+              <a:t>「部屋はコンパクトですが何も不自由することなく快適に過ごせました」</a:t>
             </a:r>
             <a:endParaRPr lang="en-US" sz="900" dirty="0"/>
           </a:p>
@@ -11300,13 +11540,13 @@
       </p:sp>
       <p:sp>
         <p:nvSpPr>
-          <p:cNvPr id="26" name="Shape 24"/>
-          <p:cNvSpPr/>
-          <p:nvPr/>
-        </p:nvSpPr>
-        <p:spPr>
-          <a:xfrm>
-            <a:off x="457200" y="2880360"/>
+          <p:cNvPr id="33" name="Shape 31"/>
+          <p:cNvSpPr/>
+          <p:nvPr/>
+        </p:nvSpPr>
+        <p:spPr>
+          <a:xfrm>
+            <a:off x="3291840" y="2880360"/>
             <a:ext cx="2651760" cy="1600200"/>
           </a:xfrm>
           <a:prstGeom prst="rect">
@@ -11327,13 +11567,13 @@
       </p:sp>
       <p:sp>
         <p:nvSpPr>
-          <p:cNvPr id="27" name="Shape 25"/>
-          <p:cNvSpPr/>
-          <p:nvPr/>
-        </p:nvSpPr>
-        <p:spPr>
-          <a:xfrm>
-            <a:off x="457200" y="2880360"/>
+          <p:cNvPr id="34" name="Shape 32"/>
+          <p:cNvSpPr/>
+          <p:nvPr/>
+        </p:nvSpPr>
+        <p:spPr>
+          <a:xfrm>
+            <a:off x="3291840" y="2880360"/>
             <a:ext cx="54864" cy="1600200"/>
           </a:xfrm>
           <a:prstGeom prst="rect">
@@ -11347,13 +11587,13 @@
       </p:sp>
       <p:sp>
         <p:nvSpPr>
-          <p:cNvPr id="28" name="Shape 26"/>
-          <p:cNvSpPr/>
-          <p:nvPr/>
-        </p:nvSpPr>
-        <p:spPr>
-          <a:xfrm>
-            <a:off x="2286000" y="2953512"/>
+          <p:cNvPr id="35" name="Shape 33"/>
+          <p:cNvSpPr/>
+          <p:nvPr/>
+        </p:nvSpPr>
+        <p:spPr>
+          <a:xfrm>
+            <a:off x="5120640" y="2953512"/>
             <a:ext cx="658368" cy="228600"/>
           </a:xfrm>
           <a:prstGeom prst="rect">
@@ -11367,13 +11607,13 @@
       </p:sp>
       <p:sp>
         <p:nvSpPr>
-          <p:cNvPr id="29" name="Text 27"/>
-          <p:cNvSpPr/>
-          <p:nvPr/>
-        </p:nvSpPr>
-        <p:spPr>
-          <a:xfrm>
-            <a:off x="2286000" y="2953512"/>
+          <p:cNvPr id="36" name="Text 34"/>
+          <p:cNvSpPr/>
+          <p:nvPr/>
+        </p:nvSpPr>
+        <p:spPr>
+          <a:xfrm>
+            <a:off x="5120640" y="2953512"/>
             <a:ext cx="658368" cy="228600"/>
           </a:xfrm>
           <a:prstGeom prst="rect">
@@ -11406,229 +11646,6 @@
       </p:sp>
       <p:sp>
         <p:nvSpPr>
-          <p:cNvPr id="30" name="Text 28"/>
-          <p:cNvSpPr/>
-          <p:nvPr/>
-        </p:nvSpPr>
-        <p:spPr>
-          <a:xfrm>
-            <a:off x="594360" y="2953512"/>
-            <a:ext cx="1645920" cy="274320"/>
-          </a:xfrm>
-          <a:prstGeom prst="rect">
-            <a:avLst/>
-          </a:prstGeom>
-          <a:noFill/>
-          <a:ln/>
-        </p:spPr>
-        <p:txBody>
-          <a:bodyPr wrap="square" lIns="0" tIns="0" rIns="0" bIns="0" rtlCol="0" anchor="ctr"/>
-          <a:lstStyle/>
-          <a:p>
-            <a:pPr indent="0" marL="0">
-              <a:buNone/>
-            </a:pPr>
-            <a:r>
-              <a:rPr lang="en-US" sz="1300" b="1" dirty="0">
-                <a:solidFill>
-                  <a:srgbClr val="1A2744"/>
-                </a:solidFill>
-                <a:latin typeface="Arial" pitchFamily="34" charset="0"/>
-                <a:ea typeface="Arial" pitchFamily="34" charset="-122"/>
-                <a:cs typeface="Arial" pitchFamily="34" charset="-120"/>
-              </a:rPr>
-              <a:t>快適さ・設備</a:t>
-            </a:r>
-            <a:endParaRPr lang="en-US" sz="1300" dirty="0"/>
-          </a:p>
-        </p:txBody>
-      </p:sp>
-      <p:sp>
-        <p:nvSpPr>
-          <p:cNvPr id="31" name="Text 29"/>
-          <p:cNvSpPr/>
-          <p:nvPr/>
-        </p:nvSpPr>
-        <p:spPr>
-          <a:xfrm>
-            <a:off x="594360" y="3246120"/>
-            <a:ext cx="2377440" cy="365760"/>
-          </a:xfrm>
-          <a:prstGeom prst="rect">
-            <a:avLst/>
-          </a:prstGeom>
-          <a:noFill/>
-          <a:ln/>
-        </p:spPr>
-        <p:txBody>
-          <a:bodyPr wrap="square" lIns="0" tIns="0" rIns="0" bIns="0" rtlCol="0" anchor="ctr"/>
-          <a:lstStyle/>
-          <a:p>
-            <a:pPr indent="0" marL="0">
-              <a:buNone/>
-            </a:pPr>
-            <a:r>
-              <a:rPr lang="en-US" sz="900" dirty="0">
-                <a:solidFill>
-                  <a:srgbClr val="64748B"/>
-                </a:solidFill>
-                <a:latin typeface="Arial" pitchFamily="34" charset="0"/>
-                <a:ea typeface="Arial" pitchFamily="34" charset="-122"/>
-                <a:cs typeface="Arial" pitchFamily="34" charset="-120"/>
-              </a:rPr>
-              <a:t>客室は広々としていて、とても快適でした</a:t>
-            </a:r>
-            <a:endParaRPr lang="en-US" sz="900" dirty="0"/>
-          </a:p>
-        </p:txBody>
-      </p:sp>
-      <p:sp>
-        <p:nvSpPr>
-          <p:cNvPr id="32" name="Text 30"/>
-          <p:cNvSpPr/>
-          <p:nvPr/>
-        </p:nvSpPr>
-        <p:spPr>
-          <a:xfrm>
-            <a:off x="594360" y="3657600"/>
-            <a:ext cx="2377440" cy="640080"/>
-          </a:xfrm>
-          <a:prstGeom prst="rect">
-            <a:avLst/>
-          </a:prstGeom>
-          <a:noFill/>
-          <a:ln/>
-        </p:spPr>
-        <p:txBody>
-          <a:bodyPr wrap="square" lIns="0" tIns="0" rIns="0" bIns="0" rtlCol="0" anchor="ctr"/>
-          <a:lstStyle/>
-          <a:p>
-            <a:pPr indent="0" marL="0">
-              <a:buNone/>
-            </a:pPr>
-            <a:r>
-              <a:rPr lang="en-US" sz="900" i="1" dirty="0">
-                <a:solidFill>
-                  <a:srgbClr val="3B7DD8"/>
-                </a:solidFill>
-                <a:latin typeface="Arial" pitchFamily="34" charset="0"/>
-                <a:ea typeface="Arial" pitchFamily="34" charset="-122"/>
-                <a:cs typeface="Arial" pitchFamily="34" charset="-120"/>
-              </a:rPr>
-              <a:t>「福岡で泊まったホテルよりも断然快適でした」</a:t>
-            </a:r>
-            <a:endParaRPr lang="en-US" sz="900" dirty="0"/>
-          </a:p>
-        </p:txBody>
-      </p:sp>
-      <p:sp>
-        <p:nvSpPr>
-          <p:cNvPr id="33" name="Shape 31"/>
-          <p:cNvSpPr/>
-          <p:nvPr/>
-        </p:nvSpPr>
-        <p:spPr>
-          <a:xfrm>
-            <a:off x="3291840" y="2880360"/>
-            <a:ext cx="2651760" cy="1600200"/>
-          </a:xfrm>
-          <a:prstGeom prst="rect">
-            <a:avLst/>
-          </a:prstGeom>
-          <a:solidFill>
-            <a:srgbClr val="FFFFFF"/>
-          </a:solidFill>
-          <a:ln/>
-          <a:effectLst>
-            <a:outerShdw sx="100000" sy="100000" kx="0" ky="0" algn="bl" rotWithShape="0" blurRad="50800" dist="25400" dir="8100000">
-              <a:srgbClr val="000000">
-                <a:alpha val="10000"/>
-              </a:srgbClr>
-            </a:outerShdw>
-          </a:effectLst>
-        </p:spPr>
-      </p:sp>
-      <p:sp>
-        <p:nvSpPr>
-          <p:cNvPr id="34" name="Shape 32"/>
-          <p:cNvSpPr/>
-          <p:nvPr/>
-        </p:nvSpPr>
-        <p:spPr>
-          <a:xfrm>
-            <a:off x="3291840" y="2880360"/>
-            <a:ext cx="54864" cy="1600200"/>
-          </a:xfrm>
-          <a:prstGeom prst="rect">
-            <a:avLst/>
-          </a:prstGeom>
-          <a:solidFill>
-            <a:srgbClr val="16A34A"/>
-          </a:solidFill>
-          <a:ln/>
-        </p:spPr>
-      </p:sp>
-      <p:sp>
-        <p:nvSpPr>
-          <p:cNvPr id="35" name="Shape 33"/>
-          <p:cNvSpPr/>
-          <p:nvPr/>
-        </p:nvSpPr>
-        <p:spPr>
-          <a:xfrm>
-            <a:off x="5120640" y="2953512"/>
-            <a:ext cx="658368" cy="228600"/>
-          </a:xfrm>
-          <a:prstGeom prst="rect">
-            <a:avLst/>
-          </a:prstGeom>
-          <a:solidFill>
-            <a:srgbClr val="DCFCE7"/>
-          </a:solidFill>
-          <a:ln/>
-        </p:spPr>
-      </p:sp>
-      <p:sp>
-        <p:nvSpPr>
-          <p:cNvPr id="36" name="Text 34"/>
-          <p:cNvSpPr/>
-          <p:nvPr/>
-        </p:nvSpPr>
-        <p:spPr>
-          <a:xfrm>
-            <a:off x="5120640" y="2953512"/>
-            <a:ext cx="658368" cy="228600"/>
-          </a:xfrm>
-          <a:prstGeom prst="rect">
-            <a:avLst/>
-          </a:prstGeom>
-          <a:noFill/>
-          <a:ln/>
-        </p:spPr>
-        <p:txBody>
-          <a:bodyPr wrap="square" lIns="0" tIns="0" rIns="0" bIns="0" rtlCol="0" anchor="ctr"/>
-          <a:lstStyle/>
-          <a:p>
-            <a:pPr algn="ctr" indent="0" marL="0">
-              <a:buNone/>
-            </a:pPr>
-            <a:r>
-              <a:rPr lang="en-US" sz="900" b="1" dirty="0">
-                <a:solidFill>
-                  <a:srgbClr val="16A34A"/>
-                </a:solidFill>
-                <a:latin typeface="Arial" pitchFamily="34" charset="0"/>
-                <a:ea typeface="Arial" pitchFamily="34" charset="-122"/>
-                <a:cs typeface="Arial" pitchFamily="34" charset="-120"/>
-              </a:rPr>
-              <a:t>10件+</a:t>
-            </a:r>
-            <a:endParaRPr lang="en-US" sz="900" dirty="0"/>
-          </a:p>
-        </p:txBody>
-      </p:sp>
-      <p:sp>
-        <p:nvSpPr>
           <p:cNvPr id="37" name="Text 35"/>
           <p:cNvSpPr/>
           <p:nvPr/>
@@ -11699,7 +11716,7 @@
                 <a:ea typeface="Arial" pitchFamily="34" charset="-122"/>
                 <a:cs typeface="Arial" pitchFamily="34" charset="-120"/>
               </a:rPr>
-              <a:t>成田空港近くのホテルは古いまま以上してるところが多い一方、コンフォート成田は清潔、かつとてもきめ細やかなサービスな...</a:t>
+              <a:t>また他の部屋の掃除をしているスタッフさんが全員必ず「おはようございます」と挨拶をして下さり、とにかく全体的に接客面...</a:t>
             </a:r>
             <a:endParaRPr lang="en-US" sz="900" dirty="0"/>
           </a:p>
@@ -11738,7 +11755,7 @@
                 <a:ea typeface="Arial" pitchFamily="34" charset="-122"/>
                 <a:cs typeface="Arial" pitchFamily="34" charset="-120"/>
               </a:rPr>
-              <a:t>「また他の部屋の掃除をしているスタッフさんが全員必ず「おはようございます」と挨拶をして下さり、とにかく全体的に接客面...」</a:t>
+              <a:t>「部屋も清潔で居心地がよく、ゆっくり休むことができました」</a:t>
             </a:r>
             <a:endParaRPr lang="en-US" sz="900" dirty="0"/>
           </a:p>
@@ -11844,7 +11861,7 @@
                 <a:ea typeface="Arial" pitchFamily="34" charset="-122"/>
                 <a:cs typeface="Arial" pitchFamily="34" charset="-120"/>
               </a:rPr>
-              <a:t>6件</a:t>
+              <a:t>10件+</a:t>
             </a:r>
             <a:endParaRPr lang="en-US" sz="900" dirty="0"/>
           </a:p>
@@ -12651,7 +12668,7 @@
                           <a:ea typeface="Arial" pitchFamily="34" charset="-122"/>
                           <a:cs typeface="Arial" pitchFamily="34" charset="-120"/>
                         </a:rPr>
-                        <a:t>The staff at this place were very helpful and friendly</a:t>
+                        <a:t>冬でも暖房の温度を自分で調整できるので、暑すぎることもなく、とても快適でした</a:t>
                       </a:r>
                       <a:endParaRPr lang="en-US" sz="900" dirty="0">
                         <a:latin typeface="Arial" charset="0"/>
@@ -12719,7 +12736,7 @@
                           <a:ea typeface="Arial" pitchFamily="34" charset="-122"/>
                           <a:cs typeface="Arial" pitchFamily="34" charset="-120"/>
                         </a:rPr>
-                        <a:t>12件</a:t>
+                        <a:t>16件</a:t>
                       </a:r>
                       <a:endParaRPr lang="en-US" sz="900" dirty="0">
                         <a:latin typeface="Arial" charset="0"/>
@@ -12993,7 +13010,7 @@
                           <a:ea typeface="Arial" pitchFamily="34" charset="-122"/>
                           <a:cs typeface="Arial" pitchFamily="34" charset="-120"/>
                         </a:rPr>
-                        <a:t>8件</a:t>
+                        <a:t>10件</a:t>
                       </a:r>
                       <a:endParaRPr lang="en-US" sz="900" dirty="0">
                         <a:latin typeface="Arial" charset="0"/>
@@ -13131,7 +13148,7 @@
                           <a:ea typeface="Arial" pitchFamily="34" charset="-122"/>
                           <a:cs typeface="Arial" pitchFamily="34" charset="-120"/>
                         </a:rPr>
-                        <a:t>設備の老朽化</a:t>
+                        <a:t>臭い・匂い</a:t>
                       </a:r>
                       <a:endParaRPr lang="en-US" sz="900" dirty="0">
                         <a:latin typeface="Arial" charset="0"/>
@@ -13199,7 +13216,7 @@
                           <a:ea typeface="Arial" pitchFamily="34" charset="-122"/>
                           <a:cs typeface="Arial" pitchFamily="34" charset="-120"/>
                         </a:rPr>
-                        <a:t>ที่พักอาจจะเก่าไปนิด แต่สะดวกเพราะอยู่ใกล้รถไฟ ใกล้สนามบิ...</a:t>
+                        <a:t>部屋の方はリニューアル後の為、綺麗でタバコの臭いもなく広さも充分</a:t>
                       </a:r>
                       <a:endParaRPr lang="en-US" sz="900" dirty="0">
                         <a:latin typeface="Arial" charset="0"/>
@@ -13405,7 +13422,7 @@
                           <a:ea typeface="Arial" pitchFamily="34" charset="-122"/>
                           <a:cs typeface="Arial" pitchFamily="34" charset="-120"/>
                         </a:rPr>
-                        <a:t>部屋の狭さ</a:t>
+                        <a:t>清掃不備</a:t>
                       </a:r>
                       <a:endParaRPr lang="en-US" sz="900" dirty="0">
                         <a:latin typeface="Arial" charset="0"/>
@@ -13473,7 +13490,7 @@
                           <a:ea typeface="Arial" pitchFamily="34" charset="-122"/>
                           <a:cs typeface="Arial" pitchFamily="34" charset="-120"/>
                         </a:rPr>
-                        <a:t>It also overlooks a small part of the city</a:t>
+                        <a:t>バスルームの隅々に少し埃や汚れがありました</a:t>
                       </a:r>
                       <a:endParaRPr lang="en-US" sz="900" dirty="0">
                         <a:latin typeface="Arial" charset="0"/>
@@ -13541,7 +13558,7 @@
                           <a:ea typeface="Arial" pitchFamily="34" charset="-122"/>
                           <a:cs typeface="Arial" pitchFamily="34" charset="-120"/>
                         </a:rPr>
-                        <a:t>3件</a:t>
+                        <a:t>5件</a:t>
                       </a:r>
                       <a:endParaRPr lang="en-US" sz="900" dirty="0">
                         <a:latin typeface="Arial" charset="0"/>
@@ -13679,7 +13696,7 @@
                           <a:ea typeface="Arial" pitchFamily="34" charset="-122"/>
                           <a:cs typeface="Arial" pitchFamily="34" charset="-120"/>
                         </a:rPr>
-                        <a:t>窓・採光</a:t>
+                        <a:t>部屋の狭さ</a:t>
                       </a:r>
                       <a:endParaRPr lang="en-US" sz="900" dirty="0">
                         <a:latin typeface="Arial" charset="0"/>
@@ -13747,7 +13764,7 @@
                           <a:ea typeface="Arial" pitchFamily="34" charset="-122"/>
                           <a:cs typeface="Arial" pitchFamily="34" charset="-120"/>
                         </a:rPr>
-                        <a:t>スタッフの皆さんが、明るく、丁寧にもてなしてくださり、朝食も素晴らしく、安心して滞在できました</a:t>
+                        <a:t>Bahkan 1 hari setelah nya rambut masih halus  Udah 2x ngi...</a:t>
                       </a:r>
                       <a:endParaRPr lang="en-US" sz="900" dirty="0">
                         <a:latin typeface="Arial" charset="0"/>
@@ -13815,7 +13832,7 @@
                           <a:ea typeface="Arial" pitchFamily="34" charset="-122"/>
                           <a:cs typeface="Arial" pitchFamily="34" charset="-120"/>
                         </a:rPr>
-                        <a:t>2件</a:t>
+                        <a:t>4件</a:t>
                       </a:r>
                       <a:endParaRPr lang="en-US" sz="900" dirty="0">
                         <a:latin typeface="Arial" charset="0"/>
@@ -13953,7 +13970,7 @@
                           <a:ea typeface="Arial" pitchFamily="34" charset="-122"/>
                           <a:cs typeface="Arial" pitchFamily="34" charset="-120"/>
                         </a:rPr>
-                        <a:t>清掃不備</a:t>
+                        <a:t>設備の老朽化</a:t>
                       </a:r>
                       <a:endParaRPr lang="en-US" sz="900" dirty="0">
                         <a:latin typeface="Arial" charset="0"/>
@@ -14021,7 +14038,7 @@
                           <a:ea typeface="Arial" pitchFamily="34" charset="-122"/>
                           <a:cs typeface="Arial" pitchFamily="34" charset="-120"/>
                         </a:rPr>
-                        <a:t>バスルームの隅々に少し埃や汚れがありました</a:t>
+                        <a:t>設備は少し古いですが、とても清潔で快適です</a:t>
                       </a:r>
                       <a:endParaRPr lang="en-US" sz="900" dirty="0">
                         <a:latin typeface="Arial" charset="0"/>
@@ -14089,7 +14106,7 @@
                           <a:ea typeface="Arial" pitchFamily="34" charset="-122"/>
                           <a:cs typeface="Arial" pitchFamily="34" charset="-120"/>
                         </a:rPr>
-                        <a:t>2件</a:t>
+                        <a:t>3件</a:t>
                       </a:r>
                       <a:endParaRPr lang="en-US" sz="900" dirty="0">
                         <a:latin typeface="Arial" charset="0"/>
@@ -14227,7 +14244,7 @@
                           <a:ea typeface="Arial" pitchFamily="34" charset="-122"/>
                           <a:cs typeface="Arial" pitchFamily="34" charset="-120"/>
                         </a:rPr>
-                        <a:t>防音性能</a:t>
+                        <a:t>対応・サービスの不満</a:t>
                       </a:r>
                       <a:endParaRPr lang="en-US" sz="900" dirty="0">
                         <a:latin typeface="Arial" charset="0"/>
@@ -14295,7 +14312,7 @@
                           <a:ea typeface="Arial" pitchFamily="34" charset="-122"/>
                           <a:cs typeface="Arial" pitchFamily="34" charset="-120"/>
                         </a:rPr>
-                        <a:t>空調電源を切ってるのに 奥でずっと音がしていて寝れない 朝ごはんは美味しい 駅の近くで立地は良いです 空調電源を切...</a:t>
+                        <a:t>員工態度親切 一進房間有股臭味（發霉味），地毯稍嫌不乾淨 部屋に入るとカビ臭い匂いがして、カーペットも少し汚れていた</a:t>
                       </a:r>
                       <a:endParaRPr lang="en-US" sz="900" dirty="0">
                         <a:latin typeface="Arial" charset="0"/>
@@ -14363,7 +14380,7 @@
                           <a:ea typeface="Arial" pitchFamily="34" charset="-122"/>
                           <a:cs typeface="Arial" pitchFamily="34" charset="-120"/>
                         </a:rPr>
-                        <a:t>1件</a:t>
+                        <a:t>3件</a:t>
                       </a:r>
                       <a:endParaRPr lang="en-US" sz="900" dirty="0">
                         <a:latin typeface="Arial" charset="0"/>
@@ -14569,7 +14586,7 @@
                           <a:ea typeface="Arial" pitchFamily="34" charset="-122"/>
                           <a:cs typeface="Arial" pitchFamily="34" charset="-120"/>
                         </a:rPr>
-                        <a:t>連泊だったけど、朝食も少しずつメニューを変えていてよかった。スタッフのちょっとした対応が温かくてよかった。 駅近く...</a:t>
+                        <a:t>朝食は品数は多くはないが充分、野菜を沢山食べました</a:t>
                       </a:r>
                       <a:endParaRPr lang="en-US" sz="900" dirty="0">
                         <a:latin typeface="Arial" charset="0"/>
@@ -14637,7 +14654,7 @@
                           <a:ea typeface="Arial" pitchFamily="34" charset="-122"/>
                           <a:cs typeface="Arial" pitchFamily="34" charset="-120"/>
                         </a:rPr>
-                        <a:t>1件</a:t>
+                        <a:t>2件</a:t>
                       </a:r>
                       <a:endParaRPr lang="en-US" sz="900" dirty="0">
                         <a:latin typeface="Arial" charset="0"/>
@@ -14685,6 +14702,280 @@
                     </a:lnB>
                     <a:solidFill>
                       <a:srgbClr val="FFFFFF"/>
+                    </a:solidFill>
+                  </a:tcPr>
+                </a:tc>
+              </a:tr>
+              <a:tr h="320040">
+                <a:tc>
+                  <a:txBody>
+                    <a:bodyPr/>
+                    <a:lstStyle/>
+                    <a:p>
+                      <a:pPr algn="ctr" indent="0" marL="0">
+                        <a:buNone/>
+                      </a:pPr>
+                      <a:r>
+                        <a:rPr lang="en-US" sz="1200" b="1" dirty="0">
+                          <a:solidFill>
+                            <a:srgbClr val="94A3B8"/>
+                          </a:solidFill>
+                          <a:latin typeface="Arial" pitchFamily="34" charset="0"/>
+                          <a:ea typeface="Arial" pitchFamily="34" charset="-122"/>
+                          <a:cs typeface="Arial" pitchFamily="34" charset="-120"/>
+                        </a:rPr>
+                        <a:t>C</a:t>
+                      </a:r>
+                      <a:endParaRPr lang="en-US" sz="1200" dirty="0">
+                        <a:latin typeface="Arial" charset="0"/>
+                        <a:ea typeface="Arial" charset="0"/>
+                        <a:cs typeface="Arial" charset="0"/>
+                      </a:endParaRPr>
+                    </a:p>
+                  </a:txBody>
+                  <a:tcPr marL="91440" marR="91440" marT="45720" marB="45720">
+                    <a:lnL w="6350" cap="flat" cmpd="sng" algn="ctr">
+                      <a:solidFill>
+                        <a:srgbClr val="CBD5E1"/>
+                      </a:solidFill>
+                      <a:prstDash val="solid"/>
+                      <a:round/>
+                      <a:headEnd type="none" w="med" len="med"/>
+                      <a:tailEnd type="none" w="med" len="med"/>
+                    </a:lnL>
+                    <a:lnR w="6350" cap="flat" cmpd="sng" algn="ctr">
+                      <a:solidFill>
+                        <a:srgbClr val="CBD5E1"/>
+                      </a:solidFill>
+                      <a:prstDash val="solid"/>
+                      <a:round/>
+                      <a:headEnd type="none" w="med" len="med"/>
+                      <a:tailEnd type="none" w="med" len="med"/>
+                    </a:lnR>
+                    <a:lnT w="6350" cap="flat" cmpd="sng" algn="ctr">
+                      <a:solidFill>
+                        <a:srgbClr val="CBD5E1"/>
+                      </a:solidFill>
+                      <a:prstDash val="solid"/>
+                      <a:round/>
+                      <a:headEnd type="none" w="med" len="med"/>
+                      <a:tailEnd type="none" w="med" len="med"/>
+                    </a:lnT>
+                    <a:lnB w="6350" cap="flat" cmpd="sng" algn="ctr">
+                      <a:solidFill>
+                        <a:srgbClr val="CBD5E1"/>
+                      </a:solidFill>
+                      <a:prstDash val="solid"/>
+                      <a:round/>
+                      <a:headEnd type="none" w="med" len="med"/>
+                      <a:tailEnd type="none" w="med" len="med"/>
+                    </a:lnB>
+                    <a:solidFill>
+                      <a:srgbClr val="E8EFF8"/>
+                    </a:solidFill>
+                  </a:tcPr>
+                </a:tc>
+                <a:tc>
+                  <a:txBody>
+                    <a:bodyPr/>
+                    <a:lstStyle/>
+                    <a:p>
+                      <a:pPr indent="0" marL="0">
+                        <a:buNone/>
+                      </a:pPr>
+                      <a:r>
+                        <a:rPr lang="en-US" sz="900" b="1" dirty="0">
+                          <a:solidFill>
+                            <a:srgbClr val="334155"/>
+                          </a:solidFill>
+                          <a:latin typeface="Arial" pitchFamily="34" charset="0"/>
+                          <a:ea typeface="Arial" pitchFamily="34" charset="-122"/>
+                          <a:cs typeface="Arial" pitchFamily="34" charset="-120"/>
+                        </a:rPr>
+                        <a:t>窓・採光</a:t>
+                      </a:r>
+                      <a:endParaRPr lang="en-US" sz="900" dirty="0">
+                        <a:latin typeface="Arial" charset="0"/>
+                        <a:ea typeface="Arial" charset="0"/>
+                        <a:cs typeface="Arial" charset="0"/>
+                      </a:endParaRPr>
+                    </a:p>
+                  </a:txBody>
+                  <a:tcPr marL="91440" marR="91440" marT="45720" marB="45720">
+                    <a:lnL w="6350" cap="flat" cmpd="sng" algn="ctr">
+                      <a:solidFill>
+                        <a:srgbClr val="CBD5E1"/>
+                      </a:solidFill>
+                      <a:prstDash val="solid"/>
+                      <a:round/>
+                      <a:headEnd type="none" w="med" len="med"/>
+                      <a:tailEnd type="none" w="med" len="med"/>
+                    </a:lnL>
+                    <a:lnR w="6350" cap="flat" cmpd="sng" algn="ctr">
+                      <a:solidFill>
+                        <a:srgbClr val="CBD5E1"/>
+                      </a:solidFill>
+                      <a:prstDash val="solid"/>
+                      <a:round/>
+                      <a:headEnd type="none" w="med" len="med"/>
+                      <a:tailEnd type="none" w="med" len="med"/>
+                    </a:lnR>
+                    <a:lnT w="6350" cap="flat" cmpd="sng" algn="ctr">
+                      <a:solidFill>
+                        <a:srgbClr val="CBD5E1"/>
+                      </a:solidFill>
+                      <a:prstDash val="solid"/>
+                      <a:round/>
+                      <a:headEnd type="none" w="med" len="med"/>
+                      <a:tailEnd type="none" w="med" len="med"/>
+                    </a:lnT>
+                    <a:lnB w="6350" cap="flat" cmpd="sng" algn="ctr">
+                      <a:solidFill>
+                        <a:srgbClr val="CBD5E1"/>
+                      </a:solidFill>
+                      <a:prstDash val="solid"/>
+                      <a:round/>
+                      <a:headEnd type="none" w="med" len="med"/>
+                      <a:tailEnd type="none" w="med" len="med"/>
+                    </a:lnB>
+                    <a:solidFill>
+                      <a:srgbClr val="E8EFF8"/>
+                    </a:solidFill>
+                  </a:tcPr>
+                </a:tc>
+                <a:tc>
+                  <a:txBody>
+                    <a:bodyPr/>
+                    <a:lstStyle/>
+                    <a:p>
+                      <a:pPr indent="0" marL="0">
+                        <a:buNone/>
+                      </a:pPr>
+                      <a:r>
+                        <a:rPr lang="en-US" sz="900" dirty="0">
+                          <a:solidFill>
+                            <a:srgbClr val="64748B"/>
+                          </a:solidFill>
+                          <a:latin typeface="Arial" pitchFamily="34" charset="0"/>
+                          <a:ea typeface="Arial" pitchFamily="34" charset="-122"/>
+                          <a:cs typeface="Arial" pitchFamily="34" charset="-120"/>
+                        </a:rPr>
+                        <a:t>スタッフの皆さんが、明るく、丁寧にもてなしてくださり、朝食も素晴らしく、安心して滞在できました</a:t>
+                      </a:r>
+                      <a:endParaRPr lang="en-US" sz="900" dirty="0">
+                        <a:latin typeface="Arial" charset="0"/>
+                        <a:ea typeface="Arial" charset="0"/>
+                        <a:cs typeface="Arial" charset="0"/>
+                      </a:endParaRPr>
+                    </a:p>
+                  </a:txBody>
+                  <a:tcPr marL="91440" marR="91440" marT="45720" marB="45720">
+                    <a:lnL w="6350" cap="flat" cmpd="sng" algn="ctr">
+                      <a:solidFill>
+                        <a:srgbClr val="CBD5E1"/>
+                      </a:solidFill>
+                      <a:prstDash val="solid"/>
+                      <a:round/>
+                      <a:headEnd type="none" w="med" len="med"/>
+                      <a:tailEnd type="none" w="med" len="med"/>
+                    </a:lnL>
+                    <a:lnR w="6350" cap="flat" cmpd="sng" algn="ctr">
+                      <a:solidFill>
+                        <a:srgbClr val="CBD5E1"/>
+                      </a:solidFill>
+                      <a:prstDash val="solid"/>
+                      <a:round/>
+                      <a:headEnd type="none" w="med" len="med"/>
+                      <a:tailEnd type="none" w="med" len="med"/>
+                    </a:lnR>
+                    <a:lnT w="6350" cap="flat" cmpd="sng" algn="ctr">
+                      <a:solidFill>
+                        <a:srgbClr val="CBD5E1"/>
+                      </a:solidFill>
+                      <a:prstDash val="solid"/>
+                      <a:round/>
+                      <a:headEnd type="none" w="med" len="med"/>
+                      <a:tailEnd type="none" w="med" len="med"/>
+                    </a:lnT>
+                    <a:lnB w="6350" cap="flat" cmpd="sng" algn="ctr">
+                      <a:solidFill>
+                        <a:srgbClr val="CBD5E1"/>
+                      </a:solidFill>
+                      <a:prstDash val="solid"/>
+                      <a:round/>
+                      <a:headEnd type="none" w="med" len="med"/>
+                      <a:tailEnd type="none" w="med" len="med"/>
+                    </a:lnB>
+                    <a:solidFill>
+                      <a:srgbClr val="E8EFF8"/>
+                    </a:solidFill>
+                  </a:tcPr>
+                </a:tc>
+                <a:tc>
+                  <a:txBody>
+                    <a:bodyPr/>
+                    <a:lstStyle/>
+                    <a:p>
+                      <a:pPr algn="ctr" indent="0" marL="0">
+                        <a:buNone/>
+                      </a:pPr>
+                      <a:r>
+                        <a:rPr lang="en-US" sz="900" dirty="0">
+                          <a:solidFill>
+                            <a:srgbClr val="334155"/>
+                          </a:solidFill>
+                          <a:latin typeface="Arial" pitchFamily="34" charset="0"/>
+                          <a:ea typeface="Arial" pitchFamily="34" charset="-122"/>
+                          <a:cs typeface="Arial" pitchFamily="34" charset="-120"/>
+                        </a:rPr>
+                        <a:t>2件</a:t>
+                      </a:r>
+                      <a:endParaRPr lang="en-US" sz="900" dirty="0">
+                        <a:latin typeface="Arial" charset="0"/>
+                        <a:ea typeface="Arial" charset="0"/>
+                        <a:cs typeface="Arial" charset="0"/>
+                      </a:endParaRPr>
+                    </a:p>
+                  </a:txBody>
+                  <a:tcPr marL="91440" marR="91440" marT="45720" marB="45720">
+                    <a:lnL w="6350" cap="flat" cmpd="sng" algn="ctr">
+                      <a:solidFill>
+                        <a:srgbClr val="CBD5E1"/>
+                      </a:solidFill>
+                      <a:prstDash val="solid"/>
+                      <a:round/>
+                      <a:headEnd type="none" w="med" len="med"/>
+                      <a:tailEnd type="none" w="med" len="med"/>
+                    </a:lnL>
+                    <a:lnR w="6350" cap="flat" cmpd="sng" algn="ctr">
+                      <a:solidFill>
+                        <a:srgbClr val="CBD5E1"/>
+                      </a:solidFill>
+                      <a:prstDash val="solid"/>
+                      <a:round/>
+                      <a:headEnd type="none" w="med" len="med"/>
+                      <a:tailEnd type="none" w="med" len="med"/>
+                    </a:lnR>
+                    <a:lnT w="6350" cap="flat" cmpd="sng" algn="ctr">
+                      <a:solidFill>
+                        <a:srgbClr val="CBD5E1"/>
+                      </a:solidFill>
+                      <a:prstDash val="solid"/>
+                      <a:round/>
+                      <a:headEnd type="none" w="med" len="med"/>
+                      <a:tailEnd type="none" w="med" len="med"/>
+                    </a:lnT>
+                    <a:lnB w="6350" cap="flat" cmpd="sng" algn="ctr">
+                      <a:solidFill>
+                        <a:srgbClr val="CBD5E1"/>
+                      </a:solidFill>
+                      <a:prstDash val="solid"/>
+                      <a:round/>
+                      <a:headEnd type="none" w="med" len="med"/>
+                      <a:tailEnd type="none" w="med" len="med"/>
+                    </a:lnB>
+                    <a:solidFill>
+                      <a:srgbClr val="E8EFF8"/>
                     </a:solidFill>
                   </a:tcPr>
                 </a:tc>
@@ -15177,6 +15468,177 @@
                 <a:ea typeface="Arial" pitchFamily="34" charset="-122"/>
                 <a:cs typeface="Arial" pitchFamily="34" charset="-120"/>
               </a:rPr>
+              <a:t>客室の消臭対策の強化</a:t>
+            </a:r>
+            <a:endParaRPr lang="en-US" sz="1200" dirty="0"/>
+          </a:p>
+        </p:txBody>
+      </p:sp>
+      <p:sp>
+        <p:nvSpPr>
+          <p:cNvPr id="9" name="Text 7"/>
+          <p:cNvSpPr/>
+          <p:nvPr/>
+        </p:nvSpPr>
+        <p:spPr>
+          <a:xfrm>
+            <a:off x="594360" y="1600200"/>
+            <a:ext cx="3657600" cy="1188720"/>
+          </a:xfrm>
+          <a:prstGeom prst="rect">
+            <a:avLst/>
+          </a:prstGeom>
+          <a:noFill/>
+          <a:ln/>
+        </p:spPr>
+        <p:txBody>
+          <a:bodyPr wrap="square" lIns="0" tIns="0" rIns="0" bIns="0" rtlCol="0" anchor="ctr"/>
+          <a:lstStyle/>
+          <a:p>
+            <a:pPr marL="342900" indent="-342900">
+              <a:spcAft>
+                <a:spcPts val="300"/>
+              </a:spcAft>
+              <a:buSzPct val="100000"/>
+              <a:buChar char="•"/>
+            </a:pPr>
+            <a:r>
+              <a:rPr lang="en-US" sz="900" dirty="0">
+                <a:solidFill>
+                  <a:srgbClr val="334155"/>
+                </a:solidFill>
+                <a:latin typeface="Arial" pitchFamily="34" charset="0"/>
+                <a:ea typeface="Arial" pitchFamily="34" charset="-122"/>
+                <a:cs typeface="Arial" pitchFamily="34" charset="-120"/>
+              </a:rPr>
+              <a:t>チェックアウト後の換気・消臭スプレー処理の徹底</a:t>
+            </a:r>
+            <a:endParaRPr lang="en-US" sz="900" dirty="0"/>
+          </a:p>
+          <a:p>
+            <a:pPr marL="342900" indent="-342900">
+              <a:spcAft>
+                <a:spcPts val="300"/>
+              </a:spcAft>
+              <a:buSzPct val="100000"/>
+              <a:buChar char="•"/>
+            </a:pPr>
+            <a:r>
+              <a:rPr lang="en-US" sz="900" dirty="0">
+                <a:solidFill>
+                  <a:srgbClr val="334155"/>
+                </a:solidFill>
+                <a:latin typeface="Arial" pitchFamily="34" charset="0"/>
+                <a:ea typeface="Arial" pitchFamily="34" charset="-122"/>
+                <a:cs typeface="Arial" pitchFamily="34" charset="-120"/>
+              </a:rPr>
+              <a:t>定期的な脱臭剤の設置と交換フローの確立</a:t>
+            </a:r>
+            <a:endParaRPr lang="en-US" sz="900" dirty="0"/>
+          </a:p>
+          <a:p>
+            <a:pPr marL="342900" indent="-342900">
+              <a:spcAft>
+                <a:spcPts val="300"/>
+              </a:spcAft>
+              <a:buSzPct val="100000"/>
+              <a:buChar char="•"/>
+            </a:pPr>
+            <a:r>
+              <a:rPr lang="en-US" sz="900" dirty="0">
+                <a:solidFill>
+                  <a:srgbClr val="334155"/>
+                </a:solidFill>
+                <a:latin typeface="Arial" pitchFamily="34" charset="0"/>
+                <a:ea typeface="Arial" pitchFamily="34" charset="-122"/>
+                <a:cs typeface="Arial" pitchFamily="34" charset="-120"/>
+              </a:rPr>
+              <a:t>喫煙・臭いに関するクレーム発生時の即座対応マニュアル作成</a:t>
+            </a:r>
+            <a:endParaRPr lang="en-US" sz="900" dirty="0"/>
+          </a:p>
+        </p:txBody>
+      </p:sp>
+      <p:sp>
+        <p:nvSpPr>
+          <p:cNvPr id="10" name="Shape 8"/>
+          <p:cNvSpPr/>
+          <p:nvPr/>
+        </p:nvSpPr>
+        <p:spPr>
+          <a:xfrm>
+            <a:off x="4663440" y="1234440"/>
+            <a:ext cx="3977640" cy="1600200"/>
+          </a:xfrm>
+          <a:prstGeom prst="rect">
+            <a:avLst/>
+          </a:prstGeom>
+          <a:solidFill>
+            <a:srgbClr val="FFFFFF"/>
+          </a:solidFill>
+          <a:ln/>
+          <a:effectLst>
+            <a:outerShdw sx="100000" sy="100000" kx="0" ky="0" algn="bl" rotWithShape="0" blurRad="50800" dist="25400" dir="8100000">
+              <a:srgbClr val="000000">
+                <a:alpha val="10000"/>
+              </a:srgbClr>
+            </a:outerShdw>
+          </a:effectLst>
+        </p:spPr>
+      </p:sp>
+      <p:sp>
+        <p:nvSpPr>
+          <p:cNvPr id="11" name="Shape 9"/>
+          <p:cNvSpPr/>
+          <p:nvPr/>
+        </p:nvSpPr>
+        <p:spPr>
+          <a:xfrm>
+            <a:off x="4663440" y="1234440"/>
+            <a:ext cx="54864" cy="1600200"/>
+          </a:xfrm>
+          <a:prstGeom prst="rect">
+            <a:avLst/>
+          </a:prstGeom>
+          <a:solidFill>
+            <a:srgbClr val="3B7DD8"/>
+          </a:solidFill>
+          <a:ln/>
+        </p:spPr>
+      </p:sp>
+      <p:sp>
+        <p:nvSpPr>
+          <p:cNvPr id="12" name="Text 10"/>
+          <p:cNvSpPr/>
+          <p:nvPr/>
+        </p:nvSpPr>
+        <p:spPr>
+          <a:xfrm>
+            <a:off x="4800600" y="1280160"/>
+            <a:ext cx="3657600" cy="320040"/>
+          </a:xfrm>
+          <a:prstGeom prst="rect">
+            <a:avLst/>
+          </a:prstGeom>
+          <a:noFill/>
+          <a:ln/>
+        </p:spPr>
+        <p:txBody>
+          <a:bodyPr wrap="square" lIns="0" tIns="0" rIns="0" bIns="0" rtlCol="0" anchor="ctr"/>
+          <a:lstStyle/>
+          <a:p>
+            <a:pPr indent="0" marL="0">
+              <a:buNone/>
+            </a:pPr>
+            <a:r>
+              <a:rPr lang="en-US" sz="1200" b="1" dirty="0">
+                <a:solidFill>
+                  <a:srgbClr val="1A2744"/>
+                </a:solidFill>
+                <a:latin typeface="Arial" pitchFamily="34" charset="0"/>
+                <a:ea typeface="Arial" pitchFamily="34" charset="-122"/>
+                <a:cs typeface="Arial" pitchFamily="34" charset="-120"/>
+              </a:rPr>
               <a:t>清掃品質の向上</a:t>
             </a:r>
             <a:endParaRPr lang="en-US" sz="1200" dirty="0"/>
@@ -15185,13 +15647,13 @@
       </p:sp>
       <p:sp>
         <p:nvSpPr>
-          <p:cNvPr id="9" name="Text 7"/>
-          <p:cNvSpPr/>
-          <p:nvPr/>
-        </p:nvSpPr>
-        <p:spPr>
-          <a:xfrm>
-            <a:off x="594360" y="1600200"/>
+          <p:cNvPr id="13" name="Text 11"/>
+          <p:cNvSpPr/>
+          <p:nvPr/>
+        </p:nvSpPr>
+        <p:spPr>
+          <a:xfrm>
+            <a:off x="4800600" y="1600200"/>
             <a:ext cx="3657600" cy="1188720"/>
           </a:xfrm>
           <a:prstGeom prst="rect">
@@ -15270,13 +15732,13 @@
       </p:sp>
       <p:sp>
         <p:nvSpPr>
-          <p:cNvPr id="10" name="Shape 8"/>
-          <p:cNvSpPr/>
-          <p:nvPr/>
-        </p:nvSpPr>
-        <p:spPr>
-          <a:xfrm>
-            <a:off x="4663440" y="1234440"/>
+          <p:cNvPr id="14" name="Shape 12"/>
+          <p:cNvSpPr/>
+          <p:nvPr/>
+        </p:nvSpPr>
+        <p:spPr>
+          <a:xfrm>
+            <a:off x="457200" y="3017520"/>
             <a:ext cx="3977640" cy="1600200"/>
           </a:xfrm>
           <a:prstGeom prst="rect">
@@ -15297,13 +15759,13 @@
       </p:sp>
       <p:sp>
         <p:nvSpPr>
-          <p:cNvPr id="11" name="Shape 9"/>
-          <p:cNvSpPr/>
-          <p:nvPr/>
-        </p:nvSpPr>
-        <p:spPr>
-          <a:xfrm>
-            <a:off x="4663440" y="1234440"/>
+          <p:cNvPr id="15" name="Shape 13"/>
+          <p:cNvSpPr/>
+          <p:nvPr/>
+        </p:nvSpPr>
+        <p:spPr>
+          <a:xfrm>
+            <a:off x="457200" y="3017520"/>
             <a:ext cx="54864" cy="1600200"/>
           </a:xfrm>
           <a:prstGeom prst="rect">
@@ -15317,13 +15779,13 @@
       </p:sp>
       <p:sp>
         <p:nvSpPr>
-          <p:cNvPr id="12" name="Text 10"/>
-          <p:cNvSpPr/>
-          <p:nvPr/>
-        </p:nvSpPr>
-        <p:spPr>
-          <a:xfrm>
-            <a:off x="4800600" y="1280160"/>
+          <p:cNvPr id="16" name="Text 14"/>
+          <p:cNvSpPr/>
+          <p:nvPr/>
+        </p:nvSpPr>
+        <p:spPr>
+          <a:xfrm>
+            <a:off x="594360" y="3063240"/>
             <a:ext cx="3657600" cy="320040"/>
           </a:xfrm>
           <a:prstGeom prst="rect">
@@ -15356,13 +15818,13 @@
       </p:sp>
       <p:sp>
         <p:nvSpPr>
-          <p:cNvPr id="13" name="Text 11"/>
-          <p:cNvSpPr/>
-          <p:nvPr/>
-        </p:nvSpPr>
-        <p:spPr>
-          <a:xfrm>
-            <a:off x="4800600" y="1600200"/>
+          <p:cNvPr id="17" name="Text 15"/>
+          <p:cNvSpPr/>
+          <p:nvPr/>
+        </p:nvSpPr>
+        <p:spPr>
+          <a:xfrm>
+            <a:off x="594360" y="3383280"/>
             <a:ext cx="3657600" cy="1188720"/>
           </a:xfrm>
           <a:prstGeom prst="rect">
@@ -15441,13 +15903,13 @@
       </p:sp>
       <p:sp>
         <p:nvSpPr>
-          <p:cNvPr id="14" name="Shape 12"/>
-          <p:cNvSpPr/>
-          <p:nvPr/>
-        </p:nvSpPr>
-        <p:spPr>
-          <a:xfrm>
-            <a:off x="457200" y="3017520"/>
+          <p:cNvPr id="18" name="Shape 16"/>
+          <p:cNvSpPr/>
+          <p:nvPr/>
+        </p:nvSpPr>
+        <p:spPr>
+          <a:xfrm>
+            <a:off x="4663440" y="3017520"/>
             <a:ext cx="3977640" cy="1600200"/>
           </a:xfrm>
           <a:prstGeom prst="rect">
@@ -15468,13 +15930,13 @@
       </p:sp>
       <p:sp>
         <p:nvSpPr>
-          <p:cNvPr id="15" name="Shape 13"/>
-          <p:cNvSpPr/>
-          <p:nvPr/>
-        </p:nvSpPr>
-        <p:spPr>
-          <a:xfrm>
-            <a:off x="457200" y="3017520"/>
+          <p:cNvPr id="19" name="Shape 17"/>
+          <p:cNvSpPr/>
+          <p:nvPr/>
+        </p:nvSpPr>
+        <p:spPr>
+          <a:xfrm>
+            <a:off x="4663440" y="3017520"/>
             <a:ext cx="54864" cy="1600200"/>
           </a:xfrm>
           <a:prstGeom prst="rect">
@@ -15488,13 +15950,13 @@
       </p:sp>
       <p:sp>
         <p:nvSpPr>
-          <p:cNvPr id="16" name="Text 14"/>
-          <p:cNvSpPr/>
-          <p:nvPr/>
-        </p:nvSpPr>
-        <p:spPr>
-          <a:xfrm>
-            <a:off x="594360" y="3063240"/>
+          <p:cNvPr id="20" name="Text 18"/>
+          <p:cNvSpPr/>
+          <p:nvPr/>
+        </p:nvSpPr>
+        <p:spPr>
+          <a:xfrm>
+            <a:off x="4800600" y="3063240"/>
             <a:ext cx="3657600" cy="320040"/>
           </a:xfrm>
           <a:prstGeom prst="rect">
@@ -15527,13 +15989,13 @@
       </p:sp>
       <p:sp>
         <p:nvSpPr>
-          <p:cNvPr id="17" name="Text 15"/>
-          <p:cNvSpPr/>
-          <p:nvPr/>
-        </p:nvSpPr>
-        <p:spPr>
-          <a:xfrm>
-            <a:off x="594360" y="3383280"/>
+          <p:cNvPr id="21" name="Text 19"/>
+          <p:cNvSpPr/>
+          <p:nvPr/>
+        </p:nvSpPr>
+        <p:spPr>
+          <a:xfrm>
+            <a:off x="4800600" y="3383280"/>
             <a:ext cx="3657600" cy="1188720"/>
           </a:xfrm>
           <a:prstGeom prst="rect">
@@ -15612,7 +16074,7 @@
       </p:sp>
       <p:sp>
         <p:nvSpPr>
-          <p:cNvPr id="18" name="Shape 16"/>
+          <p:cNvPr id="22" name="Shape 20"/>
           <p:cNvSpPr/>
           <p:nvPr/>
         </p:nvSpPr>
@@ -15632,7 +16094,7 @@
       </p:sp>
       <p:sp>
         <p:nvSpPr>
-          <p:cNvPr id="19" name="Text 17"/>
+          <p:cNvPr id="23" name="Text 21"/>
           <p:cNvSpPr/>
           <p:nvPr/>
         </p:nvSpPr>
@@ -15671,7 +16133,7 @@
       </p:sp>
       <p:sp>
         <p:nvSpPr>
-          <p:cNvPr id="20" name="Text 18"/>
+          <p:cNvPr id="24" name="Text 22"/>
           <p:cNvSpPr/>
           <p:nvPr/>
         </p:nvSpPr>

--- a/納品レポート/ホテル別レポート/comfort_narita_口コミ分析レポート.pptx
+++ b/納品レポート/ホテル別レポート/comfort_narita_口コミ分析レポート.pptx
@@ -2784,7 +2784,7 @@
                 <a:ea typeface="Arial" pitchFamily="34" charset="-122"/>
                 <a:cs typeface="Arial" pitchFamily="34" charset="-120"/>
               </a:rPr>
-              <a:t>作成日：2026年4月10日</a:t>
+              <a:t>作成日：2026年4月11日</a:t>
             </a:r>
             <a:endParaRPr lang="en-US" sz="1000" dirty="0"/>
           </a:p>

--- a/納品レポート/ホテル別レポート/comfort_narita_口コミ分析レポート.pptx
+++ b/納品レポート/ホテル別レポート/comfort_narita_口コミ分析レポート.pptx
@@ -2784,7 +2784,7 @@
                 <a:ea typeface="Arial" pitchFamily="34" charset="-122"/>
                 <a:cs typeface="Arial" pitchFamily="34" charset="-120"/>
               </a:rPr>
-              <a:t>作成日：2026年4月11日</a:t>
+              <a:t>作成日：2026年4月13日</a:t>
             </a:r>
             <a:endParaRPr lang="en-US" sz="1000" dirty="0"/>
           </a:p>

--- a/納品レポート/ホテル別レポート/comfort_narita_口コミ分析レポート.pptx
+++ b/納品レポート/ホテル別レポート/comfort_narita_口コミ分析レポート.pptx
@@ -2784,7 +2784,7 @@
                 <a:ea typeface="Arial" pitchFamily="34" charset="-122"/>
                 <a:cs typeface="Arial" pitchFamily="34" charset="-120"/>
               </a:rPr>
-              <a:t>作成日：2026年4月13日</a:t>
+              <a:t>作成日：2026年4月15日</a:t>
             </a:r>
             <a:endParaRPr lang="en-US" sz="1000" dirty="0"/>
           </a:p>

--- a/納品レポート/ホテル別レポート/comfort_narita_口コミ分析レポート.pptx
+++ b/納品レポート/ホテル別レポート/comfort_narita_口コミ分析レポート.pptx
@@ -2784,7 +2784,7 @@
                 <a:ea typeface="Arial" pitchFamily="34" charset="-122"/>
                 <a:cs typeface="Arial" pitchFamily="34" charset="-120"/>
               </a:rPr>
-              <a:t>作成日：2026年4月16日</a:t>
+              <a:t>作成日：2026年4月20日</a:t>
             </a:r>
             <a:endParaRPr lang="en-US" sz="1000" dirty="0"/>
           </a:p>

--- a/納品レポート/ホテル別レポート/comfort_narita_口コミ分析レポート.pptx
+++ b/納品レポート/ホテル別レポート/comfort_narita_口コミ分析レポート.pptx
@@ -2784,7 +2784,7 @@
                 <a:ea typeface="Arial" pitchFamily="34" charset="-122"/>
                 <a:cs typeface="Arial" pitchFamily="34" charset="-120"/>
               </a:rPr>
-              <a:t>作成日：2026年4月20日</a:t>
+              <a:t>作成日：2026年4月21日</a:t>
             </a:r>
             <a:endParaRPr lang="en-US" sz="1000" dirty="0"/>
           </a:p>

--- a/納品レポート/ホテル別レポート/comfort_narita_口コミ分析レポート.pptx
+++ b/納品レポート/ホテル別レポート/comfort_narita_口コミ分析レポート.pptx
@@ -2784,7 +2784,7 @@
                 <a:ea typeface="Arial" pitchFamily="34" charset="-122"/>
                 <a:cs typeface="Arial" pitchFamily="34" charset="-120"/>
               </a:rPr>
-              <a:t>作成日：2026年4月21日</a:t>
+              <a:t>作成日：2026年4月22日</a:t>
             </a:r>
             <a:endParaRPr lang="en-US" sz="1000" dirty="0"/>
           </a:p>
